--- a/slides/02_model_eval_cv.pptx
+++ b/slides/02_model_eval_cv.pptx
@@ -5,25 +5,28 @@
     <p:sldMasterId id="2147483648" r:id="rId1"/>
   </p:sldMasterIdLst>
   <p:notesMasterIdLst>
-    <p:notesMasterId r:id="rId18"/>
+    <p:notesMasterId r:id="rId21"/>
   </p:notesMasterIdLst>
   <p:sldIdLst>
     <p:sldId id="256" r:id="rId2"/>
     <p:sldId id="257" r:id="rId3"/>
-    <p:sldId id="258" r:id="rId4"/>
-    <p:sldId id="259" r:id="rId5"/>
-    <p:sldId id="260" r:id="rId6"/>
-    <p:sldId id="261" r:id="rId7"/>
-    <p:sldId id="262" r:id="rId8"/>
-    <p:sldId id="263" r:id="rId9"/>
-    <p:sldId id="264" r:id="rId10"/>
-    <p:sldId id="265" r:id="rId11"/>
-    <p:sldId id="266" r:id="rId12"/>
-    <p:sldId id="267" r:id="rId13"/>
-    <p:sldId id="270" r:id="rId14"/>
-    <p:sldId id="271" r:id="rId15"/>
-    <p:sldId id="268" r:id="rId16"/>
-    <p:sldId id="269" r:id="rId17"/>
+    <p:sldId id="272" r:id="rId4"/>
+    <p:sldId id="274" r:id="rId5"/>
+    <p:sldId id="273" r:id="rId6"/>
+    <p:sldId id="275" r:id="rId7"/>
+    <p:sldId id="259" r:id="rId8"/>
+    <p:sldId id="260" r:id="rId9"/>
+    <p:sldId id="261" r:id="rId10"/>
+    <p:sldId id="262" r:id="rId11"/>
+    <p:sldId id="263" r:id="rId12"/>
+    <p:sldId id="264" r:id="rId13"/>
+    <p:sldId id="265" r:id="rId14"/>
+    <p:sldId id="266" r:id="rId15"/>
+    <p:sldId id="267" r:id="rId16"/>
+    <p:sldId id="270" r:id="rId17"/>
+    <p:sldId id="271" r:id="rId18"/>
+    <p:sldId id="268" r:id="rId19"/>
+    <p:sldId id="269" r:id="rId20"/>
   </p:sldIdLst>
   <p:sldSz cx="12192000" cy="6858000"/>
   <p:notesSz cx="6858000" cy="9144000"/>
@@ -122,6 +125,11 @@
       </a:defRPr>
     </a:lvl9pPr>
   </p:defaultTextStyle>
+  <p:extLst>
+    <p:ext uri="{EFAFB233-063F-42B5-8137-9DF3F51BA10A}">
+      <p15:sldGuideLst xmlns:p15="http://schemas.microsoft.com/office/powerpoint/2012/main"/>
+    </p:ext>
+  </p:extLst>
 </p:presentation>
 </file>
 
@@ -239,7 +247,7 @@
           <a:p>
             <a:fld id="{61DD8851-E0C4-5646-8CC5-734891EC49CD}" type="datetimeFigureOut">
               <a:rPr lang="en-US" smtClean="0"/>
-              <a:t>3/30/26</a:t>
+              <a:t>4/13/26</a:t>
             </a:fld>
             <a:endParaRPr lang="en-US"/>
           </a:p>
@@ -604,7 +612,7 @@
           <a:p>
             <a:fld id="{D8330999-8BAC-FF4E-BF5A-F75E56417DB6}" type="slidenum">
               <a:rPr lang="en-US" smtClean="0"/>
-              <a:t>4</a:t>
+              <a:t>7</a:t>
             </a:fld>
             <a:endParaRPr lang="en-US"/>
           </a:p>
@@ -730,7 +738,7 @@
           <a:p>
             <a:fld id="{D8330999-8BAC-FF4E-BF5A-F75E56417DB6}" type="slidenum">
               <a:rPr lang="en-US" smtClean="0"/>
-              <a:t>5</a:t>
+              <a:t>8</a:t>
             </a:fld>
             <a:endParaRPr lang="en-US"/>
           </a:p>
@@ -896,7 +904,7 @@
           <a:p>
             <a:fld id="{CEE2ACAA-75FA-AD45-8679-E5834893ECEC}" type="datetimeFigureOut">
               <a:rPr lang="en-US" smtClean="0"/>
-              <a:t>3/30/26</a:t>
+              <a:t>4/13/26</a:t>
             </a:fld>
             <a:endParaRPr lang="en-US"/>
           </a:p>
@@ -1094,7 +1102,7 @@
           <a:p>
             <a:fld id="{CEE2ACAA-75FA-AD45-8679-E5834893ECEC}" type="datetimeFigureOut">
               <a:rPr lang="en-US" smtClean="0"/>
-              <a:t>3/30/26</a:t>
+              <a:t>4/13/26</a:t>
             </a:fld>
             <a:endParaRPr lang="en-US"/>
           </a:p>
@@ -1302,7 +1310,7 @@
           <a:p>
             <a:fld id="{CEE2ACAA-75FA-AD45-8679-E5834893ECEC}" type="datetimeFigureOut">
               <a:rPr lang="en-US" smtClean="0"/>
-              <a:t>3/30/26</a:t>
+              <a:t>4/13/26</a:t>
             </a:fld>
             <a:endParaRPr lang="en-US"/>
           </a:p>
@@ -1500,7 +1508,7 @@
           <a:p>
             <a:fld id="{CEE2ACAA-75FA-AD45-8679-E5834893ECEC}" type="datetimeFigureOut">
               <a:rPr lang="en-US" smtClean="0"/>
-              <a:t>3/30/26</a:t>
+              <a:t>4/13/26</a:t>
             </a:fld>
             <a:endParaRPr lang="en-US"/>
           </a:p>
@@ -1775,7 +1783,7 @@
           <a:p>
             <a:fld id="{CEE2ACAA-75FA-AD45-8679-E5834893ECEC}" type="datetimeFigureOut">
               <a:rPr lang="en-US" smtClean="0"/>
-              <a:t>3/30/26</a:t>
+              <a:t>4/13/26</a:t>
             </a:fld>
             <a:endParaRPr lang="en-US"/>
           </a:p>
@@ -2040,7 +2048,7 @@
           <a:p>
             <a:fld id="{CEE2ACAA-75FA-AD45-8679-E5834893ECEC}" type="datetimeFigureOut">
               <a:rPr lang="en-US" smtClean="0"/>
-              <a:t>3/30/26</a:t>
+              <a:t>4/13/26</a:t>
             </a:fld>
             <a:endParaRPr lang="en-US"/>
           </a:p>
@@ -2452,7 +2460,7 @@
           <a:p>
             <a:fld id="{CEE2ACAA-75FA-AD45-8679-E5834893ECEC}" type="datetimeFigureOut">
               <a:rPr lang="en-US" smtClean="0"/>
-              <a:t>3/30/26</a:t>
+              <a:t>4/13/26</a:t>
             </a:fld>
             <a:endParaRPr lang="en-US"/>
           </a:p>
@@ -2593,7 +2601,7 @@
           <a:p>
             <a:fld id="{CEE2ACAA-75FA-AD45-8679-E5834893ECEC}" type="datetimeFigureOut">
               <a:rPr lang="en-US" smtClean="0"/>
-              <a:t>3/30/26</a:t>
+              <a:t>4/13/26</a:t>
             </a:fld>
             <a:endParaRPr lang="en-US"/>
           </a:p>
@@ -2706,7 +2714,7 @@
           <a:p>
             <a:fld id="{CEE2ACAA-75FA-AD45-8679-E5834893ECEC}" type="datetimeFigureOut">
               <a:rPr lang="en-US" smtClean="0"/>
-              <a:t>3/30/26</a:t>
+              <a:t>4/13/26</a:t>
             </a:fld>
             <a:endParaRPr lang="en-US"/>
           </a:p>
@@ -3017,7 +3025,7 @@
           <a:p>
             <a:fld id="{CEE2ACAA-75FA-AD45-8679-E5834893ECEC}" type="datetimeFigureOut">
               <a:rPr lang="en-US" smtClean="0"/>
-              <a:t>3/30/26</a:t>
+              <a:t>4/13/26</a:t>
             </a:fld>
             <a:endParaRPr lang="en-US"/>
           </a:p>
@@ -3305,7 +3313,7 @@
           <a:p>
             <a:fld id="{CEE2ACAA-75FA-AD45-8679-E5834893ECEC}" type="datetimeFigureOut">
               <a:rPr lang="en-US" smtClean="0"/>
-              <a:t>3/30/26</a:t>
+              <a:t>4/13/26</a:t>
             </a:fld>
             <a:endParaRPr lang="en-US"/>
           </a:p>
@@ -3546,7 +3554,7 @@
           <a:p>
             <a:fld id="{CEE2ACAA-75FA-AD45-8679-E5834893ECEC}" type="datetimeFigureOut">
               <a:rPr lang="en-US" smtClean="0"/>
-              <a:t>3/30/26</a:t>
+              <a:t>4/13/26</a:t>
             </a:fld>
             <a:endParaRPr lang="en-US"/>
           </a:p>
@@ -4062,6 +4070,516 @@
           <p:cNvPr id="2" name="Title 1">
             <a:extLst>
               <a:ext uri="{FF2B5EF4-FFF2-40B4-BE49-F238E27FC236}">
+                <a16:creationId xmlns:a16="http://schemas.microsoft.com/office/drawing/2014/main" id="{57495654-A376-21A2-5DCD-FACCFCC5B067}"/>
+              </a:ext>
+            </a:extLst>
+          </p:cNvPr>
+          <p:cNvSpPr>
+            <a:spLocks noGrp="1"/>
+          </p:cNvSpPr>
+          <p:nvPr>
+            <p:ph type="title"/>
+          </p:nvPr>
+        </p:nvSpPr>
+        <p:spPr/>
+        <p:txBody>
+          <a:bodyPr/>
+          <a:lstStyle/>
+          <a:p>
+            <a:r>
+              <a:rPr lang="en-US" dirty="0"/>
+              <a:t>Model evaluation and cross-validation</a:t>
+            </a:r>
+          </a:p>
+        </p:txBody>
+      </p:sp>
+      <p:sp>
+        <p:nvSpPr>
+          <p:cNvPr id="3" name="Content Placeholder 2">
+            <a:extLst>
+              <a:ext uri="{FF2B5EF4-FFF2-40B4-BE49-F238E27FC236}">
+                <a16:creationId xmlns:a16="http://schemas.microsoft.com/office/drawing/2014/main" id="{592056A0-B353-C081-017D-281B629E7B12}"/>
+              </a:ext>
+            </a:extLst>
+          </p:cNvPr>
+          <p:cNvSpPr>
+            <a:spLocks noGrp="1"/>
+          </p:cNvSpPr>
+          <p:nvPr>
+            <p:ph idx="1"/>
+          </p:nvPr>
+        </p:nvSpPr>
+        <p:spPr/>
+        <p:txBody>
+          <a:bodyPr/>
+          <a:lstStyle/>
+          <a:p>
+            <a:pPr marL="0" indent="0">
+              <a:buNone/>
+            </a:pPr>
+            <a:r>
+              <a:rPr lang="en-US" dirty="0"/>
+              <a:t>First, an example…</a:t>
+            </a:r>
+          </a:p>
+          <a:p>
+            <a:pPr marL="0" indent="0">
+              <a:buNone/>
+            </a:pPr>
+            <a:endParaRPr lang="en-US" b="1" dirty="0"/>
+          </a:p>
+          <a:p>
+            <a:pPr marL="0" indent="0">
+              <a:buNone/>
+            </a:pPr>
+            <a:r>
+              <a:rPr lang="en-US" b="1" dirty="0"/>
+              <a:t>INSERT</a:t>
+            </a:r>
+            <a:r>
+              <a:rPr lang="en-US" dirty="0"/>
+              <a:t> example of model (probably classification) that performs well on the training data, but poorly on new data</a:t>
+            </a:r>
+          </a:p>
+          <a:p>
+            <a:pPr marL="0" indent="0">
+              <a:buNone/>
+            </a:pPr>
+            <a:endParaRPr lang="en-US" dirty="0"/>
+          </a:p>
+          <a:p>
+            <a:pPr marL="0" indent="0">
+              <a:buNone/>
+            </a:pPr>
+            <a:r>
+              <a:rPr lang="en-US" dirty="0"/>
+              <a:t>Is this a good model? Or a bad model? It depends how we evaluate it...</a:t>
+            </a:r>
+          </a:p>
+        </p:txBody>
+      </p:sp>
+    </p:spTree>
+    <p:extLst>
+      <p:ext uri="{BB962C8B-B14F-4D97-AF65-F5344CB8AC3E}">
+        <p14:creationId xmlns:p14="http://schemas.microsoft.com/office/powerpoint/2010/main" val="177675001"/>
+      </p:ext>
+    </p:extLst>
+  </p:cSld>
+  <p:clrMapOvr>
+    <a:masterClrMapping/>
+  </p:clrMapOvr>
+</p:sld>
+</file>
+
+<file path=ppt/slides/slide11.xml><?xml version="1.0" encoding="utf-8"?>
+<p:sld xmlns:a="http://schemas.openxmlformats.org/drawingml/2006/main" xmlns:r="http://schemas.openxmlformats.org/officeDocument/2006/relationships" xmlns:p="http://schemas.openxmlformats.org/presentationml/2006/main">
+  <p:cSld>
+    <p:spTree>
+      <p:nvGrpSpPr>
+        <p:cNvPr id="1" name=""/>
+        <p:cNvGrpSpPr/>
+        <p:nvPr/>
+      </p:nvGrpSpPr>
+      <p:grpSpPr>
+        <a:xfrm>
+          <a:off x="0" y="0"/>
+          <a:ext cx="0" cy="0"/>
+          <a:chOff x="0" y="0"/>
+          <a:chExt cx="0" cy="0"/>
+        </a:xfrm>
+      </p:grpSpPr>
+      <p:sp>
+        <p:nvSpPr>
+          <p:cNvPr id="2" name="Title 1">
+            <a:extLst>
+              <a:ext uri="{FF2B5EF4-FFF2-40B4-BE49-F238E27FC236}">
+                <a16:creationId xmlns:a16="http://schemas.microsoft.com/office/drawing/2014/main" id="{578D8BD5-1866-8949-4A75-E045188B007F}"/>
+              </a:ext>
+            </a:extLst>
+          </p:cNvPr>
+          <p:cNvSpPr>
+            <a:spLocks noGrp="1"/>
+          </p:cNvSpPr>
+          <p:nvPr>
+            <p:ph type="title"/>
+          </p:nvPr>
+        </p:nvSpPr>
+        <p:spPr/>
+        <p:txBody>
+          <a:bodyPr/>
+          <a:lstStyle/>
+          <a:p>
+            <a:r>
+              <a:rPr lang="en-US" dirty="0"/>
+              <a:t>You should </a:t>
+            </a:r>
+            <a:r>
+              <a:rPr lang="en-US" i="1" dirty="0"/>
+              <a:t>always </a:t>
+            </a:r>
+            <a:r>
+              <a:rPr lang="en-US" dirty="0"/>
+              <a:t>evaluate your model with an </a:t>
+            </a:r>
+            <a:r>
+              <a:rPr lang="en-US" b="1" dirty="0"/>
+              <a:t>independent test set</a:t>
+            </a:r>
+            <a:endParaRPr lang="en-US" b="1" i="1" dirty="0"/>
+          </a:p>
+        </p:txBody>
+      </p:sp>
+      <p:sp>
+        <p:nvSpPr>
+          <p:cNvPr id="3" name="Content Placeholder 2">
+            <a:extLst>
+              <a:ext uri="{FF2B5EF4-FFF2-40B4-BE49-F238E27FC236}">
+                <a16:creationId xmlns:a16="http://schemas.microsoft.com/office/drawing/2014/main" id="{E86D81AE-EEF4-2FD6-10E6-7E3EC20FFF97}"/>
+              </a:ext>
+            </a:extLst>
+          </p:cNvPr>
+          <p:cNvSpPr>
+            <a:spLocks noGrp="1"/>
+          </p:cNvSpPr>
+          <p:nvPr>
+            <p:ph idx="1"/>
+          </p:nvPr>
+        </p:nvSpPr>
+        <p:spPr/>
+        <p:txBody>
+          <a:bodyPr/>
+          <a:lstStyle/>
+          <a:p>
+            <a:pPr marL="0" indent="0">
+              <a:buNone/>
+            </a:pPr>
+            <a:r>
+              <a:rPr lang="en-US" dirty="0"/>
+              <a:t>The simplest option is to:</a:t>
+            </a:r>
+          </a:p>
+          <a:p>
+            <a:r>
+              <a:rPr lang="en-US" dirty="0"/>
+              <a:t>Hold out 20% of your dataset as the </a:t>
+            </a:r>
+            <a:r>
+              <a:rPr lang="en-US" b="1" dirty="0"/>
+              <a:t>test set</a:t>
+            </a:r>
+          </a:p>
+          <a:p>
+            <a:r>
+              <a:rPr lang="en-US" dirty="0"/>
+              <a:t>Train your model on the 80% </a:t>
+            </a:r>
+            <a:r>
+              <a:rPr lang="en-US" b="1" dirty="0"/>
+              <a:t>training set</a:t>
+            </a:r>
+          </a:p>
+          <a:p>
+            <a:r>
+              <a:rPr lang="en-US" dirty="0"/>
+              <a:t>Calculate performance metrics on the test set</a:t>
+            </a:r>
+          </a:p>
+          <a:p>
+            <a:endParaRPr lang="en-US" dirty="0"/>
+          </a:p>
+        </p:txBody>
+      </p:sp>
+      <p:sp>
+        <p:nvSpPr>
+          <p:cNvPr id="4" name="TextBox 3">
+            <a:extLst>
+              <a:ext uri="{FF2B5EF4-FFF2-40B4-BE49-F238E27FC236}">
+                <a16:creationId xmlns:a16="http://schemas.microsoft.com/office/drawing/2014/main" id="{53866A68-2498-F3B1-38FB-4AE0B2236D18}"/>
+              </a:ext>
+            </a:extLst>
+          </p:cNvPr>
+          <p:cNvSpPr txBox="1"/>
+          <p:nvPr/>
+        </p:nvSpPr>
+        <p:spPr>
+          <a:xfrm>
+            <a:off x="5572772" y="6169709"/>
+            <a:ext cx="7116939" cy="646331"/>
+          </a:xfrm>
+          <a:prstGeom prst="rect">
+            <a:avLst/>
+          </a:prstGeom>
+          <a:noFill/>
+        </p:spPr>
+        <p:txBody>
+          <a:bodyPr wrap="square" rtlCol="0">
+            <a:spAutoFit/>
+          </a:bodyPr>
+          <a:lstStyle/>
+          <a:p>
+            <a:r>
+              <a:rPr lang="en-US" dirty="0"/>
+              <a:t>Sometimes, sample size makes this impractical or requires alternatives for a specific application...we'll talk about those later.</a:t>
+            </a:r>
+          </a:p>
+        </p:txBody>
+      </p:sp>
+      <p:sp>
+        <p:nvSpPr>
+          <p:cNvPr id="5" name="TextBox 4">
+            <a:extLst>
+              <a:ext uri="{FF2B5EF4-FFF2-40B4-BE49-F238E27FC236}">
+                <a16:creationId xmlns:a16="http://schemas.microsoft.com/office/drawing/2014/main" id="{DEBA9765-44B7-8C47-2DB8-F54935B27004}"/>
+              </a:ext>
+            </a:extLst>
+          </p:cNvPr>
+          <p:cNvSpPr txBox="1"/>
+          <p:nvPr/>
+        </p:nvSpPr>
+        <p:spPr>
+          <a:xfrm>
+            <a:off x="1319514" y="4676172"/>
+            <a:ext cx="2591607" cy="461665"/>
+          </a:xfrm>
+          <a:prstGeom prst="rect">
+            <a:avLst/>
+          </a:prstGeom>
+          <a:noFill/>
+        </p:spPr>
+        <p:txBody>
+          <a:bodyPr wrap="none" rtlCol="0">
+            <a:spAutoFit/>
+          </a:bodyPr>
+          <a:lstStyle/>
+          <a:p>
+            <a:r>
+              <a:rPr lang="en-US" sz="2400" b="1" dirty="0"/>
+              <a:t>INSERT GRAPHIC</a:t>
+            </a:r>
+          </a:p>
+        </p:txBody>
+      </p:sp>
+    </p:spTree>
+    <p:extLst>
+      <p:ext uri="{BB962C8B-B14F-4D97-AF65-F5344CB8AC3E}">
+        <p14:creationId xmlns:p14="http://schemas.microsoft.com/office/powerpoint/2010/main" val="63385871"/>
+      </p:ext>
+    </p:extLst>
+  </p:cSld>
+  <p:clrMapOvr>
+    <a:masterClrMapping/>
+  </p:clrMapOvr>
+</p:sld>
+</file>
+
+<file path=ppt/slides/slide12.xml><?xml version="1.0" encoding="utf-8"?>
+<p:sld xmlns:a="http://schemas.openxmlformats.org/drawingml/2006/main" xmlns:r="http://schemas.openxmlformats.org/officeDocument/2006/relationships" xmlns:p="http://schemas.openxmlformats.org/presentationml/2006/main">
+  <p:cSld>
+    <p:spTree>
+      <p:nvGrpSpPr>
+        <p:cNvPr id="1" name=""/>
+        <p:cNvGrpSpPr/>
+        <p:nvPr/>
+      </p:nvGrpSpPr>
+      <p:grpSpPr>
+        <a:xfrm>
+          <a:off x="0" y="0"/>
+          <a:ext cx="0" cy="0"/>
+          <a:chOff x="0" y="0"/>
+          <a:chExt cx="0" cy="0"/>
+        </a:xfrm>
+      </p:grpSpPr>
+      <p:sp>
+        <p:nvSpPr>
+          <p:cNvPr id="2" name="Title 1">
+            <a:extLst>
+              <a:ext uri="{FF2B5EF4-FFF2-40B4-BE49-F238E27FC236}">
+                <a16:creationId xmlns:a16="http://schemas.microsoft.com/office/drawing/2014/main" id="{92A64831-9647-66C8-2A0D-733435F4DF19}"/>
+              </a:ext>
+            </a:extLst>
+          </p:cNvPr>
+          <p:cNvSpPr>
+            <a:spLocks noGrp="1"/>
+          </p:cNvSpPr>
+          <p:nvPr>
+            <p:ph type="title"/>
+          </p:nvPr>
+        </p:nvSpPr>
+        <p:spPr/>
+        <p:txBody>
+          <a:bodyPr/>
+          <a:lstStyle/>
+          <a:p>
+            <a:r>
+              <a:rPr lang="en-US" dirty="0"/>
+              <a:t>K-fold cross-validation</a:t>
+            </a:r>
+          </a:p>
+        </p:txBody>
+      </p:sp>
+      <p:sp>
+        <p:nvSpPr>
+          <p:cNvPr id="3" name="Content Placeholder 2">
+            <a:extLst>
+              <a:ext uri="{FF2B5EF4-FFF2-40B4-BE49-F238E27FC236}">
+                <a16:creationId xmlns:a16="http://schemas.microsoft.com/office/drawing/2014/main" id="{F3B4B68D-001C-0E24-5F1A-4F72F1B64A72}"/>
+              </a:ext>
+            </a:extLst>
+          </p:cNvPr>
+          <p:cNvSpPr>
+            <a:spLocks noGrp="1"/>
+          </p:cNvSpPr>
+          <p:nvPr>
+            <p:ph idx="1"/>
+          </p:nvPr>
+        </p:nvSpPr>
+        <p:spPr/>
+        <p:txBody>
+          <a:bodyPr>
+            <a:normAutofit fontScale="85000" lnSpcReduction="20000"/>
+          </a:bodyPr>
+          <a:lstStyle/>
+          <a:p>
+            <a:pPr marL="0" indent="0">
+              <a:buNone/>
+            </a:pPr>
+            <a:r>
+              <a:rPr lang="en-US" dirty="0"/>
+              <a:t>Another common way to evaluate a model is via k-fold cross validation.</a:t>
+            </a:r>
+          </a:p>
+          <a:p>
+            <a:pPr marL="0" indent="0">
+              <a:buNone/>
+            </a:pPr>
+            <a:endParaRPr lang="en-US" dirty="0"/>
+          </a:p>
+          <a:p>
+            <a:pPr marL="0" indent="0">
+              <a:buNone/>
+            </a:pPr>
+            <a:r>
+              <a:rPr lang="en-US" b="1" dirty="0"/>
+              <a:t>INSERT GRAPHIC FOR EXPLANATION</a:t>
+            </a:r>
+          </a:p>
+          <a:p>
+            <a:pPr marL="0" indent="0">
+              <a:buNone/>
+            </a:pPr>
+            <a:endParaRPr lang="en-US" dirty="0"/>
+          </a:p>
+          <a:p>
+            <a:pPr marL="0" indent="0">
+              <a:buNone/>
+            </a:pPr>
+            <a:r>
+              <a:rPr lang="en-US" dirty="0"/>
+              <a:t>If `k = 10`, you train a model using a randomized 90% of the data, then evaluate it on the remaining 10%. Repeat this for 10 "folds" of the data, then take the average&lt;sup&gt;*&lt;/sup&gt; performance across the ten folds.</a:t>
+            </a:r>
+          </a:p>
+          <a:p>
+            <a:pPr marL="0" indent="0">
+              <a:buNone/>
+            </a:pPr>
+            <a:endParaRPr lang="en-US" dirty="0"/>
+          </a:p>
+          <a:p>
+            <a:pPr marL="0" indent="0">
+              <a:buNone/>
+            </a:pPr>
+            <a:r>
+              <a:rPr lang="en-US" dirty="0"/>
+              <a:t>This way, every row in the dataset is evaluated in one test set.</a:t>
+            </a:r>
+          </a:p>
+          <a:p>
+            <a:pPr marL="0" indent="0">
+              <a:buNone/>
+            </a:pPr>
+            <a:endParaRPr lang="en-US" dirty="0"/>
+          </a:p>
+          <a:p>
+            <a:pPr marL="0" indent="0">
+              <a:buNone/>
+            </a:pPr>
+            <a:r>
+              <a:rPr lang="en-US" dirty="0"/>
+              <a:t>Leave-one-out cross-validation is when `k = # of rows`, is very useful but sometimes too computationally heavy, since you have to train k models.</a:t>
+            </a:r>
+          </a:p>
+        </p:txBody>
+      </p:sp>
+      <p:sp>
+        <p:nvSpPr>
+          <p:cNvPr id="4" name="TextBox 3">
+            <a:extLst>
+              <a:ext uri="{FF2B5EF4-FFF2-40B4-BE49-F238E27FC236}">
+                <a16:creationId xmlns:a16="http://schemas.microsoft.com/office/drawing/2014/main" id="{48E41563-C349-12D7-E220-408A66F6861A}"/>
+              </a:ext>
+            </a:extLst>
+          </p:cNvPr>
+          <p:cNvSpPr txBox="1"/>
+          <p:nvPr/>
+        </p:nvSpPr>
+        <p:spPr>
+          <a:xfrm>
+            <a:off x="4930815" y="6211669"/>
+            <a:ext cx="7349925" cy="646331"/>
+          </a:xfrm>
+          <a:prstGeom prst="rect">
+            <a:avLst/>
+          </a:prstGeom>
+          <a:noFill/>
+        </p:spPr>
+        <p:txBody>
+          <a:bodyPr wrap="square" rtlCol="0">
+            <a:spAutoFit/>
+          </a:bodyPr>
+          <a:lstStyle/>
+          <a:p>
+            <a:r>
+              <a:rPr lang="en-US" dirty="0"/>
+              <a:t>Summarizing a performance across folds is typically done using the arithmetic mean but could be summarized in a number of relevant ways.</a:t>
+            </a:r>
+          </a:p>
+        </p:txBody>
+      </p:sp>
+    </p:spTree>
+    <p:extLst>
+      <p:ext uri="{BB962C8B-B14F-4D97-AF65-F5344CB8AC3E}">
+        <p14:creationId xmlns:p14="http://schemas.microsoft.com/office/powerpoint/2010/main" val="1699236919"/>
+      </p:ext>
+    </p:extLst>
+  </p:cSld>
+  <p:clrMapOvr>
+    <a:masterClrMapping/>
+  </p:clrMapOvr>
+</p:sld>
+</file>
+
+<file path=ppt/slides/slide13.xml><?xml version="1.0" encoding="utf-8"?>
+<p:sld xmlns:a="http://schemas.openxmlformats.org/drawingml/2006/main" xmlns:r="http://schemas.openxmlformats.org/officeDocument/2006/relationships" xmlns:p="http://schemas.openxmlformats.org/presentationml/2006/main">
+  <p:cSld>
+    <p:spTree>
+      <p:nvGrpSpPr>
+        <p:cNvPr id="1" name=""/>
+        <p:cNvGrpSpPr/>
+        <p:nvPr/>
+      </p:nvGrpSpPr>
+      <p:grpSpPr>
+        <a:xfrm>
+          <a:off x="0" y="0"/>
+          <a:ext cx="0" cy="0"/>
+          <a:chOff x="0" y="0"/>
+          <a:chExt cx="0" cy="0"/>
+        </a:xfrm>
+      </p:grpSpPr>
+      <p:sp>
+        <p:nvSpPr>
+          <p:cNvPr id="2" name="Title 1">
+            <a:extLst>
+              <a:ext uri="{FF2B5EF4-FFF2-40B4-BE49-F238E27FC236}">
                 <a16:creationId xmlns:a16="http://schemas.microsoft.com/office/drawing/2014/main" id="{759238B0-72F7-2ACA-F2BE-3DF32754A013}"/>
               </a:ext>
             </a:extLst>
@@ -4199,7 +4717,7 @@
 </p:sld>
 </file>
 
-<file path=ppt/slides/slide11.xml><?xml version="1.0" encoding="utf-8"?>
+<file path=ppt/slides/slide14.xml><?xml version="1.0" encoding="utf-8"?>
 <p:sld xmlns:a="http://schemas.openxmlformats.org/drawingml/2006/main" xmlns:r="http://schemas.openxmlformats.org/officeDocument/2006/relationships" xmlns:p="http://schemas.openxmlformats.org/presentationml/2006/main">
   <p:cSld>
     <p:spTree>
@@ -4557,252 +5075,6 @@
 </p:sld>
 </file>
 
-<file path=ppt/slides/slide12.xml><?xml version="1.0" encoding="utf-8"?>
-<p:sld xmlns:a="http://schemas.openxmlformats.org/drawingml/2006/main" xmlns:r="http://schemas.openxmlformats.org/officeDocument/2006/relationships" xmlns:p="http://schemas.openxmlformats.org/presentationml/2006/main">
-  <p:cSld>
-    <p:spTree>
-      <p:nvGrpSpPr>
-        <p:cNvPr id="1" name=""/>
-        <p:cNvGrpSpPr/>
-        <p:nvPr/>
-      </p:nvGrpSpPr>
-      <p:grpSpPr>
-        <a:xfrm>
-          <a:off x="0" y="0"/>
-          <a:ext cx="0" cy="0"/>
-          <a:chOff x="0" y="0"/>
-          <a:chExt cx="0" cy="0"/>
-        </a:xfrm>
-      </p:grpSpPr>
-      <p:sp>
-        <p:nvSpPr>
-          <p:cNvPr id="2" name="Title 1">
-            <a:extLst>
-              <a:ext uri="{FF2B5EF4-FFF2-40B4-BE49-F238E27FC236}">
-                <a16:creationId xmlns:a16="http://schemas.microsoft.com/office/drawing/2014/main" id="{F839EA71-7B3C-12EA-AFED-BF652B54B94B}"/>
-              </a:ext>
-            </a:extLst>
-          </p:cNvPr>
-          <p:cNvSpPr>
-            <a:spLocks noGrp="1"/>
-          </p:cNvSpPr>
-          <p:nvPr>
-            <p:ph type="title"/>
-          </p:nvPr>
-        </p:nvSpPr>
-        <p:spPr/>
-        <p:txBody>
-          <a:bodyPr/>
-          <a:lstStyle/>
-          <a:p>
-            <a:endParaRPr lang="en-US"/>
-          </a:p>
-        </p:txBody>
-      </p:sp>
-      <p:sp>
-        <p:nvSpPr>
-          <p:cNvPr id="3" name="Content Placeholder 2">
-            <a:extLst>
-              <a:ext uri="{FF2B5EF4-FFF2-40B4-BE49-F238E27FC236}">
-                <a16:creationId xmlns:a16="http://schemas.microsoft.com/office/drawing/2014/main" id="{C8EDAA9D-D15D-2A71-CF6C-74A97DB581B0}"/>
-              </a:ext>
-            </a:extLst>
-          </p:cNvPr>
-          <p:cNvSpPr>
-            <a:spLocks noGrp="1"/>
-          </p:cNvSpPr>
-          <p:nvPr>
-            <p:ph idx="1"/>
-          </p:nvPr>
-        </p:nvSpPr>
-        <p:spPr/>
-        <p:txBody>
-          <a:bodyPr/>
-          <a:lstStyle/>
-          <a:p>
-            <a:endParaRPr lang="en-US"/>
-          </a:p>
-        </p:txBody>
-      </p:sp>
-    </p:spTree>
-    <p:extLst>
-      <p:ext uri="{BB962C8B-B14F-4D97-AF65-F5344CB8AC3E}">
-        <p14:creationId xmlns:p14="http://schemas.microsoft.com/office/powerpoint/2010/main" val="1194441702"/>
-      </p:ext>
-    </p:extLst>
-  </p:cSld>
-  <p:clrMapOvr>
-    <a:masterClrMapping/>
-  </p:clrMapOvr>
-</p:sld>
-</file>
-
-<file path=ppt/slides/slide13.xml><?xml version="1.0" encoding="utf-8"?>
-<p:sld xmlns:a="http://schemas.openxmlformats.org/drawingml/2006/main" xmlns:r="http://schemas.openxmlformats.org/officeDocument/2006/relationships" xmlns:p="http://schemas.openxmlformats.org/presentationml/2006/main">
-  <p:cSld>
-    <p:spTree>
-      <p:nvGrpSpPr>
-        <p:cNvPr id="1" name=""/>
-        <p:cNvGrpSpPr/>
-        <p:nvPr/>
-      </p:nvGrpSpPr>
-      <p:grpSpPr>
-        <a:xfrm>
-          <a:off x="0" y="0"/>
-          <a:ext cx="0" cy="0"/>
-          <a:chOff x="0" y="0"/>
-          <a:chExt cx="0" cy="0"/>
-        </a:xfrm>
-      </p:grpSpPr>
-      <p:sp>
-        <p:nvSpPr>
-          <p:cNvPr id="2" name="Title 1">
-            <a:extLst>
-              <a:ext uri="{FF2B5EF4-FFF2-40B4-BE49-F238E27FC236}">
-                <a16:creationId xmlns:a16="http://schemas.microsoft.com/office/drawing/2014/main" id="{DB801954-72B5-A072-BA66-4298F8106232}"/>
-              </a:ext>
-            </a:extLst>
-          </p:cNvPr>
-          <p:cNvSpPr>
-            <a:spLocks noGrp="1"/>
-          </p:cNvSpPr>
-          <p:nvPr>
-            <p:ph type="title"/>
-          </p:nvPr>
-        </p:nvSpPr>
-        <p:spPr/>
-        <p:txBody>
-          <a:bodyPr/>
-          <a:lstStyle/>
-          <a:p>
-            <a:endParaRPr lang="en-US"/>
-          </a:p>
-        </p:txBody>
-      </p:sp>
-      <p:sp>
-        <p:nvSpPr>
-          <p:cNvPr id="3" name="Content Placeholder 2">
-            <a:extLst>
-              <a:ext uri="{FF2B5EF4-FFF2-40B4-BE49-F238E27FC236}">
-                <a16:creationId xmlns:a16="http://schemas.microsoft.com/office/drawing/2014/main" id="{EE0BDF31-7C2C-7AB3-28CC-C1C18B42776D}"/>
-              </a:ext>
-            </a:extLst>
-          </p:cNvPr>
-          <p:cNvSpPr>
-            <a:spLocks noGrp="1"/>
-          </p:cNvSpPr>
-          <p:nvPr>
-            <p:ph idx="1"/>
-          </p:nvPr>
-        </p:nvSpPr>
-        <p:spPr/>
-        <p:txBody>
-          <a:bodyPr/>
-          <a:lstStyle/>
-          <a:p>
-            <a:endParaRPr lang="en-US"/>
-          </a:p>
-        </p:txBody>
-      </p:sp>
-    </p:spTree>
-    <p:extLst>
-      <p:ext uri="{BB962C8B-B14F-4D97-AF65-F5344CB8AC3E}">
-        <p14:creationId xmlns:p14="http://schemas.microsoft.com/office/powerpoint/2010/main" val="1999576953"/>
-      </p:ext>
-    </p:extLst>
-  </p:cSld>
-  <p:clrMapOvr>
-    <a:masterClrMapping/>
-  </p:clrMapOvr>
-</p:sld>
-</file>
-
-<file path=ppt/slides/slide14.xml><?xml version="1.0" encoding="utf-8"?>
-<p:sld xmlns:a="http://schemas.openxmlformats.org/drawingml/2006/main" xmlns:r="http://schemas.openxmlformats.org/officeDocument/2006/relationships" xmlns:p="http://schemas.openxmlformats.org/presentationml/2006/main">
-  <p:cSld>
-    <p:spTree>
-      <p:nvGrpSpPr>
-        <p:cNvPr id="1" name=""/>
-        <p:cNvGrpSpPr/>
-        <p:nvPr/>
-      </p:nvGrpSpPr>
-      <p:grpSpPr>
-        <a:xfrm>
-          <a:off x="0" y="0"/>
-          <a:ext cx="0" cy="0"/>
-          <a:chOff x="0" y="0"/>
-          <a:chExt cx="0" cy="0"/>
-        </a:xfrm>
-      </p:grpSpPr>
-      <p:sp>
-        <p:nvSpPr>
-          <p:cNvPr id="2" name="Title 1">
-            <a:extLst>
-              <a:ext uri="{FF2B5EF4-FFF2-40B4-BE49-F238E27FC236}">
-                <a16:creationId xmlns:a16="http://schemas.microsoft.com/office/drawing/2014/main" id="{C90EB099-EDFE-49C0-F92A-5A06671FA823}"/>
-              </a:ext>
-            </a:extLst>
-          </p:cNvPr>
-          <p:cNvSpPr>
-            <a:spLocks noGrp="1"/>
-          </p:cNvSpPr>
-          <p:nvPr>
-            <p:ph type="title"/>
-          </p:nvPr>
-        </p:nvSpPr>
-        <p:spPr/>
-        <p:txBody>
-          <a:bodyPr/>
-          <a:lstStyle/>
-          <a:p>
-            <a:r>
-              <a:rPr lang="en-US" dirty="0"/>
-              <a:t>Now to a hands-on coding example…</a:t>
-            </a:r>
-          </a:p>
-        </p:txBody>
-      </p:sp>
-      <p:sp>
-        <p:nvSpPr>
-          <p:cNvPr id="3" name="Content Placeholder 2">
-            <a:extLst>
-              <a:ext uri="{FF2B5EF4-FFF2-40B4-BE49-F238E27FC236}">
-                <a16:creationId xmlns:a16="http://schemas.microsoft.com/office/drawing/2014/main" id="{7C3E5F25-6642-7C5A-28C2-4F63673F26C5}"/>
-              </a:ext>
-            </a:extLst>
-          </p:cNvPr>
-          <p:cNvSpPr>
-            <a:spLocks noGrp="1"/>
-          </p:cNvSpPr>
-          <p:nvPr>
-            <p:ph idx="1"/>
-          </p:nvPr>
-        </p:nvSpPr>
-        <p:spPr/>
-        <p:txBody>
-          <a:bodyPr/>
-          <a:lstStyle/>
-          <a:p>
-            <a:r>
-              <a:rPr lang="en-US" dirty="0"/>
-              <a:t>INSERT details on where to find, how long, etc.</a:t>
-            </a:r>
-          </a:p>
-        </p:txBody>
-      </p:sp>
-    </p:spTree>
-    <p:extLst>
-      <p:ext uri="{BB962C8B-B14F-4D97-AF65-F5344CB8AC3E}">
-        <p14:creationId xmlns:p14="http://schemas.microsoft.com/office/powerpoint/2010/main" val="3633211302"/>
-      </p:ext>
-    </p:extLst>
-  </p:cSld>
-  <p:clrMapOvr>
-    <a:masterClrMapping/>
-  </p:clrMapOvr>
-</p:sld>
-</file>
-
 <file path=ppt/slides/slide15.xml><?xml version="1.0" encoding="utf-8"?>
 <p:sld xmlns:a="http://schemas.openxmlformats.org/drawingml/2006/main" xmlns:r="http://schemas.openxmlformats.org/officeDocument/2006/relationships" xmlns:p="http://schemas.openxmlformats.org/presentationml/2006/main">
   <p:cSld>
@@ -4825,6 +5097,259 @@
           <p:cNvPr id="2" name="Title 1">
             <a:extLst>
               <a:ext uri="{FF2B5EF4-FFF2-40B4-BE49-F238E27FC236}">
+                <a16:creationId xmlns:a16="http://schemas.microsoft.com/office/drawing/2014/main" id="{F839EA71-7B3C-12EA-AFED-BF652B54B94B}"/>
+              </a:ext>
+            </a:extLst>
+          </p:cNvPr>
+          <p:cNvSpPr>
+            <a:spLocks noGrp="1"/>
+          </p:cNvSpPr>
+          <p:nvPr>
+            <p:ph type="title"/>
+          </p:nvPr>
+        </p:nvSpPr>
+        <p:spPr/>
+        <p:txBody>
+          <a:bodyPr/>
+          <a:lstStyle/>
+          <a:p>
+            <a:endParaRPr lang="en-US"/>
+          </a:p>
+        </p:txBody>
+      </p:sp>
+      <p:sp>
+        <p:nvSpPr>
+          <p:cNvPr id="3" name="Content Placeholder 2">
+            <a:extLst>
+              <a:ext uri="{FF2B5EF4-FFF2-40B4-BE49-F238E27FC236}">
+                <a16:creationId xmlns:a16="http://schemas.microsoft.com/office/drawing/2014/main" id="{C8EDAA9D-D15D-2A71-CF6C-74A97DB581B0}"/>
+              </a:ext>
+            </a:extLst>
+          </p:cNvPr>
+          <p:cNvSpPr>
+            <a:spLocks noGrp="1"/>
+          </p:cNvSpPr>
+          <p:nvPr>
+            <p:ph idx="1"/>
+          </p:nvPr>
+        </p:nvSpPr>
+        <p:spPr/>
+        <p:txBody>
+          <a:bodyPr/>
+          <a:lstStyle/>
+          <a:p>
+            <a:endParaRPr lang="en-US"/>
+          </a:p>
+        </p:txBody>
+      </p:sp>
+    </p:spTree>
+    <p:extLst>
+      <p:ext uri="{BB962C8B-B14F-4D97-AF65-F5344CB8AC3E}">
+        <p14:creationId xmlns:p14="http://schemas.microsoft.com/office/powerpoint/2010/main" val="1194441702"/>
+      </p:ext>
+    </p:extLst>
+  </p:cSld>
+  <p:clrMapOvr>
+    <a:masterClrMapping/>
+  </p:clrMapOvr>
+</p:sld>
+</file>
+
+<file path=ppt/slides/slide16.xml><?xml version="1.0" encoding="utf-8"?>
+<p:sld xmlns:a="http://schemas.openxmlformats.org/drawingml/2006/main" xmlns:r="http://schemas.openxmlformats.org/officeDocument/2006/relationships" xmlns:p="http://schemas.openxmlformats.org/presentationml/2006/main">
+  <p:cSld>
+    <p:spTree>
+      <p:nvGrpSpPr>
+        <p:cNvPr id="1" name=""/>
+        <p:cNvGrpSpPr/>
+        <p:nvPr/>
+      </p:nvGrpSpPr>
+      <p:grpSpPr>
+        <a:xfrm>
+          <a:off x="0" y="0"/>
+          <a:ext cx="0" cy="0"/>
+          <a:chOff x="0" y="0"/>
+          <a:chExt cx="0" cy="0"/>
+        </a:xfrm>
+      </p:grpSpPr>
+      <p:sp>
+        <p:nvSpPr>
+          <p:cNvPr id="2" name="Title 1">
+            <a:extLst>
+              <a:ext uri="{FF2B5EF4-FFF2-40B4-BE49-F238E27FC236}">
+                <a16:creationId xmlns:a16="http://schemas.microsoft.com/office/drawing/2014/main" id="{DB801954-72B5-A072-BA66-4298F8106232}"/>
+              </a:ext>
+            </a:extLst>
+          </p:cNvPr>
+          <p:cNvSpPr>
+            <a:spLocks noGrp="1"/>
+          </p:cNvSpPr>
+          <p:nvPr>
+            <p:ph type="title"/>
+          </p:nvPr>
+        </p:nvSpPr>
+        <p:spPr/>
+        <p:txBody>
+          <a:bodyPr/>
+          <a:lstStyle/>
+          <a:p>
+            <a:endParaRPr lang="en-US"/>
+          </a:p>
+        </p:txBody>
+      </p:sp>
+      <p:sp>
+        <p:nvSpPr>
+          <p:cNvPr id="3" name="Content Placeholder 2">
+            <a:extLst>
+              <a:ext uri="{FF2B5EF4-FFF2-40B4-BE49-F238E27FC236}">
+                <a16:creationId xmlns:a16="http://schemas.microsoft.com/office/drawing/2014/main" id="{EE0BDF31-7C2C-7AB3-28CC-C1C18B42776D}"/>
+              </a:ext>
+            </a:extLst>
+          </p:cNvPr>
+          <p:cNvSpPr>
+            <a:spLocks noGrp="1"/>
+          </p:cNvSpPr>
+          <p:nvPr>
+            <p:ph idx="1"/>
+          </p:nvPr>
+        </p:nvSpPr>
+        <p:spPr/>
+        <p:txBody>
+          <a:bodyPr/>
+          <a:lstStyle/>
+          <a:p>
+            <a:endParaRPr lang="en-US"/>
+          </a:p>
+        </p:txBody>
+      </p:sp>
+    </p:spTree>
+    <p:extLst>
+      <p:ext uri="{BB962C8B-B14F-4D97-AF65-F5344CB8AC3E}">
+        <p14:creationId xmlns:p14="http://schemas.microsoft.com/office/powerpoint/2010/main" val="1999576953"/>
+      </p:ext>
+    </p:extLst>
+  </p:cSld>
+  <p:clrMapOvr>
+    <a:masterClrMapping/>
+  </p:clrMapOvr>
+</p:sld>
+</file>
+
+<file path=ppt/slides/slide17.xml><?xml version="1.0" encoding="utf-8"?>
+<p:sld xmlns:a="http://schemas.openxmlformats.org/drawingml/2006/main" xmlns:r="http://schemas.openxmlformats.org/officeDocument/2006/relationships" xmlns:p="http://schemas.openxmlformats.org/presentationml/2006/main">
+  <p:cSld>
+    <p:spTree>
+      <p:nvGrpSpPr>
+        <p:cNvPr id="1" name=""/>
+        <p:cNvGrpSpPr/>
+        <p:nvPr/>
+      </p:nvGrpSpPr>
+      <p:grpSpPr>
+        <a:xfrm>
+          <a:off x="0" y="0"/>
+          <a:ext cx="0" cy="0"/>
+          <a:chOff x="0" y="0"/>
+          <a:chExt cx="0" cy="0"/>
+        </a:xfrm>
+      </p:grpSpPr>
+      <p:sp>
+        <p:nvSpPr>
+          <p:cNvPr id="2" name="Title 1">
+            <a:extLst>
+              <a:ext uri="{FF2B5EF4-FFF2-40B4-BE49-F238E27FC236}">
+                <a16:creationId xmlns:a16="http://schemas.microsoft.com/office/drawing/2014/main" id="{C90EB099-EDFE-49C0-F92A-5A06671FA823}"/>
+              </a:ext>
+            </a:extLst>
+          </p:cNvPr>
+          <p:cNvSpPr>
+            <a:spLocks noGrp="1"/>
+          </p:cNvSpPr>
+          <p:nvPr>
+            <p:ph type="title"/>
+          </p:nvPr>
+        </p:nvSpPr>
+        <p:spPr/>
+        <p:txBody>
+          <a:bodyPr/>
+          <a:lstStyle/>
+          <a:p>
+            <a:r>
+              <a:rPr lang="en-US" dirty="0"/>
+              <a:t>Now to a hands-on coding example…</a:t>
+            </a:r>
+          </a:p>
+        </p:txBody>
+      </p:sp>
+      <p:sp>
+        <p:nvSpPr>
+          <p:cNvPr id="3" name="Content Placeholder 2">
+            <a:extLst>
+              <a:ext uri="{FF2B5EF4-FFF2-40B4-BE49-F238E27FC236}">
+                <a16:creationId xmlns:a16="http://schemas.microsoft.com/office/drawing/2014/main" id="{7C3E5F25-6642-7C5A-28C2-4F63673F26C5}"/>
+              </a:ext>
+            </a:extLst>
+          </p:cNvPr>
+          <p:cNvSpPr>
+            <a:spLocks noGrp="1"/>
+          </p:cNvSpPr>
+          <p:nvPr>
+            <p:ph idx="1"/>
+          </p:nvPr>
+        </p:nvSpPr>
+        <p:spPr/>
+        <p:txBody>
+          <a:bodyPr/>
+          <a:lstStyle/>
+          <a:p>
+            <a:r>
+              <a:rPr lang="en-US" dirty="0"/>
+              <a:t>INSERT details on where to find, how long, etc.</a:t>
+            </a:r>
+          </a:p>
+          <a:p>
+            <a:r>
+              <a:rPr lang="en-US"/>
+              <a:t>SCREENSHOTS OF HOW TO DOWNLOAD AND OPEN IT</a:t>
+            </a:r>
+            <a:endParaRPr lang="en-US" dirty="0"/>
+          </a:p>
+        </p:txBody>
+      </p:sp>
+    </p:spTree>
+    <p:extLst>
+      <p:ext uri="{BB962C8B-B14F-4D97-AF65-F5344CB8AC3E}">
+        <p14:creationId xmlns:p14="http://schemas.microsoft.com/office/powerpoint/2010/main" val="3633211302"/>
+      </p:ext>
+    </p:extLst>
+  </p:cSld>
+  <p:clrMapOvr>
+    <a:masterClrMapping/>
+  </p:clrMapOvr>
+</p:sld>
+</file>
+
+<file path=ppt/slides/slide18.xml><?xml version="1.0" encoding="utf-8"?>
+<p:sld xmlns:a="http://schemas.openxmlformats.org/drawingml/2006/main" xmlns:r="http://schemas.openxmlformats.org/officeDocument/2006/relationships" xmlns:p="http://schemas.openxmlformats.org/presentationml/2006/main">
+  <p:cSld>
+    <p:spTree>
+      <p:nvGrpSpPr>
+        <p:cNvPr id="1" name=""/>
+        <p:cNvGrpSpPr/>
+        <p:nvPr/>
+      </p:nvGrpSpPr>
+      <p:grpSpPr>
+        <a:xfrm>
+          <a:off x="0" y="0"/>
+          <a:ext cx="0" cy="0"/>
+          <a:chOff x="0" y="0"/>
+          <a:chExt cx="0" cy="0"/>
+        </a:xfrm>
+      </p:grpSpPr>
+      <p:sp>
+        <p:nvSpPr>
+          <p:cNvPr id="2" name="Title 1">
+            <a:extLst>
+              <a:ext uri="{FF2B5EF4-FFF2-40B4-BE49-F238E27FC236}">
                 <a16:creationId xmlns:a16="http://schemas.microsoft.com/office/drawing/2014/main" id="{12A11CD7-89B4-B643-CF66-E9D8F9BC6BF2}"/>
               </a:ext>
             </a:extLst>
@@ -4883,7 +5408,7 @@
 </p:sld>
 </file>
 
-<file path=ppt/slides/slide16.xml><?xml version="1.0" encoding="utf-8"?>
+<file path=ppt/slides/slide19.xml><?xml version="1.0" encoding="utf-8"?>
 <p:sld xmlns:a="http://schemas.openxmlformats.org/drawingml/2006/main" xmlns:r="http://schemas.openxmlformats.org/officeDocument/2006/relationships" xmlns:p="http://schemas.openxmlformats.org/presentationml/2006/main">
   <p:cSld>
     <p:spTree>
@@ -5138,7 +5663,13 @@
   <p:cSld>
     <p:spTree>
       <p:nvGrpSpPr>
-        <p:cNvPr id="1" name=""/>
+        <p:cNvPr id="1" name="">
+          <a:extLst>
+            <a:ext uri="{FF2B5EF4-FFF2-40B4-BE49-F238E27FC236}">
+              <a16:creationId xmlns:a16="http://schemas.microsoft.com/office/drawing/2014/main" id="{C85D51B6-F824-2DF4-0E39-A904E8ED94C5}"/>
+            </a:ext>
+          </a:extLst>
+        </p:cNvPr>
         <p:cNvGrpSpPr/>
         <p:nvPr/>
       </p:nvGrpSpPr>
@@ -5155,7 +5686,7 @@
           <p:cNvPr id="2" name="Title 1">
             <a:extLst>
               <a:ext uri="{FF2B5EF4-FFF2-40B4-BE49-F238E27FC236}">
-                <a16:creationId xmlns:a16="http://schemas.microsoft.com/office/drawing/2014/main" id="{21C975CC-935F-0CF9-FC1F-E0B0D254FA0A}"/>
+                <a16:creationId xmlns:a16="http://schemas.microsoft.com/office/drawing/2014/main" id="{94B29588-D1DF-122B-4F68-AEAA3CA1C2D7}"/>
               </a:ext>
             </a:extLst>
           </p:cNvPr>
@@ -5178,12 +5709,422 @@
           </a:p>
         </p:txBody>
       </p:sp>
-      <p:sp>
-        <p:nvSpPr>
-          <p:cNvPr id="3" name="Content Placeholder 2">
-            <a:extLst>
-              <a:ext uri="{FF2B5EF4-FFF2-40B4-BE49-F238E27FC236}">
-                <a16:creationId xmlns:a16="http://schemas.microsoft.com/office/drawing/2014/main" id="{6BC73098-2150-6397-382E-65B9DD64DD8D}"/>
+      <p:grpSp>
+        <p:nvGrpSpPr>
+          <p:cNvPr id="29" name="Group 28">
+            <a:extLst>
+              <a:ext uri="{FF2B5EF4-FFF2-40B4-BE49-F238E27FC236}">
+                <a16:creationId xmlns:a16="http://schemas.microsoft.com/office/drawing/2014/main" id="{CFC6CD10-3DD9-517A-338F-6F7F9E28F98E}"/>
+              </a:ext>
+            </a:extLst>
+          </p:cNvPr>
+          <p:cNvGrpSpPr/>
+          <p:nvPr/>
+        </p:nvGrpSpPr>
+        <p:grpSpPr>
+          <a:xfrm>
+            <a:off x="6564223" y="2369713"/>
+            <a:ext cx="4179418" cy="2736153"/>
+            <a:chOff x="253576" y="2125014"/>
+            <a:chExt cx="4179418" cy="2736153"/>
+          </a:xfrm>
+        </p:grpSpPr>
+        <p:sp>
+          <p:nvSpPr>
+            <p:cNvPr id="6" name="Oval 5">
+              <a:extLst>
+                <a:ext uri="{FF2B5EF4-FFF2-40B4-BE49-F238E27FC236}">
+                  <a16:creationId xmlns:a16="http://schemas.microsoft.com/office/drawing/2014/main" id="{2095633A-ABC7-F729-F6DA-E89BC10C846C}"/>
+                </a:ext>
+              </a:extLst>
+            </p:cNvPr>
+            <p:cNvSpPr/>
+            <p:nvPr/>
+          </p:nvSpPr>
+          <p:spPr>
+            <a:xfrm>
+              <a:off x="2410784" y="2125014"/>
+              <a:ext cx="821813" cy="819337"/>
+            </a:xfrm>
+            <a:prstGeom prst="ellipse">
+              <a:avLst/>
+            </a:prstGeom>
+          </p:spPr>
+          <p:style>
+            <a:lnRef idx="2">
+              <a:schemeClr val="accent1">
+                <a:shade val="15000"/>
+              </a:schemeClr>
+            </a:lnRef>
+            <a:fillRef idx="1">
+              <a:schemeClr val="accent1"/>
+            </a:fillRef>
+            <a:effectRef idx="0">
+              <a:schemeClr val="accent1"/>
+            </a:effectRef>
+            <a:fontRef idx="minor">
+              <a:schemeClr val="lt1"/>
+            </a:fontRef>
+          </p:style>
+          <p:txBody>
+            <a:bodyPr rtlCol="0" anchor="ctr"/>
+            <a:lstStyle/>
+            <a:p>
+              <a:pPr algn="ctr"/>
+              <a:endParaRPr lang="en-US"/>
+            </a:p>
+          </p:txBody>
+        </p:sp>
+        <p:sp>
+          <p:nvSpPr>
+            <p:cNvPr id="7" name="Oval 6">
+              <a:extLst>
+                <a:ext uri="{FF2B5EF4-FFF2-40B4-BE49-F238E27FC236}">
+                  <a16:creationId xmlns:a16="http://schemas.microsoft.com/office/drawing/2014/main" id="{29C3E9C8-B89D-4C74-5206-B6A835D91119}"/>
+                </a:ext>
+              </a:extLst>
+            </p:cNvPr>
+            <p:cNvSpPr/>
+            <p:nvPr/>
+          </p:nvSpPr>
+          <p:spPr>
+            <a:xfrm>
+              <a:off x="1291291" y="3034954"/>
+              <a:ext cx="821813" cy="819337"/>
+            </a:xfrm>
+            <a:prstGeom prst="ellipse">
+              <a:avLst/>
+            </a:prstGeom>
+          </p:spPr>
+          <p:style>
+            <a:lnRef idx="2">
+              <a:schemeClr val="accent1">
+                <a:shade val="15000"/>
+              </a:schemeClr>
+            </a:lnRef>
+            <a:fillRef idx="1">
+              <a:schemeClr val="accent1"/>
+            </a:fillRef>
+            <a:effectRef idx="0">
+              <a:schemeClr val="accent1"/>
+            </a:effectRef>
+            <a:fontRef idx="minor">
+              <a:schemeClr val="lt1"/>
+            </a:fontRef>
+          </p:style>
+          <p:txBody>
+            <a:bodyPr rtlCol="0" anchor="ctr"/>
+            <a:lstStyle/>
+            <a:p>
+              <a:pPr algn="ctr"/>
+              <a:endParaRPr lang="en-US"/>
+            </a:p>
+          </p:txBody>
+        </p:sp>
+        <p:sp>
+          <p:nvSpPr>
+            <p:cNvPr id="8" name="Oval 7">
+              <a:extLst>
+                <a:ext uri="{FF2B5EF4-FFF2-40B4-BE49-F238E27FC236}">
+                  <a16:creationId xmlns:a16="http://schemas.microsoft.com/office/drawing/2014/main" id="{3543A37D-7224-5DA4-49B1-D01AA77F540B}"/>
+                </a:ext>
+              </a:extLst>
+            </p:cNvPr>
+            <p:cNvSpPr/>
+            <p:nvPr/>
+          </p:nvSpPr>
+          <p:spPr>
+            <a:xfrm>
+              <a:off x="3611181" y="3323259"/>
+              <a:ext cx="821813" cy="819337"/>
+            </a:xfrm>
+            <a:prstGeom prst="ellipse">
+              <a:avLst/>
+            </a:prstGeom>
+          </p:spPr>
+          <p:style>
+            <a:lnRef idx="2">
+              <a:schemeClr val="accent1">
+                <a:shade val="15000"/>
+              </a:schemeClr>
+            </a:lnRef>
+            <a:fillRef idx="1">
+              <a:schemeClr val="accent1"/>
+            </a:fillRef>
+            <a:effectRef idx="0">
+              <a:schemeClr val="accent1"/>
+            </a:effectRef>
+            <a:fontRef idx="minor">
+              <a:schemeClr val="lt1"/>
+            </a:fontRef>
+          </p:style>
+          <p:txBody>
+            <a:bodyPr rtlCol="0" anchor="ctr"/>
+            <a:lstStyle/>
+            <a:p>
+              <a:pPr algn="ctr"/>
+              <a:endParaRPr lang="en-US"/>
+            </a:p>
+          </p:txBody>
+        </p:sp>
+        <p:sp>
+          <p:nvSpPr>
+            <p:cNvPr id="9" name="Oval 8">
+              <a:extLst>
+                <a:ext uri="{FF2B5EF4-FFF2-40B4-BE49-F238E27FC236}">
+                  <a16:creationId xmlns:a16="http://schemas.microsoft.com/office/drawing/2014/main" id="{89041EF3-7F7C-AC60-40AD-576DF5279509}"/>
+                </a:ext>
+              </a:extLst>
+            </p:cNvPr>
+            <p:cNvSpPr/>
+            <p:nvPr/>
+          </p:nvSpPr>
+          <p:spPr>
+            <a:xfrm>
+              <a:off x="253576" y="4041829"/>
+              <a:ext cx="821813" cy="819337"/>
+            </a:xfrm>
+            <a:prstGeom prst="ellipse">
+              <a:avLst/>
+            </a:prstGeom>
+          </p:spPr>
+          <p:style>
+            <a:lnRef idx="2">
+              <a:schemeClr val="accent1">
+                <a:shade val="15000"/>
+              </a:schemeClr>
+            </a:lnRef>
+            <a:fillRef idx="1">
+              <a:schemeClr val="accent1"/>
+            </a:fillRef>
+            <a:effectRef idx="0">
+              <a:schemeClr val="accent1"/>
+            </a:effectRef>
+            <a:fontRef idx="minor">
+              <a:schemeClr val="lt1"/>
+            </a:fontRef>
+          </p:style>
+          <p:txBody>
+            <a:bodyPr rtlCol="0" anchor="ctr"/>
+            <a:lstStyle/>
+            <a:p>
+              <a:pPr algn="ctr"/>
+              <a:endParaRPr lang="en-US"/>
+            </a:p>
+          </p:txBody>
+        </p:sp>
+        <p:sp>
+          <p:nvSpPr>
+            <p:cNvPr id="10" name="Oval 9">
+              <a:extLst>
+                <a:ext uri="{FF2B5EF4-FFF2-40B4-BE49-F238E27FC236}">
+                  <a16:creationId xmlns:a16="http://schemas.microsoft.com/office/drawing/2014/main" id="{6C4C346D-A0DC-0B6C-EF5B-6932B2E54136}"/>
+                </a:ext>
+              </a:extLst>
+            </p:cNvPr>
+            <p:cNvSpPr/>
+            <p:nvPr/>
+          </p:nvSpPr>
+          <p:spPr>
+            <a:xfrm>
+              <a:off x="2296413" y="4041830"/>
+              <a:ext cx="821813" cy="819337"/>
+            </a:xfrm>
+            <a:prstGeom prst="ellipse">
+              <a:avLst/>
+            </a:prstGeom>
+          </p:spPr>
+          <p:style>
+            <a:lnRef idx="2">
+              <a:schemeClr val="accent1">
+                <a:shade val="15000"/>
+              </a:schemeClr>
+            </a:lnRef>
+            <a:fillRef idx="1">
+              <a:schemeClr val="accent1"/>
+            </a:fillRef>
+            <a:effectRef idx="0">
+              <a:schemeClr val="accent1"/>
+            </a:effectRef>
+            <a:fontRef idx="minor">
+              <a:schemeClr val="lt1"/>
+            </a:fontRef>
+          </p:style>
+          <p:txBody>
+            <a:bodyPr rtlCol="0" anchor="ctr"/>
+            <a:lstStyle/>
+            <a:p>
+              <a:pPr algn="ctr"/>
+              <a:endParaRPr lang="en-US"/>
+            </a:p>
+          </p:txBody>
+        </p:sp>
+        <p:cxnSp>
+          <p:nvCxnSpPr>
+            <p:cNvPr id="11" name="Straight Connector 10">
+              <a:extLst>
+                <a:ext uri="{FF2B5EF4-FFF2-40B4-BE49-F238E27FC236}">
+                  <a16:creationId xmlns:a16="http://schemas.microsoft.com/office/drawing/2014/main" id="{58216F9B-A959-C1AB-C95E-F6AC5C909421}"/>
+                </a:ext>
+              </a:extLst>
+            </p:cNvPr>
+            <p:cNvCxnSpPr>
+              <a:stCxn id="6" idx="5"/>
+              <a:endCxn id="8" idx="1"/>
+            </p:cNvCxnSpPr>
+            <p:nvPr/>
+          </p:nvCxnSpPr>
+          <p:spPr>
+            <a:xfrm>
+              <a:off x="3112245" y="2824362"/>
+              <a:ext cx="619288" cy="618886"/>
+            </a:xfrm>
+            <a:prstGeom prst="line">
+              <a:avLst/>
+            </a:prstGeom>
+          </p:spPr>
+          <p:style>
+            <a:lnRef idx="2">
+              <a:schemeClr val="accent1"/>
+            </a:lnRef>
+            <a:fillRef idx="0">
+              <a:schemeClr val="accent1"/>
+            </a:fillRef>
+            <a:effectRef idx="1">
+              <a:schemeClr val="accent1"/>
+            </a:effectRef>
+            <a:fontRef idx="minor">
+              <a:schemeClr val="tx1"/>
+            </a:fontRef>
+          </p:style>
+        </p:cxnSp>
+        <p:cxnSp>
+          <p:nvCxnSpPr>
+            <p:cNvPr id="12" name="Straight Connector 11">
+              <a:extLst>
+                <a:ext uri="{FF2B5EF4-FFF2-40B4-BE49-F238E27FC236}">
+                  <a16:creationId xmlns:a16="http://schemas.microsoft.com/office/drawing/2014/main" id="{DAB2E903-12B1-0AC5-B95F-5BFF2F3726ED}"/>
+                </a:ext>
+              </a:extLst>
+            </p:cNvPr>
+            <p:cNvCxnSpPr>
+              <a:cxnSpLocks/>
+              <a:stCxn id="6" idx="3"/>
+              <a:endCxn id="7" idx="7"/>
+            </p:cNvCxnSpPr>
+            <p:nvPr/>
+          </p:nvCxnSpPr>
+          <p:spPr>
+            <a:xfrm flipH="1">
+              <a:off x="1992752" y="2824362"/>
+              <a:ext cx="538384" cy="330581"/>
+            </a:xfrm>
+            <a:prstGeom prst="line">
+              <a:avLst/>
+            </a:prstGeom>
+          </p:spPr>
+          <p:style>
+            <a:lnRef idx="2">
+              <a:schemeClr val="accent1"/>
+            </a:lnRef>
+            <a:fillRef idx="0">
+              <a:schemeClr val="accent1"/>
+            </a:fillRef>
+            <a:effectRef idx="1">
+              <a:schemeClr val="accent1"/>
+            </a:effectRef>
+            <a:fontRef idx="minor">
+              <a:schemeClr val="tx1"/>
+            </a:fontRef>
+          </p:style>
+        </p:cxnSp>
+        <p:cxnSp>
+          <p:nvCxnSpPr>
+            <p:cNvPr id="13" name="Straight Connector 12">
+              <a:extLst>
+                <a:ext uri="{FF2B5EF4-FFF2-40B4-BE49-F238E27FC236}">
+                  <a16:creationId xmlns:a16="http://schemas.microsoft.com/office/drawing/2014/main" id="{F8F9170D-3D1D-5515-76A0-9E3ED013DF36}"/>
+                </a:ext>
+              </a:extLst>
+            </p:cNvPr>
+            <p:cNvCxnSpPr>
+              <a:cxnSpLocks/>
+              <a:stCxn id="7" idx="3"/>
+              <a:endCxn id="9" idx="7"/>
+            </p:cNvCxnSpPr>
+            <p:nvPr/>
+          </p:nvCxnSpPr>
+          <p:spPr>
+            <a:xfrm flipH="1">
+              <a:off x="955037" y="3734302"/>
+              <a:ext cx="456606" cy="427516"/>
+            </a:xfrm>
+            <a:prstGeom prst="line">
+              <a:avLst/>
+            </a:prstGeom>
+          </p:spPr>
+          <p:style>
+            <a:lnRef idx="2">
+              <a:schemeClr val="accent1"/>
+            </a:lnRef>
+            <a:fillRef idx="0">
+              <a:schemeClr val="accent1"/>
+            </a:fillRef>
+            <a:effectRef idx="1">
+              <a:schemeClr val="accent1"/>
+            </a:effectRef>
+            <a:fontRef idx="minor">
+              <a:schemeClr val="tx1"/>
+            </a:fontRef>
+          </p:style>
+        </p:cxnSp>
+        <p:cxnSp>
+          <p:nvCxnSpPr>
+            <p:cNvPr id="14" name="Straight Connector 13">
+              <a:extLst>
+                <a:ext uri="{FF2B5EF4-FFF2-40B4-BE49-F238E27FC236}">
+                  <a16:creationId xmlns:a16="http://schemas.microsoft.com/office/drawing/2014/main" id="{EC1B609B-E24E-943B-82E6-D7EFC04D6DA5}"/>
+                </a:ext>
+              </a:extLst>
+            </p:cNvPr>
+            <p:cNvCxnSpPr>
+              <a:cxnSpLocks/>
+              <a:stCxn id="7" idx="5"/>
+              <a:endCxn id="10" idx="1"/>
+            </p:cNvCxnSpPr>
+            <p:nvPr/>
+          </p:nvCxnSpPr>
+          <p:spPr>
+            <a:xfrm>
+              <a:off x="1992752" y="3734302"/>
+              <a:ext cx="424013" cy="427517"/>
+            </a:xfrm>
+            <a:prstGeom prst="line">
+              <a:avLst/>
+            </a:prstGeom>
+          </p:spPr>
+          <p:style>
+            <a:lnRef idx="2">
+              <a:schemeClr val="accent1"/>
+            </a:lnRef>
+            <a:fillRef idx="0">
+              <a:schemeClr val="accent1"/>
+            </a:fillRef>
+            <a:effectRef idx="1">
+              <a:schemeClr val="accent1"/>
+            </a:effectRef>
+            <a:fontRef idx="minor">
+              <a:schemeClr val="tx1"/>
+            </a:fontRef>
+          </p:style>
+        </p:cxnSp>
+      </p:grpSp>
+      <p:sp>
+        <p:nvSpPr>
+          <p:cNvPr id="31" name="Content Placeholder 2">
+            <a:extLst>
+              <a:ext uri="{FF2B5EF4-FFF2-40B4-BE49-F238E27FC236}">
+                <a16:creationId xmlns:a16="http://schemas.microsoft.com/office/drawing/2014/main" id="{1CF5D1D4-80A5-77D3-20CF-899FDC45AC2E}"/>
               </a:ext>
             </a:extLst>
           </p:cNvPr>
@@ -5194,22 +6135,136 @@
             <p:ph idx="1"/>
           </p:nvPr>
         </p:nvSpPr>
-        <p:spPr/>
-        <p:txBody>
-          <a:bodyPr/>
-          <a:lstStyle/>
-          <a:p>
+        <p:spPr>
+          <a:xfrm>
+            <a:off x="838200" y="1825625"/>
+            <a:ext cx="6427484" cy="4667250"/>
+          </a:xfrm>
+        </p:spPr>
+        <p:txBody>
+          <a:bodyPr>
+            <a:normAutofit fontScale="92500" lnSpcReduction="10000"/>
+          </a:bodyPr>
+          <a:lstStyle/>
+          <a:p>
+            <a:pPr marL="0" indent="0">
+              <a:buNone/>
+            </a:pPr>
             <a:r>
               <a:rPr lang="en-US" dirty="0"/>
-              <a:t>INSERT overview of model algorithm</a:t>
-            </a:r>
+              <a:t>Until a stopping condition is met</a:t>
+            </a:r>
+          </a:p>
+          <a:p>
+            <a:pPr marL="0" indent="0">
+              <a:buNone/>
+            </a:pPr>
+            <a:r>
+              <a:rPr lang="en-US" dirty="0"/>
+              <a:t>   Evaluate best split for each predictor</a:t>
+            </a:r>
+          </a:p>
+          <a:p>
+            <a:pPr marL="0" indent="0">
+              <a:buNone/>
+            </a:pPr>
+            <a:r>
+              <a:rPr lang="en-US" dirty="0"/>
+              <a:t>   Select the optimal split</a:t>
+            </a:r>
+          </a:p>
+          <a:p>
+            <a:pPr marL="0" indent="0">
+              <a:buNone/>
+            </a:pPr>
+            <a:r>
+              <a:rPr lang="en-US" dirty="0"/>
+              <a:t>   Create new nodes</a:t>
+            </a:r>
+          </a:p>
+          <a:p>
+            <a:pPr marL="0" indent="0">
+              <a:buNone/>
+            </a:pPr>
+            <a:endParaRPr lang="en-US" dirty="0"/>
+          </a:p>
+          <a:p>
+            <a:pPr marL="0" indent="0">
+              <a:buNone/>
+            </a:pPr>
+            <a:r>
+              <a:rPr lang="en-US" dirty="0">
+                <a:solidFill>
+                  <a:schemeClr val="bg1"/>
+                </a:solidFill>
+              </a:rPr>
+              <a:t>Stopping conditions:</a:t>
+            </a:r>
+          </a:p>
+          <a:p>
+            <a:pPr marL="0" indent="0">
+              <a:buNone/>
+            </a:pPr>
+            <a:r>
+              <a:rPr lang="en-US" dirty="0">
+                <a:solidFill>
+                  <a:schemeClr val="bg1"/>
+                </a:solidFill>
+              </a:rPr>
+              <a:t>   Maximum tree depth</a:t>
+            </a:r>
+          </a:p>
+          <a:p>
+            <a:pPr marL="0" indent="0">
+              <a:buNone/>
+            </a:pPr>
+            <a:r>
+              <a:rPr lang="en-US" dirty="0">
+                <a:solidFill>
+                  <a:schemeClr val="bg1"/>
+                </a:solidFill>
+              </a:rPr>
+              <a:t>   Minimum number of samples per node</a:t>
+            </a:r>
+          </a:p>
+          <a:p>
+            <a:pPr marL="0" indent="0">
+              <a:buNone/>
+            </a:pPr>
+            <a:r>
+              <a:rPr lang="en-US" dirty="0">
+                <a:solidFill>
+                  <a:schemeClr val="bg1"/>
+                </a:solidFill>
+              </a:rPr>
+              <a:t>   No improvement in performance</a:t>
+            </a:r>
+          </a:p>
+          <a:p>
+            <a:pPr marL="0" indent="0">
+              <a:buNone/>
+            </a:pPr>
+            <a:r>
+              <a:rPr lang="en-US" dirty="0">
+                <a:solidFill>
+                  <a:schemeClr val="bg1"/>
+                </a:solidFill>
+              </a:rPr>
+              <a:t>   Node is all one class / value</a:t>
+            </a:r>
+          </a:p>
+          <a:p>
+            <a:pPr marL="0" indent="0">
+              <a:buNone/>
+            </a:pPr>
+            <a:endParaRPr lang="en-US" dirty="0"/>
           </a:p>
         </p:txBody>
       </p:sp>
     </p:spTree>
     <p:extLst>
       <p:ext uri="{BB962C8B-B14F-4D97-AF65-F5344CB8AC3E}">
-        <p14:creationId xmlns:p14="http://schemas.microsoft.com/office/powerpoint/2010/main" val="697061676"/>
+        <p14:creationId xmlns:p14="http://schemas.microsoft.com/office/powerpoint/2010/main" val="1309199006"/>
       </p:ext>
     </p:extLst>
   </p:cSld>
@@ -5224,7 +6279,13 @@
   <p:cSld>
     <p:spTree>
       <p:nvGrpSpPr>
-        <p:cNvPr id="1" name=""/>
+        <p:cNvPr id="1" name="">
+          <a:extLst>
+            <a:ext uri="{FF2B5EF4-FFF2-40B4-BE49-F238E27FC236}">
+              <a16:creationId xmlns:a16="http://schemas.microsoft.com/office/drawing/2014/main" id="{ED87F50D-33CF-D59D-D3F0-1252A736E233}"/>
+            </a:ext>
+          </a:extLst>
+        </p:cNvPr>
         <p:cNvGrpSpPr/>
         <p:nvPr/>
       </p:nvGrpSpPr>
@@ -5241,7 +6302,7 @@
           <p:cNvPr id="2" name="Title 1">
             <a:extLst>
               <a:ext uri="{FF2B5EF4-FFF2-40B4-BE49-F238E27FC236}">
-                <a16:creationId xmlns:a16="http://schemas.microsoft.com/office/drawing/2014/main" id="{4275B0B8-D711-CAEB-FE86-2D7A6102056A}"/>
+                <a16:creationId xmlns:a16="http://schemas.microsoft.com/office/drawing/2014/main" id="{F9B40696-A699-5D81-5F7A-3ACE26834FCB}"/>
               </a:ext>
             </a:extLst>
           </p:cNvPr>
@@ -5259,17 +6320,427 @@
           <a:p>
             <a:r>
               <a:rPr lang="en-US" dirty="0"/>
-              <a:t>Model performance metrics - classification</a:t>
-            </a:r>
-          </a:p>
-        </p:txBody>
-      </p:sp>
-      <p:sp>
-        <p:nvSpPr>
-          <p:cNvPr id="3" name="Content Placeholder 2">
-            <a:extLst>
-              <a:ext uri="{FF2B5EF4-FFF2-40B4-BE49-F238E27FC236}">
-                <a16:creationId xmlns:a16="http://schemas.microsoft.com/office/drawing/2014/main" id="{2F531D8D-36CE-D3D9-865F-879E6E664BB7}"/>
+              <a:t>Classification and Regression Trees (CART)</a:t>
+            </a:r>
+          </a:p>
+        </p:txBody>
+      </p:sp>
+      <p:grpSp>
+        <p:nvGrpSpPr>
+          <p:cNvPr id="29" name="Group 28">
+            <a:extLst>
+              <a:ext uri="{FF2B5EF4-FFF2-40B4-BE49-F238E27FC236}">
+                <a16:creationId xmlns:a16="http://schemas.microsoft.com/office/drawing/2014/main" id="{AAE0B02B-D8A8-3118-B088-9C0D87DA76F6}"/>
+              </a:ext>
+            </a:extLst>
+          </p:cNvPr>
+          <p:cNvGrpSpPr/>
+          <p:nvPr/>
+        </p:nvGrpSpPr>
+        <p:grpSpPr>
+          <a:xfrm>
+            <a:off x="6564223" y="2369713"/>
+            <a:ext cx="4179418" cy="2736153"/>
+            <a:chOff x="253576" y="2125014"/>
+            <a:chExt cx="4179418" cy="2736153"/>
+          </a:xfrm>
+        </p:grpSpPr>
+        <p:sp>
+          <p:nvSpPr>
+            <p:cNvPr id="6" name="Oval 5">
+              <a:extLst>
+                <a:ext uri="{FF2B5EF4-FFF2-40B4-BE49-F238E27FC236}">
+                  <a16:creationId xmlns:a16="http://schemas.microsoft.com/office/drawing/2014/main" id="{0179F5FB-34BA-4F35-AF02-B8EF9E3EB458}"/>
+                </a:ext>
+              </a:extLst>
+            </p:cNvPr>
+            <p:cNvSpPr/>
+            <p:nvPr/>
+          </p:nvSpPr>
+          <p:spPr>
+            <a:xfrm>
+              <a:off x="2410784" y="2125014"/>
+              <a:ext cx="821813" cy="819337"/>
+            </a:xfrm>
+            <a:prstGeom prst="ellipse">
+              <a:avLst/>
+            </a:prstGeom>
+          </p:spPr>
+          <p:style>
+            <a:lnRef idx="2">
+              <a:schemeClr val="accent1">
+                <a:shade val="15000"/>
+              </a:schemeClr>
+            </a:lnRef>
+            <a:fillRef idx="1">
+              <a:schemeClr val="accent1"/>
+            </a:fillRef>
+            <a:effectRef idx="0">
+              <a:schemeClr val="accent1"/>
+            </a:effectRef>
+            <a:fontRef idx="minor">
+              <a:schemeClr val="lt1"/>
+            </a:fontRef>
+          </p:style>
+          <p:txBody>
+            <a:bodyPr rtlCol="0" anchor="ctr"/>
+            <a:lstStyle/>
+            <a:p>
+              <a:pPr algn="ctr"/>
+              <a:endParaRPr lang="en-US"/>
+            </a:p>
+          </p:txBody>
+        </p:sp>
+        <p:sp>
+          <p:nvSpPr>
+            <p:cNvPr id="7" name="Oval 6">
+              <a:extLst>
+                <a:ext uri="{FF2B5EF4-FFF2-40B4-BE49-F238E27FC236}">
+                  <a16:creationId xmlns:a16="http://schemas.microsoft.com/office/drawing/2014/main" id="{DB1059F1-22AC-122D-648A-F6A7A4450DB0}"/>
+                </a:ext>
+              </a:extLst>
+            </p:cNvPr>
+            <p:cNvSpPr/>
+            <p:nvPr/>
+          </p:nvSpPr>
+          <p:spPr>
+            <a:xfrm>
+              <a:off x="1291291" y="3034954"/>
+              <a:ext cx="821813" cy="819337"/>
+            </a:xfrm>
+            <a:prstGeom prst="ellipse">
+              <a:avLst/>
+            </a:prstGeom>
+          </p:spPr>
+          <p:style>
+            <a:lnRef idx="2">
+              <a:schemeClr val="accent1">
+                <a:shade val="15000"/>
+              </a:schemeClr>
+            </a:lnRef>
+            <a:fillRef idx="1">
+              <a:schemeClr val="accent1"/>
+            </a:fillRef>
+            <a:effectRef idx="0">
+              <a:schemeClr val="accent1"/>
+            </a:effectRef>
+            <a:fontRef idx="minor">
+              <a:schemeClr val="lt1"/>
+            </a:fontRef>
+          </p:style>
+          <p:txBody>
+            <a:bodyPr rtlCol="0" anchor="ctr"/>
+            <a:lstStyle/>
+            <a:p>
+              <a:pPr algn="ctr"/>
+              <a:endParaRPr lang="en-US"/>
+            </a:p>
+          </p:txBody>
+        </p:sp>
+        <p:sp>
+          <p:nvSpPr>
+            <p:cNvPr id="8" name="Oval 7">
+              <a:extLst>
+                <a:ext uri="{FF2B5EF4-FFF2-40B4-BE49-F238E27FC236}">
+                  <a16:creationId xmlns:a16="http://schemas.microsoft.com/office/drawing/2014/main" id="{9BCFD99D-0A51-0890-5CA3-63215896C96C}"/>
+                </a:ext>
+              </a:extLst>
+            </p:cNvPr>
+            <p:cNvSpPr/>
+            <p:nvPr/>
+          </p:nvSpPr>
+          <p:spPr>
+            <a:xfrm>
+              <a:off x="3611181" y="3323259"/>
+              <a:ext cx="821813" cy="819337"/>
+            </a:xfrm>
+            <a:prstGeom prst="ellipse">
+              <a:avLst/>
+            </a:prstGeom>
+          </p:spPr>
+          <p:style>
+            <a:lnRef idx="2">
+              <a:schemeClr val="accent1">
+                <a:shade val="15000"/>
+              </a:schemeClr>
+            </a:lnRef>
+            <a:fillRef idx="1">
+              <a:schemeClr val="accent1"/>
+            </a:fillRef>
+            <a:effectRef idx="0">
+              <a:schemeClr val="accent1"/>
+            </a:effectRef>
+            <a:fontRef idx="minor">
+              <a:schemeClr val="lt1"/>
+            </a:fontRef>
+          </p:style>
+          <p:txBody>
+            <a:bodyPr rtlCol="0" anchor="ctr"/>
+            <a:lstStyle/>
+            <a:p>
+              <a:pPr algn="ctr"/>
+              <a:endParaRPr lang="en-US"/>
+            </a:p>
+          </p:txBody>
+        </p:sp>
+        <p:sp>
+          <p:nvSpPr>
+            <p:cNvPr id="9" name="Oval 8">
+              <a:extLst>
+                <a:ext uri="{FF2B5EF4-FFF2-40B4-BE49-F238E27FC236}">
+                  <a16:creationId xmlns:a16="http://schemas.microsoft.com/office/drawing/2014/main" id="{DABE6E76-0280-4999-B235-6F796BB09639}"/>
+                </a:ext>
+              </a:extLst>
+            </p:cNvPr>
+            <p:cNvSpPr/>
+            <p:nvPr/>
+          </p:nvSpPr>
+          <p:spPr>
+            <a:xfrm>
+              <a:off x="253576" y="4041829"/>
+              <a:ext cx="821813" cy="819337"/>
+            </a:xfrm>
+            <a:prstGeom prst="ellipse">
+              <a:avLst/>
+            </a:prstGeom>
+          </p:spPr>
+          <p:style>
+            <a:lnRef idx="2">
+              <a:schemeClr val="accent1">
+                <a:shade val="15000"/>
+              </a:schemeClr>
+            </a:lnRef>
+            <a:fillRef idx="1">
+              <a:schemeClr val="accent1"/>
+            </a:fillRef>
+            <a:effectRef idx="0">
+              <a:schemeClr val="accent1"/>
+            </a:effectRef>
+            <a:fontRef idx="minor">
+              <a:schemeClr val="lt1"/>
+            </a:fontRef>
+          </p:style>
+          <p:txBody>
+            <a:bodyPr rtlCol="0" anchor="ctr"/>
+            <a:lstStyle/>
+            <a:p>
+              <a:pPr algn="ctr"/>
+              <a:endParaRPr lang="en-US"/>
+            </a:p>
+          </p:txBody>
+        </p:sp>
+        <p:sp>
+          <p:nvSpPr>
+            <p:cNvPr id="10" name="Oval 9">
+              <a:extLst>
+                <a:ext uri="{FF2B5EF4-FFF2-40B4-BE49-F238E27FC236}">
+                  <a16:creationId xmlns:a16="http://schemas.microsoft.com/office/drawing/2014/main" id="{13112CB4-B0CC-7DC6-F76A-B4AF4BC836CB}"/>
+                </a:ext>
+              </a:extLst>
+            </p:cNvPr>
+            <p:cNvSpPr/>
+            <p:nvPr/>
+          </p:nvSpPr>
+          <p:spPr>
+            <a:xfrm>
+              <a:off x="2296413" y="4041830"/>
+              <a:ext cx="821813" cy="819337"/>
+            </a:xfrm>
+            <a:prstGeom prst="ellipse">
+              <a:avLst/>
+            </a:prstGeom>
+          </p:spPr>
+          <p:style>
+            <a:lnRef idx="2">
+              <a:schemeClr val="accent1">
+                <a:shade val="15000"/>
+              </a:schemeClr>
+            </a:lnRef>
+            <a:fillRef idx="1">
+              <a:schemeClr val="accent1"/>
+            </a:fillRef>
+            <a:effectRef idx="0">
+              <a:schemeClr val="accent1"/>
+            </a:effectRef>
+            <a:fontRef idx="minor">
+              <a:schemeClr val="lt1"/>
+            </a:fontRef>
+          </p:style>
+          <p:txBody>
+            <a:bodyPr rtlCol="0" anchor="ctr"/>
+            <a:lstStyle/>
+            <a:p>
+              <a:pPr algn="ctr"/>
+              <a:endParaRPr lang="en-US"/>
+            </a:p>
+          </p:txBody>
+        </p:sp>
+        <p:cxnSp>
+          <p:nvCxnSpPr>
+            <p:cNvPr id="11" name="Straight Connector 10">
+              <a:extLst>
+                <a:ext uri="{FF2B5EF4-FFF2-40B4-BE49-F238E27FC236}">
+                  <a16:creationId xmlns:a16="http://schemas.microsoft.com/office/drawing/2014/main" id="{18D75A48-53A9-966E-EBA4-B7877B566385}"/>
+                </a:ext>
+              </a:extLst>
+            </p:cNvPr>
+            <p:cNvCxnSpPr>
+              <a:stCxn id="6" idx="5"/>
+              <a:endCxn id="8" idx="1"/>
+            </p:cNvCxnSpPr>
+            <p:nvPr/>
+          </p:nvCxnSpPr>
+          <p:spPr>
+            <a:xfrm>
+              <a:off x="3112245" y="2824362"/>
+              <a:ext cx="619288" cy="618886"/>
+            </a:xfrm>
+            <a:prstGeom prst="line">
+              <a:avLst/>
+            </a:prstGeom>
+          </p:spPr>
+          <p:style>
+            <a:lnRef idx="2">
+              <a:schemeClr val="accent1"/>
+            </a:lnRef>
+            <a:fillRef idx="0">
+              <a:schemeClr val="accent1"/>
+            </a:fillRef>
+            <a:effectRef idx="1">
+              <a:schemeClr val="accent1"/>
+            </a:effectRef>
+            <a:fontRef idx="minor">
+              <a:schemeClr val="tx1"/>
+            </a:fontRef>
+          </p:style>
+        </p:cxnSp>
+        <p:cxnSp>
+          <p:nvCxnSpPr>
+            <p:cNvPr id="12" name="Straight Connector 11">
+              <a:extLst>
+                <a:ext uri="{FF2B5EF4-FFF2-40B4-BE49-F238E27FC236}">
+                  <a16:creationId xmlns:a16="http://schemas.microsoft.com/office/drawing/2014/main" id="{EF01BBC7-EE73-CE20-F9B5-E6429A021D62}"/>
+                </a:ext>
+              </a:extLst>
+            </p:cNvPr>
+            <p:cNvCxnSpPr>
+              <a:cxnSpLocks/>
+              <a:stCxn id="6" idx="3"/>
+              <a:endCxn id="7" idx="7"/>
+            </p:cNvCxnSpPr>
+            <p:nvPr/>
+          </p:nvCxnSpPr>
+          <p:spPr>
+            <a:xfrm flipH="1">
+              <a:off x="1992752" y="2824362"/>
+              <a:ext cx="538384" cy="330581"/>
+            </a:xfrm>
+            <a:prstGeom prst="line">
+              <a:avLst/>
+            </a:prstGeom>
+          </p:spPr>
+          <p:style>
+            <a:lnRef idx="2">
+              <a:schemeClr val="accent1"/>
+            </a:lnRef>
+            <a:fillRef idx="0">
+              <a:schemeClr val="accent1"/>
+            </a:fillRef>
+            <a:effectRef idx="1">
+              <a:schemeClr val="accent1"/>
+            </a:effectRef>
+            <a:fontRef idx="minor">
+              <a:schemeClr val="tx1"/>
+            </a:fontRef>
+          </p:style>
+        </p:cxnSp>
+        <p:cxnSp>
+          <p:nvCxnSpPr>
+            <p:cNvPr id="13" name="Straight Connector 12">
+              <a:extLst>
+                <a:ext uri="{FF2B5EF4-FFF2-40B4-BE49-F238E27FC236}">
+                  <a16:creationId xmlns:a16="http://schemas.microsoft.com/office/drawing/2014/main" id="{89299437-2466-64C5-65BB-59B8436713AB}"/>
+                </a:ext>
+              </a:extLst>
+            </p:cNvPr>
+            <p:cNvCxnSpPr>
+              <a:cxnSpLocks/>
+              <a:stCxn id="7" idx="3"/>
+              <a:endCxn id="9" idx="7"/>
+            </p:cNvCxnSpPr>
+            <p:nvPr/>
+          </p:nvCxnSpPr>
+          <p:spPr>
+            <a:xfrm flipH="1">
+              <a:off x="955037" y="3734302"/>
+              <a:ext cx="456606" cy="427516"/>
+            </a:xfrm>
+            <a:prstGeom prst="line">
+              <a:avLst/>
+            </a:prstGeom>
+          </p:spPr>
+          <p:style>
+            <a:lnRef idx="2">
+              <a:schemeClr val="accent1"/>
+            </a:lnRef>
+            <a:fillRef idx="0">
+              <a:schemeClr val="accent1"/>
+            </a:fillRef>
+            <a:effectRef idx="1">
+              <a:schemeClr val="accent1"/>
+            </a:effectRef>
+            <a:fontRef idx="minor">
+              <a:schemeClr val="tx1"/>
+            </a:fontRef>
+          </p:style>
+        </p:cxnSp>
+        <p:cxnSp>
+          <p:nvCxnSpPr>
+            <p:cNvPr id="14" name="Straight Connector 13">
+              <a:extLst>
+                <a:ext uri="{FF2B5EF4-FFF2-40B4-BE49-F238E27FC236}">
+                  <a16:creationId xmlns:a16="http://schemas.microsoft.com/office/drawing/2014/main" id="{8C0DD1BC-5814-5942-0704-920AC59B1E84}"/>
+                </a:ext>
+              </a:extLst>
+            </p:cNvPr>
+            <p:cNvCxnSpPr>
+              <a:cxnSpLocks/>
+              <a:stCxn id="7" idx="5"/>
+              <a:endCxn id="10" idx="1"/>
+            </p:cNvCxnSpPr>
+            <p:nvPr/>
+          </p:nvCxnSpPr>
+          <p:spPr>
+            <a:xfrm>
+              <a:off x="1992752" y="3734302"/>
+              <a:ext cx="424013" cy="427517"/>
+            </a:xfrm>
+            <a:prstGeom prst="line">
+              <a:avLst/>
+            </a:prstGeom>
+          </p:spPr>
+          <p:style>
+            <a:lnRef idx="2">
+              <a:schemeClr val="accent1"/>
+            </a:lnRef>
+            <a:fillRef idx="0">
+              <a:schemeClr val="accent1"/>
+            </a:fillRef>
+            <a:effectRef idx="1">
+              <a:schemeClr val="accent1"/>
+            </a:effectRef>
+            <a:fontRef idx="minor">
+              <a:schemeClr val="tx1"/>
+            </a:fontRef>
+          </p:style>
+        </p:cxnSp>
+      </p:grpSp>
+      <p:sp>
+        <p:nvSpPr>
+          <p:cNvPr id="31" name="Content Placeholder 2">
+            <a:extLst>
+              <a:ext uri="{FF2B5EF4-FFF2-40B4-BE49-F238E27FC236}">
+                <a16:creationId xmlns:a16="http://schemas.microsoft.com/office/drawing/2014/main" id="{CD3A6942-1B6D-9236-A0D9-218296CFED9B}"/>
               </a:ext>
             </a:extLst>
           </p:cNvPr>
@@ -5280,19 +6751,116 @@
             <p:ph idx="1"/>
           </p:nvPr>
         </p:nvSpPr>
-        <p:spPr/>
-        <p:txBody>
-          <a:bodyPr/>
-          <a:lstStyle/>
-          <a:p>
-            <a:endParaRPr lang="en-US"/>
+        <p:spPr>
+          <a:xfrm>
+            <a:off x="838200" y="1825625"/>
+            <a:ext cx="6427484" cy="4667250"/>
+          </a:xfrm>
+        </p:spPr>
+        <p:txBody>
+          <a:bodyPr>
+            <a:normAutofit fontScale="92500" lnSpcReduction="10000"/>
+          </a:bodyPr>
+          <a:lstStyle/>
+          <a:p>
+            <a:pPr marL="0" indent="0">
+              <a:buNone/>
+            </a:pPr>
+            <a:r>
+              <a:rPr lang="en-US" dirty="0"/>
+              <a:t>Until a stopping condition is met</a:t>
+            </a:r>
+          </a:p>
+          <a:p>
+            <a:pPr marL="0" indent="0">
+              <a:buNone/>
+            </a:pPr>
+            <a:r>
+              <a:rPr lang="en-US" dirty="0"/>
+              <a:t>   Evaluate best split for each predictor</a:t>
+            </a:r>
+          </a:p>
+          <a:p>
+            <a:pPr marL="0" indent="0">
+              <a:buNone/>
+            </a:pPr>
+            <a:r>
+              <a:rPr lang="en-US" dirty="0"/>
+              <a:t>   Select the optimal split</a:t>
+            </a:r>
+          </a:p>
+          <a:p>
+            <a:pPr marL="0" indent="0">
+              <a:buNone/>
+            </a:pPr>
+            <a:r>
+              <a:rPr lang="en-US" dirty="0"/>
+              <a:t>   Create new nodes</a:t>
+            </a:r>
+          </a:p>
+          <a:p>
+            <a:pPr marL="0" indent="0">
+              <a:buNone/>
+            </a:pPr>
+            <a:endParaRPr lang="en-US" dirty="0"/>
+          </a:p>
+          <a:p>
+            <a:pPr marL="0" indent="0">
+              <a:buNone/>
+            </a:pPr>
+            <a:r>
+              <a:rPr lang="en-US" dirty="0"/>
+              <a:t>Stopping conditions:</a:t>
+            </a:r>
+          </a:p>
+          <a:p>
+            <a:pPr marL="0" indent="0">
+              <a:buNone/>
+            </a:pPr>
+            <a:r>
+              <a:rPr lang="en-US" dirty="0"/>
+              <a:t>   Maximum tree depth</a:t>
+            </a:r>
+          </a:p>
+          <a:p>
+            <a:pPr marL="0" indent="0">
+              <a:buNone/>
+            </a:pPr>
+            <a:r>
+              <a:rPr lang="en-US" dirty="0"/>
+              <a:t>   Minimum number of samples per node</a:t>
+            </a:r>
+          </a:p>
+          <a:p>
+            <a:pPr marL="0" indent="0">
+              <a:buNone/>
+            </a:pPr>
+            <a:r>
+              <a:rPr lang="en-US" dirty="0"/>
+              <a:t>   No improvement in performance</a:t>
+            </a:r>
+          </a:p>
+          <a:p>
+            <a:pPr marL="0" indent="0">
+              <a:buNone/>
+            </a:pPr>
+            <a:r>
+              <a:rPr lang="en-US" dirty="0"/>
+              <a:t>   Node is all one class / value</a:t>
+            </a:r>
+          </a:p>
+          <a:p>
+            <a:pPr marL="0" indent="0">
+              <a:buNone/>
+            </a:pPr>
+            <a:endParaRPr lang="en-US" dirty="0"/>
           </a:p>
         </p:txBody>
       </p:sp>
     </p:spTree>
     <p:extLst>
       <p:ext uri="{BB962C8B-B14F-4D97-AF65-F5344CB8AC3E}">
-        <p14:creationId xmlns:p14="http://schemas.microsoft.com/office/powerpoint/2010/main" val="1939471003"/>
+        <p14:creationId xmlns:p14="http://schemas.microsoft.com/office/powerpoint/2010/main" val="2924114535"/>
       </p:ext>
     </p:extLst>
   </p:cSld>
@@ -5307,7 +6875,13 @@
   <p:cSld>
     <p:spTree>
       <p:nvGrpSpPr>
-        <p:cNvPr id="1" name=""/>
+        <p:cNvPr id="1" name="">
+          <a:extLst>
+            <a:ext uri="{FF2B5EF4-FFF2-40B4-BE49-F238E27FC236}">
+              <a16:creationId xmlns:a16="http://schemas.microsoft.com/office/drawing/2014/main" id="{6407B431-1B11-42AE-FE0D-022037EEB6AF}"/>
+            </a:ext>
+          </a:extLst>
+        </p:cNvPr>
         <p:cNvGrpSpPr/>
         <p:nvPr/>
       </p:nvGrpSpPr>
@@ -5324,7 +6898,7 @@
           <p:cNvPr id="2" name="Title 1">
             <a:extLst>
               <a:ext uri="{FF2B5EF4-FFF2-40B4-BE49-F238E27FC236}">
-                <a16:creationId xmlns:a16="http://schemas.microsoft.com/office/drawing/2014/main" id="{7A6F9C5C-39AB-B9C9-E471-2303A9FC396D}"/>
+                <a16:creationId xmlns:a16="http://schemas.microsoft.com/office/drawing/2014/main" id="{DAE43BF0-B502-3BA9-3C6D-93C872935E06}"/>
               </a:ext>
             </a:extLst>
           </p:cNvPr>
@@ -5342,17 +6916,427 @@
           <a:p>
             <a:r>
               <a:rPr lang="en-US" dirty="0"/>
-              <a:t>Model performance metrics - regression</a:t>
-            </a:r>
-          </a:p>
-        </p:txBody>
-      </p:sp>
-      <p:sp>
-        <p:nvSpPr>
-          <p:cNvPr id="3" name="Content Placeholder 2">
-            <a:extLst>
-              <a:ext uri="{FF2B5EF4-FFF2-40B4-BE49-F238E27FC236}">
-                <a16:creationId xmlns:a16="http://schemas.microsoft.com/office/drawing/2014/main" id="{5F5DD50A-DB67-C2B7-4EDC-A5B5745F4E78}"/>
+              <a:t>Classification and Regression Trees (CART)</a:t>
+            </a:r>
+          </a:p>
+        </p:txBody>
+      </p:sp>
+      <p:grpSp>
+        <p:nvGrpSpPr>
+          <p:cNvPr id="29" name="Group 28">
+            <a:extLst>
+              <a:ext uri="{FF2B5EF4-FFF2-40B4-BE49-F238E27FC236}">
+                <a16:creationId xmlns:a16="http://schemas.microsoft.com/office/drawing/2014/main" id="{DA12920A-176B-BA96-F4CD-E196FCA8B30A}"/>
+              </a:ext>
+            </a:extLst>
+          </p:cNvPr>
+          <p:cNvGrpSpPr/>
+          <p:nvPr/>
+        </p:nvGrpSpPr>
+        <p:grpSpPr>
+          <a:xfrm>
+            <a:off x="6564223" y="2369713"/>
+            <a:ext cx="4179418" cy="2736153"/>
+            <a:chOff x="253576" y="2125014"/>
+            <a:chExt cx="4179418" cy="2736153"/>
+          </a:xfrm>
+        </p:grpSpPr>
+        <p:sp>
+          <p:nvSpPr>
+            <p:cNvPr id="6" name="Oval 5">
+              <a:extLst>
+                <a:ext uri="{FF2B5EF4-FFF2-40B4-BE49-F238E27FC236}">
+                  <a16:creationId xmlns:a16="http://schemas.microsoft.com/office/drawing/2014/main" id="{24E0F771-71F6-3955-9472-15E0BE3ADF03}"/>
+                </a:ext>
+              </a:extLst>
+            </p:cNvPr>
+            <p:cNvSpPr/>
+            <p:nvPr/>
+          </p:nvSpPr>
+          <p:spPr>
+            <a:xfrm>
+              <a:off x="2410784" y="2125014"/>
+              <a:ext cx="821813" cy="819337"/>
+            </a:xfrm>
+            <a:prstGeom prst="ellipse">
+              <a:avLst/>
+            </a:prstGeom>
+          </p:spPr>
+          <p:style>
+            <a:lnRef idx="2">
+              <a:schemeClr val="accent1">
+                <a:shade val="15000"/>
+              </a:schemeClr>
+            </a:lnRef>
+            <a:fillRef idx="1">
+              <a:schemeClr val="accent1"/>
+            </a:fillRef>
+            <a:effectRef idx="0">
+              <a:schemeClr val="accent1"/>
+            </a:effectRef>
+            <a:fontRef idx="minor">
+              <a:schemeClr val="lt1"/>
+            </a:fontRef>
+          </p:style>
+          <p:txBody>
+            <a:bodyPr rtlCol="0" anchor="ctr"/>
+            <a:lstStyle/>
+            <a:p>
+              <a:pPr algn="ctr"/>
+              <a:endParaRPr lang="en-US"/>
+            </a:p>
+          </p:txBody>
+        </p:sp>
+        <p:sp>
+          <p:nvSpPr>
+            <p:cNvPr id="7" name="Oval 6">
+              <a:extLst>
+                <a:ext uri="{FF2B5EF4-FFF2-40B4-BE49-F238E27FC236}">
+                  <a16:creationId xmlns:a16="http://schemas.microsoft.com/office/drawing/2014/main" id="{3C358CAB-C8D8-7FC4-C6EF-BE3EB026D3FA}"/>
+                </a:ext>
+              </a:extLst>
+            </p:cNvPr>
+            <p:cNvSpPr/>
+            <p:nvPr/>
+          </p:nvSpPr>
+          <p:spPr>
+            <a:xfrm>
+              <a:off x="1291291" y="3034954"/>
+              <a:ext cx="821813" cy="819337"/>
+            </a:xfrm>
+            <a:prstGeom prst="ellipse">
+              <a:avLst/>
+            </a:prstGeom>
+          </p:spPr>
+          <p:style>
+            <a:lnRef idx="2">
+              <a:schemeClr val="accent1">
+                <a:shade val="15000"/>
+              </a:schemeClr>
+            </a:lnRef>
+            <a:fillRef idx="1">
+              <a:schemeClr val="accent1"/>
+            </a:fillRef>
+            <a:effectRef idx="0">
+              <a:schemeClr val="accent1"/>
+            </a:effectRef>
+            <a:fontRef idx="minor">
+              <a:schemeClr val="lt1"/>
+            </a:fontRef>
+          </p:style>
+          <p:txBody>
+            <a:bodyPr rtlCol="0" anchor="ctr"/>
+            <a:lstStyle/>
+            <a:p>
+              <a:pPr algn="ctr"/>
+              <a:endParaRPr lang="en-US"/>
+            </a:p>
+          </p:txBody>
+        </p:sp>
+        <p:sp>
+          <p:nvSpPr>
+            <p:cNvPr id="8" name="Oval 7">
+              <a:extLst>
+                <a:ext uri="{FF2B5EF4-FFF2-40B4-BE49-F238E27FC236}">
+                  <a16:creationId xmlns:a16="http://schemas.microsoft.com/office/drawing/2014/main" id="{01233729-E0CB-8349-BDE8-2D53A48AFF1D}"/>
+                </a:ext>
+              </a:extLst>
+            </p:cNvPr>
+            <p:cNvSpPr/>
+            <p:nvPr/>
+          </p:nvSpPr>
+          <p:spPr>
+            <a:xfrm>
+              <a:off x="3611181" y="3323259"/>
+              <a:ext cx="821813" cy="819337"/>
+            </a:xfrm>
+            <a:prstGeom prst="ellipse">
+              <a:avLst/>
+            </a:prstGeom>
+          </p:spPr>
+          <p:style>
+            <a:lnRef idx="2">
+              <a:schemeClr val="accent1">
+                <a:shade val="15000"/>
+              </a:schemeClr>
+            </a:lnRef>
+            <a:fillRef idx="1">
+              <a:schemeClr val="accent1"/>
+            </a:fillRef>
+            <a:effectRef idx="0">
+              <a:schemeClr val="accent1"/>
+            </a:effectRef>
+            <a:fontRef idx="minor">
+              <a:schemeClr val="lt1"/>
+            </a:fontRef>
+          </p:style>
+          <p:txBody>
+            <a:bodyPr rtlCol="0" anchor="ctr"/>
+            <a:lstStyle/>
+            <a:p>
+              <a:pPr algn="ctr"/>
+              <a:endParaRPr lang="en-US"/>
+            </a:p>
+          </p:txBody>
+        </p:sp>
+        <p:sp>
+          <p:nvSpPr>
+            <p:cNvPr id="9" name="Oval 8">
+              <a:extLst>
+                <a:ext uri="{FF2B5EF4-FFF2-40B4-BE49-F238E27FC236}">
+                  <a16:creationId xmlns:a16="http://schemas.microsoft.com/office/drawing/2014/main" id="{075FEAD8-B180-2410-D61C-74541263A6BE}"/>
+                </a:ext>
+              </a:extLst>
+            </p:cNvPr>
+            <p:cNvSpPr/>
+            <p:nvPr/>
+          </p:nvSpPr>
+          <p:spPr>
+            <a:xfrm>
+              <a:off x="253576" y="4041829"/>
+              <a:ext cx="821813" cy="819337"/>
+            </a:xfrm>
+            <a:prstGeom prst="ellipse">
+              <a:avLst/>
+            </a:prstGeom>
+          </p:spPr>
+          <p:style>
+            <a:lnRef idx="2">
+              <a:schemeClr val="accent1">
+                <a:shade val="15000"/>
+              </a:schemeClr>
+            </a:lnRef>
+            <a:fillRef idx="1">
+              <a:schemeClr val="accent1"/>
+            </a:fillRef>
+            <a:effectRef idx="0">
+              <a:schemeClr val="accent1"/>
+            </a:effectRef>
+            <a:fontRef idx="minor">
+              <a:schemeClr val="lt1"/>
+            </a:fontRef>
+          </p:style>
+          <p:txBody>
+            <a:bodyPr rtlCol="0" anchor="ctr"/>
+            <a:lstStyle/>
+            <a:p>
+              <a:pPr algn="ctr"/>
+              <a:endParaRPr lang="en-US"/>
+            </a:p>
+          </p:txBody>
+        </p:sp>
+        <p:sp>
+          <p:nvSpPr>
+            <p:cNvPr id="10" name="Oval 9">
+              <a:extLst>
+                <a:ext uri="{FF2B5EF4-FFF2-40B4-BE49-F238E27FC236}">
+                  <a16:creationId xmlns:a16="http://schemas.microsoft.com/office/drawing/2014/main" id="{2DD74D86-5911-216D-43A6-C68DA5F01940}"/>
+                </a:ext>
+              </a:extLst>
+            </p:cNvPr>
+            <p:cNvSpPr/>
+            <p:nvPr/>
+          </p:nvSpPr>
+          <p:spPr>
+            <a:xfrm>
+              <a:off x="2296413" y="4041830"/>
+              <a:ext cx="821813" cy="819337"/>
+            </a:xfrm>
+            <a:prstGeom prst="ellipse">
+              <a:avLst/>
+            </a:prstGeom>
+          </p:spPr>
+          <p:style>
+            <a:lnRef idx="2">
+              <a:schemeClr val="accent1">
+                <a:shade val="15000"/>
+              </a:schemeClr>
+            </a:lnRef>
+            <a:fillRef idx="1">
+              <a:schemeClr val="accent1"/>
+            </a:fillRef>
+            <a:effectRef idx="0">
+              <a:schemeClr val="accent1"/>
+            </a:effectRef>
+            <a:fontRef idx="minor">
+              <a:schemeClr val="lt1"/>
+            </a:fontRef>
+          </p:style>
+          <p:txBody>
+            <a:bodyPr rtlCol="0" anchor="ctr"/>
+            <a:lstStyle/>
+            <a:p>
+              <a:pPr algn="ctr"/>
+              <a:endParaRPr lang="en-US"/>
+            </a:p>
+          </p:txBody>
+        </p:sp>
+        <p:cxnSp>
+          <p:nvCxnSpPr>
+            <p:cNvPr id="11" name="Straight Connector 10">
+              <a:extLst>
+                <a:ext uri="{FF2B5EF4-FFF2-40B4-BE49-F238E27FC236}">
+                  <a16:creationId xmlns:a16="http://schemas.microsoft.com/office/drawing/2014/main" id="{412B1550-5C53-A34A-A35F-3E94461333E5}"/>
+                </a:ext>
+              </a:extLst>
+            </p:cNvPr>
+            <p:cNvCxnSpPr>
+              <a:stCxn id="6" idx="5"/>
+              <a:endCxn id="8" idx="1"/>
+            </p:cNvCxnSpPr>
+            <p:nvPr/>
+          </p:nvCxnSpPr>
+          <p:spPr>
+            <a:xfrm>
+              <a:off x="3112245" y="2824362"/>
+              <a:ext cx="619288" cy="618886"/>
+            </a:xfrm>
+            <a:prstGeom prst="line">
+              <a:avLst/>
+            </a:prstGeom>
+          </p:spPr>
+          <p:style>
+            <a:lnRef idx="2">
+              <a:schemeClr val="accent1"/>
+            </a:lnRef>
+            <a:fillRef idx="0">
+              <a:schemeClr val="accent1"/>
+            </a:fillRef>
+            <a:effectRef idx="1">
+              <a:schemeClr val="accent1"/>
+            </a:effectRef>
+            <a:fontRef idx="minor">
+              <a:schemeClr val="tx1"/>
+            </a:fontRef>
+          </p:style>
+        </p:cxnSp>
+        <p:cxnSp>
+          <p:nvCxnSpPr>
+            <p:cNvPr id="12" name="Straight Connector 11">
+              <a:extLst>
+                <a:ext uri="{FF2B5EF4-FFF2-40B4-BE49-F238E27FC236}">
+                  <a16:creationId xmlns:a16="http://schemas.microsoft.com/office/drawing/2014/main" id="{946E4D7C-E91E-7545-188C-FD0731F6B7BB}"/>
+                </a:ext>
+              </a:extLst>
+            </p:cNvPr>
+            <p:cNvCxnSpPr>
+              <a:cxnSpLocks/>
+              <a:stCxn id="6" idx="3"/>
+              <a:endCxn id="7" idx="7"/>
+            </p:cNvCxnSpPr>
+            <p:nvPr/>
+          </p:nvCxnSpPr>
+          <p:spPr>
+            <a:xfrm flipH="1">
+              <a:off x="1992752" y="2824362"/>
+              <a:ext cx="538384" cy="330581"/>
+            </a:xfrm>
+            <a:prstGeom prst="line">
+              <a:avLst/>
+            </a:prstGeom>
+          </p:spPr>
+          <p:style>
+            <a:lnRef idx="2">
+              <a:schemeClr val="accent1"/>
+            </a:lnRef>
+            <a:fillRef idx="0">
+              <a:schemeClr val="accent1"/>
+            </a:fillRef>
+            <a:effectRef idx="1">
+              <a:schemeClr val="accent1"/>
+            </a:effectRef>
+            <a:fontRef idx="minor">
+              <a:schemeClr val="tx1"/>
+            </a:fontRef>
+          </p:style>
+        </p:cxnSp>
+        <p:cxnSp>
+          <p:nvCxnSpPr>
+            <p:cNvPr id="13" name="Straight Connector 12">
+              <a:extLst>
+                <a:ext uri="{FF2B5EF4-FFF2-40B4-BE49-F238E27FC236}">
+                  <a16:creationId xmlns:a16="http://schemas.microsoft.com/office/drawing/2014/main" id="{8BFC7E7E-07B7-2056-BD1A-23BB843CE6A7}"/>
+                </a:ext>
+              </a:extLst>
+            </p:cNvPr>
+            <p:cNvCxnSpPr>
+              <a:cxnSpLocks/>
+              <a:stCxn id="7" idx="3"/>
+              <a:endCxn id="9" idx="7"/>
+            </p:cNvCxnSpPr>
+            <p:nvPr/>
+          </p:nvCxnSpPr>
+          <p:spPr>
+            <a:xfrm flipH="1">
+              <a:off x="955037" y="3734302"/>
+              <a:ext cx="456606" cy="427516"/>
+            </a:xfrm>
+            <a:prstGeom prst="line">
+              <a:avLst/>
+            </a:prstGeom>
+          </p:spPr>
+          <p:style>
+            <a:lnRef idx="2">
+              <a:schemeClr val="accent1"/>
+            </a:lnRef>
+            <a:fillRef idx="0">
+              <a:schemeClr val="accent1"/>
+            </a:fillRef>
+            <a:effectRef idx="1">
+              <a:schemeClr val="accent1"/>
+            </a:effectRef>
+            <a:fontRef idx="minor">
+              <a:schemeClr val="tx1"/>
+            </a:fontRef>
+          </p:style>
+        </p:cxnSp>
+        <p:cxnSp>
+          <p:nvCxnSpPr>
+            <p:cNvPr id="14" name="Straight Connector 13">
+              <a:extLst>
+                <a:ext uri="{FF2B5EF4-FFF2-40B4-BE49-F238E27FC236}">
+                  <a16:creationId xmlns:a16="http://schemas.microsoft.com/office/drawing/2014/main" id="{41AB2E65-1444-C23F-D49F-BA07D1A985DE}"/>
+                </a:ext>
+              </a:extLst>
+            </p:cNvPr>
+            <p:cNvCxnSpPr>
+              <a:cxnSpLocks/>
+              <a:stCxn id="7" idx="5"/>
+              <a:endCxn id="10" idx="1"/>
+            </p:cNvCxnSpPr>
+            <p:nvPr/>
+          </p:nvCxnSpPr>
+          <p:spPr>
+            <a:xfrm>
+              <a:off x="1992752" y="3734302"/>
+              <a:ext cx="424013" cy="427517"/>
+            </a:xfrm>
+            <a:prstGeom prst="line">
+              <a:avLst/>
+            </a:prstGeom>
+          </p:spPr>
+          <p:style>
+            <a:lnRef idx="2">
+              <a:schemeClr val="accent1"/>
+            </a:lnRef>
+            <a:fillRef idx="0">
+              <a:schemeClr val="accent1"/>
+            </a:fillRef>
+            <a:effectRef idx="1">
+              <a:schemeClr val="accent1"/>
+            </a:effectRef>
+            <a:fontRef idx="minor">
+              <a:schemeClr val="tx1"/>
+            </a:fontRef>
+          </p:style>
+        </p:cxnSp>
+      </p:grpSp>
+      <p:sp>
+        <p:nvSpPr>
+          <p:cNvPr id="31" name="Content Placeholder 2">
+            <a:extLst>
+              <a:ext uri="{FF2B5EF4-FFF2-40B4-BE49-F238E27FC236}">
+                <a16:creationId xmlns:a16="http://schemas.microsoft.com/office/drawing/2014/main" id="{95846E5C-ED90-F17F-C274-F07FCFFE3117}"/>
               </a:ext>
             </a:extLst>
           </p:cNvPr>
@@ -5363,78 +7347,328 @@
             <p:ph idx="1"/>
           </p:nvPr>
         </p:nvSpPr>
-        <p:spPr/>
+        <p:spPr>
+          <a:xfrm>
+            <a:off x="838200" y="1825625"/>
+            <a:ext cx="7181770" cy="4667250"/>
+          </a:xfrm>
+        </p:spPr>
         <p:txBody>
           <a:bodyPr>
-            <a:normAutofit lnSpcReduction="10000"/>
+            <a:normAutofit/>
           </a:bodyPr>
           <a:lstStyle/>
           <a:p>
+            <a:pPr marL="0" indent="0">
+              <a:buNone/>
+            </a:pPr>
             <a:r>
               <a:rPr lang="en-US" dirty="0"/>
-              <a:t>INSERT figure that shows observed vs predicted with some variability, to kick off the slide of how we measure the accuracy of the predictions</a:t>
-            </a:r>
-          </a:p>
-          <a:p>
+              <a:t>Example:</a:t>
+            </a:r>
+          </a:p>
+          <a:p>
+            <a:pPr marL="0" indent="0">
+              <a:buNone/>
+            </a:pPr>
             <a:r>
               <a:rPr lang="en-US" dirty="0"/>
-              <a:t>RMSE is very common, many others</a:t>
-            </a:r>
-          </a:p>
-          <a:p>
-            <a:pPr marL="0" indent="0">
-              <a:buNone/>
-            </a:pPr>
-            <a:endParaRPr lang="en-US" dirty="0"/>
-          </a:p>
-          <a:p>
-            <a:pPr marL="0" indent="0">
-              <a:buNone/>
-            </a:pPr>
-            <a:r>
-              <a:rPr lang="en-US" dirty="0"/>
-              <a:t>$$ RMSE = \sqrt{ \frac{\sum (observed - predicted)^2 }{n} } $$</a:t>
-            </a:r>
-          </a:p>
-          <a:p>
-            <a:pPr marL="0" indent="0">
-              <a:buNone/>
-            </a:pPr>
-            <a:endParaRPr lang="en-US" dirty="0"/>
-          </a:p>
-          <a:p>
-            <a:pPr marL="0" indent="0">
-              <a:buNone/>
-            </a:pPr>
-            <a:r>
-              <a:rPr lang="en-US" dirty="0"/>
-              <a:t>It's related to $R^2$: $$ R^2 = 1 - \frac{RMSE^2}{Var(y)}$$</a:t>
-            </a:r>
-          </a:p>
-          <a:p>
-            <a:pPr marL="0" indent="0">
-              <a:buNone/>
-            </a:pPr>
-            <a:r>
-              <a:rPr lang="en-US" dirty="0"/>
-              <a:t>Typically, $R^2$ is calculated on **training data**, and $RMSE$ is calculated on a **test set**.</a:t>
-            </a:r>
-          </a:p>
-          <a:p>
-            <a:pPr marL="0" indent="0">
-              <a:buNone/>
-            </a:pPr>
-            <a:endParaRPr lang="en-US" dirty="0"/>
-          </a:p>
-          <a:p>
-            <a:endParaRPr lang="en-US" dirty="0"/>
-          </a:p>
-        </p:txBody>
-      </p:sp>
+              <a:t>Penguin species ~ flipper length + body mass</a:t>
+            </a:r>
+          </a:p>
+        </p:txBody>
+      </p:sp>
+      <p:graphicFrame>
+        <p:nvGraphicFramePr>
+          <p:cNvPr id="3" name="Table 2">
+            <a:extLst>
+              <a:ext uri="{FF2B5EF4-FFF2-40B4-BE49-F238E27FC236}">
+                <a16:creationId xmlns:a16="http://schemas.microsoft.com/office/drawing/2014/main" id="{8414707B-3E1D-DFA2-9B56-8AEBDADFF55F}"/>
+              </a:ext>
+            </a:extLst>
+          </p:cNvPr>
+          <p:cNvGraphicFramePr>
+            <a:graphicFrameLocks noGrp="1"/>
+          </p:cNvGraphicFramePr>
+          <p:nvPr>
+            <p:extLst>
+              <p:ext uri="{D42A27DB-BD31-4B8C-83A1-F6EECF244321}">
+                <p14:modId xmlns:p14="http://schemas.microsoft.com/office/powerpoint/2010/main" val="471446837"/>
+              </p:ext>
+            </p:extLst>
+          </p:nvPr>
+        </p:nvGraphicFramePr>
+        <p:xfrm>
+          <a:off x="577833" y="3391084"/>
+          <a:ext cx="3762348" cy="3009715"/>
+        </p:xfrm>
+        <a:graphic>
+          <a:graphicData uri="http://schemas.openxmlformats.org/drawingml/2006/table">
+            <a:tbl>
+              <a:tblPr firstRow="1" bandRow="1">
+                <a:tableStyleId>{5C22544A-7EE6-4342-B048-85BDC9FD1C3A}</a:tableStyleId>
+              </a:tblPr>
+              <a:tblGrid>
+                <a:gridCol w="1254116">
+                  <a:extLst>
+                    <a:ext uri="{9D8B030D-6E8A-4147-A177-3AD203B41FA5}">
+                      <a16:colId xmlns:a16="http://schemas.microsoft.com/office/drawing/2014/main" val="3086874793"/>
+                    </a:ext>
+                  </a:extLst>
+                </a:gridCol>
+                <a:gridCol w="1254116">
+                  <a:extLst>
+                    <a:ext uri="{9D8B030D-6E8A-4147-A177-3AD203B41FA5}">
+                      <a16:colId xmlns:a16="http://schemas.microsoft.com/office/drawing/2014/main" val="725989201"/>
+                    </a:ext>
+                  </a:extLst>
+                </a:gridCol>
+                <a:gridCol w="1254116">
+                  <a:extLst>
+                    <a:ext uri="{9D8B030D-6E8A-4147-A177-3AD203B41FA5}">
+                      <a16:colId xmlns:a16="http://schemas.microsoft.com/office/drawing/2014/main" val="1915941172"/>
+                    </a:ext>
+                  </a:extLst>
+                </a:gridCol>
+              </a:tblGrid>
+              <a:tr h="907235">
+                <a:tc>
+                  <a:txBody>
+                    <a:bodyPr/>
+                    <a:lstStyle/>
+                    <a:p>
+                      <a:r>
+                        <a:rPr lang="en-US" dirty="0"/>
+                        <a:t>Penguin species</a:t>
+                      </a:r>
+                    </a:p>
+                  </a:txBody>
+                  <a:tcPr/>
+                </a:tc>
+                <a:tc>
+                  <a:txBody>
+                    <a:bodyPr/>
+                    <a:lstStyle/>
+                    <a:p>
+                      <a:r>
+                        <a:rPr lang="en-US" dirty="0"/>
+                        <a:t>Flipper length</a:t>
+                      </a:r>
+                    </a:p>
+                  </a:txBody>
+                  <a:tcPr/>
+                </a:tc>
+                <a:tc>
+                  <a:txBody>
+                    <a:bodyPr/>
+                    <a:lstStyle/>
+                    <a:p>
+                      <a:r>
+                        <a:rPr lang="en-US" dirty="0"/>
+                        <a:t>Body mass</a:t>
+                      </a:r>
+                    </a:p>
+                  </a:txBody>
+                  <a:tcPr/>
+                </a:tc>
+                <a:extLst>
+                  <a:ext uri="{0D108BD9-81ED-4DB2-BD59-A6C34878D82A}">
+                    <a16:rowId xmlns:a16="http://schemas.microsoft.com/office/drawing/2014/main" val="207539063"/>
+                  </a:ext>
+                </a:extLst>
+              </a:tr>
+              <a:tr h="525620">
+                <a:tc>
+                  <a:txBody>
+                    <a:bodyPr/>
+                    <a:lstStyle/>
+                    <a:p>
+                      <a:r>
+                        <a:rPr lang="en-US" dirty="0"/>
+                        <a:t>Adelie</a:t>
+                      </a:r>
+                    </a:p>
+                  </a:txBody>
+                  <a:tcPr/>
+                </a:tc>
+                <a:tc>
+                  <a:txBody>
+                    <a:bodyPr/>
+                    <a:lstStyle/>
+                    <a:p>
+                      <a:r>
+                        <a:rPr lang="en-US" dirty="0"/>
+                        <a:t>90</a:t>
+                      </a:r>
+                    </a:p>
+                  </a:txBody>
+                  <a:tcPr/>
+                </a:tc>
+                <a:tc>
+                  <a:txBody>
+                    <a:bodyPr/>
+                    <a:lstStyle/>
+                    <a:p>
+                      <a:r>
+                        <a:rPr lang="en-US" dirty="0"/>
+                        <a:t>80</a:t>
+                      </a:r>
+                    </a:p>
+                  </a:txBody>
+                  <a:tcPr/>
+                </a:tc>
+                <a:extLst>
+                  <a:ext uri="{0D108BD9-81ED-4DB2-BD59-A6C34878D82A}">
+                    <a16:rowId xmlns:a16="http://schemas.microsoft.com/office/drawing/2014/main" val="350663204"/>
+                  </a:ext>
+                </a:extLst>
+              </a:tr>
+              <a:tr h="525620">
+                <a:tc>
+                  <a:txBody>
+                    <a:bodyPr/>
+                    <a:lstStyle/>
+                    <a:p>
+                      <a:r>
+                        <a:rPr lang="en-US" dirty="0"/>
+                        <a:t>Gentoo</a:t>
+                      </a:r>
+                    </a:p>
+                  </a:txBody>
+                  <a:tcPr/>
+                </a:tc>
+                <a:tc>
+                  <a:txBody>
+                    <a:bodyPr/>
+                    <a:lstStyle/>
+                    <a:p>
+                      <a:r>
+                        <a:rPr lang="en-US" dirty="0"/>
+                        <a:t>75</a:t>
+                      </a:r>
+                    </a:p>
+                  </a:txBody>
+                  <a:tcPr/>
+                </a:tc>
+                <a:tc>
+                  <a:txBody>
+                    <a:bodyPr/>
+                    <a:lstStyle/>
+                    <a:p>
+                      <a:r>
+                        <a:rPr lang="en-US" dirty="0"/>
+                        <a:t>20</a:t>
+                      </a:r>
+                    </a:p>
+                  </a:txBody>
+                  <a:tcPr/>
+                </a:tc>
+                <a:extLst>
+                  <a:ext uri="{0D108BD9-81ED-4DB2-BD59-A6C34878D82A}">
+                    <a16:rowId xmlns:a16="http://schemas.microsoft.com/office/drawing/2014/main" val="2716910918"/>
+                  </a:ext>
+                </a:extLst>
+              </a:tr>
+              <a:tr h="525620">
+                <a:tc>
+                  <a:txBody>
+                    <a:bodyPr/>
+                    <a:lstStyle/>
+                    <a:p>
+                      <a:r>
+                        <a:rPr lang="en-US" dirty="0"/>
+                        <a:t>Gentoo</a:t>
+                      </a:r>
+                    </a:p>
+                  </a:txBody>
+                  <a:tcPr/>
+                </a:tc>
+                <a:tc>
+                  <a:txBody>
+                    <a:bodyPr/>
+                    <a:lstStyle/>
+                    <a:p>
+                      <a:r>
+                        <a:rPr lang="en-US" dirty="0"/>
+                        <a:t>77</a:t>
+                      </a:r>
+                    </a:p>
+                  </a:txBody>
+                  <a:tcPr/>
+                </a:tc>
+                <a:tc>
+                  <a:txBody>
+                    <a:bodyPr/>
+                    <a:lstStyle/>
+                    <a:p>
+                      <a:r>
+                        <a:rPr lang="en-US" dirty="0"/>
+                        <a:t>32</a:t>
+                      </a:r>
+                    </a:p>
+                  </a:txBody>
+                  <a:tcPr/>
+                </a:tc>
+                <a:extLst>
+                  <a:ext uri="{0D108BD9-81ED-4DB2-BD59-A6C34878D82A}">
+                    <a16:rowId xmlns:a16="http://schemas.microsoft.com/office/drawing/2014/main" val="3870395830"/>
+                  </a:ext>
+                </a:extLst>
+              </a:tr>
+              <a:tr h="525620">
+                <a:tc>
+                  <a:txBody>
+                    <a:bodyPr/>
+                    <a:lstStyle/>
+                    <a:p>
+                      <a:r>
+                        <a:rPr lang="en-US" dirty="0"/>
+                        <a:t>Chinstrap</a:t>
+                      </a:r>
+                    </a:p>
+                  </a:txBody>
+                  <a:tcPr/>
+                </a:tc>
+                <a:tc>
+                  <a:txBody>
+                    <a:bodyPr/>
+                    <a:lstStyle/>
+                    <a:p>
+                      <a:r>
+                        <a:rPr lang="en-US" dirty="0"/>
+                        <a:t>76</a:t>
+                      </a:r>
+                    </a:p>
+                  </a:txBody>
+                  <a:tcPr/>
+                </a:tc>
+                <a:tc>
+                  <a:txBody>
+                    <a:bodyPr/>
+                    <a:lstStyle/>
+                    <a:p>
+                      <a:r>
+                        <a:rPr lang="en-US" dirty="0"/>
+                        <a:t>12</a:t>
+                      </a:r>
+                    </a:p>
+                  </a:txBody>
+                  <a:tcPr/>
+                </a:tc>
+                <a:extLst>
+                  <a:ext uri="{0D108BD9-81ED-4DB2-BD59-A6C34878D82A}">
+                    <a16:rowId xmlns:a16="http://schemas.microsoft.com/office/drawing/2014/main" val="2608199707"/>
+                  </a:ext>
+                </a:extLst>
+              </a:tr>
+            </a:tbl>
+          </a:graphicData>
+        </a:graphic>
+      </p:graphicFrame>
     </p:spTree>
     <p:extLst>
       <p:ext uri="{BB962C8B-B14F-4D97-AF65-F5344CB8AC3E}">
-        <p14:creationId xmlns:p14="http://schemas.microsoft.com/office/powerpoint/2010/main" val="1115218904"/>
+        <p14:creationId xmlns:p14="http://schemas.microsoft.com/office/powerpoint/2010/main" val="2720760849"/>
       </p:ext>
     </p:extLst>
   </p:cSld>
@@ -5449,7 +7683,13 @@
   <p:cSld>
     <p:spTree>
       <p:nvGrpSpPr>
-        <p:cNvPr id="1" name=""/>
+        <p:cNvPr id="1" name="">
+          <a:extLst>
+            <a:ext uri="{FF2B5EF4-FFF2-40B4-BE49-F238E27FC236}">
+              <a16:creationId xmlns:a16="http://schemas.microsoft.com/office/drawing/2014/main" id="{555AFD7D-712C-32D0-A2C5-01B4B5A969DA}"/>
+            </a:ext>
+          </a:extLst>
+        </p:cNvPr>
         <p:cNvGrpSpPr/>
         <p:nvPr/>
       </p:nvGrpSpPr>
@@ -5466,7 +7706,7 @@
           <p:cNvPr id="2" name="Title 1">
             <a:extLst>
               <a:ext uri="{FF2B5EF4-FFF2-40B4-BE49-F238E27FC236}">
-                <a16:creationId xmlns:a16="http://schemas.microsoft.com/office/drawing/2014/main" id="{095E95B8-4A71-743D-70FA-DCBDB3356D8F}"/>
+                <a16:creationId xmlns:a16="http://schemas.microsoft.com/office/drawing/2014/main" id="{8B1AC418-F0E0-A13E-0968-2E80ABF97030}"/>
               </a:ext>
             </a:extLst>
           </p:cNvPr>
@@ -5482,16 +7722,429 @@
           <a:bodyPr/>
           <a:lstStyle/>
           <a:p>
-            <a:endParaRPr lang="en-US" dirty="0"/>
-          </a:p>
-        </p:txBody>
-      </p:sp>
-      <p:sp>
-        <p:nvSpPr>
-          <p:cNvPr id="3" name="Content Placeholder 2">
-            <a:extLst>
-              <a:ext uri="{FF2B5EF4-FFF2-40B4-BE49-F238E27FC236}">
-                <a16:creationId xmlns:a16="http://schemas.microsoft.com/office/drawing/2014/main" id="{B630D6EF-15BD-BE47-CDCA-566FDE878BE6}"/>
+            <a:r>
+              <a:rPr lang="en-US" dirty="0"/>
+              <a:t>Classification and Regression Trees (CART)</a:t>
+            </a:r>
+          </a:p>
+        </p:txBody>
+      </p:sp>
+      <p:grpSp>
+        <p:nvGrpSpPr>
+          <p:cNvPr id="29" name="Group 28">
+            <a:extLst>
+              <a:ext uri="{FF2B5EF4-FFF2-40B4-BE49-F238E27FC236}">
+                <a16:creationId xmlns:a16="http://schemas.microsoft.com/office/drawing/2014/main" id="{249BDF57-2004-326A-1A02-EC49A5DD22AA}"/>
+              </a:ext>
+            </a:extLst>
+          </p:cNvPr>
+          <p:cNvGrpSpPr/>
+          <p:nvPr/>
+        </p:nvGrpSpPr>
+        <p:grpSpPr>
+          <a:xfrm>
+            <a:off x="5074276" y="2369713"/>
+            <a:ext cx="6539891" cy="2736153"/>
+            <a:chOff x="253576" y="2125014"/>
+            <a:chExt cx="4179418" cy="2736153"/>
+          </a:xfrm>
+        </p:grpSpPr>
+        <p:sp>
+          <p:nvSpPr>
+            <p:cNvPr id="6" name="Oval 5">
+              <a:extLst>
+                <a:ext uri="{FF2B5EF4-FFF2-40B4-BE49-F238E27FC236}">
+                  <a16:creationId xmlns:a16="http://schemas.microsoft.com/office/drawing/2014/main" id="{8C3CF5AA-F8A1-3690-0CBD-60E43E8E2455}"/>
+                </a:ext>
+              </a:extLst>
+            </p:cNvPr>
+            <p:cNvSpPr/>
+            <p:nvPr/>
+          </p:nvSpPr>
+          <p:spPr>
+            <a:xfrm>
+              <a:off x="2410784" y="2125014"/>
+              <a:ext cx="821813" cy="819337"/>
+            </a:xfrm>
+            <a:prstGeom prst="ellipse">
+              <a:avLst/>
+            </a:prstGeom>
+          </p:spPr>
+          <p:style>
+            <a:lnRef idx="2">
+              <a:schemeClr val="accent1">
+                <a:shade val="15000"/>
+              </a:schemeClr>
+            </a:lnRef>
+            <a:fillRef idx="1">
+              <a:schemeClr val="accent1"/>
+            </a:fillRef>
+            <a:effectRef idx="0">
+              <a:schemeClr val="accent1"/>
+            </a:effectRef>
+            <a:fontRef idx="minor">
+              <a:schemeClr val="lt1"/>
+            </a:fontRef>
+          </p:style>
+          <p:txBody>
+            <a:bodyPr rtlCol="0" anchor="ctr"/>
+            <a:lstStyle/>
+            <a:p>
+              <a:pPr algn="ctr"/>
+              <a:endParaRPr lang="en-US"/>
+            </a:p>
+          </p:txBody>
+        </p:sp>
+        <p:sp>
+          <p:nvSpPr>
+            <p:cNvPr id="7" name="Oval 6">
+              <a:extLst>
+                <a:ext uri="{FF2B5EF4-FFF2-40B4-BE49-F238E27FC236}">
+                  <a16:creationId xmlns:a16="http://schemas.microsoft.com/office/drawing/2014/main" id="{B372B615-7BB3-9669-F308-E42AB1AE1DBE}"/>
+                </a:ext>
+              </a:extLst>
+            </p:cNvPr>
+            <p:cNvSpPr/>
+            <p:nvPr/>
+          </p:nvSpPr>
+          <p:spPr>
+            <a:xfrm>
+              <a:off x="1291291" y="3034954"/>
+              <a:ext cx="821813" cy="819337"/>
+            </a:xfrm>
+            <a:prstGeom prst="ellipse">
+              <a:avLst/>
+            </a:prstGeom>
+          </p:spPr>
+          <p:style>
+            <a:lnRef idx="2">
+              <a:schemeClr val="accent1">
+                <a:shade val="15000"/>
+              </a:schemeClr>
+            </a:lnRef>
+            <a:fillRef idx="1">
+              <a:schemeClr val="accent1"/>
+            </a:fillRef>
+            <a:effectRef idx="0">
+              <a:schemeClr val="accent1"/>
+            </a:effectRef>
+            <a:fontRef idx="minor">
+              <a:schemeClr val="lt1"/>
+            </a:fontRef>
+          </p:style>
+          <p:txBody>
+            <a:bodyPr rtlCol="0" anchor="ctr"/>
+            <a:lstStyle/>
+            <a:p>
+              <a:pPr algn="ctr"/>
+              <a:endParaRPr lang="en-US"/>
+            </a:p>
+          </p:txBody>
+        </p:sp>
+        <p:sp>
+          <p:nvSpPr>
+            <p:cNvPr id="8" name="Oval 7">
+              <a:extLst>
+                <a:ext uri="{FF2B5EF4-FFF2-40B4-BE49-F238E27FC236}">
+                  <a16:creationId xmlns:a16="http://schemas.microsoft.com/office/drawing/2014/main" id="{DF0EAD58-C6BB-4FD8-1CF8-8A0168C5041B}"/>
+                </a:ext>
+              </a:extLst>
+            </p:cNvPr>
+            <p:cNvSpPr/>
+            <p:nvPr/>
+          </p:nvSpPr>
+          <p:spPr>
+            <a:xfrm>
+              <a:off x="3611181" y="3323259"/>
+              <a:ext cx="821813" cy="819337"/>
+            </a:xfrm>
+            <a:prstGeom prst="ellipse">
+              <a:avLst/>
+            </a:prstGeom>
+          </p:spPr>
+          <p:style>
+            <a:lnRef idx="2">
+              <a:schemeClr val="accent1">
+                <a:shade val="15000"/>
+              </a:schemeClr>
+            </a:lnRef>
+            <a:fillRef idx="1">
+              <a:schemeClr val="accent1"/>
+            </a:fillRef>
+            <a:effectRef idx="0">
+              <a:schemeClr val="accent1"/>
+            </a:effectRef>
+            <a:fontRef idx="minor">
+              <a:schemeClr val="lt1"/>
+            </a:fontRef>
+          </p:style>
+          <p:txBody>
+            <a:bodyPr rtlCol="0" anchor="ctr"/>
+            <a:lstStyle/>
+            <a:p>
+              <a:pPr algn="ctr"/>
+              <a:endParaRPr lang="en-US"/>
+            </a:p>
+          </p:txBody>
+        </p:sp>
+        <p:sp>
+          <p:nvSpPr>
+            <p:cNvPr id="9" name="Oval 8">
+              <a:extLst>
+                <a:ext uri="{FF2B5EF4-FFF2-40B4-BE49-F238E27FC236}">
+                  <a16:creationId xmlns:a16="http://schemas.microsoft.com/office/drawing/2014/main" id="{98DBBEA4-03FB-2DC1-DBF6-C627D2EB5AD5}"/>
+                </a:ext>
+              </a:extLst>
+            </p:cNvPr>
+            <p:cNvSpPr/>
+            <p:nvPr/>
+          </p:nvSpPr>
+          <p:spPr>
+            <a:xfrm>
+              <a:off x="253576" y="4041829"/>
+              <a:ext cx="821813" cy="819337"/>
+            </a:xfrm>
+            <a:prstGeom prst="ellipse">
+              <a:avLst/>
+            </a:prstGeom>
+          </p:spPr>
+          <p:style>
+            <a:lnRef idx="2">
+              <a:schemeClr val="accent1">
+                <a:shade val="15000"/>
+              </a:schemeClr>
+            </a:lnRef>
+            <a:fillRef idx="1">
+              <a:schemeClr val="accent1"/>
+            </a:fillRef>
+            <a:effectRef idx="0">
+              <a:schemeClr val="accent1"/>
+            </a:effectRef>
+            <a:fontRef idx="minor">
+              <a:schemeClr val="lt1"/>
+            </a:fontRef>
+          </p:style>
+          <p:txBody>
+            <a:bodyPr rtlCol="0" anchor="ctr"/>
+            <a:lstStyle/>
+            <a:p>
+              <a:pPr algn="ctr"/>
+              <a:endParaRPr lang="en-US"/>
+            </a:p>
+          </p:txBody>
+        </p:sp>
+        <p:sp>
+          <p:nvSpPr>
+            <p:cNvPr id="10" name="Oval 9">
+              <a:extLst>
+                <a:ext uri="{FF2B5EF4-FFF2-40B4-BE49-F238E27FC236}">
+                  <a16:creationId xmlns:a16="http://schemas.microsoft.com/office/drawing/2014/main" id="{3A9E68EE-7FFC-EC19-FD01-5571CD3CD4AA}"/>
+                </a:ext>
+              </a:extLst>
+            </p:cNvPr>
+            <p:cNvSpPr/>
+            <p:nvPr/>
+          </p:nvSpPr>
+          <p:spPr>
+            <a:xfrm>
+              <a:off x="2296413" y="4041830"/>
+              <a:ext cx="821813" cy="819337"/>
+            </a:xfrm>
+            <a:prstGeom prst="ellipse">
+              <a:avLst/>
+            </a:prstGeom>
+          </p:spPr>
+          <p:style>
+            <a:lnRef idx="2">
+              <a:schemeClr val="accent1">
+                <a:shade val="15000"/>
+              </a:schemeClr>
+            </a:lnRef>
+            <a:fillRef idx="1">
+              <a:schemeClr val="accent1"/>
+            </a:fillRef>
+            <a:effectRef idx="0">
+              <a:schemeClr val="accent1"/>
+            </a:effectRef>
+            <a:fontRef idx="minor">
+              <a:schemeClr val="lt1"/>
+            </a:fontRef>
+          </p:style>
+          <p:txBody>
+            <a:bodyPr rtlCol="0" anchor="ctr"/>
+            <a:lstStyle/>
+            <a:p>
+              <a:pPr algn="ctr"/>
+              <a:endParaRPr lang="en-US"/>
+            </a:p>
+          </p:txBody>
+        </p:sp>
+        <p:cxnSp>
+          <p:nvCxnSpPr>
+            <p:cNvPr id="11" name="Straight Connector 10">
+              <a:extLst>
+                <a:ext uri="{FF2B5EF4-FFF2-40B4-BE49-F238E27FC236}">
+                  <a16:creationId xmlns:a16="http://schemas.microsoft.com/office/drawing/2014/main" id="{1BB8BDDA-5D86-059A-418C-D88A684EB4B1}"/>
+                </a:ext>
+              </a:extLst>
+            </p:cNvPr>
+            <p:cNvCxnSpPr>
+              <a:stCxn id="6" idx="5"/>
+              <a:endCxn id="8" idx="1"/>
+            </p:cNvCxnSpPr>
+            <p:nvPr/>
+          </p:nvCxnSpPr>
+          <p:spPr>
+            <a:xfrm>
+              <a:off x="3112245" y="2824362"/>
+              <a:ext cx="619288" cy="618886"/>
+            </a:xfrm>
+            <a:prstGeom prst="line">
+              <a:avLst/>
+            </a:prstGeom>
+          </p:spPr>
+          <p:style>
+            <a:lnRef idx="2">
+              <a:schemeClr val="accent1"/>
+            </a:lnRef>
+            <a:fillRef idx="0">
+              <a:schemeClr val="accent1"/>
+            </a:fillRef>
+            <a:effectRef idx="1">
+              <a:schemeClr val="accent1"/>
+            </a:effectRef>
+            <a:fontRef idx="minor">
+              <a:schemeClr val="tx1"/>
+            </a:fontRef>
+          </p:style>
+        </p:cxnSp>
+        <p:cxnSp>
+          <p:nvCxnSpPr>
+            <p:cNvPr id="12" name="Straight Connector 11">
+              <a:extLst>
+                <a:ext uri="{FF2B5EF4-FFF2-40B4-BE49-F238E27FC236}">
+                  <a16:creationId xmlns:a16="http://schemas.microsoft.com/office/drawing/2014/main" id="{E5531276-962C-2766-53B7-CEB8C3BA0185}"/>
+                </a:ext>
+              </a:extLst>
+            </p:cNvPr>
+            <p:cNvCxnSpPr>
+              <a:cxnSpLocks/>
+              <a:stCxn id="6" idx="3"/>
+              <a:endCxn id="7" idx="7"/>
+            </p:cNvCxnSpPr>
+            <p:nvPr/>
+          </p:nvCxnSpPr>
+          <p:spPr>
+            <a:xfrm flipH="1">
+              <a:off x="1992752" y="2824362"/>
+              <a:ext cx="538384" cy="330581"/>
+            </a:xfrm>
+            <a:prstGeom prst="line">
+              <a:avLst/>
+            </a:prstGeom>
+          </p:spPr>
+          <p:style>
+            <a:lnRef idx="2">
+              <a:schemeClr val="accent1"/>
+            </a:lnRef>
+            <a:fillRef idx="0">
+              <a:schemeClr val="accent1"/>
+            </a:fillRef>
+            <a:effectRef idx="1">
+              <a:schemeClr val="accent1"/>
+            </a:effectRef>
+            <a:fontRef idx="minor">
+              <a:schemeClr val="tx1"/>
+            </a:fontRef>
+          </p:style>
+        </p:cxnSp>
+        <p:cxnSp>
+          <p:nvCxnSpPr>
+            <p:cNvPr id="13" name="Straight Connector 12">
+              <a:extLst>
+                <a:ext uri="{FF2B5EF4-FFF2-40B4-BE49-F238E27FC236}">
+                  <a16:creationId xmlns:a16="http://schemas.microsoft.com/office/drawing/2014/main" id="{ADED6975-142E-9844-E646-AA7309EEBFE6}"/>
+                </a:ext>
+              </a:extLst>
+            </p:cNvPr>
+            <p:cNvCxnSpPr>
+              <a:cxnSpLocks/>
+              <a:stCxn id="7" idx="3"/>
+              <a:endCxn id="9" idx="7"/>
+            </p:cNvCxnSpPr>
+            <p:nvPr/>
+          </p:nvCxnSpPr>
+          <p:spPr>
+            <a:xfrm flipH="1">
+              <a:off x="955037" y="3734302"/>
+              <a:ext cx="456606" cy="427516"/>
+            </a:xfrm>
+            <a:prstGeom prst="line">
+              <a:avLst/>
+            </a:prstGeom>
+          </p:spPr>
+          <p:style>
+            <a:lnRef idx="2">
+              <a:schemeClr val="accent1"/>
+            </a:lnRef>
+            <a:fillRef idx="0">
+              <a:schemeClr val="accent1"/>
+            </a:fillRef>
+            <a:effectRef idx="1">
+              <a:schemeClr val="accent1"/>
+            </a:effectRef>
+            <a:fontRef idx="minor">
+              <a:schemeClr val="tx1"/>
+            </a:fontRef>
+          </p:style>
+        </p:cxnSp>
+        <p:cxnSp>
+          <p:nvCxnSpPr>
+            <p:cNvPr id="14" name="Straight Connector 13">
+              <a:extLst>
+                <a:ext uri="{FF2B5EF4-FFF2-40B4-BE49-F238E27FC236}">
+                  <a16:creationId xmlns:a16="http://schemas.microsoft.com/office/drawing/2014/main" id="{09BA25F2-4ECD-0272-B7EF-70104CEA3135}"/>
+                </a:ext>
+              </a:extLst>
+            </p:cNvPr>
+            <p:cNvCxnSpPr>
+              <a:cxnSpLocks/>
+              <a:stCxn id="7" idx="5"/>
+              <a:endCxn id="10" idx="1"/>
+            </p:cNvCxnSpPr>
+            <p:nvPr/>
+          </p:nvCxnSpPr>
+          <p:spPr>
+            <a:xfrm>
+              <a:off x="1992752" y="3734302"/>
+              <a:ext cx="424013" cy="427517"/>
+            </a:xfrm>
+            <a:prstGeom prst="line">
+              <a:avLst/>
+            </a:prstGeom>
+          </p:spPr>
+          <p:style>
+            <a:lnRef idx="2">
+              <a:schemeClr val="accent1"/>
+            </a:lnRef>
+            <a:fillRef idx="0">
+              <a:schemeClr val="accent1"/>
+            </a:fillRef>
+            <a:effectRef idx="1">
+              <a:schemeClr val="accent1"/>
+            </a:effectRef>
+            <a:fontRef idx="minor">
+              <a:schemeClr val="tx1"/>
+            </a:fontRef>
+          </p:style>
+        </p:cxnSp>
+      </p:grpSp>
+      <p:sp>
+        <p:nvSpPr>
+          <p:cNvPr id="31" name="Content Placeholder 2">
+            <a:extLst>
+              <a:ext uri="{FF2B5EF4-FFF2-40B4-BE49-F238E27FC236}">
+                <a16:creationId xmlns:a16="http://schemas.microsoft.com/office/drawing/2014/main" id="{589AADF8-1423-F874-1CB3-9E9EAF9F9AF6}"/>
               </a:ext>
             </a:extLst>
           </p:cNvPr>
@@ -5502,22 +8155,516 @@
             <p:ph idx="1"/>
           </p:nvPr>
         </p:nvSpPr>
-        <p:spPr/>
-        <p:txBody>
-          <a:bodyPr/>
-          <a:lstStyle/>
+        <p:spPr>
+          <a:xfrm>
+            <a:off x="838200" y="1825625"/>
+            <a:ext cx="7181770" cy="4667250"/>
+          </a:xfrm>
+        </p:spPr>
+        <p:txBody>
+          <a:bodyPr>
+            <a:normAutofit/>
+          </a:bodyPr>
+          <a:lstStyle/>
+          <a:p>
+            <a:pPr marL="0" indent="0">
+              <a:buNone/>
+            </a:pPr>
+            <a:r>
+              <a:rPr lang="en-US" dirty="0"/>
+              <a:t>Penguin species ~ flipper length + body mass</a:t>
+            </a:r>
+          </a:p>
           <a:p>
             <a:pPr marL="0" indent="0">
               <a:buNone/>
             </a:pPr>
             <a:endParaRPr lang="en-US" dirty="0"/>
+          </a:p>
+        </p:txBody>
+      </p:sp>
+      <p:graphicFrame>
+        <p:nvGraphicFramePr>
+          <p:cNvPr id="3" name="Table 2">
+            <a:extLst>
+              <a:ext uri="{FF2B5EF4-FFF2-40B4-BE49-F238E27FC236}">
+                <a16:creationId xmlns:a16="http://schemas.microsoft.com/office/drawing/2014/main" id="{E1D27FCD-59B0-2A73-E8FF-4FDB1CEC2A57}"/>
+              </a:ext>
+            </a:extLst>
+          </p:cNvPr>
+          <p:cNvGraphicFramePr>
+            <a:graphicFrameLocks noGrp="1"/>
+          </p:cNvGraphicFramePr>
+          <p:nvPr/>
+        </p:nvGraphicFramePr>
+        <p:xfrm>
+          <a:off x="577833" y="3391084"/>
+          <a:ext cx="3762348" cy="3009715"/>
+        </p:xfrm>
+        <a:graphic>
+          <a:graphicData uri="http://schemas.openxmlformats.org/drawingml/2006/table">
+            <a:tbl>
+              <a:tblPr firstRow="1" bandRow="1">
+                <a:tableStyleId>{5C22544A-7EE6-4342-B048-85BDC9FD1C3A}</a:tableStyleId>
+              </a:tblPr>
+              <a:tblGrid>
+                <a:gridCol w="1254116">
+                  <a:extLst>
+                    <a:ext uri="{9D8B030D-6E8A-4147-A177-3AD203B41FA5}">
+                      <a16:colId xmlns:a16="http://schemas.microsoft.com/office/drawing/2014/main" val="3086874793"/>
+                    </a:ext>
+                  </a:extLst>
+                </a:gridCol>
+                <a:gridCol w="1254116">
+                  <a:extLst>
+                    <a:ext uri="{9D8B030D-6E8A-4147-A177-3AD203B41FA5}">
+                      <a16:colId xmlns:a16="http://schemas.microsoft.com/office/drawing/2014/main" val="725989201"/>
+                    </a:ext>
+                  </a:extLst>
+                </a:gridCol>
+                <a:gridCol w="1254116">
+                  <a:extLst>
+                    <a:ext uri="{9D8B030D-6E8A-4147-A177-3AD203B41FA5}">
+                      <a16:colId xmlns:a16="http://schemas.microsoft.com/office/drawing/2014/main" val="1915941172"/>
+                    </a:ext>
+                  </a:extLst>
+                </a:gridCol>
+              </a:tblGrid>
+              <a:tr h="907235">
+                <a:tc>
+                  <a:txBody>
+                    <a:bodyPr/>
+                    <a:lstStyle/>
+                    <a:p>
+                      <a:r>
+                        <a:rPr lang="en-US" dirty="0"/>
+                        <a:t>Penguin species</a:t>
+                      </a:r>
+                    </a:p>
+                  </a:txBody>
+                  <a:tcPr/>
+                </a:tc>
+                <a:tc>
+                  <a:txBody>
+                    <a:bodyPr/>
+                    <a:lstStyle/>
+                    <a:p>
+                      <a:r>
+                        <a:rPr lang="en-US" dirty="0"/>
+                        <a:t>Flipper length</a:t>
+                      </a:r>
+                    </a:p>
+                  </a:txBody>
+                  <a:tcPr/>
+                </a:tc>
+                <a:tc>
+                  <a:txBody>
+                    <a:bodyPr/>
+                    <a:lstStyle/>
+                    <a:p>
+                      <a:r>
+                        <a:rPr lang="en-US" dirty="0"/>
+                        <a:t>Body mass</a:t>
+                      </a:r>
+                    </a:p>
+                  </a:txBody>
+                  <a:tcPr/>
+                </a:tc>
+                <a:extLst>
+                  <a:ext uri="{0D108BD9-81ED-4DB2-BD59-A6C34878D82A}">
+                    <a16:rowId xmlns:a16="http://schemas.microsoft.com/office/drawing/2014/main" val="207539063"/>
+                  </a:ext>
+                </a:extLst>
+              </a:tr>
+              <a:tr h="525620">
+                <a:tc>
+                  <a:txBody>
+                    <a:bodyPr/>
+                    <a:lstStyle/>
+                    <a:p>
+                      <a:r>
+                        <a:rPr lang="en-US" dirty="0"/>
+                        <a:t>Adelie</a:t>
+                      </a:r>
+                    </a:p>
+                  </a:txBody>
+                  <a:tcPr/>
+                </a:tc>
+                <a:tc>
+                  <a:txBody>
+                    <a:bodyPr/>
+                    <a:lstStyle/>
+                    <a:p>
+                      <a:r>
+                        <a:rPr lang="en-US" dirty="0"/>
+                        <a:t>90</a:t>
+                      </a:r>
+                    </a:p>
+                  </a:txBody>
+                  <a:tcPr/>
+                </a:tc>
+                <a:tc>
+                  <a:txBody>
+                    <a:bodyPr/>
+                    <a:lstStyle/>
+                    <a:p>
+                      <a:r>
+                        <a:rPr lang="en-US" dirty="0"/>
+                        <a:t>80</a:t>
+                      </a:r>
+                    </a:p>
+                  </a:txBody>
+                  <a:tcPr/>
+                </a:tc>
+                <a:extLst>
+                  <a:ext uri="{0D108BD9-81ED-4DB2-BD59-A6C34878D82A}">
+                    <a16:rowId xmlns:a16="http://schemas.microsoft.com/office/drawing/2014/main" val="350663204"/>
+                  </a:ext>
+                </a:extLst>
+              </a:tr>
+              <a:tr h="525620">
+                <a:tc>
+                  <a:txBody>
+                    <a:bodyPr/>
+                    <a:lstStyle/>
+                    <a:p>
+                      <a:r>
+                        <a:rPr lang="en-US" dirty="0"/>
+                        <a:t>Gentoo</a:t>
+                      </a:r>
+                    </a:p>
+                  </a:txBody>
+                  <a:tcPr/>
+                </a:tc>
+                <a:tc>
+                  <a:txBody>
+                    <a:bodyPr/>
+                    <a:lstStyle/>
+                    <a:p>
+                      <a:r>
+                        <a:rPr lang="en-US" dirty="0"/>
+                        <a:t>75</a:t>
+                      </a:r>
+                    </a:p>
+                  </a:txBody>
+                  <a:tcPr/>
+                </a:tc>
+                <a:tc>
+                  <a:txBody>
+                    <a:bodyPr/>
+                    <a:lstStyle/>
+                    <a:p>
+                      <a:r>
+                        <a:rPr lang="en-US" dirty="0"/>
+                        <a:t>20</a:t>
+                      </a:r>
+                    </a:p>
+                  </a:txBody>
+                  <a:tcPr/>
+                </a:tc>
+                <a:extLst>
+                  <a:ext uri="{0D108BD9-81ED-4DB2-BD59-A6C34878D82A}">
+                    <a16:rowId xmlns:a16="http://schemas.microsoft.com/office/drawing/2014/main" val="2716910918"/>
+                  </a:ext>
+                </a:extLst>
+              </a:tr>
+              <a:tr h="525620">
+                <a:tc>
+                  <a:txBody>
+                    <a:bodyPr/>
+                    <a:lstStyle/>
+                    <a:p>
+                      <a:r>
+                        <a:rPr lang="en-US" dirty="0"/>
+                        <a:t>Gentoo</a:t>
+                      </a:r>
+                    </a:p>
+                  </a:txBody>
+                  <a:tcPr/>
+                </a:tc>
+                <a:tc>
+                  <a:txBody>
+                    <a:bodyPr/>
+                    <a:lstStyle/>
+                    <a:p>
+                      <a:r>
+                        <a:rPr lang="en-US" dirty="0"/>
+                        <a:t>77</a:t>
+                      </a:r>
+                    </a:p>
+                  </a:txBody>
+                  <a:tcPr/>
+                </a:tc>
+                <a:tc>
+                  <a:txBody>
+                    <a:bodyPr/>
+                    <a:lstStyle/>
+                    <a:p>
+                      <a:r>
+                        <a:rPr lang="en-US" dirty="0"/>
+                        <a:t>32</a:t>
+                      </a:r>
+                    </a:p>
+                  </a:txBody>
+                  <a:tcPr/>
+                </a:tc>
+                <a:extLst>
+                  <a:ext uri="{0D108BD9-81ED-4DB2-BD59-A6C34878D82A}">
+                    <a16:rowId xmlns:a16="http://schemas.microsoft.com/office/drawing/2014/main" val="3870395830"/>
+                  </a:ext>
+                </a:extLst>
+              </a:tr>
+              <a:tr h="525620">
+                <a:tc>
+                  <a:txBody>
+                    <a:bodyPr/>
+                    <a:lstStyle/>
+                    <a:p>
+                      <a:r>
+                        <a:rPr lang="en-US" dirty="0"/>
+                        <a:t>Chinstrap</a:t>
+                      </a:r>
+                    </a:p>
+                  </a:txBody>
+                  <a:tcPr/>
+                </a:tc>
+                <a:tc>
+                  <a:txBody>
+                    <a:bodyPr/>
+                    <a:lstStyle/>
+                    <a:p>
+                      <a:r>
+                        <a:rPr lang="en-US" dirty="0"/>
+                        <a:t>76</a:t>
+                      </a:r>
+                    </a:p>
+                  </a:txBody>
+                  <a:tcPr/>
+                </a:tc>
+                <a:tc>
+                  <a:txBody>
+                    <a:bodyPr/>
+                    <a:lstStyle/>
+                    <a:p>
+                      <a:r>
+                        <a:rPr lang="en-US" dirty="0"/>
+                        <a:t>12</a:t>
+                      </a:r>
+                    </a:p>
+                  </a:txBody>
+                  <a:tcPr/>
+                </a:tc>
+                <a:extLst>
+                  <a:ext uri="{0D108BD9-81ED-4DB2-BD59-A6C34878D82A}">
+                    <a16:rowId xmlns:a16="http://schemas.microsoft.com/office/drawing/2014/main" val="2608199707"/>
+                  </a:ext>
+                </a:extLst>
+              </a:tr>
+            </a:tbl>
+          </a:graphicData>
+        </a:graphic>
+      </p:graphicFrame>
+      <p:sp>
+        <p:nvSpPr>
+          <p:cNvPr id="4" name="TextBox 3">
+            <a:extLst>
+              <a:ext uri="{FF2B5EF4-FFF2-40B4-BE49-F238E27FC236}">
+                <a16:creationId xmlns:a16="http://schemas.microsoft.com/office/drawing/2014/main" id="{6B7E6931-BBAB-BADF-7E2C-06B13D046B9E}"/>
+              </a:ext>
+            </a:extLst>
+          </p:cNvPr>
+          <p:cNvSpPr txBox="1"/>
+          <p:nvPr/>
+        </p:nvSpPr>
+        <p:spPr>
+          <a:xfrm>
+            <a:off x="8139712" y="3174079"/>
+            <a:ext cx="2010487" cy="369332"/>
+          </a:xfrm>
+          <a:prstGeom prst="rect">
+            <a:avLst/>
+          </a:prstGeom>
+          <a:noFill/>
+        </p:spPr>
+        <p:txBody>
+          <a:bodyPr wrap="none" rtlCol="0">
+            <a:spAutoFit/>
+          </a:bodyPr>
+          <a:lstStyle/>
+          <a:p>
+            <a:r>
+              <a:rPr lang="en-US" dirty="0"/>
+              <a:t>Flipper length &gt; 80</a:t>
+            </a:r>
+          </a:p>
+        </p:txBody>
+      </p:sp>
+      <p:sp>
+        <p:nvSpPr>
+          <p:cNvPr id="5" name="TextBox 4">
+            <a:extLst>
+              <a:ext uri="{FF2B5EF4-FFF2-40B4-BE49-F238E27FC236}">
+                <a16:creationId xmlns:a16="http://schemas.microsoft.com/office/drawing/2014/main" id="{2A7B323F-6F0D-9CFA-9B17-98BCC73711A0}"/>
+              </a:ext>
+            </a:extLst>
+          </p:cNvPr>
+          <p:cNvSpPr txBox="1"/>
+          <p:nvPr/>
+        </p:nvSpPr>
+        <p:spPr>
+          <a:xfrm>
+            <a:off x="10581704" y="3778299"/>
+            <a:ext cx="808235" cy="369332"/>
+          </a:xfrm>
+          <a:prstGeom prst="rect">
+            <a:avLst/>
+          </a:prstGeom>
+          <a:noFill/>
+        </p:spPr>
+        <p:txBody>
+          <a:bodyPr wrap="none" rtlCol="0">
+            <a:spAutoFit/>
+          </a:bodyPr>
+          <a:lstStyle/>
+          <a:p>
+            <a:r>
+              <a:rPr lang="en-US" dirty="0">
+                <a:solidFill>
+                  <a:schemeClr val="bg1"/>
+                </a:solidFill>
+              </a:rPr>
+              <a:t>Adelie</a:t>
+            </a:r>
+          </a:p>
+        </p:txBody>
+      </p:sp>
+      <p:sp>
+        <p:nvSpPr>
+          <p:cNvPr id="15" name="TextBox 14">
+            <a:extLst>
+              <a:ext uri="{FF2B5EF4-FFF2-40B4-BE49-F238E27FC236}">
+                <a16:creationId xmlns:a16="http://schemas.microsoft.com/office/drawing/2014/main" id="{E731C642-AAEB-5B1F-8E80-FC758683E2B2}"/>
+              </a:ext>
+            </a:extLst>
+          </p:cNvPr>
+          <p:cNvSpPr txBox="1"/>
+          <p:nvPr/>
+        </p:nvSpPr>
+        <p:spPr>
+          <a:xfrm>
+            <a:off x="6452389" y="3986854"/>
+            <a:ext cx="1739579" cy="369332"/>
+          </a:xfrm>
+          <a:prstGeom prst="rect">
+            <a:avLst/>
+          </a:prstGeom>
+          <a:noFill/>
+        </p:spPr>
+        <p:txBody>
+          <a:bodyPr wrap="none" rtlCol="0">
+            <a:spAutoFit/>
+          </a:bodyPr>
+          <a:lstStyle/>
+          <a:p>
+            <a:r>
+              <a:rPr lang="en-US" dirty="0"/>
+              <a:t>Body mass &gt; 18</a:t>
+            </a:r>
+          </a:p>
+        </p:txBody>
+      </p:sp>
+      <p:sp>
+        <p:nvSpPr>
+          <p:cNvPr id="16" name="TextBox 15">
+            <a:extLst>
+              <a:ext uri="{FF2B5EF4-FFF2-40B4-BE49-F238E27FC236}">
+                <a16:creationId xmlns:a16="http://schemas.microsoft.com/office/drawing/2014/main" id="{18D54936-524E-5DDA-344C-F9F7FA9148C7}"/>
+              </a:ext>
+            </a:extLst>
+          </p:cNvPr>
+          <p:cNvSpPr txBox="1"/>
+          <p:nvPr/>
+        </p:nvSpPr>
+        <p:spPr>
+          <a:xfrm>
+            <a:off x="8451807" y="4373029"/>
+            <a:ext cx="924099" cy="646331"/>
+          </a:xfrm>
+          <a:prstGeom prst="rect">
+            <a:avLst/>
+          </a:prstGeom>
+          <a:noFill/>
+        </p:spPr>
+        <p:txBody>
+          <a:bodyPr wrap="none" rtlCol="0">
+            <a:spAutoFit/>
+          </a:bodyPr>
+          <a:lstStyle/>
+          <a:p>
+            <a:r>
+              <a:rPr lang="en-US" dirty="0">
+                <a:solidFill>
+                  <a:schemeClr val="bg1"/>
+                </a:solidFill>
+              </a:rPr>
+              <a:t>Gentoo</a:t>
+            </a:r>
+          </a:p>
+          <a:p>
+            <a:r>
+              <a:rPr lang="en-US" dirty="0">
+                <a:solidFill>
+                  <a:schemeClr val="bg1"/>
+                </a:solidFill>
+              </a:rPr>
+              <a:t>Gentoo</a:t>
+            </a:r>
+          </a:p>
+        </p:txBody>
+      </p:sp>
+      <p:sp>
+        <p:nvSpPr>
+          <p:cNvPr id="17" name="TextBox 16">
+            <a:extLst>
+              <a:ext uri="{FF2B5EF4-FFF2-40B4-BE49-F238E27FC236}">
+                <a16:creationId xmlns:a16="http://schemas.microsoft.com/office/drawing/2014/main" id="{3EEF2781-75FA-1991-AC4E-BBF2474D7921}"/>
+              </a:ext>
+            </a:extLst>
+          </p:cNvPr>
+          <p:cNvSpPr txBox="1"/>
+          <p:nvPr/>
+        </p:nvSpPr>
+        <p:spPr>
+          <a:xfrm>
+            <a:off x="5136103" y="4511529"/>
+            <a:ext cx="1162306" cy="369332"/>
+          </a:xfrm>
+          <a:prstGeom prst="rect">
+            <a:avLst/>
+          </a:prstGeom>
+          <a:noFill/>
+        </p:spPr>
+        <p:txBody>
+          <a:bodyPr wrap="none" rtlCol="0">
+            <a:spAutoFit/>
+          </a:bodyPr>
+          <a:lstStyle/>
+          <a:p>
+            <a:r>
+              <a:rPr lang="en-US" dirty="0">
+                <a:solidFill>
+                  <a:schemeClr val="bg1"/>
+                </a:solidFill>
+              </a:rPr>
+              <a:t>Chinstrap</a:t>
+            </a:r>
           </a:p>
         </p:txBody>
       </p:sp>
     </p:spTree>
     <p:extLst>
       <p:ext uri="{BB962C8B-B14F-4D97-AF65-F5344CB8AC3E}">
-        <p14:creationId xmlns:p14="http://schemas.microsoft.com/office/powerpoint/2010/main" val="1027895095"/>
+        <p14:creationId xmlns:p14="http://schemas.microsoft.com/office/powerpoint/2010/main" val="372755476"/>
       </p:ext>
     </p:extLst>
   </p:cSld>
@@ -5549,7 +8696,7 @@
           <p:cNvPr id="2" name="Title 1">
             <a:extLst>
               <a:ext uri="{FF2B5EF4-FFF2-40B4-BE49-F238E27FC236}">
-                <a16:creationId xmlns:a16="http://schemas.microsoft.com/office/drawing/2014/main" id="{57495654-A376-21A2-5DCD-FACCFCC5B067}"/>
+                <a16:creationId xmlns:a16="http://schemas.microsoft.com/office/drawing/2014/main" id="{4275B0B8-D711-CAEB-FE86-2D7A6102056A}"/>
               </a:ext>
             </a:extLst>
           </p:cNvPr>
@@ -5567,7 +8714,7 @@
           <a:p>
             <a:r>
               <a:rPr lang="en-US" dirty="0"/>
-              <a:t>Model evaluation and cross-validation</a:t>
+              <a:t>Model performance metrics - classification</a:t>
             </a:r>
           </a:p>
         </p:txBody>
@@ -5577,7 +8724,7 @@
           <p:cNvPr id="3" name="Content Placeholder 2">
             <a:extLst>
               <a:ext uri="{FF2B5EF4-FFF2-40B4-BE49-F238E27FC236}">
-                <a16:creationId xmlns:a16="http://schemas.microsoft.com/office/drawing/2014/main" id="{592056A0-B353-C081-017D-281B629E7B12}"/>
+                <a16:creationId xmlns:a16="http://schemas.microsoft.com/office/drawing/2014/main" id="{2F531D8D-36CE-D3D9-865F-879E6E664BB7}"/>
               </a:ext>
             </a:extLst>
           </p:cNvPr>
@@ -5593,54 +8740,14 @@
           <a:bodyPr/>
           <a:lstStyle/>
           <a:p>
-            <a:pPr marL="0" indent="0">
-              <a:buNone/>
-            </a:pPr>
-            <a:r>
-              <a:rPr lang="en-US" dirty="0"/>
-              <a:t>First, an example…</a:t>
-            </a:r>
-          </a:p>
-          <a:p>
-            <a:pPr marL="0" indent="0">
-              <a:buNone/>
-            </a:pPr>
-            <a:endParaRPr lang="en-US" b="1" dirty="0"/>
-          </a:p>
-          <a:p>
-            <a:pPr marL="0" indent="0">
-              <a:buNone/>
-            </a:pPr>
-            <a:r>
-              <a:rPr lang="en-US" b="1" dirty="0"/>
-              <a:t>INSERT</a:t>
-            </a:r>
-            <a:r>
-              <a:rPr lang="en-US" dirty="0"/>
-              <a:t> example of model (probably classification) that performs well on the training data, but poorly on new data</a:t>
-            </a:r>
-          </a:p>
-          <a:p>
-            <a:pPr marL="0" indent="0">
-              <a:buNone/>
-            </a:pPr>
-            <a:endParaRPr lang="en-US" dirty="0"/>
-          </a:p>
-          <a:p>
-            <a:pPr marL="0" indent="0">
-              <a:buNone/>
-            </a:pPr>
-            <a:r>
-              <a:rPr lang="en-US" dirty="0"/>
-              <a:t>Is this a good model? Or a bad model? It depends how we evaluate it...</a:t>
-            </a:r>
+            <a:endParaRPr lang="en-US"/>
           </a:p>
         </p:txBody>
       </p:sp>
     </p:spTree>
     <p:extLst>
       <p:ext uri="{BB962C8B-B14F-4D97-AF65-F5344CB8AC3E}">
-        <p14:creationId xmlns:p14="http://schemas.microsoft.com/office/powerpoint/2010/main" val="177675001"/>
+        <p14:creationId xmlns:p14="http://schemas.microsoft.com/office/powerpoint/2010/main" val="1939471003"/>
       </p:ext>
     </p:extLst>
   </p:cSld>
@@ -5672,7 +8779,7 @@
           <p:cNvPr id="2" name="Title 1">
             <a:extLst>
               <a:ext uri="{FF2B5EF4-FFF2-40B4-BE49-F238E27FC236}">
-                <a16:creationId xmlns:a16="http://schemas.microsoft.com/office/drawing/2014/main" id="{578D8BD5-1866-8949-4A75-E045188B007F}"/>
+                <a16:creationId xmlns:a16="http://schemas.microsoft.com/office/drawing/2014/main" id="{7A6F9C5C-39AB-B9C9-E471-2303A9FC396D}"/>
               </a:ext>
             </a:extLst>
           </p:cNvPr>
@@ -5690,158 +8797,99 @@
           <a:p>
             <a:r>
               <a:rPr lang="en-US" dirty="0"/>
-              <a:t>You should </a:t>
-            </a:r>
-            <a:r>
-              <a:rPr lang="en-US" i="1" dirty="0"/>
-              <a:t>always </a:t>
-            </a:r>
+              <a:t>Model performance metrics - regression</a:t>
+            </a:r>
+          </a:p>
+        </p:txBody>
+      </p:sp>
+      <p:sp>
+        <p:nvSpPr>
+          <p:cNvPr id="3" name="Content Placeholder 2">
+            <a:extLst>
+              <a:ext uri="{FF2B5EF4-FFF2-40B4-BE49-F238E27FC236}">
+                <a16:creationId xmlns:a16="http://schemas.microsoft.com/office/drawing/2014/main" id="{5F5DD50A-DB67-C2B7-4EDC-A5B5745F4E78}"/>
+              </a:ext>
+            </a:extLst>
+          </p:cNvPr>
+          <p:cNvSpPr>
+            <a:spLocks noGrp="1"/>
+          </p:cNvSpPr>
+          <p:nvPr>
+            <p:ph idx="1"/>
+          </p:nvPr>
+        </p:nvSpPr>
+        <p:spPr/>
+        <p:txBody>
+          <a:bodyPr>
+            <a:normAutofit lnSpcReduction="10000"/>
+          </a:bodyPr>
+          <a:lstStyle/>
+          <a:p>
             <a:r>
               <a:rPr lang="en-US" dirty="0"/>
-              <a:t>evaluate your model with an </a:t>
-            </a:r>
-            <a:r>
-              <a:rPr lang="en-US" b="1" dirty="0"/>
-              <a:t>independent test set</a:t>
-            </a:r>
-            <a:endParaRPr lang="en-US" b="1" i="1" dirty="0"/>
-          </a:p>
-        </p:txBody>
-      </p:sp>
-      <p:sp>
-        <p:nvSpPr>
-          <p:cNvPr id="3" name="Content Placeholder 2">
-            <a:extLst>
-              <a:ext uri="{FF2B5EF4-FFF2-40B4-BE49-F238E27FC236}">
-                <a16:creationId xmlns:a16="http://schemas.microsoft.com/office/drawing/2014/main" id="{E86D81AE-EEF4-2FD6-10E6-7E3EC20FFF97}"/>
-              </a:ext>
-            </a:extLst>
-          </p:cNvPr>
-          <p:cNvSpPr>
-            <a:spLocks noGrp="1"/>
-          </p:cNvSpPr>
-          <p:nvPr>
-            <p:ph idx="1"/>
-          </p:nvPr>
-        </p:nvSpPr>
-        <p:spPr/>
-        <p:txBody>
-          <a:bodyPr/>
-          <a:lstStyle/>
+              <a:t>INSERT figure that shows observed vs predicted with some variability, to kick off the slide of how we measure the accuracy of the predictions</a:t>
+            </a:r>
+          </a:p>
+          <a:p>
+            <a:r>
+              <a:rPr lang="en-US" dirty="0"/>
+              <a:t>RMSE is very common, many others</a:t>
+            </a:r>
+          </a:p>
           <a:p>
             <a:pPr marL="0" indent="0">
               <a:buNone/>
             </a:pPr>
+            <a:endParaRPr lang="en-US" dirty="0"/>
+          </a:p>
+          <a:p>
+            <a:pPr marL="0" indent="0">
+              <a:buNone/>
+            </a:pPr>
             <a:r>
               <a:rPr lang="en-US" dirty="0"/>
-              <a:t>The simplest option is to:</a:t>
-            </a:r>
-          </a:p>
-          <a:p>
+              <a:t>$$ RMSE = \sqrt{ \frac{\sum (observed - predicted)^2 }{n} } $$</a:t>
+            </a:r>
+          </a:p>
+          <a:p>
+            <a:pPr marL="0" indent="0">
+              <a:buNone/>
+            </a:pPr>
+            <a:endParaRPr lang="en-US" dirty="0"/>
+          </a:p>
+          <a:p>
+            <a:pPr marL="0" indent="0">
+              <a:buNone/>
+            </a:pPr>
             <a:r>
               <a:rPr lang="en-US" dirty="0"/>
-              <a:t>Hold out 20% of your dataset as the </a:t>
-            </a:r>
-            <a:r>
-              <a:rPr lang="en-US" b="1" dirty="0"/>
-              <a:t>test set</a:t>
-            </a:r>
-          </a:p>
-          <a:p>
+              <a:t>It's related to $R^2$: $$ R^2 = 1 - \frac{RMSE^2}{Var(y)}$$</a:t>
+            </a:r>
+          </a:p>
+          <a:p>
+            <a:pPr marL="0" indent="0">
+              <a:buNone/>
+            </a:pPr>
             <a:r>
               <a:rPr lang="en-US" dirty="0"/>
-              <a:t>Train your model on the 80% </a:t>
-            </a:r>
-            <a:r>
-              <a:rPr lang="en-US" b="1" dirty="0"/>
-              <a:t>training set</a:t>
-            </a:r>
-          </a:p>
-          <a:p>
-            <a:r>
-              <a:rPr lang="en-US" dirty="0"/>
-              <a:t>Calculate performance metrics on the test set</a:t>
-            </a:r>
-          </a:p>
-          <a:p>
+              <a:t>Typically, $R^2$ is calculated on **training data**, and $RMSE$ is calculated on a **test set**.</a:t>
+            </a:r>
+          </a:p>
+          <a:p>
+            <a:pPr marL="0" indent="0">
+              <a:buNone/>
+            </a:pPr>
             <a:endParaRPr lang="en-US" dirty="0"/>
           </a:p>
-        </p:txBody>
-      </p:sp>
-      <p:sp>
-        <p:nvSpPr>
-          <p:cNvPr id="4" name="TextBox 3">
-            <a:extLst>
-              <a:ext uri="{FF2B5EF4-FFF2-40B4-BE49-F238E27FC236}">
-                <a16:creationId xmlns:a16="http://schemas.microsoft.com/office/drawing/2014/main" id="{53866A68-2498-F3B1-38FB-4AE0B2236D18}"/>
-              </a:ext>
-            </a:extLst>
-          </p:cNvPr>
-          <p:cNvSpPr txBox="1"/>
-          <p:nvPr/>
-        </p:nvSpPr>
-        <p:spPr>
-          <a:xfrm>
-            <a:off x="5572772" y="6169709"/>
-            <a:ext cx="7116939" cy="646331"/>
-          </a:xfrm>
-          <a:prstGeom prst="rect">
-            <a:avLst/>
-          </a:prstGeom>
-          <a:noFill/>
-        </p:spPr>
-        <p:txBody>
-          <a:bodyPr wrap="square" rtlCol="0">
-            <a:spAutoFit/>
-          </a:bodyPr>
-          <a:lstStyle/>
-          <a:p>
-            <a:r>
-              <a:rPr lang="en-US" dirty="0"/>
-              <a:t>Sometimes, sample size makes this impractical or requires alternatives for a specific application...we'll talk about those later.</a:t>
-            </a:r>
-          </a:p>
-        </p:txBody>
-      </p:sp>
-      <p:sp>
-        <p:nvSpPr>
-          <p:cNvPr id="5" name="TextBox 4">
-            <a:extLst>
-              <a:ext uri="{FF2B5EF4-FFF2-40B4-BE49-F238E27FC236}">
-                <a16:creationId xmlns:a16="http://schemas.microsoft.com/office/drawing/2014/main" id="{DEBA9765-44B7-8C47-2DB8-F54935B27004}"/>
-              </a:ext>
-            </a:extLst>
-          </p:cNvPr>
-          <p:cNvSpPr txBox="1"/>
-          <p:nvPr/>
-        </p:nvSpPr>
-        <p:spPr>
-          <a:xfrm>
-            <a:off x="1319514" y="4676172"/>
-            <a:ext cx="2591607" cy="461665"/>
-          </a:xfrm>
-          <a:prstGeom prst="rect">
-            <a:avLst/>
-          </a:prstGeom>
-          <a:noFill/>
-        </p:spPr>
-        <p:txBody>
-          <a:bodyPr wrap="none" rtlCol="0">
-            <a:spAutoFit/>
-          </a:bodyPr>
-          <a:lstStyle/>
-          <a:p>
-            <a:r>
-              <a:rPr lang="en-US" sz="2400" b="1" dirty="0"/>
-              <a:t>INSERT GRAPHIC</a:t>
-            </a:r>
+          <a:p>
+            <a:endParaRPr lang="en-US" dirty="0"/>
           </a:p>
         </p:txBody>
       </p:sp>
     </p:spTree>
     <p:extLst>
       <p:ext uri="{BB962C8B-B14F-4D97-AF65-F5344CB8AC3E}">
-        <p14:creationId xmlns:p14="http://schemas.microsoft.com/office/powerpoint/2010/main" val="63385871"/>
+        <p14:creationId xmlns:p14="http://schemas.microsoft.com/office/powerpoint/2010/main" val="1115218904"/>
       </p:ext>
     </p:extLst>
   </p:cSld>
@@ -5873,7 +8921,7 @@
           <p:cNvPr id="2" name="Title 1">
             <a:extLst>
               <a:ext uri="{FF2B5EF4-FFF2-40B4-BE49-F238E27FC236}">
-                <a16:creationId xmlns:a16="http://schemas.microsoft.com/office/drawing/2014/main" id="{92A64831-9647-66C8-2A0D-733435F4DF19}"/>
+                <a16:creationId xmlns:a16="http://schemas.microsoft.com/office/drawing/2014/main" id="{095E95B8-4A71-743D-70FA-DCBDB3356D8F}"/>
               </a:ext>
             </a:extLst>
           </p:cNvPr>
@@ -5889,10 +8937,7 @@
           <a:bodyPr/>
           <a:lstStyle/>
           <a:p>
-            <a:r>
-              <a:rPr lang="en-US" dirty="0"/>
-              <a:t>K-fold cross-validation</a:t>
-            </a:r>
+            <a:endParaRPr lang="en-US" dirty="0"/>
           </a:p>
         </p:txBody>
       </p:sp>
@@ -5901,7 +8946,7 @@
           <p:cNvPr id="3" name="Content Placeholder 2">
             <a:extLst>
               <a:ext uri="{FF2B5EF4-FFF2-40B4-BE49-F238E27FC236}">
-                <a16:creationId xmlns:a16="http://schemas.microsoft.com/office/drawing/2014/main" id="{F3B4B68D-001C-0E24-5F1A-4F72F1B64A72}"/>
+                <a16:creationId xmlns:a16="http://schemas.microsoft.com/office/drawing/2014/main" id="{B630D6EF-15BD-BE47-CDCA-566FDE878BE6}"/>
               </a:ext>
             </a:extLst>
           </p:cNvPr>
@@ -5914,120 +8959,20 @@
         </p:nvSpPr>
         <p:spPr/>
         <p:txBody>
-          <a:bodyPr>
-            <a:normAutofit fontScale="85000" lnSpcReduction="20000"/>
-          </a:bodyPr>
-          <a:lstStyle/>
-          <a:p>
-            <a:pPr marL="0" indent="0">
-              <a:buNone/>
-            </a:pPr>
-            <a:r>
-              <a:rPr lang="en-US" dirty="0"/>
-              <a:t>Another common way to evaluate a model is via k-fold cross validation.</a:t>
-            </a:r>
-          </a:p>
+          <a:bodyPr/>
+          <a:lstStyle/>
           <a:p>
             <a:pPr marL="0" indent="0">
               <a:buNone/>
             </a:pPr>
             <a:endParaRPr lang="en-US" dirty="0"/>
-          </a:p>
-          <a:p>
-            <a:pPr marL="0" indent="0">
-              <a:buNone/>
-            </a:pPr>
-            <a:r>
-              <a:rPr lang="en-US" b="1" dirty="0"/>
-              <a:t>INSERT GRAPHIC FOR EXPLANATION</a:t>
-            </a:r>
-          </a:p>
-          <a:p>
-            <a:pPr marL="0" indent="0">
-              <a:buNone/>
-            </a:pPr>
-            <a:endParaRPr lang="en-US" dirty="0"/>
-          </a:p>
-          <a:p>
-            <a:pPr marL="0" indent="0">
-              <a:buNone/>
-            </a:pPr>
-            <a:r>
-              <a:rPr lang="en-US" dirty="0"/>
-              <a:t>If `k = 10`, you train a model using a randomized 90% of the data, then evaluate it on the remaining 10%. Repeat this for 10 "folds" of the data, then take the average&lt;sup&gt;*&lt;/sup&gt; performance across the ten folds.</a:t>
-            </a:r>
-          </a:p>
-          <a:p>
-            <a:pPr marL="0" indent="0">
-              <a:buNone/>
-            </a:pPr>
-            <a:endParaRPr lang="en-US" dirty="0"/>
-          </a:p>
-          <a:p>
-            <a:pPr marL="0" indent="0">
-              <a:buNone/>
-            </a:pPr>
-            <a:r>
-              <a:rPr lang="en-US" dirty="0"/>
-              <a:t>This way, every row in the dataset is evaluated in one test set.</a:t>
-            </a:r>
-          </a:p>
-          <a:p>
-            <a:pPr marL="0" indent="0">
-              <a:buNone/>
-            </a:pPr>
-            <a:endParaRPr lang="en-US" dirty="0"/>
-          </a:p>
-          <a:p>
-            <a:pPr marL="0" indent="0">
-              <a:buNone/>
-            </a:pPr>
-            <a:r>
-              <a:rPr lang="en-US" dirty="0"/>
-              <a:t>Leave-one-out cross-validation is when `k = # of rows`, is very useful but sometimes too computationally heavy, since you have to train k models.</a:t>
-            </a:r>
-          </a:p>
-        </p:txBody>
-      </p:sp>
-      <p:sp>
-        <p:nvSpPr>
-          <p:cNvPr id="4" name="TextBox 3">
-            <a:extLst>
-              <a:ext uri="{FF2B5EF4-FFF2-40B4-BE49-F238E27FC236}">
-                <a16:creationId xmlns:a16="http://schemas.microsoft.com/office/drawing/2014/main" id="{48E41563-C349-12D7-E220-408A66F6861A}"/>
-              </a:ext>
-            </a:extLst>
-          </p:cNvPr>
-          <p:cNvSpPr txBox="1"/>
-          <p:nvPr/>
-        </p:nvSpPr>
-        <p:spPr>
-          <a:xfrm>
-            <a:off x="4930815" y="6211669"/>
-            <a:ext cx="7349925" cy="646331"/>
-          </a:xfrm>
-          <a:prstGeom prst="rect">
-            <a:avLst/>
-          </a:prstGeom>
-          <a:noFill/>
-        </p:spPr>
-        <p:txBody>
-          <a:bodyPr wrap="square" rtlCol="0">
-            <a:spAutoFit/>
-          </a:bodyPr>
-          <a:lstStyle/>
-          <a:p>
-            <a:r>
-              <a:rPr lang="en-US" dirty="0"/>
-              <a:t>Summarizing a performance across folds is typically done using the arithmetic mean but could be summarized in a number of relevant ways.</a:t>
-            </a:r>
           </a:p>
         </p:txBody>
       </p:sp>
     </p:spTree>
     <p:extLst>
       <p:ext uri="{BB962C8B-B14F-4D97-AF65-F5344CB8AC3E}">
-        <p14:creationId xmlns:p14="http://schemas.microsoft.com/office/powerpoint/2010/main" val="1699236919"/>
+        <p14:creationId xmlns:p14="http://schemas.microsoft.com/office/powerpoint/2010/main" val="1027895095"/>
       </p:ext>
     </p:extLst>
   </p:cSld>

--- a/slides/02_model_eval_cv.pptx
+++ b/slides/02_model_eval_cv.pptx
@@ -5,7 +5,7 @@
     <p:sldMasterId id="2147483648" r:id="rId1"/>
   </p:sldMasterIdLst>
   <p:notesMasterIdLst>
-    <p:notesMasterId r:id="rId58"/>
+    <p:notesMasterId r:id="rId53"/>
   </p:notesMasterIdLst>
   <p:sldIdLst>
     <p:sldId id="256" r:id="rId2"/>
@@ -22,48 +22,43 @@
     <p:sldId id="293" r:id="rId13"/>
     <p:sldId id="291" r:id="rId14"/>
     <p:sldId id="290" r:id="rId15"/>
-    <p:sldId id="260" r:id="rId16"/>
-    <p:sldId id="296" r:id="rId17"/>
-    <p:sldId id="311" r:id="rId18"/>
-    <p:sldId id="310" r:id="rId19"/>
-    <p:sldId id="309" r:id="rId20"/>
-    <p:sldId id="313" r:id="rId21"/>
-    <p:sldId id="299" r:id="rId22"/>
-    <p:sldId id="317" r:id="rId23"/>
-    <p:sldId id="316" r:id="rId24"/>
-    <p:sldId id="261" r:id="rId25"/>
-    <p:sldId id="318" r:id="rId26"/>
-    <p:sldId id="319" r:id="rId27"/>
-    <p:sldId id="308" r:id="rId28"/>
-    <p:sldId id="321" r:id="rId29"/>
-    <p:sldId id="323" r:id="rId30"/>
-    <p:sldId id="322" r:id="rId31"/>
-    <p:sldId id="324" r:id="rId32"/>
-    <p:sldId id="300" r:id="rId33"/>
-    <p:sldId id="301" r:id="rId34"/>
-    <p:sldId id="263" r:id="rId35"/>
-    <p:sldId id="264" r:id="rId36"/>
-    <p:sldId id="265" r:id="rId37"/>
-    <p:sldId id="303" r:id="rId38"/>
-    <p:sldId id="302" r:id="rId39"/>
-    <p:sldId id="266" r:id="rId40"/>
-    <p:sldId id="305" r:id="rId41"/>
-    <p:sldId id="304" r:id="rId42"/>
-    <p:sldId id="307" r:id="rId43"/>
-    <p:sldId id="267" r:id="rId44"/>
-    <p:sldId id="272" r:id="rId45"/>
-    <p:sldId id="274" r:id="rId46"/>
-    <p:sldId id="273" r:id="rId47"/>
-    <p:sldId id="275" r:id="rId48"/>
-    <p:sldId id="278" r:id="rId49"/>
-    <p:sldId id="282" r:id="rId50"/>
-    <p:sldId id="281" r:id="rId51"/>
-    <p:sldId id="280" r:id="rId52"/>
-    <p:sldId id="279" r:id="rId53"/>
-    <p:sldId id="271" r:id="rId54"/>
-    <p:sldId id="320" r:id="rId55"/>
-    <p:sldId id="268" r:id="rId56"/>
-    <p:sldId id="269" r:id="rId57"/>
+    <p:sldId id="296" r:id="rId16"/>
+    <p:sldId id="311" r:id="rId17"/>
+    <p:sldId id="310" r:id="rId18"/>
+    <p:sldId id="309" r:id="rId19"/>
+    <p:sldId id="313" r:id="rId20"/>
+    <p:sldId id="299" r:id="rId21"/>
+    <p:sldId id="317" r:id="rId22"/>
+    <p:sldId id="316" r:id="rId23"/>
+    <p:sldId id="261" r:id="rId24"/>
+    <p:sldId id="318" r:id="rId25"/>
+    <p:sldId id="319" r:id="rId26"/>
+    <p:sldId id="321" r:id="rId27"/>
+    <p:sldId id="323" r:id="rId28"/>
+    <p:sldId id="322" r:id="rId29"/>
+    <p:sldId id="324" r:id="rId30"/>
+    <p:sldId id="300" r:id="rId31"/>
+    <p:sldId id="301" r:id="rId32"/>
+    <p:sldId id="263" r:id="rId33"/>
+    <p:sldId id="264" r:id="rId34"/>
+    <p:sldId id="265" r:id="rId35"/>
+    <p:sldId id="303" r:id="rId36"/>
+    <p:sldId id="302" r:id="rId37"/>
+    <p:sldId id="266" r:id="rId38"/>
+    <p:sldId id="305" r:id="rId39"/>
+    <p:sldId id="304" r:id="rId40"/>
+    <p:sldId id="307" r:id="rId41"/>
+    <p:sldId id="272" r:id="rId42"/>
+    <p:sldId id="274" r:id="rId43"/>
+    <p:sldId id="273" r:id="rId44"/>
+    <p:sldId id="275" r:id="rId45"/>
+    <p:sldId id="278" r:id="rId46"/>
+    <p:sldId id="282" r:id="rId47"/>
+    <p:sldId id="281" r:id="rId48"/>
+    <p:sldId id="280" r:id="rId49"/>
+    <p:sldId id="279" r:id="rId50"/>
+    <p:sldId id="320" r:id="rId51"/>
+    <p:sldId id="269" r:id="rId52"/>
   </p:sldIdLst>
   <p:sldSz cx="12192000" cy="6858000"/>
   <p:notesSz cx="6858000" cy="9144000"/>
@@ -258,7 +253,7 @@
           <a:p>
             <a:fld id="{61DD8851-E0C4-5646-8CC5-734891EC49CD}" type="datetimeFigureOut">
               <a:rPr lang="en-US" smtClean="0"/>
-              <a:t>4/15/26</a:t>
+              <a:t>5/4/26</a:t>
             </a:fld>
             <a:endParaRPr lang="en-US"/>
           </a:p>
@@ -938,132 +933,6 @@
   <p:cSld>
     <p:spTree>
       <p:nvGrpSpPr>
-        <p:cNvPr id="1" name=""/>
-        <p:cNvGrpSpPr/>
-        <p:nvPr/>
-      </p:nvGrpSpPr>
-      <p:grpSpPr>
-        <a:xfrm>
-          <a:off x="0" y="0"/>
-          <a:ext cx="0" cy="0"/>
-          <a:chOff x="0" y="0"/>
-          <a:chExt cx="0" cy="0"/>
-        </a:xfrm>
-      </p:grpSpPr>
-      <p:sp>
-        <p:nvSpPr>
-          <p:cNvPr id="2" name="Slide Image Placeholder 1"/>
-          <p:cNvSpPr>
-            <a:spLocks noGrp="1" noRot="1" noChangeAspect="1"/>
-          </p:cNvSpPr>
-          <p:nvPr>
-            <p:ph type="sldImg"/>
-          </p:nvPr>
-        </p:nvSpPr>
-        <p:spPr/>
-      </p:sp>
-      <p:sp>
-        <p:nvSpPr>
-          <p:cNvPr id="3" name="Notes Placeholder 2"/>
-          <p:cNvSpPr>
-            <a:spLocks noGrp="1"/>
-          </p:cNvSpPr>
-          <p:nvPr>
-            <p:ph type="body" idx="1"/>
-          </p:nvPr>
-        </p:nvSpPr>
-        <p:spPr/>
-        <p:txBody>
-          <a:bodyPr/>
-          <a:lstStyle/>
-          <a:p>
-            <a:pPr marL="0" indent="0">
-              <a:buNone/>
-            </a:pPr>
-            <a:r>
-              <a:rPr lang="en-US" dirty="0"/>
-              <a:t>[*] [stack exchange discussion on RMSE and R-squared](https://</a:t>
-            </a:r>
-            <a:r>
-              <a:rPr lang="en-US" dirty="0" err="1"/>
-              <a:t>datascience.stackexchange.com</a:t>
-            </a:r>
-            <a:r>
-              <a:rPr lang="en-US" dirty="0"/>
-              <a:t>/questions/100605/</a:t>
-            </a:r>
-            <a:r>
-              <a:rPr lang="en-US" dirty="0" err="1"/>
-              <a:t>rmse</a:t>
-            </a:r>
-            <a:r>
-              <a:rPr lang="en-US" dirty="0"/>
-              <a:t>-vs-r-squared)</a:t>
-            </a:r>
-          </a:p>
-          <a:p>
-            <a:pPr marL="0" indent="0">
-              <a:buNone/>
-            </a:pPr>
-            <a:r>
-              <a:rPr lang="en-US" dirty="0"/>
-              <a:t>  [**] [link to article with many other evaluation metrics](https://</a:t>
-            </a:r>
-            <a:r>
-              <a:rPr lang="en-US" dirty="0" err="1"/>
-              <a:t>towardsai.net</a:t>
-            </a:r>
-            <a:r>
-              <a:rPr lang="en-US" dirty="0"/>
-              <a:t>/p/artificial-intelligence/the-essential-guide-to-ml-evaluation-metrics-for-regression)</a:t>
-            </a:r>
-          </a:p>
-          <a:p>
-            <a:endParaRPr lang="en-US" dirty="0"/>
-          </a:p>
-        </p:txBody>
-      </p:sp>
-      <p:sp>
-        <p:nvSpPr>
-          <p:cNvPr id="4" name="Slide Number Placeholder 3"/>
-          <p:cNvSpPr>
-            <a:spLocks noGrp="1"/>
-          </p:cNvSpPr>
-          <p:nvPr>
-            <p:ph type="sldNum" sz="quarter" idx="5"/>
-          </p:nvPr>
-        </p:nvSpPr>
-        <p:spPr/>
-        <p:txBody>
-          <a:bodyPr/>
-          <a:lstStyle/>
-          <a:p>
-            <a:fld id="{D8330999-8BAC-FF4E-BF5A-F75E56417DB6}" type="slidenum">
-              <a:rPr lang="en-US" smtClean="0"/>
-              <a:t>15</a:t>
-            </a:fld>
-            <a:endParaRPr lang="en-US"/>
-          </a:p>
-        </p:txBody>
-      </p:sp>
-    </p:spTree>
-    <p:extLst>
-      <p:ext uri="{BB962C8B-B14F-4D97-AF65-F5344CB8AC3E}">
-        <p14:creationId xmlns:p14="http://schemas.microsoft.com/office/powerpoint/2010/main" val="3457495311"/>
-      </p:ext>
-    </p:extLst>
-  </p:cSld>
-  <p:clrMapOvr>
-    <a:masterClrMapping/>
-  </p:clrMapOvr>
-</p:notes>
-</file>
-
-<file path=ppt/notesSlides/notesSlide14.xml><?xml version="1.0" encoding="utf-8"?>
-<p:notes xmlns:a="http://schemas.openxmlformats.org/drawingml/2006/main" xmlns:r="http://schemas.openxmlformats.org/officeDocument/2006/relationships" xmlns:p="http://schemas.openxmlformats.org/presentationml/2006/main">
-  <p:cSld>
-    <p:spTree>
-      <p:nvGrpSpPr>
         <p:cNvPr id="1" name="">
           <a:extLst>
             <a:ext uri="{FF2B5EF4-FFF2-40B4-BE49-F238E27FC236}">
@@ -1190,7 +1059,7 @@
           <a:p>
             <a:fld id="{D8330999-8BAC-FF4E-BF5A-F75E56417DB6}" type="slidenum">
               <a:rPr lang="en-US" smtClean="0"/>
-              <a:t>16</a:t>
+              <a:t>15</a:t>
             </a:fld>
             <a:endParaRPr lang="en-US"/>
           </a:p>
@@ -1209,7 +1078,7 @@
 </p:notes>
 </file>
 
-<file path=ppt/notesSlides/notesSlide15.xml><?xml version="1.0" encoding="utf-8"?>
+<file path=ppt/notesSlides/notesSlide14.xml><?xml version="1.0" encoding="utf-8"?>
 <p:notes xmlns:a="http://schemas.openxmlformats.org/drawingml/2006/main" xmlns:r="http://schemas.openxmlformats.org/officeDocument/2006/relationships" xmlns:p="http://schemas.openxmlformats.org/presentationml/2006/main">
   <p:cSld>
     <p:spTree>
@@ -1340,7 +1209,7 @@
           <a:p>
             <a:fld id="{D8330999-8BAC-FF4E-BF5A-F75E56417DB6}" type="slidenum">
               <a:rPr lang="en-US" smtClean="0"/>
-              <a:t>17</a:t>
+              <a:t>16</a:t>
             </a:fld>
             <a:endParaRPr lang="en-US"/>
           </a:p>
@@ -1359,7 +1228,7 @@
 </p:notes>
 </file>
 
-<file path=ppt/notesSlides/notesSlide16.xml><?xml version="1.0" encoding="utf-8"?>
+<file path=ppt/notesSlides/notesSlide15.xml><?xml version="1.0" encoding="utf-8"?>
 <p:notes xmlns:a="http://schemas.openxmlformats.org/drawingml/2006/main" xmlns:r="http://schemas.openxmlformats.org/officeDocument/2006/relationships" xmlns:p="http://schemas.openxmlformats.org/presentationml/2006/main">
   <p:cSld>
     <p:spTree>
@@ -1490,7 +1359,7 @@
           <a:p>
             <a:fld id="{D8330999-8BAC-FF4E-BF5A-F75E56417DB6}" type="slidenum">
               <a:rPr lang="en-US" smtClean="0"/>
-              <a:t>18</a:t>
+              <a:t>17</a:t>
             </a:fld>
             <a:endParaRPr lang="en-US"/>
           </a:p>
@@ -1509,7 +1378,7 @@
 </p:notes>
 </file>
 
-<file path=ppt/notesSlides/notesSlide17.xml><?xml version="1.0" encoding="utf-8"?>
+<file path=ppt/notesSlides/notesSlide16.xml><?xml version="1.0" encoding="utf-8"?>
 <p:notes xmlns:a="http://schemas.openxmlformats.org/drawingml/2006/main" xmlns:r="http://schemas.openxmlformats.org/officeDocument/2006/relationships" xmlns:p="http://schemas.openxmlformats.org/presentationml/2006/main">
   <p:cSld>
     <p:spTree>
@@ -1640,7 +1509,7 @@
           <a:p>
             <a:fld id="{D8330999-8BAC-FF4E-BF5A-F75E56417DB6}" type="slidenum">
               <a:rPr lang="en-US" smtClean="0"/>
-              <a:t>19</a:t>
+              <a:t>18</a:t>
             </a:fld>
             <a:endParaRPr lang="en-US"/>
           </a:p>
@@ -1659,7 +1528,7 @@
 </p:notes>
 </file>
 
-<file path=ppt/notesSlides/notesSlide18.xml><?xml version="1.0" encoding="utf-8"?>
+<file path=ppt/notesSlides/notesSlide17.xml><?xml version="1.0" encoding="utf-8"?>
 <p:notes xmlns:a="http://schemas.openxmlformats.org/drawingml/2006/main" xmlns:r="http://schemas.openxmlformats.org/officeDocument/2006/relationships" xmlns:p="http://schemas.openxmlformats.org/presentationml/2006/main">
   <p:cSld>
     <p:spTree>
@@ -1790,7 +1659,7 @@
           <a:p>
             <a:fld id="{D8330999-8BAC-FF4E-BF5A-F75E56417DB6}" type="slidenum">
               <a:rPr lang="en-US" smtClean="0"/>
-              <a:t>20</a:t>
+              <a:t>19</a:t>
             </a:fld>
             <a:endParaRPr lang="en-US"/>
           </a:p>
@@ -1809,7 +1678,7 @@
 </p:notes>
 </file>
 
-<file path=ppt/notesSlides/notesSlide19.xml><?xml version="1.0" encoding="utf-8"?>
+<file path=ppt/notesSlides/notesSlide18.xml><?xml version="1.0" encoding="utf-8"?>
 <p:notes xmlns:a="http://schemas.openxmlformats.org/drawingml/2006/main" xmlns:r="http://schemas.openxmlformats.org/officeDocument/2006/relationships" xmlns:p="http://schemas.openxmlformats.org/presentationml/2006/main">
   <p:cSld>
     <p:spTree>
@@ -1898,7 +1767,7 @@
           <a:p>
             <a:fld id="{D8330999-8BAC-FF4E-BF5A-F75E56417DB6}" type="slidenum">
               <a:rPr lang="en-US" smtClean="0"/>
-              <a:t>28</a:t>
+              <a:t>26</a:t>
             </a:fld>
             <a:endParaRPr lang="en-US"/>
           </a:p>
@@ -1908,6 +1777,114 @@
     <p:extLst>
       <p:ext uri="{BB962C8B-B14F-4D97-AF65-F5344CB8AC3E}">
         <p14:creationId xmlns:p14="http://schemas.microsoft.com/office/powerpoint/2010/main" val="1809856218"/>
+      </p:ext>
+    </p:extLst>
+  </p:cSld>
+  <p:clrMapOvr>
+    <a:masterClrMapping/>
+  </p:clrMapOvr>
+</p:notes>
+</file>
+
+<file path=ppt/notesSlides/notesSlide19.xml><?xml version="1.0" encoding="utf-8"?>
+<p:notes xmlns:a="http://schemas.openxmlformats.org/drawingml/2006/main" xmlns:r="http://schemas.openxmlformats.org/officeDocument/2006/relationships" xmlns:p="http://schemas.openxmlformats.org/presentationml/2006/main">
+  <p:cSld>
+    <p:spTree>
+      <p:nvGrpSpPr>
+        <p:cNvPr id="1" name="">
+          <a:extLst>
+            <a:ext uri="{FF2B5EF4-FFF2-40B4-BE49-F238E27FC236}">
+              <a16:creationId xmlns:a16="http://schemas.microsoft.com/office/drawing/2014/main" id="{052FF78D-67C9-768E-20F3-4D2E995FDC2F}"/>
+            </a:ext>
+          </a:extLst>
+        </p:cNvPr>
+        <p:cNvGrpSpPr/>
+        <p:nvPr/>
+      </p:nvGrpSpPr>
+      <p:grpSpPr>
+        <a:xfrm>
+          <a:off x="0" y="0"/>
+          <a:ext cx="0" cy="0"/>
+          <a:chOff x="0" y="0"/>
+          <a:chExt cx="0" cy="0"/>
+        </a:xfrm>
+      </p:grpSpPr>
+      <p:sp>
+        <p:nvSpPr>
+          <p:cNvPr id="2" name="Slide Image Placeholder 1">
+            <a:extLst>
+              <a:ext uri="{FF2B5EF4-FFF2-40B4-BE49-F238E27FC236}">
+                <a16:creationId xmlns:a16="http://schemas.microsoft.com/office/drawing/2014/main" id="{3C178877-D8DC-7198-7794-26419EF22030}"/>
+              </a:ext>
+            </a:extLst>
+          </p:cNvPr>
+          <p:cNvSpPr>
+            <a:spLocks noGrp="1" noRot="1" noChangeAspect="1"/>
+          </p:cNvSpPr>
+          <p:nvPr>
+            <p:ph type="sldImg"/>
+          </p:nvPr>
+        </p:nvSpPr>
+        <p:spPr/>
+      </p:sp>
+      <p:sp>
+        <p:nvSpPr>
+          <p:cNvPr id="3" name="Notes Placeholder 2">
+            <a:extLst>
+              <a:ext uri="{FF2B5EF4-FFF2-40B4-BE49-F238E27FC236}">
+                <a16:creationId xmlns:a16="http://schemas.microsoft.com/office/drawing/2014/main" id="{D72DE60F-B6CC-B001-199E-BA2FC56556F5}"/>
+              </a:ext>
+            </a:extLst>
+          </p:cNvPr>
+          <p:cNvSpPr>
+            <a:spLocks noGrp="1"/>
+          </p:cNvSpPr>
+          <p:nvPr>
+            <p:ph type="body" idx="1"/>
+          </p:nvPr>
+        </p:nvSpPr>
+        <p:spPr/>
+        <p:txBody>
+          <a:bodyPr/>
+          <a:lstStyle/>
+          <a:p>
+            <a:endParaRPr lang="en-US" dirty="0"/>
+          </a:p>
+        </p:txBody>
+      </p:sp>
+      <p:sp>
+        <p:nvSpPr>
+          <p:cNvPr id="4" name="Slide Number Placeholder 3">
+            <a:extLst>
+              <a:ext uri="{FF2B5EF4-FFF2-40B4-BE49-F238E27FC236}">
+                <a16:creationId xmlns:a16="http://schemas.microsoft.com/office/drawing/2014/main" id="{948CA6D9-9B12-B272-C6C1-03B113E167F6}"/>
+              </a:ext>
+            </a:extLst>
+          </p:cNvPr>
+          <p:cNvSpPr>
+            <a:spLocks noGrp="1"/>
+          </p:cNvSpPr>
+          <p:nvPr>
+            <p:ph type="sldNum" sz="quarter" idx="5"/>
+          </p:nvPr>
+        </p:nvSpPr>
+        <p:spPr/>
+        <p:txBody>
+          <a:bodyPr/>
+          <a:lstStyle/>
+          <a:p>
+            <a:fld id="{D8330999-8BAC-FF4E-BF5A-F75E56417DB6}" type="slidenum">
+              <a:rPr lang="en-US" smtClean="0"/>
+              <a:t>27</a:t>
+            </a:fld>
+            <a:endParaRPr lang="en-US"/>
+          </a:p>
+        </p:txBody>
+      </p:sp>
+    </p:spTree>
+    <p:extLst>
+      <p:ext uri="{BB962C8B-B14F-4D97-AF65-F5344CB8AC3E}">
+        <p14:creationId xmlns:p14="http://schemas.microsoft.com/office/powerpoint/2010/main" val="3470339531"/>
       </p:ext>
     </p:extLst>
   </p:cSld>
@@ -2042,114 +2019,6 @@
         <p:cNvPr id="1" name="">
           <a:extLst>
             <a:ext uri="{FF2B5EF4-FFF2-40B4-BE49-F238E27FC236}">
-              <a16:creationId xmlns:a16="http://schemas.microsoft.com/office/drawing/2014/main" id="{052FF78D-67C9-768E-20F3-4D2E995FDC2F}"/>
-            </a:ext>
-          </a:extLst>
-        </p:cNvPr>
-        <p:cNvGrpSpPr/>
-        <p:nvPr/>
-      </p:nvGrpSpPr>
-      <p:grpSpPr>
-        <a:xfrm>
-          <a:off x="0" y="0"/>
-          <a:ext cx="0" cy="0"/>
-          <a:chOff x="0" y="0"/>
-          <a:chExt cx="0" cy="0"/>
-        </a:xfrm>
-      </p:grpSpPr>
-      <p:sp>
-        <p:nvSpPr>
-          <p:cNvPr id="2" name="Slide Image Placeholder 1">
-            <a:extLst>
-              <a:ext uri="{FF2B5EF4-FFF2-40B4-BE49-F238E27FC236}">
-                <a16:creationId xmlns:a16="http://schemas.microsoft.com/office/drawing/2014/main" id="{3C178877-D8DC-7198-7794-26419EF22030}"/>
-              </a:ext>
-            </a:extLst>
-          </p:cNvPr>
-          <p:cNvSpPr>
-            <a:spLocks noGrp="1" noRot="1" noChangeAspect="1"/>
-          </p:cNvSpPr>
-          <p:nvPr>
-            <p:ph type="sldImg"/>
-          </p:nvPr>
-        </p:nvSpPr>
-        <p:spPr/>
-      </p:sp>
-      <p:sp>
-        <p:nvSpPr>
-          <p:cNvPr id="3" name="Notes Placeholder 2">
-            <a:extLst>
-              <a:ext uri="{FF2B5EF4-FFF2-40B4-BE49-F238E27FC236}">
-                <a16:creationId xmlns:a16="http://schemas.microsoft.com/office/drawing/2014/main" id="{D72DE60F-B6CC-B001-199E-BA2FC56556F5}"/>
-              </a:ext>
-            </a:extLst>
-          </p:cNvPr>
-          <p:cNvSpPr>
-            <a:spLocks noGrp="1"/>
-          </p:cNvSpPr>
-          <p:nvPr>
-            <p:ph type="body" idx="1"/>
-          </p:nvPr>
-        </p:nvSpPr>
-        <p:spPr/>
-        <p:txBody>
-          <a:bodyPr/>
-          <a:lstStyle/>
-          <a:p>
-            <a:endParaRPr lang="en-US" dirty="0"/>
-          </a:p>
-        </p:txBody>
-      </p:sp>
-      <p:sp>
-        <p:nvSpPr>
-          <p:cNvPr id="4" name="Slide Number Placeholder 3">
-            <a:extLst>
-              <a:ext uri="{FF2B5EF4-FFF2-40B4-BE49-F238E27FC236}">
-                <a16:creationId xmlns:a16="http://schemas.microsoft.com/office/drawing/2014/main" id="{948CA6D9-9B12-B272-C6C1-03B113E167F6}"/>
-              </a:ext>
-            </a:extLst>
-          </p:cNvPr>
-          <p:cNvSpPr>
-            <a:spLocks noGrp="1"/>
-          </p:cNvSpPr>
-          <p:nvPr>
-            <p:ph type="sldNum" sz="quarter" idx="5"/>
-          </p:nvPr>
-        </p:nvSpPr>
-        <p:spPr/>
-        <p:txBody>
-          <a:bodyPr/>
-          <a:lstStyle/>
-          <a:p>
-            <a:fld id="{D8330999-8BAC-FF4E-BF5A-F75E56417DB6}" type="slidenum">
-              <a:rPr lang="en-US" smtClean="0"/>
-              <a:t>29</a:t>
-            </a:fld>
-            <a:endParaRPr lang="en-US"/>
-          </a:p>
-        </p:txBody>
-      </p:sp>
-    </p:spTree>
-    <p:extLst>
-      <p:ext uri="{BB962C8B-B14F-4D97-AF65-F5344CB8AC3E}">
-        <p14:creationId xmlns:p14="http://schemas.microsoft.com/office/powerpoint/2010/main" val="3470339531"/>
-      </p:ext>
-    </p:extLst>
-  </p:cSld>
-  <p:clrMapOvr>
-    <a:masterClrMapping/>
-  </p:clrMapOvr>
-</p:notes>
-</file>
-
-<file path=ppt/notesSlides/notesSlide21.xml><?xml version="1.0" encoding="utf-8"?>
-<p:notes xmlns:a="http://schemas.openxmlformats.org/drawingml/2006/main" xmlns:r="http://schemas.openxmlformats.org/officeDocument/2006/relationships" xmlns:p="http://schemas.openxmlformats.org/presentationml/2006/main">
-  <p:cSld>
-    <p:spTree>
-      <p:nvGrpSpPr>
-        <p:cNvPr id="1" name="">
-          <a:extLst>
-            <a:ext uri="{FF2B5EF4-FFF2-40B4-BE49-F238E27FC236}">
               <a16:creationId xmlns:a16="http://schemas.microsoft.com/office/drawing/2014/main" id="{92FA3537-1BED-D74C-51F8-3B8B6049B221}"/>
             </a:ext>
           </a:extLst>
@@ -2231,7 +2100,7 @@
           <a:p>
             <a:fld id="{D8330999-8BAC-FF4E-BF5A-F75E56417DB6}" type="slidenum">
               <a:rPr lang="en-US" smtClean="0"/>
-              <a:t>30</a:t>
+              <a:t>28</a:t>
             </a:fld>
             <a:endParaRPr lang="en-US"/>
           </a:p>
@@ -2250,7 +2119,7 @@
 </p:notes>
 </file>
 
-<file path=ppt/notesSlides/notesSlide22.xml><?xml version="1.0" encoding="utf-8"?>
+<file path=ppt/notesSlides/notesSlide21.xml><?xml version="1.0" encoding="utf-8"?>
 <p:notes xmlns:a="http://schemas.openxmlformats.org/drawingml/2006/main" xmlns:r="http://schemas.openxmlformats.org/officeDocument/2006/relationships" xmlns:p="http://schemas.openxmlformats.org/presentationml/2006/main">
   <p:cSld>
     <p:spTree>
@@ -2339,7 +2208,7 @@
           <a:p>
             <a:fld id="{D8330999-8BAC-FF4E-BF5A-F75E56417DB6}" type="slidenum">
               <a:rPr lang="en-US" smtClean="0"/>
-              <a:t>31</a:t>
+              <a:t>29</a:t>
             </a:fld>
             <a:endParaRPr lang="en-US"/>
           </a:p>
@@ -2358,7 +2227,7 @@
 </p:notes>
 </file>
 
-<file path=ppt/notesSlides/notesSlide23.xml><?xml version="1.0" encoding="utf-8"?>
+<file path=ppt/notesSlides/notesSlide22.xml><?xml version="1.0" encoding="utf-8"?>
 <p:notes xmlns:a="http://schemas.openxmlformats.org/drawingml/2006/main" xmlns:r="http://schemas.openxmlformats.org/officeDocument/2006/relationships" xmlns:p="http://schemas.openxmlformats.org/presentationml/2006/main">
   <p:cSld>
     <p:spTree>
@@ -2423,7 +2292,7 @@
           <a:p>
             <a:fld id="{D8330999-8BAC-FF4E-BF5A-F75E56417DB6}" type="slidenum">
               <a:rPr lang="en-US" smtClean="0"/>
-              <a:t>32</a:t>
+              <a:t>30</a:t>
             </a:fld>
             <a:endParaRPr lang="en-US"/>
           </a:p>
@@ -2442,7 +2311,7 @@
 </p:notes>
 </file>
 
-<file path=ppt/notesSlides/notesSlide24.xml><?xml version="1.0" encoding="utf-8"?>
+<file path=ppt/notesSlides/notesSlide23.xml><?xml version="1.0" encoding="utf-8"?>
 <p:notes xmlns:a="http://schemas.openxmlformats.org/drawingml/2006/main" xmlns:r="http://schemas.openxmlformats.org/officeDocument/2006/relationships" xmlns:p="http://schemas.openxmlformats.org/presentationml/2006/main">
   <p:cSld>
     <p:spTree>
@@ -2531,7 +2400,7 @@
           <a:p>
             <a:fld id="{D8330999-8BAC-FF4E-BF5A-F75E56417DB6}" type="slidenum">
               <a:rPr lang="en-US" smtClean="0"/>
-              <a:t>33</a:t>
+              <a:t>31</a:t>
             </a:fld>
             <a:endParaRPr lang="en-US"/>
           </a:p>
@@ -2550,7 +2419,7 @@
 </p:notes>
 </file>
 
-<file path=ppt/notesSlides/notesSlide25.xml><?xml version="1.0" encoding="utf-8"?>
+<file path=ppt/notesSlides/notesSlide24.xml><?xml version="1.0" encoding="utf-8"?>
 <p:notes xmlns:a="http://schemas.openxmlformats.org/drawingml/2006/main" xmlns:r="http://schemas.openxmlformats.org/officeDocument/2006/relationships" xmlns:p="http://schemas.openxmlformats.org/presentationml/2006/main">
   <p:cSld>
     <p:spTree>
@@ -2615,7 +2484,7 @@
           <a:p>
             <a:fld id="{D8330999-8BAC-FF4E-BF5A-F75E56417DB6}" type="slidenum">
               <a:rPr lang="en-US" smtClean="0"/>
-              <a:t>35</a:t>
+              <a:t>33</a:t>
             </a:fld>
             <a:endParaRPr lang="en-US"/>
           </a:p>
@@ -3603,7 +3472,7 @@
           <a:p>
             <a:fld id="{CEE2ACAA-75FA-AD45-8679-E5834893ECEC}" type="datetimeFigureOut">
               <a:rPr lang="en-US" smtClean="0"/>
-              <a:t>4/15/26</a:t>
+              <a:t>5/4/26</a:t>
             </a:fld>
             <a:endParaRPr lang="en-US"/>
           </a:p>
@@ -3801,7 +3670,7 @@
           <a:p>
             <a:fld id="{CEE2ACAA-75FA-AD45-8679-E5834893ECEC}" type="datetimeFigureOut">
               <a:rPr lang="en-US" smtClean="0"/>
-              <a:t>4/15/26</a:t>
+              <a:t>5/4/26</a:t>
             </a:fld>
             <a:endParaRPr lang="en-US"/>
           </a:p>
@@ -4009,7 +3878,7 @@
           <a:p>
             <a:fld id="{CEE2ACAA-75FA-AD45-8679-E5834893ECEC}" type="datetimeFigureOut">
               <a:rPr lang="en-US" smtClean="0"/>
-              <a:t>4/15/26</a:t>
+              <a:t>5/4/26</a:t>
             </a:fld>
             <a:endParaRPr lang="en-US"/>
           </a:p>
@@ -4207,7 +4076,7 @@
           <a:p>
             <a:fld id="{CEE2ACAA-75FA-AD45-8679-E5834893ECEC}" type="datetimeFigureOut">
               <a:rPr lang="en-US" smtClean="0"/>
-              <a:t>4/15/26</a:t>
+              <a:t>5/4/26</a:t>
             </a:fld>
             <a:endParaRPr lang="en-US"/>
           </a:p>
@@ -4482,7 +4351,7 @@
           <a:p>
             <a:fld id="{CEE2ACAA-75FA-AD45-8679-E5834893ECEC}" type="datetimeFigureOut">
               <a:rPr lang="en-US" smtClean="0"/>
-              <a:t>4/15/26</a:t>
+              <a:t>5/4/26</a:t>
             </a:fld>
             <a:endParaRPr lang="en-US"/>
           </a:p>
@@ -4747,7 +4616,7 @@
           <a:p>
             <a:fld id="{CEE2ACAA-75FA-AD45-8679-E5834893ECEC}" type="datetimeFigureOut">
               <a:rPr lang="en-US" smtClean="0"/>
-              <a:t>4/15/26</a:t>
+              <a:t>5/4/26</a:t>
             </a:fld>
             <a:endParaRPr lang="en-US"/>
           </a:p>
@@ -5159,7 +5028,7 @@
           <a:p>
             <a:fld id="{CEE2ACAA-75FA-AD45-8679-E5834893ECEC}" type="datetimeFigureOut">
               <a:rPr lang="en-US" smtClean="0"/>
-              <a:t>4/15/26</a:t>
+              <a:t>5/4/26</a:t>
             </a:fld>
             <a:endParaRPr lang="en-US"/>
           </a:p>
@@ -5300,7 +5169,7 @@
           <a:p>
             <a:fld id="{CEE2ACAA-75FA-AD45-8679-E5834893ECEC}" type="datetimeFigureOut">
               <a:rPr lang="en-US" smtClean="0"/>
-              <a:t>4/15/26</a:t>
+              <a:t>5/4/26</a:t>
             </a:fld>
             <a:endParaRPr lang="en-US"/>
           </a:p>
@@ -5413,7 +5282,7 @@
           <a:p>
             <a:fld id="{CEE2ACAA-75FA-AD45-8679-E5834893ECEC}" type="datetimeFigureOut">
               <a:rPr lang="en-US" smtClean="0"/>
-              <a:t>4/15/26</a:t>
+              <a:t>5/4/26</a:t>
             </a:fld>
             <a:endParaRPr lang="en-US"/>
           </a:p>
@@ -5724,7 +5593,7 @@
           <a:p>
             <a:fld id="{CEE2ACAA-75FA-AD45-8679-E5834893ECEC}" type="datetimeFigureOut">
               <a:rPr lang="en-US" smtClean="0"/>
-              <a:t>4/15/26</a:t>
+              <a:t>5/4/26</a:t>
             </a:fld>
             <a:endParaRPr lang="en-US"/>
           </a:p>
@@ -6012,7 +5881,7 @@
           <a:p>
             <a:fld id="{CEE2ACAA-75FA-AD45-8679-E5834893ECEC}" type="datetimeFigureOut">
               <a:rPr lang="en-US" smtClean="0"/>
-              <a:t>4/15/26</a:t>
+              <a:t>5/4/26</a:t>
             </a:fld>
             <a:endParaRPr lang="en-US"/>
           </a:p>
@@ -6253,7 +6122,7 @@
           <a:p>
             <a:fld id="{CEE2ACAA-75FA-AD45-8679-E5834893ECEC}" type="datetimeFigureOut">
               <a:rPr lang="en-US" smtClean="0"/>
-              <a:t>4/15/26</a:t>
+              <a:t>5/4/26</a:t>
             </a:fld>
             <a:endParaRPr lang="en-US"/>
           </a:p>
@@ -6778,42 +6647,6 @@
             <a:r>
               <a:rPr lang="en-US" dirty="0"/>
               <a:t>Model evaluation and cross validation</a:t>
-            </a:r>
-          </a:p>
-        </p:txBody>
-      </p:sp>
-      <p:sp>
-        <p:nvSpPr>
-          <p:cNvPr id="3" name="Subtitle 2">
-            <a:extLst>
-              <a:ext uri="{FF2B5EF4-FFF2-40B4-BE49-F238E27FC236}">
-                <a16:creationId xmlns:a16="http://schemas.microsoft.com/office/drawing/2014/main" id="{2B86EE02-CD74-3E24-9C07-FC52D726FE3F}"/>
-              </a:ext>
-            </a:extLst>
-          </p:cNvPr>
-          <p:cNvSpPr>
-            <a:spLocks noGrp="1"/>
-          </p:cNvSpPr>
-          <p:nvPr>
-            <p:ph type="subTitle" idx="1"/>
-          </p:nvPr>
-        </p:nvSpPr>
-        <p:spPr/>
-        <p:txBody>
-          <a:bodyPr/>
-          <a:lstStyle/>
-          <a:p>
-            <a:r>
-              <a:rPr lang="en-US" dirty="0"/>
-              <a:t>Grant Vagle, Jeremiah </a:t>
-            </a:r>
-            <a:r>
-              <a:rPr lang="en-US" dirty="0" err="1"/>
-              <a:t>Shrovnal</a:t>
-            </a:r>
-            <a:r>
-              <a:rPr lang="en-US" dirty="0"/>
-              <a:t>, Lynn Waterhouse</a:t>
             </a:r>
           </a:p>
         </p:txBody>
@@ -10868,66 +10701,6 @@
   <p:cSld>
     <p:spTree>
       <p:nvGrpSpPr>
-        <p:cNvPr id="1" name=""/>
-        <p:cNvGrpSpPr/>
-        <p:nvPr/>
-      </p:nvGrpSpPr>
-      <p:grpSpPr>
-        <a:xfrm>
-          <a:off x="0" y="0"/>
-          <a:ext cx="0" cy="0"/>
-          <a:chOff x="0" y="0"/>
-          <a:chExt cx="0" cy="0"/>
-        </a:xfrm>
-      </p:grpSpPr>
-      <p:pic>
-        <p:nvPicPr>
-          <p:cNvPr id="9" name="Picture 8">
-            <a:extLst>
-              <a:ext uri="{FF2B5EF4-FFF2-40B4-BE49-F238E27FC236}">
-                <a16:creationId xmlns:a16="http://schemas.microsoft.com/office/drawing/2014/main" id="{9C8008CE-A425-C829-619C-BE4777D9A093}"/>
-              </a:ext>
-            </a:extLst>
-          </p:cNvPr>
-          <p:cNvPicPr>
-            <a:picLocks noChangeAspect="1"/>
-          </p:cNvPicPr>
-          <p:nvPr/>
-        </p:nvPicPr>
-        <p:blipFill>
-          <a:blip r:embed="rId3"/>
-          <a:stretch>
-            <a:fillRect/>
-          </a:stretch>
-        </p:blipFill>
-        <p:spPr>
-          <a:xfrm>
-            <a:off x="1146" y="0"/>
-            <a:ext cx="12190854" cy="6858645"/>
-          </a:xfrm>
-          <a:prstGeom prst="rect">
-            <a:avLst/>
-          </a:prstGeom>
-        </p:spPr>
-      </p:pic>
-    </p:spTree>
-    <p:extLst>
-      <p:ext uri="{BB962C8B-B14F-4D97-AF65-F5344CB8AC3E}">
-        <p14:creationId xmlns:p14="http://schemas.microsoft.com/office/powerpoint/2010/main" val="1115218904"/>
-      </p:ext>
-    </p:extLst>
-  </p:cSld>
-  <p:clrMapOvr>
-    <a:masterClrMapping/>
-  </p:clrMapOvr>
-</p:sld>
-</file>
-
-<file path=ppt/slides/slide16.xml><?xml version="1.0" encoding="utf-8"?>
-<p:sld xmlns:a="http://schemas.openxmlformats.org/drawingml/2006/main" xmlns:r="http://schemas.openxmlformats.org/officeDocument/2006/relationships" xmlns:p="http://schemas.openxmlformats.org/presentationml/2006/main">
-  <p:cSld>
-    <p:spTree>
-      <p:nvGrpSpPr>
         <p:cNvPr id="1" name="">
           <a:extLst>
             <a:ext uri="{FF2B5EF4-FFF2-40B4-BE49-F238E27FC236}">
@@ -11191,7 +10964,7 @@
 </p:sld>
 </file>
 
-<file path=ppt/slides/slide17.xml><?xml version="1.0" encoding="utf-8"?>
+<file path=ppt/slides/slide16.xml><?xml version="1.0" encoding="utf-8"?>
 <p:sld xmlns:a="http://schemas.openxmlformats.org/drawingml/2006/main" xmlns:r="http://schemas.openxmlformats.org/officeDocument/2006/relationships" xmlns:p="http://schemas.openxmlformats.org/presentationml/2006/main">
   <p:cSld>
     <p:spTree>
@@ -11443,7 +11216,7 @@
 </p:sld>
 </file>
 
-<file path=ppt/slides/slide18.xml><?xml version="1.0" encoding="utf-8"?>
+<file path=ppt/slides/slide17.xml><?xml version="1.0" encoding="utf-8"?>
 <p:sld xmlns:a="http://schemas.openxmlformats.org/drawingml/2006/main" xmlns:r="http://schemas.openxmlformats.org/officeDocument/2006/relationships" xmlns:p="http://schemas.openxmlformats.org/presentationml/2006/main">
   <p:cSld>
     <p:spTree>
@@ -11893,7 +11666,7 @@
 </p:sld>
 </file>
 
-<file path=ppt/slides/slide19.xml><?xml version="1.0" encoding="utf-8"?>
+<file path=ppt/slides/slide18.xml><?xml version="1.0" encoding="utf-8"?>
 <p:sld xmlns:a="http://schemas.openxmlformats.org/drawingml/2006/main" xmlns:r="http://schemas.openxmlformats.org/officeDocument/2006/relationships" xmlns:p="http://schemas.openxmlformats.org/presentationml/2006/main">
   <p:cSld>
     <p:spTree>
@@ -12332,127 +12105,7 @@
 </p:sld>
 </file>
 
-<file path=ppt/slides/slide2.xml><?xml version="1.0" encoding="utf-8"?>
-<p:sld xmlns:a="http://schemas.openxmlformats.org/drawingml/2006/main" xmlns:r="http://schemas.openxmlformats.org/officeDocument/2006/relationships" xmlns:p="http://schemas.openxmlformats.org/presentationml/2006/main">
-  <p:cSld>
-    <p:spTree>
-      <p:nvGrpSpPr>
-        <p:cNvPr id="1" name="">
-          <a:extLst>
-            <a:ext uri="{FF2B5EF4-FFF2-40B4-BE49-F238E27FC236}">
-              <a16:creationId xmlns:a16="http://schemas.microsoft.com/office/drawing/2014/main" id="{3B2D0CD4-09DF-AAED-BF50-4082EE4EA079}"/>
-            </a:ext>
-          </a:extLst>
-        </p:cNvPr>
-        <p:cNvGrpSpPr/>
-        <p:nvPr/>
-      </p:nvGrpSpPr>
-      <p:grpSpPr>
-        <a:xfrm>
-          <a:off x="0" y="0"/>
-          <a:ext cx="0" cy="0"/>
-          <a:chOff x="0" y="0"/>
-          <a:chExt cx="0" cy="0"/>
-        </a:xfrm>
-      </p:grpSpPr>
-      <p:sp>
-        <p:nvSpPr>
-          <p:cNvPr id="2" name="Title 1">
-            <a:extLst>
-              <a:ext uri="{FF2B5EF4-FFF2-40B4-BE49-F238E27FC236}">
-                <a16:creationId xmlns:a16="http://schemas.microsoft.com/office/drawing/2014/main" id="{0BFF68A7-F4E7-6630-7B04-0757F69329A5}"/>
-              </a:ext>
-            </a:extLst>
-          </p:cNvPr>
-          <p:cNvSpPr>
-            <a:spLocks noGrp="1"/>
-          </p:cNvSpPr>
-          <p:nvPr>
-            <p:ph type="title"/>
-          </p:nvPr>
-        </p:nvSpPr>
-        <p:spPr/>
-        <p:txBody>
-          <a:bodyPr/>
-          <a:lstStyle/>
-          <a:p>
-            <a:r>
-              <a:rPr lang="en-US" dirty="0"/>
-              <a:t>Overview of this section</a:t>
-            </a:r>
-          </a:p>
-        </p:txBody>
-      </p:sp>
-      <p:sp>
-        <p:nvSpPr>
-          <p:cNvPr id="3" name="Content Placeholder 2">
-            <a:extLst>
-              <a:ext uri="{FF2B5EF4-FFF2-40B4-BE49-F238E27FC236}">
-                <a16:creationId xmlns:a16="http://schemas.microsoft.com/office/drawing/2014/main" id="{B87CCB3B-034D-4F08-7B3F-2EDF93FD2F56}"/>
-              </a:ext>
-            </a:extLst>
-          </p:cNvPr>
-          <p:cNvSpPr>
-            <a:spLocks noGrp="1"/>
-          </p:cNvSpPr>
-          <p:nvPr>
-            <p:ph idx="1"/>
-          </p:nvPr>
-        </p:nvSpPr>
-        <p:spPr/>
-        <p:txBody>
-          <a:bodyPr>
-            <a:normAutofit/>
-          </a:bodyPr>
-          <a:lstStyle/>
-          <a:p>
-            <a:r>
-              <a:rPr lang="en-US" dirty="0"/>
-              <a:t>Understanding how well a model is performing</a:t>
-            </a:r>
-          </a:p>
-          <a:p>
-            <a:pPr lvl="1"/>
-            <a:r>
-              <a:rPr lang="en-US" dirty="0"/>
-              <a:t>Performance metrics</a:t>
-            </a:r>
-          </a:p>
-          <a:p>
-            <a:pPr lvl="1"/>
-            <a:r>
-              <a:rPr lang="en-US" dirty="0"/>
-              <a:t>Evaluation / cross-validation</a:t>
-            </a:r>
-          </a:p>
-          <a:p>
-            <a:r>
-              <a:rPr lang="en-US" dirty="0"/>
-              <a:t>Introduce Classification and Regression Trees (CART)</a:t>
-            </a:r>
-          </a:p>
-          <a:p>
-            <a:r>
-              <a:rPr lang="en-US" dirty="0"/>
-              <a:t>Hands-on coding example</a:t>
-            </a:r>
-          </a:p>
-        </p:txBody>
-      </p:sp>
-    </p:spTree>
-    <p:extLst>
-      <p:ext uri="{BB962C8B-B14F-4D97-AF65-F5344CB8AC3E}">
-        <p14:creationId xmlns:p14="http://schemas.microsoft.com/office/powerpoint/2010/main" val="3014274260"/>
-      </p:ext>
-    </p:extLst>
-  </p:cSld>
-  <p:clrMapOvr>
-    <a:masterClrMapping/>
-  </p:clrMapOvr>
-</p:sld>
-</file>
-
-<file path=ppt/slides/slide20.xml><?xml version="1.0" encoding="utf-8"?>
+<file path=ppt/slides/slide19.xml><?xml version="1.0" encoding="utf-8"?>
 <p:sld xmlns:a="http://schemas.openxmlformats.org/drawingml/2006/main" xmlns:r="http://schemas.openxmlformats.org/officeDocument/2006/relationships" xmlns:p="http://schemas.openxmlformats.org/presentationml/2006/main">
   <p:cSld>
     <p:spTree>
@@ -13137,7 +12790,127 @@
 </p:sld>
 </file>
 
-<file path=ppt/slides/slide21.xml><?xml version="1.0" encoding="utf-8"?>
+<file path=ppt/slides/slide2.xml><?xml version="1.0" encoding="utf-8"?>
+<p:sld xmlns:a="http://schemas.openxmlformats.org/drawingml/2006/main" xmlns:r="http://schemas.openxmlformats.org/officeDocument/2006/relationships" xmlns:p="http://schemas.openxmlformats.org/presentationml/2006/main">
+  <p:cSld>
+    <p:spTree>
+      <p:nvGrpSpPr>
+        <p:cNvPr id="1" name="">
+          <a:extLst>
+            <a:ext uri="{FF2B5EF4-FFF2-40B4-BE49-F238E27FC236}">
+              <a16:creationId xmlns:a16="http://schemas.microsoft.com/office/drawing/2014/main" id="{3B2D0CD4-09DF-AAED-BF50-4082EE4EA079}"/>
+            </a:ext>
+          </a:extLst>
+        </p:cNvPr>
+        <p:cNvGrpSpPr/>
+        <p:nvPr/>
+      </p:nvGrpSpPr>
+      <p:grpSpPr>
+        <a:xfrm>
+          <a:off x="0" y="0"/>
+          <a:ext cx="0" cy="0"/>
+          <a:chOff x="0" y="0"/>
+          <a:chExt cx="0" cy="0"/>
+        </a:xfrm>
+      </p:grpSpPr>
+      <p:sp>
+        <p:nvSpPr>
+          <p:cNvPr id="2" name="Title 1">
+            <a:extLst>
+              <a:ext uri="{FF2B5EF4-FFF2-40B4-BE49-F238E27FC236}">
+                <a16:creationId xmlns:a16="http://schemas.microsoft.com/office/drawing/2014/main" id="{0BFF68A7-F4E7-6630-7B04-0757F69329A5}"/>
+              </a:ext>
+            </a:extLst>
+          </p:cNvPr>
+          <p:cNvSpPr>
+            <a:spLocks noGrp="1"/>
+          </p:cNvSpPr>
+          <p:nvPr>
+            <p:ph type="title"/>
+          </p:nvPr>
+        </p:nvSpPr>
+        <p:spPr/>
+        <p:txBody>
+          <a:bodyPr/>
+          <a:lstStyle/>
+          <a:p>
+            <a:r>
+              <a:rPr lang="en-US" dirty="0"/>
+              <a:t>Overview of this section</a:t>
+            </a:r>
+          </a:p>
+        </p:txBody>
+      </p:sp>
+      <p:sp>
+        <p:nvSpPr>
+          <p:cNvPr id="3" name="Content Placeholder 2">
+            <a:extLst>
+              <a:ext uri="{FF2B5EF4-FFF2-40B4-BE49-F238E27FC236}">
+                <a16:creationId xmlns:a16="http://schemas.microsoft.com/office/drawing/2014/main" id="{B87CCB3B-034D-4F08-7B3F-2EDF93FD2F56}"/>
+              </a:ext>
+            </a:extLst>
+          </p:cNvPr>
+          <p:cNvSpPr>
+            <a:spLocks noGrp="1"/>
+          </p:cNvSpPr>
+          <p:nvPr>
+            <p:ph idx="1"/>
+          </p:nvPr>
+        </p:nvSpPr>
+        <p:spPr/>
+        <p:txBody>
+          <a:bodyPr>
+            <a:normAutofit/>
+          </a:bodyPr>
+          <a:lstStyle/>
+          <a:p>
+            <a:r>
+              <a:rPr lang="en-US" dirty="0"/>
+              <a:t>Understanding how well a model is performing</a:t>
+            </a:r>
+          </a:p>
+          <a:p>
+            <a:pPr lvl="1"/>
+            <a:r>
+              <a:rPr lang="en-US" dirty="0"/>
+              <a:t>Performance metrics</a:t>
+            </a:r>
+          </a:p>
+          <a:p>
+            <a:pPr lvl="1"/>
+            <a:r>
+              <a:rPr lang="en-US" dirty="0"/>
+              <a:t>Evaluation / cross-validation</a:t>
+            </a:r>
+          </a:p>
+          <a:p>
+            <a:r>
+              <a:rPr lang="en-US" dirty="0"/>
+              <a:t>Introduce Classification and Regression Trees (CART)</a:t>
+            </a:r>
+          </a:p>
+          <a:p>
+            <a:r>
+              <a:rPr lang="en-US" dirty="0"/>
+              <a:t>Hands-on coding example</a:t>
+            </a:r>
+          </a:p>
+        </p:txBody>
+      </p:sp>
+    </p:spTree>
+    <p:extLst>
+      <p:ext uri="{BB962C8B-B14F-4D97-AF65-F5344CB8AC3E}">
+        <p14:creationId xmlns:p14="http://schemas.microsoft.com/office/powerpoint/2010/main" val="3014274260"/>
+      </p:ext>
+    </p:extLst>
+  </p:cSld>
+  <p:clrMapOvr>
+    <a:masterClrMapping/>
+  </p:clrMapOvr>
+</p:sld>
+</file>
+
+<file path=ppt/slides/slide20.xml><?xml version="1.0" encoding="utf-8"?>
 <p:sld xmlns:a="http://schemas.openxmlformats.org/drawingml/2006/main" xmlns:r="http://schemas.openxmlformats.org/officeDocument/2006/relationships" xmlns:p="http://schemas.openxmlformats.org/presentationml/2006/main">
   <p:cSld>
     <p:spTree>
@@ -13301,7 +13074,7 @@
 </p:sld>
 </file>
 
-<file path=ppt/slides/slide22.xml><?xml version="1.0" encoding="utf-8"?>
+<file path=ppt/slides/slide21.xml><?xml version="1.0" encoding="utf-8"?>
 <p:sld xmlns:a="http://schemas.openxmlformats.org/drawingml/2006/main" xmlns:r="http://schemas.openxmlformats.org/officeDocument/2006/relationships" xmlns:p="http://schemas.openxmlformats.org/presentationml/2006/main">
   <p:cSld>
     <p:spTree>
@@ -13455,7 +13228,7 @@
 </p:sld>
 </file>
 
-<file path=ppt/slides/slide23.xml><?xml version="1.0" encoding="utf-8"?>
+<file path=ppt/slides/slide22.xml><?xml version="1.0" encoding="utf-8"?>
 <p:sld xmlns:a="http://schemas.openxmlformats.org/drawingml/2006/main" xmlns:r="http://schemas.openxmlformats.org/officeDocument/2006/relationships" xmlns:p="http://schemas.openxmlformats.org/presentationml/2006/main">
   <p:cSld>
     <p:spTree>
@@ -13656,7 +13429,7 @@
 </p:sld>
 </file>
 
-<file path=ppt/slides/slide24.xml><?xml version="1.0" encoding="utf-8"?>
+<file path=ppt/slides/slide23.xml><?xml version="1.0" encoding="utf-8"?>
 <p:sld xmlns:a="http://schemas.openxmlformats.org/drawingml/2006/main" xmlns:r="http://schemas.openxmlformats.org/officeDocument/2006/relationships" xmlns:p="http://schemas.openxmlformats.org/presentationml/2006/main">
   <p:cSld>
     <p:spTree>
@@ -13714,7 +13487,7 @@
 </p:sld>
 </file>
 
-<file path=ppt/slides/slide25.xml><?xml version="1.0" encoding="utf-8"?>
+<file path=ppt/slides/slide24.xml><?xml version="1.0" encoding="utf-8"?>
 <p:sld xmlns:a="http://schemas.openxmlformats.org/drawingml/2006/main" xmlns:r="http://schemas.openxmlformats.org/officeDocument/2006/relationships" xmlns:p="http://schemas.openxmlformats.org/presentationml/2006/main">
   <p:cSld>
     <p:spTree>
@@ -13850,7 +13623,7 @@
 </p:sld>
 </file>
 
-<file path=ppt/slides/slide26.xml><?xml version="1.0" encoding="utf-8"?>
+<file path=ppt/slides/slide25.xml><?xml version="1.0" encoding="utf-8"?>
 <p:sld xmlns:a="http://schemas.openxmlformats.org/drawingml/2006/main" xmlns:r="http://schemas.openxmlformats.org/officeDocument/2006/relationships" xmlns:p="http://schemas.openxmlformats.org/presentationml/2006/main">
   <p:cSld>
     <p:spTree>
@@ -14355,67 +14128,7 @@
 </p:sld>
 </file>
 
-<file path=ppt/slides/slide27.xml><?xml version="1.0" encoding="utf-8"?>
-<p:sld xmlns:a="http://schemas.openxmlformats.org/drawingml/2006/main" xmlns:r="http://schemas.openxmlformats.org/officeDocument/2006/relationships" xmlns:p="http://schemas.openxmlformats.org/presentationml/2006/main">
-  <p:cSld>
-    <p:spTree>
-      <p:nvGrpSpPr>
-        <p:cNvPr id="1" name=""/>
-        <p:cNvGrpSpPr/>
-        <p:nvPr/>
-      </p:nvGrpSpPr>
-      <p:grpSpPr>
-        <a:xfrm>
-          <a:off x="0" y="0"/>
-          <a:ext cx="0" cy="0"/>
-          <a:chOff x="0" y="0"/>
-          <a:chExt cx="0" cy="0"/>
-        </a:xfrm>
-      </p:grpSpPr>
-      <p:pic>
-        <p:nvPicPr>
-          <p:cNvPr id="5" name="Picture 4">
-            <a:extLst>
-              <a:ext uri="{FF2B5EF4-FFF2-40B4-BE49-F238E27FC236}">
-                <a16:creationId xmlns:a16="http://schemas.microsoft.com/office/drawing/2014/main" id="{1E13A741-7C89-7BF4-BCCA-EEB84255FA97}"/>
-              </a:ext>
-            </a:extLst>
-          </p:cNvPr>
-          <p:cNvPicPr>
-            <a:picLocks noChangeAspect="1"/>
-          </p:cNvPicPr>
-          <p:nvPr/>
-        </p:nvPicPr>
-        <p:blipFill>
-          <a:blip r:embed="rId2"/>
-          <a:stretch>
-            <a:fillRect/>
-          </a:stretch>
-        </p:blipFill>
-        <p:spPr>
-          <a:xfrm>
-            <a:off x="1146" y="0"/>
-            <a:ext cx="12189708" cy="6858000"/>
-          </a:xfrm>
-          <a:prstGeom prst="rect">
-            <a:avLst/>
-          </a:prstGeom>
-        </p:spPr>
-      </p:pic>
-    </p:spTree>
-    <p:extLst>
-      <p:ext uri="{BB962C8B-B14F-4D97-AF65-F5344CB8AC3E}">
-        <p14:creationId xmlns:p14="http://schemas.microsoft.com/office/powerpoint/2010/main" val="2170150179"/>
-      </p:ext>
-    </p:extLst>
-  </p:cSld>
-  <p:clrMapOvr>
-    <a:masterClrMapping/>
-  </p:clrMapOvr>
-</p:sld>
-</file>
-
-<file path=ppt/slides/slide28.xml><?xml version="1.0" encoding="utf-8"?>
+<file path=ppt/slides/slide26.xml><?xml version="1.0" encoding="utf-8"?>
 <p:sld xmlns:a="http://schemas.openxmlformats.org/drawingml/2006/main" xmlns:r="http://schemas.openxmlformats.org/officeDocument/2006/relationships" xmlns:p="http://schemas.openxmlformats.org/presentationml/2006/main">
   <p:cSld>
     <p:spTree>
@@ -14604,7 +14317,7 @@
 </p:sld>
 </file>
 
-<file path=ppt/slides/slide29.xml><?xml version="1.0" encoding="utf-8"?>
+<file path=ppt/slides/slide27.xml><?xml version="1.0" encoding="utf-8"?>
 <p:sld xmlns:a="http://schemas.openxmlformats.org/drawingml/2006/main" xmlns:r="http://schemas.openxmlformats.org/officeDocument/2006/relationships" xmlns:p="http://schemas.openxmlformats.org/presentationml/2006/main">
   <p:cSld>
     <p:spTree>
@@ -14806,6 +14519,450 @@
     <p:extLst>
       <p:ext uri="{BB962C8B-B14F-4D97-AF65-F5344CB8AC3E}">
         <p14:creationId xmlns:p14="http://schemas.microsoft.com/office/powerpoint/2010/main" val="4193877296"/>
+      </p:ext>
+    </p:extLst>
+  </p:cSld>
+  <p:clrMapOvr>
+    <a:masterClrMapping/>
+  </p:clrMapOvr>
+</p:sld>
+</file>
+
+<file path=ppt/slides/slide28.xml><?xml version="1.0" encoding="utf-8"?>
+<p:sld xmlns:a="http://schemas.openxmlformats.org/drawingml/2006/main" xmlns:r="http://schemas.openxmlformats.org/officeDocument/2006/relationships" xmlns:p="http://schemas.openxmlformats.org/presentationml/2006/main">
+  <p:cSld>
+    <p:spTree>
+      <p:nvGrpSpPr>
+        <p:cNvPr id="1" name="">
+          <a:extLst>
+            <a:ext uri="{FF2B5EF4-FFF2-40B4-BE49-F238E27FC236}">
+              <a16:creationId xmlns:a16="http://schemas.microsoft.com/office/drawing/2014/main" id="{D6805E51-3476-A92A-0EC0-FC68DE1F24B4}"/>
+            </a:ext>
+          </a:extLst>
+        </p:cNvPr>
+        <p:cNvGrpSpPr/>
+        <p:nvPr/>
+      </p:nvGrpSpPr>
+      <p:grpSpPr>
+        <a:xfrm>
+          <a:off x="0" y="0"/>
+          <a:ext cx="0" cy="0"/>
+          <a:chOff x="0" y="0"/>
+          <a:chExt cx="0" cy="0"/>
+        </a:xfrm>
+      </p:grpSpPr>
+      <p:sp>
+        <p:nvSpPr>
+          <p:cNvPr id="2" name="Title 1">
+            <a:extLst>
+              <a:ext uri="{FF2B5EF4-FFF2-40B4-BE49-F238E27FC236}">
+                <a16:creationId xmlns:a16="http://schemas.microsoft.com/office/drawing/2014/main" id="{F1AB17DD-7966-83BD-C029-1E1CBE50ED93}"/>
+              </a:ext>
+            </a:extLst>
+          </p:cNvPr>
+          <p:cNvSpPr>
+            <a:spLocks noGrp="1"/>
+          </p:cNvSpPr>
+          <p:nvPr>
+            <p:ph type="title"/>
+          </p:nvPr>
+        </p:nvSpPr>
+        <p:spPr/>
+        <p:txBody>
+          <a:bodyPr/>
+          <a:lstStyle/>
+          <a:p>
+            <a:r>
+              <a:rPr lang="en-US" dirty="0"/>
+              <a:t>An example…</a:t>
+            </a:r>
+          </a:p>
+        </p:txBody>
+      </p:sp>
+      <p:sp>
+        <p:nvSpPr>
+          <p:cNvPr id="3" name="Content Placeholder 2">
+            <a:extLst>
+              <a:ext uri="{FF2B5EF4-FFF2-40B4-BE49-F238E27FC236}">
+                <a16:creationId xmlns:a16="http://schemas.microsoft.com/office/drawing/2014/main" id="{7BED526E-0AD1-8701-CE14-BEDB157F444C}"/>
+              </a:ext>
+            </a:extLst>
+          </p:cNvPr>
+          <p:cNvSpPr>
+            <a:spLocks noGrp="1"/>
+          </p:cNvSpPr>
+          <p:nvPr>
+            <p:ph idx="1"/>
+          </p:nvPr>
+        </p:nvSpPr>
+        <p:spPr>
+          <a:xfrm>
+            <a:off x="838200" y="1524682"/>
+            <a:ext cx="5736220" cy="4817269"/>
+          </a:xfrm>
+        </p:spPr>
+        <p:txBody>
+          <a:bodyPr>
+            <a:normAutofit/>
+          </a:bodyPr>
+          <a:lstStyle/>
+          <a:p>
+            <a:pPr marL="0" indent="0">
+              <a:buNone/>
+            </a:pPr>
+            <a:r>
+              <a:rPr lang="en-US" dirty="0"/>
+              <a:t>We build a model to predict a lake’s fish abundance over time based on fishing pressure and weather.</a:t>
+            </a:r>
+          </a:p>
+          <a:p>
+            <a:pPr marL="0" indent="0">
+              <a:buNone/>
+            </a:pPr>
+            <a:endParaRPr lang="en-US" dirty="0"/>
+          </a:p>
+          <a:p>
+            <a:pPr marL="0" indent="0">
+              <a:buNone/>
+            </a:pPr>
+            <a:r>
+              <a:rPr lang="en-US" dirty="0"/>
+              <a:t>We train the model using data from 1990-2025 </a:t>
+            </a:r>
+          </a:p>
+          <a:p>
+            <a:pPr marL="0" indent="0">
+              <a:buNone/>
+            </a:pPr>
+            <a:endParaRPr lang="en-US" dirty="0"/>
+          </a:p>
+          <a:p>
+            <a:pPr marL="0" indent="0">
+              <a:buNone/>
+            </a:pPr>
+            <a:r>
+              <a:rPr lang="en-US" dirty="0"/>
+              <a:t>It predicts those years perfectly.</a:t>
+            </a:r>
+          </a:p>
+          <a:p>
+            <a:pPr marL="0" indent="0">
+              <a:buNone/>
+            </a:pPr>
+            <a:endParaRPr lang="en-US" dirty="0"/>
+          </a:p>
+          <a:p>
+            <a:pPr marL="0" indent="0">
+              <a:buNone/>
+            </a:pPr>
+            <a:r>
+              <a:rPr lang="en-US" dirty="0"/>
+              <a:t>Is this a good model?</a:t>
+            </a:r>
+          </a:p>
+        </p:txBody>
+      </p:sp>
+      <p:pic>
+        <p:nvPicPr>
+          <p:cNvPr id="4" name="Picture 3">
+            <a:extLst>
+              <a:ext uri="{FF2B5EF4-FFF2-40B4-BE49-F238E27FC236}">
+                <a16:creationId xmlns:a16="http://schemas.microsoft.com/office/drawing/2014/main" id="{E2271644-17DF-3EBE-4CC7-1DF65408DDF2}"/>
+              </a:ext>
+            </a:extLst>
+          </p:cNvPr>
+          <p:cNvPicPr>
+            <a:picLocks noChangeAspect="1"/>
+          </p:cNvPicPr>
+          <p:nvPr/>
+        </p:nvPicPr>
+        <p:blipFill>
+          <a:blip r:embed="rId3"/>
+          <a:stretch>
+            <a:fillRect/>
+          </a:stretch>
+        </p:blipFill>
+        <p:spPr>
+          <a:xfrm>
+            <a:off x="7264905" y="2640750"/>
+            <a:ext cx="3927813" cy="1749228"/>
+          </a:xfrm>
+          <a:prstGeom prst="rect">
+            <a:avLst/>
+          </a:prstGeom>
+        </p:spPr>
+      </p:pic>
+      <p:pic>
+        <p:nvPicPr>
+          <p:cNvPr id="5" name="Picture 4">
+            <a:extLst>
+              <a:ext uri="{FF2B5EF4-FFF2-40B4-BE49-F238E27FC236}">
+                <a16:creationId xmlns:a16="http://schemas.microsoft.com/office/drawing/2014/main" id="{E1E47954-EC7E-ADA2-9567-0361C7CC2372}"/>
+              </a:ext>
+            </a:extLst>
+          </p:cNvPr>
+          <p:cNvPicPr>
+            <a:picLocks noChangeAspect="1"/>
+          </p:cNvPicPr>
+          <p:nvPr/>
+        </p:nvPicPr>
+        <p:blipFill>
+          <a:blip r:embed="rId4"/>
+          <a:stretch>
+            <a:fillRect/>
+          </a:stretch>
+        </p:blipFill>
+        <p:spPr>
+          <a:xfrm>
+            <a:off x="7264905" y="4592723"/>
+            <a:ext cx="3927812" cy="1749228"/>
+          </a:xfrm>
+          <a:prstGeom prst="rect">
+            <a:avLst/>
+          </a:prstGeom>
+        </p:spPr>
+      </p:pic>
+    </p:spTree>
+    <p:extLst>
+      <p:ext uri="{BB962C8B-B14F-4D97-AF65-F5344CB8AC3E}">
+        <p14:creationId xmlns:p14="http://schemas.microsoft.com/office/powerpoint/2010/main" val="782883695"/>
+      </p:ext>
+    </p:extLst>
+  </p:cSld>
+  <p:clrMapOvr>
+    <a:masterClrMapping/>
+  </p:clrMapOvr>
+</p:sld>
+</file>
+
+<file path=ppt/slides/slide29.xml><?xml version="1.0" encoding="utf-8"?>
+<p:sld xmlns:a="http://schemas.openxmlformats.org/drawingml/2006/main" xmlns:r="http://schemas.openxmlformats.org/officeDocument/2006/relationships" xmlns:p="http://schemas.openxmlformats.org/presentationml/2006/main">
+  <p:cSld>
+    <p:spTree>
+      <p:nvGrpSpPr>
+        <p:cNvPr id="1" name="">
+          <a:extLst>
+            <a:ext uri="{FF2B5EF4-FFF2-40B4-BE49-F238E27FC236}">
+              <a16:creationId xmlns:a16="http://schemas.microsoft.com/office/drawing/2014/main" id="{4B8D7E77-9AD5-BF13-14E5-0CFE035B3136}"/>
+            </a:ext>
+          </a:extLst>
+        </p:cNvPr>
+        <p:cNvGrpSpPr/>
+        <p:nvPr/>
+      </p:nvGrpSpPr>
+      <p:grpSpPr>
+        <a:xfrm>
+          <a:off x="0" y="0"/>
+          <a:ext cx="0" cy="0"/>
+          <a:chOff x="0" y="0"/>
+          <a:chExt cx="0" cy="0"/>
+        </a:xfrm>
+      </p:grpSpPr>
+      <p:sp>
+        <p:nvSpPr>
+          <p:cNvPr id="2" name="Title 1">
+            <a:extLst>
+              <a:ext uri="{FF2B5EF4-FFF2-40B4-BE49-F238E27FC236}">
+                <a16:creationId xmlns:a16="http://schemas.microsoft.com/office/drawing/2014/main" id="{F2E8EE1A-1FA8-735D-F7FB-EAA7809B43C1}"/>
+              </a:ext>
+            </a:extLst>
+          </p:cNvPr>
+          <p:cNvSpPr>
+            <a:spLocks noGrp="1"/>
+          </p:cNvSpPr>
+          <p:nvPr>
+            <p:ph type="title"/>
+          </p:nvPr>
+        </p:nvSpPr>
+        <p:spPr/>
+        <p:txBody>
+          <a:bodyPr/>
+          <a:lstStyle/>
+          <a:p>
+            <a:r>
+              <a:rPr lang="en-US" dirty="0"/>
+              <a:t>An example…</a:t>
+            </a:r>
+          </a:p>
+        </p:txBody>
+      </p:sp>
+      <p:sp>
+        <p:nvSpPr>
+          <p:cNvPr id="3" name="Content Placeholder 2">
+            <a:extLst>
+              <a:ext uri="{FF2B5EF4-FFF2-40B4-BE49-F238E27FC236}">
+                <a16:creationId xmlns:a16="http://schemas.microsoft.com/office/drawing/2014/main" id="{F6C32D91-F338-A6FA-1313-B9E939A527A6}"/>
+              </a:ext>
+            </a:extLst>
+          </p:cNvPr>
+          <p:cNvSpPr>
+            <a:spLocks noGrp="1"/>
+          </p:cNvSpPr>
+          <p:nvPr>
+            <p:ph idx="1"/>
+          </p:nvPr>
+        </p:nvSpPr>
+        <p:spPr>
+          <a:xfrm>
+            <a:off x="838200" y="1524682"/>
+            <a:ext cx="5736220" cy="4817269"/>
+          </a:xfrm>
+        </p:spPr>
+        <p:txBody>
+          <a:bodyPr>
+            <a:normAutofit/>
+          </a:bodyPr>
+          <a:lstStyle/>
+          <a:p>
+            <a:pPr marL="0" indent="0">
+              <a:buNone/>
+            </a:pPr>
+            <a:r>
+              <a:rPr lang="en-US" dirty="0"/>
+              <a:t>We build a model to predict a lake’s fish abundance over time based on fishing pressure and weather.</a:t>
+            </a:r>
+          </a:p>
+          <a:p>
+            <a:pPr marL="0" indent="0">
+              <a:buNone/>
+            </a:pPr>
+            <a:endParaRPr lang="en-US" dirty="0"/>
+          </a:p>
+          <a:p>
+            <a:pPr marL="0" indent="0">
+              <a:buNone/>
+            </a:pPr>
+            <a:r>
+              <a:rPr lang="en-US" dirty="0"/>
+              <a:t>We train the model using data from 1990-2025 </a:t>
+            </a:r>
+          </a:p>
+          <a:p>
+            <a:pPr marL="0" indent="0">
+              <a:buNone/>
+            </a:pPr>
+            <a:endParaRPr lang="en-US" dirty="0"/>
+          </a:p>
+          <a:p>
+            <a:pPr marL="0" indent="0">
+              <a:buNone/>
+            </a:pPr>
+            <a:r>
+              <a:rPr lang="en-US" dirty="0"/>
+              <a:t>It predicts those years perfectly.</a:t>
+            </a:r>
+          </a:p>
+          <a:p>
+            <a:pPr marL="0" indent="0">
+              <a:buNone/>
+            </a:pPr>
+            <a:endParaRPr lang="en-US" dirty="0"/>
+          </a:p>
+          <a:p>
+            <a:pPr marL="0" indent="0">
+              <a:buNone/>
+            </a:pPr>
+            <a:r>
+              <a:rPr lang="en-US" dirty="0"/>
+              <a:t>Is this a good model?</a:t>
+            </a:r>
+          </a:p>
+        </p:txBody>
+      </p:sp>
+      <p:pic>
+        <p:nvPicPr>
+          <p:cNvPr id="4" name="Picture 3">
+            <a:extLst>
+              <a:ext uri="{FF2B5EF4-FFF2-40B4-BE49-F238E27FC236}">
+                <a16:creationId xmlns:a16="http://schemas.microsoft.com/office/drawing/2014/main" id="{2B66E6BC-BF49-F038-BC46-C4F81E58F9B5}"/>
+              </a:ext>
+            </a:extLst>
+          </p:cNvPr>
+          <p:cNvPicPr>
+            <a:picLocks noChangeAspect="1"/>
+          </p:cNvPicPr>
+          <p:nvPr/>
+        </p:nvPicPr>
+        <p:blipFill>
+          <a:blip r:embed="rId3"/>
+          <a:stretch>
+            <a:fillRect/>
+          </a:stretch>
+        </p:blipFill>
+        <p:spPr>
+          <a:xfrm>
+            <a:off x="7264905" y="2640750"/>
+            <a:ext cx="3927813" cy="1749228"/>
+          </a:xfrm>
+          <a:prstGeom prst="rect">
+            <a:avLst/>
+          </a:prstGeom>
+        </p:spPr>
+      </p:pic>
+      <p:pic>
+        <p:nvPicPr>
+          <p:cNvPr id="5" name="Picture 4">
+            <a:extLst>
+              <a:ext uri="{FF2B5EF4-FFF2-40B4-BE49-F238E27FC236}">
+                <a16:creationId xmlns:a16="http://schemas.microsoft.com/office/drawing/2014/main" id="{71FD3728-47E6-4AF7-6209-0279CFF13E72}"/>
+              </a:ext>
+            </a:extLst>
+          </p:cNvPr>
+          <p:cNvPicPr>
+            <a:picLocks noChangeAspect="1"/>
+          </p:cNvPicPr>
+          <p:nvPr/>
+        </p:nvPicPr>
+        <p:blipFill>
+          <a:blip r:embed="rId4"/>
+          <a:stretch>
+            <a:fillRect/>
+          </a:stretch>
+        </p:blipFill>
+        <p:spPr>
+          <a:xfrm>
+            <a:off x="7264905" y="4592723"/>
+            <a:ext cx="3927812" cy="1749228"/>
+          </a:xfrm>
+          <a:prstGeom prst="rect">
+            <a:avLst/>
+          </a:prstGeom>
+        </p:spPr>
+      </p:pic>
+      <p:pic>
+        <p:nvPicPr>
+          <p:cNvPr id="6" name="Picture 5">
+            <a:extLst>
+              <a:ext uri="{FF2B5EF4-FFF2-40B4-BE49-F238E27FC236}">
+                <a16:creationId xmlns:a16="http://schemas.microsoft.com/office/drawing/2014/main" id="{6D611B50-249A-AF96-09EC-52F2A575C690}"/>
+              </a:ext>
+            </a:extLst>
+          </p:cNvPr>
+          <p:cNvPicPr>
+            <a:picLocks noChangeAspect="1"/>
+          </p:cNvPicPr>
+          <p:nvPr/>
+        </p:nvPicPr>
+        <p:blipFill>
+          <a:blip r:embed="rId5"/>
+          <a:stretch>
+            <a:fillRect/>
+          </a:stretch>
+        </p:blipFill>
+        <p:spPr>
+          <a:xfrm>
+            <a:off x="8449519" y="92597"/>
+            <a:ext cx="3249523" cy="3249523"/>
+          </a:xfrm>
+          <a:prstGeom prst="rect">
+            <a:avLst/>
+          </a:prstGeom>
+        </p:spPr>
+      </p:pic>
+    </p:spTree>
+    <p:extLst>
+      <p:ext uri="{BB962C8B-B14F-4D97-AF65-F5344CB8AC3E}">
+        <p14:creationId xmlns:p14="http://schemas.microsoft.com/office/powerpoint/2010/main" val="3351739289"/>
       </p:ext>
     </p:extLst>
   </p:cSld>
@@ -15619,450 +15776,6 @@
   <p:cSld>
     <p:spTree>
       <p:nvGrpSpPr>
-        <p:cNvPr id="1" name="">
-          <a:extLst>
-            <a:ext uri="{FF2B5EF4-FFF2-40B4-BE49-F238E27FC236}">
-              <a16:creationId xmlns:a16="http://schemas.microsoft.com/office/drawing/2014/main" id="{D6805E51-3476-A92A-0EC0-FC68DE1F24B4}"/>
-            </a:ext>
-          </a:extLst>
-        </p:cNvPr>
-        <p:cNvGrpSpPr/>
-        <p:nvPr/>
-      </p:nvGrpSpPr>
-      <p:grpSpPr>
-        <a:xfrm>
-          <a:off x="0" y="0"/>
-          <a:ext cx="0" cy="0"/>
-          <a:chOff x="0" y="0"/>
-          <a:chExt cx="0" cy="0"/>
-        </a:xfrm>
-      </p:grpSpPr>
-      <p:sp>
-        <p:nvSpPr>
-          <p:cNvPr id="2" name="Title 1">
-            <a:extLst>
-              <a:ext uri="{FF2B5EF4-FFF2-40B4-BE49-F238E27FC236}">
-                <a16:creationId xmlns:a16="http://schemas.microsoft.com/office/drawing/2014/main" id="{F1AB17DD-7966-83BD-C029-1E1CBE50ED93}"/>
-              </a:ext>
-            </a:extLst>
-          </p:cNvPr>
-          <p:cNvSpPr>
-            <a:spLocks noGrp="1"/>
-          </p:cNvSpPr>
-          <p:nvPr>
-            <p:ph type="title"/>
-          </p:nvPr>
-        </p:nvSpPr>
-        <p:spPr/>
-        <p:txBody>
-          <a:bodyPr/>
-          <a:lstStyle/>
-          <a:p>
-            <a:r>
-              <a:rPr lang="en-US" dirty="0"/>
-              <a:t>An example…</a:t>
-            </a:r>
-          </a:p>
-        </p:txBody>
-      </p:sp>
-      <p:sp>
-        <p:nvSpPr>
-          <p:cNvPr id="3" name="Content Placeholder 2">
-            <a:extLst>
-              <a:ext uri="{FF2B5EF4-FFF2-40B4-BE49-F238E27FC236}">
-                <a16:creationId xmlns:a16="http://schemas.microsoft.com/office/drawing/2014/main" id="{7BED526E-0AD1-8701-CE14-BEDB157F444C}"/>
-              </a:ext>
-            </a:extLst>
-          </p:cNvPr>
-          <p:cNvSpPr>
-            <a:spLocks noGrp="1"/>
-          </p:cNvSpPr>
-          <p:nvPr>
-            <p:ph idx="1"/>
-          </p:nvPr>
-        </p:nvSpPr>
-        <p:spPr>
-          <a:xfrm>
-            <a:off x="838200" y="1524682"/>
-            <a:ext cx="5736220" cy="4817269"/>
-          </a:xfrm>
-        </p:spPr>
-        <p:txBody>
-          <a:bodyPr>
-            <a:normAutofit/>
-          </a:bodyPr>
-          <a:lstStyle/>
-          <a:p>
-            <a:pPr marL="0" indent="0">
-              <a:buNone/>
-            </a:pPr>
-            <a:r>
-              <a:rPr lang="en-US" dirty="0"/>
-              <a:t>We build a model to predict a lake’s fish abundance over time based on fishing pressure and weather.</a:t>
-            </a:r>
-          </a:p>
-          <a:p>
-            <a:pPr marL="0" indent="0">
-              <a:buNone/>
-            </a:pPr>
-            <a:endParaRPr lang="en-US" dirty="0"/>
-          </a:p>
-          <a:p>
-            <a:pPr marL="0" indent="0">
-              <a:buNone/>
-            </a:pPr>
-            <a:r>
-              <a:rPr lang="en-US" dirty="0"/>
-              <a:t>We train the model using data from 1990-2025 </a:t>
-            </a:r>
-          </a:p>
-          <a:p>
-            <a:pPr marL="0" indent="0">
-              <a:buNone/>
-            </a:pPr>
-            <a:endParaRPr lang="en-US" dirty="0"/>
-          </a:p>
-          <a:p>
-            <a:pPr marL="0" indent="0">
-              <a:buNone/>
-            </a:pPr>
-            <a:r>
-              <a:rPr lang="en-US" dirty="0"/>
-              <a:t>It predicts those years perfectly.</a:t>
-            </a:r>
-          </a:p>
-          <a:p>
-            <a:pPr marL="0" indent="0">
-              <a:buNone/>
-            </a:pPr>
-            <a:endParaRPr lang="en-US" dirty="0"/>
-          </a:p>
-          <a:p>
-            <a:pPr marL="0" indent="0">
-              <a:buNone/>
-            </a:pPr>
-            <a:r>
-              <a:rPr lang="en-US" dirty="0"/>
-              <a:t>Is this a good model?</a:t>
-            </a:r>
-          </a:p>
-        </p:txBody>
-      </p:sp>
-      <p:pic>
-        <p:nvPicPr>
-          <p:cNvPr id="4" name="Picture 3">
-            <a:extLst>
-              <a:ext uri="{FF2B5EF4-FFF2-40B4-BE49-F238E27FC236}">
-                <a16:creationId xmlns:a16="http://schemas.microsoft.com/office/drawing/2014/main" id="{E2271644-17DF-3EBE-4CC7-1DF65408DDF2}"/>
-              </a:ext>
-            </a:extLst>
-          </p:cNvPr>
-          <p:cNvPicPr>
-            <a:picLocks noChangeAspect="1"/>
-          </p:cNvPicPr>
-          <p:nvPr/>
-        </p:nvPicPr>
-        <p:blipFill>
-          <a:blip r:embed="rId3"/>
-          <a:stretch>
-            <a:fillRect/>
-          </a:stretch>
-        </p:blipFill>
-        <p:spPr>
-          <a:xfrm>
-            <a:off x="7264905" y="2640750"/>
-            <a:ext cx="3927813" cy="1749228"/>
-          </a:xfrm>
-          <a:prstGeom prst="rect">
-            <a:avLst/>
-          </a:prstGeom>
-        </p:spPr>
-      </p:pic>
-      <p:pic>
-        <p:nvPicPr>
-          <p:cNvPr id="5" name="Picture 4">
-            <a:extLst>
-              <a:ext uri="{FF2B5EF4-FFF2-40B4-BE49-F238E27FC236}">
-                <a16:creationId xmlns:a16="http://schemas.microsoft.com/office/drawing/2014/main" id="{E1E47954-EC7E-ADA2-9567-0361C7CC2372}"/>
-              </a:ext>
-            </a:extLst>
-          </p:cNvPr>
-          <p:cNvPicPr>
-            <a:picLocks noChangeAspect="1"/>
-          </p:cNvPicPr>
-          <p:nvPr/>
-        </p:nvPicPr>
-        <p:blipFill>
-          <a:blip r:embed="rId4"/>
-          <a:stretch>
-            <a:fillRect/>
-          </a:stretch>
-        </p:blipFill>
-        <p:spPr>
-          <a:xfrm>
-            <a:off x="7264905" y="4592723"/>
-            <a:ext cx="3927812" cy="1749228"/>
-          </a:xfrm>
-          <a:prstGeom prst="rect">
-            <a:avLst/>
-          </a:prstGeom>
-        </p:spPr>
-      </p:pic>
-    </p:spTree>
-    <p:extLst>
-      <p:ext uri="{BB962C8B-B14F-4D97-AF65-F5344CB8AC3E}">
-        <p14:creationId xmlns:p14="http://schemas.microsoft.com/office/powerpoint/2010/main" val="782883695"/>
-      </p:ext>
-    </p:extLst>
-  </p:cSld>
-  <p:clrMapOvr>
-    <a:masterClrMapping/>
-  </p:clrMapOvr>
-</p:sld>
-</file>
-
-<file path=ppt/slides/slide31.xml><?xml version="1.0" encoding="utf-8"?>
-<p:sld xmlns:a="http://schemas.openxmlformats.org/drawingml/2006/main" xmlns:r="http://schemas.openxmlformats.org/officeDocument/2006/relationships" xmlns:p="http://schemas.openxmlformats.org/presentationml/2006/main">
-  <p:cSld>
-    <p:spTree>
-      <p:nvGrpSpPr>
-        <p:cNvPr id="1" name="">
-          <a:extLst>
-            <a:ext uri="{FF2B5EF4-FFF2-40B4-BE49-F238E27FC236}">
-              <a16:creationId xmlns:a16="http://schemas.microsoft.com/office/drawing/2014/main" id="{4B8D7E77-9AD5-BF13-14E5-0CFE035B3136}"/>
-            </a:ext>
-          </a:extLst>
-        </p:cNvPr>
-        <p:cNvGrpSpPr/>
-        <p:nvPr/>
-      </p:nvGrpSpPr>
-      <p:grpSpPr>
-        <a:xfrm>
-          <a:off x="0" y="0"/>
-          <a:ext cx="0" cy="0"/>
-          <a:chOff x="0" y="0"/>
-          <a:chExt cx="0" cy="0"/>
-        </a:xfrm>
-      </p:grpSpPr>
-      <p:sp>
-        <p:nvSpPr>
-          <p:cNvPr id="2" name="Title 1">
-            <a:extLst>
-              <a:ext uri="{FF2B5EF4-FFF2-40B4-BE49-F238E27FC236}">
-                <a16:creationId xmlns:a16="http://schemas.microsoft.com/office/drawing/2014/main" id="{F2E8EE1A-1FA8-735D-F7FB-EAA7809B43C1}"/>
-              </a:ext>
-            </a:extLst>
-          </p:cNvPr>
-          <p:cNvSpPr>
-            <a:spLocks noGrp="1"/>
-          </p:cNvSpPr>
-          <p:nvPr>
-            <p:ph type="title"/>
-          </p:nvPr>
-        </p:nvSpPr>
-        <p:spPr/>
-        <p:txBody>
-          <a:bodyPr/>
-          <a:lstStyle/>
-          <a:p>
-            <a:r>
-              <a:rPr lang="en-US" dirty="0"/>
-              <a:t>An example…</a:t>
-            </a:r>
-          </a:p>
-        </p:txBody>
-      </p:sp>
-      <p:sp>
-        <p:nvSpPr>
-          <p:cNvPr id="3" name="Content Placeholder 2">
-            <a:extLst>
-              <a:ext uri="{FF2B5EF4-FFF2-40B4-BE49-F238E27FC236}">
-                <a16:creationId xmlns:a16="http://schemas.microsoft.com/office/drawing/2014/main" id="{F6C32D91-F338-A6FA-1313-B9E939A527A6}"/>
-              </a:ext>
-            </a:extLst>
-          </p:cNvPr>
-          <p:cNvSpPr>
-            <a:spLocks noGrp="1"/>
-          </p:cNvSpPr>
-          <p:nvPr>
-            <p:ph idx="1"/>
-          </p:nvPr>
-        </p:nvSpPr>
-        <p:spPr>
-          <a:xfrm>
-            <a:off x="838200" y="1524682"/>
-            <a:ext cx="5736220" cy="4817269"/>
-          </a:xfrm>
-        </p:spPr>
-        <p:txBody>
-          <a:bodyPr>
-            <a:normAutofit/>
-          </a:bodyPr>
-          <a:lstStyle/>
-          <a:p>
-            <a:pPr marL="0" indent="0">
-              <a:buNone/>
-            </a:pPr>
-            <a:r>
-              <a:rPr lang="en-US" dirty="0"/>
-              <a:t>We build a model to predict a lake’s fish abundance over time based on fishing pressure and weather.</a:t>
-            </a:r>
-          </a:p>
-          <a:p>
-            <a:pPr marL="0" indent="0">
-              <a:buNone/>
-            </a:pPr>
-            <a:endParaRPr lang="en-US" dirty="0"/>
-          </a:p>
-          <a:p>
-            <a:pPr marL="0" indent="0">
-              <a:buNone/>
-            </a:pPr>
-            <a:r>
-              <a:rPr lang="en-US" dirty="0"/>
-              <a:t>We train the model using data from 1990-2025 </a:t>
-            </a:r>
-          </a:p>
-          <a:p>
-            <a:pPr marL="0" indent="0">
-              <a:buNone/>
-            </a:pPr>
-            <a:endParaRPr lang="en-US" dirty="0"/>
-          </a:p>
-          <a:p>
-            <a:pPr marL="0" indent="0">
-              <a:buNone/>
-            </a:pPr>
-            <a:r>
-              <a:rPr lang="en-US" dirty="0"/>
-              <a:t>It predicts those years perfectly.</a:t>
-            </a:r>
-          </a:p>
-          <a:p>
-            <a:pPr marL="0" indent="0">
-              <a:buNone/>
-            </a:pPr>
-            <a:endParaRPr lang="en-US" dirty="0"/>
-          </a:p>
-          <a:p>
-            <a:pPr marL="0" indent="0">
-              <a:buNone/>
-            </a:pPr>
-            <a:r>
-              <a:rPr lang="en-US" dirty="0"/>
-              <a:t>Is this a good model?</a:t>
-            </a:r>
-          </a:p>
-        </p:txBody>
-      </p:sp>
-      <p:pic>
-        <p:nvPicPr>
-          <p:cNvPr id="4" name="Picture 3">
-            <a:extLst>
-              <a:ext uri="{FF2B5EF4-FFF2-40B4-BE49-F238E27FC236}">
-                <a16:creationId xmlns:a16="http://schemas.microsoft.com/office/drawing/2014/main" id="{2B66E6BC-BF49-F038-BC46-C4F81E58F9B5}"/>
-              </a:ext>
-            </a:extLst>
-          </p:cNvPr>
-          <p:cNvPicPr>
-            <a:picLocks noChangeAspect="1"/>
-          </p:cNvPicPr>
-          <p:nvPr/>
-        </p:nvPicPr>
-        <p:blipFill>
-          <a:blip r:embed="rId3"/>
-          <a:stretch>
-            <a:fillRect/>
-          </a:stretch>
-        </p:blipFill>
-        <p:spPr>
-          <a:xfrm>
-            <a:off x="7264905" y="2640750"/>
-            <a:ext cx="3927813" cy="1749228"/>
-          </a:xfrm>
-          <a:prstGeom prst="rect">
-            <a:avLst/>
-          </a:prstGeom>
-        </p:spPr>
-      </p:pic>
-      <p:pic>
-        <p:nvPicPr>
-          <p:cNvPr id="5" name="Picture 4">
-            <a:extLst>
-              <a:ext uri="{FF2B5EF4-FFF2-40B4-BE49-F238E27FC236}">
-                <a16:creationId xmlns:a16="http://schemas.microsoft.com/office/drawing/2014/main" id="{71FD3728-47E6-4AF7-6209-0279CFF13E72}"/>
-              </a:ext>
-            </a:extLst>
-          </p:cNvPr>
-          <p:cNvPicPr>
-            <a:picLocks noChangeAspect="1"/>
-          </p:cNvPicPr>
-          <p:nvPr/>
-        </p:nvPicPr>
-        <p:blipFill>
-          <a:blip r:embed="rId4"/>
-          <a:stretch>
-            <a:fillRect/>
-          </a:stretch>
-        </p:blipFill>
-        <p:spPr>
-          <a:xfrm>
-            <a:off x="7264905" y="4592723"/>
-            <a:ext cx="3927812" cy="1749228"/>
-          </a:xfrm>
-          <a:prstGeom prst="rect">
-            <a:avLst/>
-          </a:prstGeom>
-        </p:spPr>
-      </p:pic>
-      <p:pic>
-        <p:nvPicPr>
-          <p:cNvPr id="6" name="Picture 5">
-            <a:extLst>
-              <a:ext uri="{FF2B5EF4-FFF2-40B4-BE49-F238E27FC236}">
-                <a16:creationId xmlns:a16="http://schemas.microsoft.com/office/drawing/2014/main" id="{6D611B50-249A-AF96-09EC-52F2A575C690}"/>
-              </a:ext>
-            </a:extLst>
-          </p:cNvPr>
-          <p:cNvPicPr>
-            <a:picLocks noChangeAspect="1"/>
-          </p:cNvPicPr>
-          <p:nvPr/>
-        </p:nvPicPr>
-        <p:blipFill>
-          <a:blip r:embed="rId5"/>
-          <a:stretch>
-            <a:fillRect/>
-          </a:stretch>
-        </p:blipFill>
-        <p:spPr>
-          <a:xfrm>
-            <a:off x="8449519" y="92597"/>
-            <a:ext cx="3249523" cy="3249523"/>
-          </a:xfrm>
-          <a:prstGeom prst="rect">
-            <a:avLst/>
-          </a:prstGeom>
-        </p:spPr>
-      </p:pic>
-    </p:spTree>
-    <p:extLst>
-      <p:ext uri="{BB962C8B-B14F-4D97-AF65-F5344CB8AC3E}">
-        <p14:creationId xmlns:p14="http://schemas.microsoft.com/office/powerpoint/2010/main" val="3351739289"/>
-      </p:ext>
-    </p:extLst>
-  </p:cSld>
-  <p:clrMapOvr>
-    <a:masterClrMapping/>
-  </p:clrMapOvr>
-</p:sld>
-</file>
-
-<file path=ppt/slides/slide32.xml><?xml version="1.0" encoding="utf-8"?>
-<p:sld xmlns:a="http://schemas.openxmlformats.org/drawingml/2006/main" xmlns:r="http://schemas.openxmlformats.org/officeDocument/2006/relationships" xmlns:p="http://schemas.openxmlformats.org/presentationml/2006/main">
-  <p:cSld>
-    <p:spTree>
-      <p:nvGrpSpPr>
         <p:cNvPr id="1" name=""/>
         <p:cNvGrpSpPr/>
         <p:nvPr/>
@@ -16384,7 +16097,7 @@
 </p:sld>
 </file>
 
-<file path=ppt/slides/slide33.xml><?xml version="1.0" encoding="utf-8"?>
+<file path=ppt/slides/slide31.xml><?xml version="1.0" encoding="utf-8"?>
 <p:sld xmlns:a="http://schemas.openxmlformats.org/drawingml/2006/main" xmlns:r="http://schemas.openxmlformats.org/officeDocument/2006/relationships" xmlns:p="http://schemas.openxmlformats.org/presentationml/2006/main">
   <p:cSld>
     <p:spTree>
@@ -16844,7 +16557,7 @@
 </p:sld>
 </file>
 
-<file path=ppt/slides/slide34.xml><?xml version="1.0" encoding="utf-8"?>
+<file path=ppt/slides/slide32.xml><?xml version="1.0" encoding="utf-8"?>
 <p:sld xmlns:a="http://schemas.openxmlformats.org/drawingml/2006/main" xmlns:r="http://schemas.openxmlformats.org/officeDocument/2006/relationships" xmlns:p="http://schemas.openxmlformats.org/presentationml/2006/main">
   <p:cSld>
     <p:spTree>
@@ -17149,7 +16862,7 @@
 </p:sld>
 </file>
 
-<file path=ppt/slides/slide35.xml><?xml version="1.0" encoding="utf-8"?>
+<file path=ppt/slides/slide33.xml><?xml version="1.0" encoding="utf-8"?>
 <p:sld xmlns:a="http://schemas.openxmlformats.org/drawingml/2006/main" xmlns:r="http://schemas.openxmlformats.org/officeDocument/2006/relationships" xmlns:p="http://schemas.openxmlformats.org/presentationml/2006/main">
   <p:cSld>
     <p:spTree>
@@ -17383,7 +17096,7 @@
 </p:sld>
 </file>
 
-<file path=ppt/slides/slide36.xml><?xml version="1.0" encoding="utf-8"?>
+<file path=ppt/slides/slide34.xml><?xml version="1.0" encoding="utf-8"?>
 <p:sld xmlns:a="http://schemas.openxmlformats.org/drawingml/2006/main" xmlns:r="http://schemas.openxmlformats.org/officeDocument/2006/relationships" xmlns:p="http://schemas.openxmlformats.org/presentationml/2006/main">
   <p:cSld>
     <p:spTree>
@@ -17441,7 +17154,7 @@
 </p:sld>
 </file>
 
-<file path=ppt/slides/slide37.xml><?xml version="1.0" encoding="utf-8"?>
+<file path=ppt/slides/slide35.xml><?xml version="1.0" encoding="utf-8"?>
 <p:sld xmlns:a="http://schemas.openxmlformats.org/drawingml/2006/main" xmlns:r="http://schemas.openxmlformats.org/officeDocument/2006/relationships" xmlns:p="http://schemas.openxmlformats.org/presentationml/2006/main">
   <p:cSld>
     <p:spTree>
@@ -17816,7 +17529,7 @@
 </p:sld>
 </file>
 
-<file path=ppt/slides/slide38.xml><?xml version="1.0" encoding="utf-8"?>
+<file path=ppt/slides/slide36.xml><?xml version="1.0" encoding="utf-8"?>
 <p:sld xmlns:a="http://schemas.openxmlformats.org/drawingml/2006/main" xmlns:r="http://schemas.openxmlformats.org/officeDocument/2006/relationships" xmlns:p="http://schemas.openxmlformats.org/presentationml/2006/main">
   <p:cSld>
     <p:spTree>
@@ -18313,7 +18026,7 @@
 </p:sld>
 </file>
 
-<file path=ppt/slides/slide39.xml><?xml version="1.0" encoding="utf-8"?>
+<file path=ppt/slides/slide37.xml><?xml version="1.0" encoding="utf-8"?>
 <p:sld xmlns:a="http://schemas.openxmlformats.org/drawingml/2006/main" xmlns:r="http://schemas.openxmlformats.org/officeDocument/2006/relationships" xmlns:p="http://schemas.openxmlformats.org/presentationml/2006/main">
   <p:cSld>
     <p:spTree>
@@ -18442,6 +18155,274 @@
     <p:extLst>
       <p:ext uri="{BB962C8B-B14F-4D97-AF65-F5344CB8AC3E}">
         <p14:creationId xmlns:p14="http://schemas.microsoft.com/office/powerpoint/2010/main" val="2507440538"/>
+      </p:ext>
+    </p:extLst>
+  </p:cSld>
+  <p:clrMapOvr>
+    <a:masterClrMapping/>
+  </p:clrMapOvr>
+</p:sld>
+</file>
+
+<file path=ppt/slides/slide38.xml><?xml version="1.0" encoding="utf-8"?>
+<p:sld xmlns:a="http://schemas.openxmlformats.org/drawingml/2006/main" xmlns:r="http://schemas.openxmlformats.org/officeDocument/2006/relationships" xmlns:p="http://schemas.openxmlformats.org/presentationml/2006/main">
+  <p:cSld>
+    <p:spTree>
+      <p:nvGrpSpPr>
+        <p:cNvPr id="1" name="">
+          <a:extLst>
+            <a:ext uri="{FF2B5EF4-FFF2-40B4-BE49-F238E27FC236}">
+              <a16:creationId xmlns:a16="http://schemas.microsoft.com/office/drawing/2014/main" id="{1167698A-4ABC-E7DA-D6FD-518E7032992E}"/>
+            </a:ext>
+          </a:extLst>
+        </p:cNvPr>
+        <p:cNvGrpSpPr/>
+        <p:nvPr/>
+      </p:nvGrpSpPr>
+      <p:grpSpPr>
+        <a:xfrm>
+          <a:off x="0" y="0"/>
+          <a:ext cx="0" cy="0"/>
+          <a:chOff x="0" y="0"/>
+          <a:chExt cx="0" cy="0"/>
+        </a:xfrm>
+      </p:grpSpPr>
+      <p:sp>
+        <p:nvSpPr>
+          <p:cNvPr id="2" name="Title 1">
+            <a:extLst>
+              <a:ext uri="{FF2B5EF4-FFF2-40B4-BE49-F238E27FC236}">
+                <a16:creationId xmlns:a16="http://schemas.microsoft.com/office/drawing/2014/main" id="{1CEBCEC0-5233-403C-5ADB-460812D2E83D}"/>
+              </a:ext>
+            </a:extLst>
+          </p:cNvPr>
+          <p:cNvSpPr>
+            <a:spLocks noGrp="1"/>
+          </p:cNvSpPr>
+          <p:nvPr>
+            <p:ph type="title"/>
+          </p:nvPr>
+        </p:nvSpPr>
+        <p:spPr/>
+        <p:txBody>
+          <a:bodyPr/>
+          <a:lstStyle/>
+          <a:p>
+            <a:r>
+              <a:rPr lang="en-US" dirty="0"/>
+              <a:t>Some thoughts on what constitutes a “final model”</a:t>
+            </a:r>
+          </a:p>
+        </p:txBody>
+      </p:sp>
+      <p:sp>
+        <p:nvSpPr>
+          <p:cNvPr id="3" name="Content Placeholder 2">
+            <a:extLst>
+              <a:ext uri="{FF2B5EF4-FFF2-40B4-BE49-F238E27FC236}">
+                <a16:creationId xmlns:a16="http://schemas.microsoft.com/office/drawing/2014/main" id="{DE32FCE7-A3CF-5D55-0B01-6151E3DD8B95}"/>
+              </a:ext>
+            </a:extLst>
+          </p:cNvPr>
+          <p:cNvSpPr>
+            <a:spLocks noGrp="1"/>
+          </p:cNvSpPr>
+          <p:nvPr>
+            <p:ph idx="1"/>
+          </p:nvPr>
+        </p:nvSpPr>
+        <p:spPr>
+          <a:xfrm>
+            <a:off x="838200" y="1825624"/>
+            <a:ext cx="4196787" cy="4486275"/>
+          </a:xfrm>
+        </p:spPr>
+        <p:txBody>
+          <a:bodyPr>
+            <a:normAutofit fontScale="92500" lnSpcReduction="10000"/>
+          </a:bodyPr>
+          <a:lstStyle/>
+          <a:p>
+            <a:pPr marL="0" indent="0">
+              <a:buNone/>
+            </a:pPr>
+            <a:r>
+              <a:rPr lang="en-US" dirty="0"/>
+              <a:t>If you’re interested in making predictions outside the available dataset…</a:t>
+            </a:r>
+          </a:p>
+          <a:p>
+            <a:pPr marL="0" indent="0">
+              <a:buNone/>
+            </a:pPr>
+            <a:endParaRPr lang="en-US" dirty="0"/>
+          </a:p>
+          <a:p>
+            <a:pPr marL="0" indent="0">
+              <a:buNone/>
+            </a:pPr>
+            <a:r>
+              <a:rPr lang="en-US" dirty="0"/>
+              <a:t>you probably want to make final predictions using all of the available data…</a:t>
+            </a:r>
+          </a:p>
+          <a:p>
+            <a:pPr marL="0" indent="0">
+              <a:buNone/>
+            </a:pPr>
+            <a:endParaRPr lang="en-US" dirty="0"/>
+          </a:p>
+          <a:p>
+            <a:pPr marL="0" indent="0">
+              <a:buNone/>
+            </a:pPr>
+            <a:r>
+              <a:rPr lang="en-US" dirty="0">
+                <a:solidFill>
+                  <a:schemeClr val="bg1"/>
+                </a:solidFill>
+              </a:rPr>
+              <a:t>but using all of the data doesn’t leave any available for model evaluation…</a:t>
+            </a:r>
+          </a:p>
+        </p:txBody>
+      </p:sp>
+    </p:spTree>
+    <p:extLst>
+      <p:ext uri="{BB962C8B-B14F-4D97-AF65-F5344CB8AC3E}">
+        <p14:creationId xmlns:p14="http://schemas.microsoft.com/office/powerpoint/2010/main" val="645489058"/>
+      </p:ext>
+    </p:extLst>
+  </p:cSld>
+  <p:clrMapOvr>
+    <a:masterClrMapping/>
+  </p:clrMapOvr>
+</p:sld>
+</file>
+
+<file path=ppt/slides/slide39.xml><?xml version="1.0" encoding="utf-8"?>
+<p:sld xmlns:a="http://schemas.openxmlformats.org/drawingml/2006/main" xmlns:r="http://schemas.openxmlformats.org/officeDocument/2006/relationships" xmlns:p="http://schemas.openxmlformats.org/presentationml/2006/main">
+  <p:cSld>
+    <p:spTree>
+      <p:nvGrpSpPr>
+        <p:cNvPr id="1" name="">
+          <a:extLst>
+            <a:ext uri="{FF2B5EF4-FFF2-40B4-BE49-F238E27FC236}">
+              <a16:creationId xmlns:a16="http://schemas.microsoft.com/office/drawing/2014/main" id="{5A0638A2-D313-382F-8031-AD1D1B60BEDB}"/>
+            </a:ext>
+          </a:extLst>
+        </p:cNvPr>
+        <p:cNvGrpSpPr/>
+        <p:nvPr/>
+      </p:nvGrpSpPr>
+      <p:grpSpPr>
+        <a:xfrm>
+          <a:off x="0" y="0"/>
+          <a:ext cx="0" cy="0"/>
+          <a:chOff x="0" y="0"/>
+          <a:chExt cx="0" cy="0"/>
+        </a:xfrm>
+      </p:grpSpPr>
+      <p:sp>
+        <p:nvSpPr>
+          <p:cNvPr id="2" name="Title 1">
+            <a:extLst>
+              <a:ext uri="{FF2B5EF4-FFF2-40B4-BE49-F238E27FC236}">
+                <a16:creationId xmlns:a16="http://schemas.microsoft.com/office/drawing/2014/main" id="{A237FCEE-C233-FD33-1906-4528D8D44BE0}"/>
+              </a:ext>
+            </a:extLst>
+          </p:cNvPr>
+          <p:cNvSpPr>
+            <a:spLocks noGrp="1"/>
+          </p:cNvSpPr>
+          <p:nvPr>
+            <p:ph type="title"/>
+          </p:nvPr>
+        </p:nvSpPr>
+        <p:spPr/>
+        <p:txBody>
+          <a:bodyPr/>
+          <a:lstStyle/>
+          <a:p>
+            <a:r>
+              <a:rPr lang="en-US" dirty="0"/>
+              <a:t>Some thoughts on what constitutes a “final model”</a:t>
+            </a:r>
+          </a:p>
+        </p:txBody>
+      </p:sp>
+      <p:sp>
+        <p:nvSpPr>
+          <p:cNvPr id="3" name="Content Placeholder 2">
+            <a:extLst>
+              <a:ext uri="{FF2B5EF4-FFF2-40B4-BE49-F238E27FC236}">
+                <a16:creationId xmlns:a16="http://schemas.microsoft.com/office/drawing/2014/main" id="{C0C66FB4-5CFB-4C04-E7B8-F8A6FABDA545}"/>
+              </a:ext>
+            </a:extLst>
+          </p:cNvPr>
+          <p:cNvSpPr>
+            <a:spLocks noGrp="1"/>
+          </p:cNvSpPr>
+          <p:nvPr>
+            <p:ph idx="1"/>
+          </p:nvPr>
+        </p:nvSpPr>
+        <p:spPr>
+          <a:xfrm>
+            <a:off x="838200" y="1825624"/>
+            <a:ext cx="4196787" cy="4486275"/>
+          </a:xfrm>
+        </p:spPr>
+        <p:txBody>
+          <a:bodyPr>
+            <a:normAutofit fontScale="92500" lnSpcReduction="10000"/>
+          </a:bodyPr>
+          <a:lstStyle/>
+          <a:p>
+            <a:pPr marL="0" indent="0">
+              <a:buNone/>
+            </a:pPr>
+            <a:r>
+              <a:rPr lang="en-US" dirty="0"/>
+              <a:t>If you’re interested in making predictions outside the available dataset…</a:t>
+            </a:r>
+          </a:p>
+          <a:p>
+            <a:pPr marL="0" indent="0">
+              <a:buNone/>
+            </a:pPr>
+            <a:endParaRPr lang="en-US" dirty="0"/>
+          </a:p>
+          <a:p>
+            <a:pPr marL="0" indent="0">
+              <a:buNone/>
+            </a:pPr>
+            <a:r>
+              <a:rPr lang="en-US" dirty="0"/>
+              <a:t>you probably want to make final predictions using all of the available data…</a:t>
+            </a:r>
+          </a:p>
+          <a:p>
+            <a:pPr marL="0" indent="0">
+              <a:buNone/>
+            </a:pPr>
+            <a:endParaRPr lang="en-US" dirty="0"/>
+          </a:p>
+          <a:p>
+            <a:pPr marL="0" indent="0">
+              <a:buNone/>
+            </a:pPr>
+            <a:r>
+              <a:rPr lang="en-US" dirty="0"/>
+              <a:t>but using all of the data doesn’t leave any available for model evaluation…</a:t>
+            </a:r>
+          </a:p>
+        </p:txBody>
+      </p:sp>
+    </p:spTree>
+    <p:extLst>
+      <p:ext uri="{BB962C8B-B14F-4D97-AF65-F5344CB8AC3E}">
+        <p14:creationId xmlns:p14="http://schemas.microsoft.com/office/powerpoint/2010/main" val="3764649147"/>
       </p:ext>
     </p:extLst>
   </p:cSld>
@@ -18930,274 +18911,6 @@
         <p:cNvPr id="1" name="">
           <a:extLst>
             <a:ext uri="{FF2B5EF4-FFF2-40B4-BE49-F238E27FC236}">
-              <a16:creationId xmlns:a16="http://schemas.microsoft.com/office/drawing/2014/main" id="{1167698A-4ABC-E7DA-D6FD-518E7032992E}"/>
-            </a:ext>
-          </a:extLst>
-        </p:cNvPr>
-        <p:cNvGrpSpPr/>
-        <p:nvPr/>
-      </p:nvGrpSpPr>
-      <p:grpSpPr>
-        <a:xfrm>
-          <a:off x="0" y="0"/>
-          <a:ext cx="0" cy="0"/>
-          <a:chOff x="0" y="0"/>
-          <a:chExt cx="0" cy="0"/>
-        </a:xfrm>
-      </p:grpSpPr>
-      <p:sp>
-        <p:nvSpPr>
-          <p:cNvPr id="2" name="Title 1">
-            <a:extLst>
-              <a:ext uri="{FF2B5EF4-FFF2-40B4-BE49-F238E27FC236}">
-                <a16:creationId xmlns:a16="http://schemas.microsoft.com/office/drawing/2014/main" id="{1CEBCEC0-5233-403C-5ADB-460812D2E83D}"/>
-              </a:ext>
-            </a:extLst>
-          </p:cNvPr>
-          <p:cNvSpPr>
-            <a:spLocks noGrp="1"/>
-          </p:cNvSpPr>
-          <p:nvPr>
-            <p:ph type="title"/>
-          </p:nvPr>
-        </p:nvSpPr>
-        <p:spPr/>
-        <p:txBody>
-          <a:bodyPr/>
-          <a:lstStyle/>
-          <a:p>
-            <a:r>
-              <a:rPr lang="en-US" dirty="0"/>
-              <a:t>Some thoughts on what constitutes a “final model”</a:t>
-            </a:r>
-          </a:p>
-        </p:txBody>
-      </p:sp>
-      <p:sp>
-        <p:nvSpPr>
-          <p:cNvPr id="3" name="Content Placeholder 2">
-            <a:extLst>
-              <a:ext uri="{FF2B5EF4-FFF2-40B4-BE49-F238E27FC236}">
-                <a16:creationId xmlns:a16="http://schemas.microsoft.com/office/drawing/2014/main" id="{DE32FCE7-A3CF-5D55-0B01-6151E3DD8B95}"/>
-              </a:ext>
-            </a:extLst>
-          </p:cNvPr>
-          <p:cNvSpPr>
-            <a:spLocks noGrp="1"/>
-          </p:cNvSpPr>
-          <p:nvPr>
-            <p:ph idx="1"/>
-          </p:nvPr>
-        </p:nvSpPr>
-        <p:spPr>
-          <a:xfrm>
-            <a:off x="838200" y="1825624"/>
-            <a:ext cx="4196787" cy="4486275"/>
-          </a:xfrm>
-        </p:spPr>
-        <p:txBody>
-          <a:bodyPr>
-            <a:normAutofit fontScale="92500" lnSpcReduction="10000"/>
-          </a:bodyPr>
-          <a:lstStyle/>
-          <a:p>
-            <a:pPr marL="0" indent="0">
-              <a:buNone/>
-            </a:pPr>
-            <a:r>
-              <a:rPr lang="en-US" dirty="0"/>
-              <a:t>If you’re interested in making predictions outside the available dataset…</a:t>
-            </a:r>
-          </a:p>
-          <a:p>
-            <a:pPr marL="0" indent="0">
-              <a:buNone/>
-            </a:pPr>
-            <a:endParaRPr lang="en-US" dirty="0"/>
-          </a:p>
-          <a:p>
-            <a:pPr marL="0" indent="0">
-              <a:buNone/>
-            </a:pPr>
-            <a:r>
-              <a:rPr lang="en-US" dirty="0"/>
-              <a:t>you probably want to make final predictions using all of the available data…</a:t>
-            </a:r>
-          </a:p>
-          <a:p>
-            <a:pPr marL="0" indent="0">
-              <a:buNone/>
-            </a:pPr>
-            <a:endParaRPr lang="en-US" dirty="0"/>
-          </a:p>
-          <a:p>
-            <a:pPr marL="0" indent="0">
-              <a:buNone/>
-            </a:pPr>
-            <a:r>
-              <a:rPr lang="en-US" dirty="0">
-                <a:solidFill>
-                  <a:schemeClr val="bg1"/>
-                </a:solidFill>
-              </a:rPr>
-              <a:t>but using all of the data doesn’t leave any available for model evaluation…</a:t>
-            </a:r>
-          </a:p>
-        </p:txBody>
-      </p:sp>
-    </p:spTree>
-    <p:extLst>
-      <p:ext uri="{BB962C8B-B14F-4D97-AF65-F5344CB8AC3E}">
-        <p14:creationId xmlns:p14="http://schemas.microsoft.com/office/powerpoint/2010/main" val="645489058"/>
-      </p:ext>
-    </p:extLst>
-  </p:cSld>
-  <p:clrMapOvr>
-    <a:masterClrMapping/>
-  </p:clrMapOvr>
-</p:sld>
-</file>
-
-<file path=ppt/slides/slide41.xml><?xml version="1.0" encoding="utf-8"?>
-<p:sld xmlns:a="http://schemas.openxmlformats.org/drawingml/2006/main" xmlns:r="http://schemas.openxmlformats.org/officeDocument/2006/relationships" xmlns:p="http://schemas.openxmlformats.org/presentationml/2006/main">
-  <p:cSld>
-    <p:spTree>
-      <p:nvGrpSpPr>
-        <p:cNvPr id="1" name="">
-          <a:extLst>
-            <a:ext uri="{FF2B5EF4-FFF2-40B4-BE49-F238E27FC236}">
-              <a16:creationId xmlns:a16="http://schemas.microsoft.com/office/drawing/2014/main" id="{5A0638A2-D313-382F-8031-AD1D1B60BEDB}"/>
-            </a:ext>
-          </a:extLst>
-        </p:cNvPr>
-        <p:cNvGrpSpPr/>
-        <p:nvPr/>
-      </p:nvGrpSpPr>
-      <p:grpSpPr>
-        <a:xfrm>
-          <a:off x="0" y="0"/>
-          <a:ext cx="0" cy="0"/>
-          <a:chOff x="0" y="0"/>
-          <a:chExt cx="0" cy="0"/>
-        </a:xfrm>
-      </p:grpSpPr>
-      <p:sp>
-        <p:nvSpPr>
-          <p:cNvPr id="2" name="Title 1">
-            <a:extLst>
-              <a:ext uri="{FF2B5EF4-FFF2-40B4-BE49-F238E27FC236}">
-                <a16:creationId xmlns:a16="http://schemas.microsoft.com/office/drawing/2014/main" id="{A237FCEE-C233-FD33-1906-4528D8D44BE0}"/>
-              </a:ext>
-            </a:extLst>
-          </p:cNvPr>
-          <p:cNvSpPr>
-            <a:spLocks noGrp="1"/>
-          </p:cNvSpPr>
-          <p:nvPr>
-            <p:ph type="title"/>
-          </p:nvPr>
-        </p:nvSpPr>
-        <p:spPr/>
-        <p:txBody>
-          <a:bodyPr/>
-          <a:lstStyle/>
-          <a:p>
-            <a:r>
-              <a:rPr lang="en-US" dirty="0"/>
-              <a:t>Some thoughts on what constitutes a “final model”</a:t>
-            </a:r>
-          </a:p>
-        </p:txBody>
-      </p:sp>
-      <p:sp>
-        <p:nvSpPr>
-          <p:cNvPr id="3" name="Content Placeholder 2">
-            <a:extLst>
-              <a:ext uri="{FF2B5EF4-FFF2-40B4-BE49-F238E27FC236}">
-                <a16:creationId xmlns:a16="http://schemas.microsoft.com/office/drawing/2014/main" id="{C0C66FB4-5CFB-4C04-E7B8-F8A6FABDA545}"/>
-              </a:ext>
-            </a:extLst>
-          </p:cNvPr>
-          <p:cNvSpPr>
-            <a:spLocks noGrp="1"/>
-          </p:cNvSpPr>
-          <p:nvPr>
-            <p:ph idx="1"/>
-          </p:nvPr>
-        </p:nvSpPr>
-        <p:spPr>
-          <a:xfrm>
-            <a:off x="838200" y="1825624"/>
-            <a:ext cx="4196787" cy="4486275"/>
-          </a:xfrm>
-        </p:spPr>
-        <p:txBody>
-          <a:bodyPr>
-            <a:normAutofit fontScale="92500" lnSpcReduction="10000"/>
-          </a:bodyPr>
-          <a:lstStyle/>
-          <a:p>
-            <a:pPr marL="0" indent="0">
-              <a:buNone/>
-            </a:pPr>
-            <a:r>
-              <a:rPr lang="en-US" dirty="0"/>
-              <a:t>If you’re interested in making predictions outside the available dataset…</a:t>
-            </a:r>
-          </a:p>
-          <a:p>
-            <a:pPr marL="0" indent="0">
-              <a:buNone/>
-            </a:pPr>
-            <a:endParaRPr lang="en-US" dirty="0"/>
-          </a:p>
-          <a:p>
-            <a:pPr marL="0" indent="0">
-              <a:buNone/>
-            </a:pPr>
-            <a:r>
-              <a:rPr lang="en-US" dirty="0"/>
-              <a:t>you probably want to make final predictions using all of the available data…</a:t>
-            </a:r>
-          </a:p>
-          <a:p>
-            <a:pPr marL="0" indent="0">
-              <a:buNone/>
-            </a:pPr>
-            <a:endParaRPr lang="en-US" dirty="0"/>
-          </a:p>
-          <a:p>
-            <a:pPr marL="0" indent="0">
-              <a:buNone/>
-            </a:pPr>
-            <a:r>
-              <a:rPr lang="en-US" dirty="0"/>
-              <a:t>but using all of the data doesn’t leave any available for model evaluation…</a:t>
-            </a:r>
-          </a:p>
-        </p:txBody>
-      </p:sp>
-    </p:spTree>
-    <p:extLst>
-      <p:ext uri="{BB962C8B-B14F-4D97-AF65-F5344CB8AC3E}">
-        <p14:creationId xmlns:p14="http://schemas.microsoft.com/office/powerpoint/2010/main" val="3764649147"/>
-      </p:ext>
-    </p:extLst>
-  </p:cSld>
-  <p:clrMapOvr>
-    <a:masterClrMapping/>
-  </p:clrMapOvr>
-</p:sld>
-</file>
-
-<file path=ppt/slides/slide42.xml><?xml version="1.0" encoding="utf-8"?>
-<p:sld xmlns:a="http://schemas.openxmlformats.org/drawingml/2006/main" xmlns:r="http://schemas.openxmlformats.org/officeDocument/2006/relationships" xmlns:p="http://schemas.openxmlformats.org/presentationml/2006/main">
-  <p:cSld>
-    <p:spTree>
-      <p:nvGrpSpPr>
-        <p:cNvPr id="1" name="">
-          <a:extLst>
-            <a:ext uri="{FF2B5EF4-FFF2-40B4-BE49-F238E27FC236}">
               <a16:creationId xmlns:a16="http://schemas.microsoft.com/office/drawing/2014/main" id="{74D1F160-6051-0DCB-4FB4-51EBE9181E94}"/>
             </a:ext>
           </a:extLst>
@@ -19570,67 +19283,7 @@
 </p:sld>
 </file>
 
-<file path=ppt/slides/slide43.xml><?xml version="1.0" encoding="utf-8"?>
-<p:sld xmlns:a="http://schemas.openxmlformats.org/drawingml/2006/main" xmlns:r="http://schemas.openxmlformats.org/officeDocument/2006/relationships" xmlns:p="http://schemas.openxmlformats.org/presentationml/2006/main">
-  <p:cSld>
-    <p:spTree>
-      <p:nvGrpSpPr>
-        <p:cNvPr id="1" name=""/>
-        <p:cNvGrpSpPr/>
-        <p:nvPr/>
-      </p:nvGrpSpPr>
-      <p:grpSpPr>
-        <a:xfrm>
-          <a:off x="0" y="0"/>
-          <a:ext cx="0" cy="0"/>
-          <a:chOff x="0" y="0"/>
-          <a:chExt cx="0" cy="0"/>
-        </a:xfrm>
-      </p:grpSpPr>
-      <p:pic>
-        <p:nvPicPr>
-          <p:cNvPr id="5" name="Picture 4">
-            <a:extLst>
-              <a:ext uri="{FF2B5EF4-FFF2-40B4-BE49-F238E27FC236}">
-                <a16:creationId xmlns:a16="http://schemas.microsoft.com/office/drawing/2014/main" id="{2E9052F8-1246-4BE2-07DE-2DBF35F61304}"/>
-              </a:ext>
-            </a:extLst>
-          </p:cNvPr>
-          <p:cNvPicPr>
-            <a:picLocks noChangeAspect="1"/>
-          </p:cNvPicPr>
-          <p:nvPr/>
-        </p:nvPicPr>
-        <p:blipFill>
-          <a:blip r:embed="rId2"/>
-          <a:stretch>
-            <a:fillRect/>
-          </a:stretch>
-        </p:blipFill>
-        <p:spPr>
-          <a:xfrm>
-            <a:off x="1146" y="0"/>
-            <a:ext cx="12190854" cy="6858645"/>
-          </a:xfrm>
-          <a:prstGeom prst="rect">
-            <a:avLst/>
-          </a:prstGeom>
-        </p:spPr>
-      </p:pic>
-    </p:spTree>
-    <p:extLst>
-      <p:ext uri="{BB962C8B-B14F-4D97-AF65-F5344CB8AC3E}">
-        <p14:creationId xmlns:p14="http://schemas.microsoft.com/office/powerpoint/2010/main" val="1194441702"/>
-      </p:ext>
-    </p:extLst>
-  </p:cSld>
-  <p:clrMapOvr>
-    <a:masterClrMapping/>
-  </p:clrMapOvr>
-</p:sld>
-</file>
-
-<file path=ppt/slides/slide44.xml><?xml version="1.0" encoding="utf-8"?>
+<file path=ppt/slides/slide41.xml><?xml version="1.0" encoding="utf-8"?>
 <p:sld xmlns:a="http://schemas.openxmlformats.org/drawingml/2006/main" xmlns:r="http://schemas.openxmlformats.org/officeDocument/2006/relationships" xmlns:p="http://schemas.openxmlformats.org/presentationml/2006/main">
   <p:cSld>
     <p:spTree>
@@ -20246,7 +19899,7 @@
 </p:sld>
 </file>
 
-<file path=ppt/slides/slide45.xml><?xml version="1.0" encoding="utf-8"?>
+<file path=ppt/slides/slide42.xml><?xml version="1.0" encoding="utf-8"?>
 <p:sld xmlns:a="http://schemas.openxmlformats.org/drawingml/2006/main" xmlns:r="http://schemas.openxmlformats.org/officeDocument/2006/relationships" xmlns:p="http://schemas.openxmlformats.org/presentationml/2006/main">
   <p:cSld>
     <p:spTree>
@@ -20842,7 +20495,7 @@
 </p:sld>
 </file>
 
-<file path=ppt/slides/slide46.xml><?xml version="1.0" encoding="utf-8"?>
+<file path=ppt/slides/slide43.xml><?xml version="1.0" encoding="utf-8"?>
 <p:sld xmlns:a="http://schemas.openxmlformats.org/drawingml/2006/main" xmlns:r="http://schemas.openxmlformats.org/officeDocument/2006/relationships" xmlns:p="http://schemas.openxmlformats.org/presentationml/2006/main">
   <p:cSld>
     <p:spTree>
@@ -21644,7 +21297,7 @@
 </p:sld>
 </file>
 
-<file path=ppt/slides/slide47.xml><?xml version="1.0" encoding="utf-8"?>
+<file path=ppt/slides/slide44.xml><?xml version="1.0" encoding="utf-8"?>
 <p:sld xmlns:a="http://schemas.openxmlformats.org/drawingml/2006/main" xmlns:r="http://schemas.openxmlformats.org/officeDocument/2006/relationships" xmlns:p="http://schemas.openxmlformats.org/presentationml/2006/main">
   <p:cSld>
     <p:spTree>
@@ -22363,7 +22016,7 @@
 </p:sld>
 </file>
 
-<file path=ppt/slides/slide48.xml><?xml version="1.0" encoding="utf-8"?>
+<file path=ppt/slides/slide45.xml><?xml version="1.0" encoding="utf-8"?>
 <p:sld xmlns:a="http://schemas.openxmlformats.org/drawingml/2006/main" xmlns:r="http://schemas.openxmlformats.org/officeDocument/2006/relationships" xmlns:p="http://schemas.openxmlformats.org/presentationml/2006/main">
   <p:cSld>
     <p:spTree>
@@ -23317,7 +22970,7 @@
 </p:sld>
 </file>
 
-<file path=ppt/slides/slide49.xml><?xml version="1.0" encoding="utf-8"?>
+<file path=ppt/slides/slide46.xml><?xml version="1.0" encoding="utf-8"?>
 <p:sld xmlns:a="http://schemas.openxmlformats.org/drawingml/2006/main" xmlns:r="http://schemas.openxmlformats.org/officeDocument/2006/relationships" xmlns:p="http://schemas.openxmlformats.org/presentationml/2006/main">
   <p:cSld>
     <p:spTree>
@@ -24352,6 +24005,3330 @@
     <p:extLst>
       <p:ext uri="{BB962C8B-B14F-4D97-AF65-F5344CB8AC3E}">
         <p14:creationId xmlns:p14="http://schemas.microsoft.com/office/powerpoint/2010/main" val="2312596820"/>
+      </p:ext>
+    </p:extLst>
+  </p:cSld>
+  <p:clrMapOvr>
+    <a:masterClrMapping/>
+  </p:clrMapOvr>
+</p:sld>
+</file>
+
+<file path=ppt/slides/slide47.xml><?xml version="1.0" encoding="utf-8"?>
+<p:sld xmlns:a="http://schemas.openxmlformats.org/drawingml/2006/main" xmlns:r="http://schemas.openxmlformats.org/officeDocument/2006/relationships" xmlns:p="http://schemas.openxmlformats.org/presentationml/2006/main">
+  <p:cSld>
+    <p:spTree>
+      <p:nvGrpSpPr>
+        <p:cNvPr id="1" name="">
+          <a:extLst>
+            <a:ext uri="{FF2B5EF4-FFF2-40B4-BE49-F238E27FC236}">
+              <a16:creationId xmlns:a16="http://schemas.microsoft.com/office/drawing/2014/main" id="{6F89030A-0054-6957-3C4E-A96C92296135}"/>
+            </a:ext>
+          </a:extLst>
+        </p:cNvPr>
+        <p:cNvGrpSpPr/>
+        <p:nvPr/>
+      </p:nvGrpSpPr>
+      <p:grpSpPr>
+        <a:xfrm>
+          <a:off x="0" y="0"/>
+          <a:ext cx="0" cy="0"/>
+          <a:chOff x="0" y="0"/>
+          <a:chExt cx="0" cy="0"/>
+        </a:xfrm>
+      </p:grpSpPr>
+      <p:sp>
+        <p:nvSpPr>
+          <p:cNvPr id="2" name="Title 1">
+            <a:extLst>
+              <a:ext uri="{FF2B5EF4-FFF2-40B4-BE49-F238E27FC236}">
+                <a16:creationId xmlns:a16="http://schemas.microsoft.com/office/drawing/2014/main" id="{F792BF6F-6357-6B28-FB99-BC252155A043}"/>
+              </a:ext>
+            </a:extLst>
+          </p:cNvPr>
+          <p:cNvSpPr>
+            <a:spLocks noGrp="1"/>
+          </p:cNvSpPr>
+          <p:nvPr>
+            <p:ph type="title"/>
+          </p:nvPr>
+        </p:nvSpPr>
+        <p:spPr/>
+        <p:txBody>
+          <a:bodyPr/>
+          <a:lstStyle/>
+          <a:p>
+            <a:r>
+              <a:rPr lang="en-US" dirty="0"/>
+              <a:t>Classification and Regression Trees (CART)</a:t>
+            </a:r>
+          </a:p>
+        </p:txBody>
+      </p:sp>
+      <p:grpSp>
+        <p:nvGrpSpPr>
+          <p:cNvPr id="29" name="Group 28">
+            <a:extLst>
+              <a:ext uri="{FF2B5EF4-FFF2-40B4-BE49-F238E27FC236}">
+                <a16:creationId xmlns:a16="http://schemas.microsoft.com/office/drawing/2014/main" id="{24E0FDD7-90B8-8017-CB03-041E2F74476E}"/>
+              </a:ext>
+            </a:extLst>
+          </p:cNvPr>
+          <p:cNvGrpSpPr/>
+          <p:nvPr/>
+        </p:nvGrpSpPr>
+        <p:grpSpPr>
+          <a:xfrm>
+            <a:off x="6698077" y="2369713"/>
+            <a:ext cx="4916090" cy="2017582"/>
+            <a:chOff x="1291291" y="2125014"/>
+            <a:chExt cx="3141703" cy="2017582"/>
+          </a:xfrm>
+        </p:grpSpPr>
+        <p:sp>
+          <p:nvSpPr>
+            <p:cNvPr id="6" name="Oval 5">
+              <a:extLst>
+                <a:ext uri="{FF2B5EF4-FFF2-40B4-BE49-F238E27FC236}">
+                  <a16:creationId xmlns:a16="http://schemas.microsoft.com/office/drawing/2014/main" id="{18462A07-5515-B049-F219-BA09754126E6}"/>
+                </a:ext>
+              </a:extLst>
+            </p:cNvPr>
+            <p:cNvSpPr/>
+            <p:nvPr/>
+          </p:nvSpPr>
+          <p:spPr>
+            <a:xfrm>
+              <a:off x="2410784" y="2125014"/>
+              <a:ext cx="821813" cy="819337"/>
+            </a:xfrm>
+            <a:prstGeom prst="ellipse">
+              <a:avLst/>
+            </a:prstGeom>
+          </p:spPr>
+          <p:style>
+            <a:lnRef idx="2">
+              <a:schemeClr val="accent1">
+                <a:shade val="15000"/>
+              </a:schemeClr>
+            </a:lnRef>
+            <a:fillRef idx="1">
+              <a:schemeClr val="accent1"/>
+            </a:fillRef>
+            <a:effectRef idx="0">
+              <a:schemeClr val="accent1"/>
+            </a:effectRef>
+            <a:fontRef idx="minor">
+              <a:schemeClr val="lt1"/>
+            </a:fontRef>
+          </p:style>
+          <p:txBody>
+            <a:bodyPr rtlCol="0" anchor="ctr"/>
+            <a:lstStyle/>
+            <a:p>
+              <a:pPr algn="ctr"/>
+              <a:endParaRPr lang="en-US"/>
+            </a:p>
+          </p:txBody>
+        </p:sp>
+        <p:sp>
+          <p:nvSpPr>
+            <p:cNvPr id="7" name="Oval 6">
+              <a:extLst>
+                <a:ext uri="{FF2B5EF4-FFF2-40B4-BE49-F238E27FC236}">
+                  <a16:creationId xmlns:a16="http://schemas.microsoft.com/office/drawing/2014/main" id="{06D07F63-A7A4-ACF2-67C0-6C1DB64791A8}"/>
+                </a:ext>
+              </a:extLst>
+            </p:cNvPr>
+            <p:cNvSpPr/>
+            <p:nvPr/>
+          </p:nvSpPr>
+          <p:spPr>
+            <a:xfrm>
+              <a:off x="1291291" y="3034954"/>
+              <a:ext cx="821813" cy="819337"/>
+            </a:xfrm>
+            <a:prstGeom prst="ellipse">
+              <a:avLst/>
+            </a:prstGeom>
+          </p:spPr>
+          <p:style>
+            <a:lnRef idx="2">
+              <a:schemeClr val="accent1">
+                <a:shade val="15000"/>
+              </a:schemeClr>
+            </a:lnRef>
+            <a:fillRef idx="1">
+              <a:schemeClr val="accent1"/>
+            </a:fillRef>
+            <a:effectRef idx="0">
+              <a:schemeClr val="accent1"/>
+            </a:effectRef>
+            <a:fontRef idx="minor">
+              <a:schemeClr val="lt1"/>
+            </a:fontRef>
+          </p:style>
+          <p:txBody>
+            <a:bodyPr rtlCol="0" anchor="ctr"/>
+            <a:lstStyle/>
+            <a:p>
+              <a:pPr algn="ctr"/>
+              <a:endParaRPr lang="en-US"/>
+            </a:p>
+          </p:txBody>
+        </p:sp>
+        <p:sp>
+          <p:nvSpPr>
+            <p:cNvPr id="8" name="Oval 7">
+              <a:extLst>
+                <a:ext uri="{FF2B5EF4-FFF2-40B4-BE49-F238E27FC236}">
+                  <a16:creationId xmlns:a16="http://schemas.microsoft.com/office/drawing/2014/main" id="{26A464BC-A43E-3575-1A0F-36C66998A01D}"/>
+                </a:ext>
+              </a:extLst>
+            </p:cNvPr>
+            <p:cNvSpPr/>
+            <p:nvPr/>
+          </p:nvSpPr>
+          <p:spPr>
+            <a:xfrm>
+              <a:off x="3611181" y="3323259"/>
+              <a:ext cx="821813" cy="819337"/>
+            </a:xfrm>
+            <a:prstGeom prst="ellipse">
+              <a:avLst/>
+            </a:prstGeom>
+          </p:spPr>
+          <p:style>
+            <a:lnRef idx="2">
+              <a:schemeClr val="accent1">
+                <a:shade val="15000"/>
+              </a:schemeClr>
+            </a:lnRef>
+            <a:fillRef idx="1">
+              <a:schemeClr val="accent1"/>
+            </a:fillRef>
+            <a:effectRef idx="0">
+              <a:schemeClr val="accent1"/>
+            </a:effectRef>
+            <a:fontRef idx="minor">
+              <a:schemeClr val="lt1"/>
+            </a:fontRef>
+          </p:style>
+          <p:txBody>
+            <a:bodyPr rtlCol="0" anchor="ctr"/>
+            <a:lstStyle/>
+            <a:p>
+              <a:pPr algn="ctr"/>
+              <a:endParaRPr lang="en-US"/>
+            </a:p>
+          </p:txBody>
+        </p:sp>
+        <p:cxnSp>
+          <p:nvCxnSpPr>
+            <p:cNvPr id="11" name="Straight Connector 10">
+              <a:extLst>
+                <a:ext uri="{FF2B5EF4-FFF2-40B4-BE49-F238E27FC236}">
+                  <a16:creationId xmlns:a16="http://schemas.microsoft.com/office/drawing/2014/main" id="{F1567168-B3AA-7A5A-CABE-E6D85954BF32}"/>
+                </a:ext>
+              </a:extLst>
+            </p:cNvPr>
+            <p:cNvCxnSpPr>
+              <a:cxnSpLocks/>
+              <a:stCxn id="6" idx="5"/>
+              <a:endCxn id="8" idx="1"/>
+            </p:cNvCxnSpPr>
+            <p:nvPr/>
+          </p:nvCxnSpPr>
+          <p:spPr>
+            <a:xfrm>
+              <a:off x="3112245" y="2824362"/>
+              <a:ext cx="619288" cy="618886"/>
+            </a:xfrm>
+            <a:prstGeom prst="line">
+              <a:avLst/>
+            </a:prstGeom>
+          </p:spPr>
+          <p:style>
+            <a:lnRef idx="2">
+              <a:schemeClr val="accent1"/>
+            </a:lnRef>
+            <a:fillRef idx="0">
+              <a:schemeClr val="accent1"/>
+            </a:fillRef>
+            <a:effectRef idx="1">
+              <a:schemeClr val="accent1"/>
+            </a:effectRef>
+            <a:fontRef idx="minor">
+              <a:schemeClr val="tx1"/>
+            </a:fontRef>
+          </p:style>
+        </p:cxnSp>
+        <p:cxnSp>
+          <p:nvCxnSpPr>
+            <p:cNvPr id="12" name="Straight Connector 11">
+              <a:extLst>
+                <a:ext uri="{FF2B5EF4-FFF2-40B4-BE49-F238E27FC236}">
+                  <a16:creationId xmlns:a16="http://schemas.microsoft.com/office/drawing/2014/main" id="{7BD6176F-B700-A4C8-CBC8-07BB1CB1798B}"/>
+                </a:ext>
+              </a:extLst>
+            </p:cNvPr>
+            <p:cNvCxnSpPr>
+              <a:cxnSpLocks/>
+              <a:stCxn id="6" idx="3"/>
+              <a:endCxn id="7" idx="7"/>
+            </p:cNvCxnSpPr>
+            <p:nvPr/>
+          </p:nvCxnSpPr>
+          <p:spPr>
+            <a:xfrm flipH="1">
+              <a:off x="1992752" y="2824362"/>
+              <a:ext cx="538384" cy="330581"/>
+            </a:xfrm>
+            <a:prstGeom prst="line">
+              <a:avLst/>
+            </a:prstGeom>
+          </p:spPr>
+          <p:style>
+            <a:lnRef idx="2">
+              <a:schemeClr val="accent1"/>
+            </a:lnRef>
+            <a:fillRef idx="0">
+              <a:schemeClr val="accent1"/>
+            </a:fillRef>
+            <a:effectRef idx="1">
+              <a:schemeClr val="accent1"/>
+            </a:effectRef>
+            <a:fontRef idx="minor">
+              <a:schemeClr val="tx1"/>
+            </a:fontRef>
+          </p:style>
+        </p:cxnSp>
+      </p:grpSp>
+      <p:graphicFrame>
+        <p:nvGraphicFramePr>
+          <p:cNvPr id="3" name="Table 2">
+            <a:extLst>
+              <a:ext uri="{FF2B5EF4-FFF2-40B4-BE49-F238E27FC236}">
+                <a16:creationId xmlns:a16="http://schemas.microsoft.com/office/drawing/2014/main" id="{309A6777-30CD-DED5-2451-A0830CBCBF67}"/>
+              </a:ext>
+            </a:extLst>
+          </p:cNvPr>
+          <p:cNvGraphicFramePr>
+            <a:graphicFrameLocks noGrp="1"/>
+          </p:cNvGraphicFramePr>
+          <p:nvPr/>
+        </p:nvGraphicFramePr>
+        <p:xfrm>
+          <a:off x="577833" y="3391084"/>
+          <a:ext cx="3762348" cy="3009715"/>
+        </p:xfrm>
+        <a:graphic>
+          <a:graphicData uri="http://schemas.openxmlformats.org/drawingml/2006/table">
+            <a:tbl>
+              <a:tblPr firstRow="1" bandRow="1">
+                <a:tableStyleId>{5C22544A-7EE6-4342-B048-85BDC9FD1C3A}</a:tableStyleId>
+              </a:tblPr>
+              <a:tblGrid>
+                <a:gridCol w="1254116">
+                  <a:extLst>
+                    <a:ext uri="{9D8B030D-6E8A-4147-A177-3AD203B41FA5}">
+                      <a16:colId xmlns:a16="http://schemas.microsoft.com/office/drawing/2014/main" val="3086874793"/>
+                    </a:ext>
+                  </a:extLst>
+                </a:gridCol>
+                <a:gridCol w="1254116">
+                  <a:extLst>
+                    <a:ext uri="{9D8B030D-6E8A-4147-A177-3AD203B41FA5}">
+                      <a16:colId xmlns:a16="http://schemas.microsoft.com/office/drawing/2014/main" val="725989201"/>
+                    </a:ext>
+                  </a:extLst>
+                </a:gridCol>
+                <a:gridCol w="1254116">
+                  <a:extLst>
+                    <a:ext uri="{9D8B030D-6E8A-4147-A177-3AD203B41FA5}">
+                      <a16:colId xmlns:a16="http://schemas.microsoft.com/office/drawing/2014/main" val="1915941172"/>
+                    </a:ext>
+                  </a:extLst>
+                </a:gridCol>
+              </a:tblGrid>
+              <a:tr h="907235">
+                <a:tc>
+                  <a:txBody>
+                    <a:bodyPr/>
+                    <a:lstStyle/>
+                    <a:p>
+                      <a:r>
+                        <a:rPr lang="en-US" dirty="0"/>
+                        <a:t>Penguin species</a:t>
+                      </a:r>
+                    </a:p>
+                  </a:txBody>
+                  <a:tcPr/>
+                </a:tc>
+                <a:tc>
+                  <a:txBody>
+                    <a:bodyPr/>
+                    <a:lstStyle/>
+                    <a:p>
+                      <a:r>
+                        <a:rPr lang="en-US" dirty="0"/>
+                        <a:t>Flipper length</a:t>
+                      </a:r>
+                    </a:p>
+                  </a:txBody>
+                  <a:tcPr/>
+                </a:tc>
+                <a:tc>
+                  <a:txBody>
+                    <a:bodyPr/>
+                    <a:lstStyle/>
+                    <a:p>
+                      <a:r>
+                        <a:rPr lang="en-US" dirty="0"/>
+                        <a:t>Body mass</a:t>
+                      </a:r>
+                    </a:p>
+                  </a:txBody>
+                  <a:tcPr/>
+                </a:tc>
+                <a:extLst>
+                  <a:ext uri="{0D108BD9-81ED-4DB2-BD59-A6C34878D82A}">
+                    <a16:rowId xmlns:a16="http://schemas.microsoft.com/office/drawing/2014/main" val="207539063"/>
+                  </a:ext>
+                </a:extLst>
+              </a:tr>
+              <a:tr h="525620">
+                <a:tc>
+                  <a:txBody>
+                    <a:bodyPr/>
+                    <a:lstStyle/>
+                    <a:p>
+                      <a:r>
+                        <a:rPr lang="en-US" dirty="0"/>
+                        <a:t>Adelie</a:t>
+                      </a:r>
+                    </a:p>
+                  </a:txBody>
+                  <a:tcPr/>
+                </a:tc>
+                <a:tc>
+                  <a:txBody>
+                    <a:bodyPr/>
+                    <a:lstStyle/>
+                    <a:p>
+                      <a:r>
+                        <a:rPr lang="en-US" dirty="0"/>
+                        <a:t>90</a:t>
+                      </a:r>
+                    </a:p>
+                  </a:txBody>
+                  <a:tcPr/>
+                </a:tc>
+                <a:tc>
+                  <a:txBody>
+                    <a:bodyPr/>
+                    <a:lstStyle/>
+                    <a:p>
+                      <a:r>
+                        <a:rPr lang="en-US" dirty="0"/>
+                        <a:t>80</a:t>
+                      </a:r>
+                    </a:p>
+                  </a:txBody>
+                  <a:tcPr/>
+                </a:tc>
+                <a:extLst>
+                  <a:ext uri="{0D108BD9-81ED-4DB2-BD59-A6C34878D82A}">
+                    <a16:rowId xmlns:a16="http://schemas.microsoft.com/office/drawing/2014/main" val="350663204"/>
+                  </a:ext>
+                </a:extLst>
+              </a:tr>
+              <a:tr h="525620">
+                <a:tc>
+                  <a:txBody>
+                    <a:bodyPr/>
+                    <a:lstStyle/>
+                    <a:p>
+                      <a:r>
+                        <a:rPr lang="en-US" dirty="0"/>
+                        <a:t>Gentoo</a:t>
+                      </a:r>
+                    </a:p>
+                  </a:txBody>
+                  <a:tcPr/>
+                </a:tc>
+                <a:tc>
+                  <a:txBody>
+                    <a:bodyPr/>
+                    <a:lstStyle/>
+                    <a:p>
+                      <a:r>
+                        <a:rPr lang="en-US" dirty="0"/>
+                        <a:t>75</a:t>
+                      </a:r>
+                    </a:p>
+                  </a:txBody>
+                  <a:tcPr/>
+                </a:tc>
+                <a:tc>
+                  <a:txBody>
+                    <a:bodyPr/>
+                    <a:lstStyle/>
+                    <a:p>
+                      <a:r>
+                        <a:rPr lang="en-US" dirty="0"/>
+                        <a:t>20</a:t>
+                      </a:r>
+                    </a:p>
+                  </a:txBody>
+                  <a:tcPr/>
+                </a:tc>
+                <a:extLst>
+                  <a:ext uri="{0D108BD9-81ED-4DB2-BD59-A6C34878D82A}">
+                    <a16:rowId xmlns:a16="http://schemas.microsoft.com/office/drawing/2014/main" val="2716910918"/>
+                  </a:ext>
+                </a:extLst>
+              </a:tr>
+              <a:tr h="525620">
+                <a:tc>
+                  <a:txBody>
+                    <a:bodyPr/>
+                    <a:lstStyle/>
+                    <a:p>
+                      <a:r>
+                        <a:rPr lang="en-US" dirty="0"/>
+                        <a:t>Gentoo</a:t>
+                      </a:r>
+                    </a:p>
+                  </a:txBody>
+                  <a:tcPr/>
+                </a:tc>
+                <a:tc>
+                  <a:txBody>
+                    <a:bodyPr/>
+                    <a:lstStyle/>
+                    <a:p>
+                      <a:r>
+                        <a:rPr lang="en-US" dirty="0"/>
+                        <a:t>77</a:t>
+                      </a:r>
+                    </a:p>
+                  </a:txBody>
+                  <a:tcPr/>
+                </a:tc>
+                <a:tc>
+                  <a:txBody>
+                    <a:bodyPr/>
+                    <a:lstStyle/>
+                    <a:p>
+                      <a:r>
+                        <a:rPr lang="en-US" dirty="0"/>
+                        <a:t>32</a:t>
+                      </a:r>
+                    </a:p>
+                  </a:txBody>
+                  <a:tcPr/>
+                </a:tc>
+                <a:extLst>
+                  <a:ext uri="{0D108BD9-81ED-4DB2-BD59-A6C34878D82A}">
+                    <a16:rowId xmlns:a16="http://schemas.microsoft.com/office/drawing/2014/main" val="3870395830"/>
+                  </a:ext>
+                </a:extLst>
+              </a:tr>
+              <a:tr h="525620">
+                <a:tc>
+                  <a:txBody>
+                    <a:bodyPr/>
+                    <a:lstStyle/>
+                    <a:p>
+                      <a:r>
+                        <a:rPr lang="en-US" dirty="0"/>
+                        <a:t>Chinstrap</a:t>
+                      </a:r>
+                    </a:p>
+                  </a:txBody>
+                  <a:tcPr/>
+                </a:tc>
+                <a:tc>
+                  <a:txBody>
+                    <a:bodyPr/>
+                    <a:lstStyle/>
+                    <a:p>
+                      <a:r>
+                        <a:rPr lang="en-US" dirty="0"/>
+                        <a:t>76</a:t>
+                      </a:r>
+                    </a:p>
+                  </a:txBody>
+                  <a:tcPr/>
+                </a:tc>
+                <a:tc>
+                  <a:txBody>
+                    <a:bodyPr/>
+                    <a:lstStyle/>
+                    <a:p>
+                      <a:r>
+                        <a:rPr lang="en-US" dirty="0"/>
+                        <a:t>12</a:t>
+                      </a:r>
+                    </a:p>
+                  </a:txBody>
+                  <a:tcPr/>
+                </a:tc>
+                <a:extLst>
+                  <a:ext uri="{0D108BD9-81ED-4DB2-BD59-A6C34878D82A}">
+                    <a16:rowId xmlns:a16="http://schemas.microsoft.com/office/drawing/2014/main" val="2608199707"/>
+                  </a:ext>
+                </a:extLst>
+              </a:tr>
+            </a:tbl>
+          </a:graphicData>
+        </a:graphic>
+      </p:graphicFrame>
+      <p:sp>
+        <p:nvSpPr>
+          <p:cNvPr id="4" name="TextBox 3">
+            <a:extLst>
+              <a:ext uri="{FF2B5EF4-FFF2-40B4-BE49-F238E27FC236}">
+                <a16:creationId xmlns:a16="http://schemas.microsoft.com/office/drawing/2014/main" id="{B9624B2B-5D6A-5ADD-285B-79AEC2E59045}"/>
+              </a:ext>
+            </a:extLst>
+          </p:cNvPr>
+          <p:cNvSpPr txBox="1"/>
+          <p:nvPr/>
+        </p:nvSpPr>
+        <p:spPr>
+          <a:xfrm>
+            <a:off x="8139712" y="3174079"/>
+            <a:ext cx="2010487" cy="369332"/>
+          </a:xfrm>
+          <a:prstGeom prst="rect">
+            <a:avLst/>
+          </a:prstGeom>
+          <a:noFill/>
+        </p:spPr>
+        <p:txBody>
+          <a:bodyPr wrap="none" rtlCol="0">
+            <a:spAutoFit/>
+          </a:bodyPr>
+          <a:lstStyle/>
+          <a:p>
+            <a:r>
+              <a:rPr lang="en-US" dirty="0"/>
+              <a:t>Flipper length &gt; 80</a:t>
+            </a:r>
+          </a:p>
+        </p:txBody>
+      </p:sp>
+      <p:sp>
+        <p:nvSpPr>
+          <p:cNvPr id="5" name="TextBox 4">
+            <a:extLst>
+              <a:ext uri="{FF2B5EF4-FFF2-40B4-BE49-F238E27FC236}">
+                <a16:creationId xmlns:a16="http://schemas.microsoft.com/office/drawing/2014/main" id="{7E4333B4-5A22-3F57-EAD5-9CFDD8E90594}"/>
+              </a:ext>
+            </a:extLst>
+          </p:cNvPr>
+          <p:cNvSpPr txBox="1"/>
+          <p:nvPr/>
+        </p:nvSpPr>
+        <p:spPr>
+          <a:xfrm>
+            <a:off x="10581704" y="3778299"/>
+            <a:ext cx="808235" cy="369332"/>
+          </a:xfrm>
+          <a:prstGeom prst="rect">
+            <a:avLst/>
+          </a:prstGeom>
+          <a:noFill/>
+        </p:spPr>
+        <p:txBody>
+          <a:bodyPr wrap="none" rtlCol="0">
+            <a:spAutoFit/>
+          </a:bodyPr>
+          <a:lstStyle/>
+          <a:p>
+            <a:r>
+              <a:rPr lang="en-US" dirty="0">
+                <a:solidFill>
+                  <a:schemeClr val="bg1"/>
+                </a:solidFill>
+              </a:rPr>
+              <a:t>Adelie</a:t>
+            </a:r>
+          </a:p>
+        </p:txBody>
+      </p:sp>
+      <p:sp>
+        <p:nvSpPr>
+          <p:cNvPr id="15" name="TextBox 14">
+            <a:extLst>
+              <a:ext uri="{FF2B5EF4-FFF2-40B4-BE49-F238E27FC236}">
+                <a16:creationId xmlns:a16="http://schemas.microsoft.com/office/drawing/2014/main" id="{DC9059DA-1554-B209-4D95-80EF0DD61160}"/>
+              </a:ext>
+            </a:extLst>
+          </p:cNvPr>
+          <p:cNvSpPr txBox="1"/>
+          <p:nvPr/>
+        </p:nvSpPr>
+        <p:spPr>
+          <a:xfrm>
+            <a:off x="6452389" y="4010004"/>
+            <a:ext cx="1739579" cy="369332"/>
+          </a:xfrm>
+          <a:prstGeom prst="rect">
+            <a:avLst/>
+          </a:prstGeom>
+          <a:noFill/>
+        </p:spPr>
+        <p:txBody>
+          <a:bodyPr wrap="none" rtlCol="0">
+            <a:spAutoFit/>
+          </a:bodyPr>
+          <a:lstStyle/>
+          <a:p>
+            <a:r>
+              <a:rPr lang="en-US" dirty="0"/>
+              <a:t>Body mass &gt; 18</a:t>
+            </a:r>
+          </a:p>
+        </p:txBody>
+      </p:sp>
+      <p:sp>
+        <p:nvSpPr>
+          <p:cNvPr id="17" name="TextBox 16">
+            <a:extLst>
+              <a:ext uri="{FF2B5EF4-FFF2-40B4-BE49-F238E27FC236}">
+                <a16:creationId xmlns:a16="http://schemas.microsoft.com/office/drawing/2014/main" id="{1B811112-4CD7-40F9-C177-624CE7BCC612}"/>
+              </a:ext>
+            </a:extLst>
+          </p:cNvPr>
+          <p:cNvSpPr txBox="1"/>
+          <p:nvPr/>
+        </p:nvSpPr>
+        <p:spPr>
+          <a:xfrm>
+            <a:off x="5136103" y="4511529"/>
+            <a:ext cx="1162306" cy="369332"/>
+          </a:xfrm>
+          <a:prstGeom prst="rect">
+            <a:avLst/>
+          </a:prstGeom>
+          <a:noFill/>
+        </p:spPr>
+        <p:txBody>
+          <a:bodyPr wrap="none" rtlCol="0">
+            <a:spAutoFit/>
+          </a:bodyPr>
+          <a:lstStyle/>
+          <a:p>
+            <a:r>
+              <a:rPr lang="en-US" dirty="0">
+                <a:solidFill>
+                  <a:schemeClr val="bg1"/>
+                </a:solidFill>
+              </a:rPr>
+              <a:t>Chinstrap</a:t>
+            </a:r>
+          </a:p>
+        </p:txBody>
+      </p:sp>
+      <p:sp>
+        <p:nvSpPr>
+          <p:cNvPr id="20" name="Content Placeholder 2">
+            <a:extLst>
+              <a:ext uri="{FF2B5EF4-FFF2-40B4-BE49-F238E27FC236}">
+                <a16:creationId xmlns:a16="http://schemas.microsoft.com/office/drawing/2014/main" id="{D7C07C8C-41BC-0AF7-62C7-E1922F2CE665}"/>
+              </a:ext>
+            </a:extLst>
+          </p:cNvPr>
+          <p:cNvSpPr txBox="1">
+            <a:spLocks/>
+          </p:cNvSpPr>
+          <p:nvPr/>
+        </p:nvSpPr>
+        <p:spPr>
+          <a:xfrm>
+            <a:off x="838200" y="1582551"/>
+            <a:ext cx="6427484" cy="1704659"/>
+          </a:xfrm>
+          <a:prstGeom prst="rect">
+            <a:avLst/>
+          </a:prstGeom>
+        </p:spPr>
+        <p:txBody>
+          <a:bodyPr vert="horz" lIns="91440" tIns="45720" rIns="91440" bIns="45720" rtlCol="0">
+            <a:normAutofit fontScale="92500" lnSpcReduction="20000"/>
+          </a:bodyPr>
+          <a:lstStyle>
+            <a:lvl1pPr marL="228600" indent="-228600" algn="l" defTabSz="914400" rtl="0" eaLnBrk="1" latinLnBrk="0" hangingPunct="1">
+              <a:lnSpc>
+                <a:spcPct val="90000"/>
+              </a:lnSpc>
+              <a:spcBef>
+                <a:spcPts val="1000"/>
+              </a:spcBef>
+              <a:buFont typeface="Arial" panose="020B0604020202020204" pitchFamily="34" charset="0"/>
+              <a:buChar char="•"/>
+              <a:defRPr sz="2800" kern="1200">
+                <a:solidFill>
+                  <a:schemeClr val="tx1"/>
+                </a:solidFill>
+                <a:latin typeface="+mn-lt"/>
+                <a:ea typeface="+mn-ea"/>
+                <a:cs typeface="+mn-cs"/>
+              </a:defRPr>
+            </a:lvl1pPr>
+            <a:lvl2pPr marL="685800" indent="-228600" algn="l" defTabSz="914400" rtl="0" eaLnBrk="1" latinLnBrk="0" hangingPunct="1">
+              <a:lnSpc>
+                <a:spcPct val="90000"/>
+              </a:lnSpc>
+              <a:spcBef>
+                <a:spcPts val="500"/>
+              </a:spcBef>
+              <a:buFont typeface="Arial" panose="020B0604020202020204" pitchFamily="34" charset="0"/>
+              <a:buChar char="•"/>
+              <a:defRPr sz="2400" kern="1200">
+                <a:solidFill>
+                  <a:schemeClr val="tx1"/>
+                </a:solidFill>
+                <a:latin typeface="+mn-lt"/>
+                <a:ea typeface="+mn-ea"/>
+                <a:cs typeface="+mn-cs"/>
+              </a:defRPr>
+            </a:lvl2pPr>
+            <a:lvl3pPr marL="1143000" indent="-228600" algn="l" defTabSz="914400" rtl="0" eaLnBrk="1" latinLnBrk="0" hangingPunct="1">
+              <a:lnSpc>
+                <a:spcPct val="90000"/>
+              </a:lnSpc>
+              <a:spcBef>
+                <a:spcPts val="500"/>
+              </a:spcBef>
+              <a:buFont typeface="Arial" panose="020B0604020202020204" pitchFamily="34" charset="0"/>
+              <a:buChar char="•"/>
+              <a:defRPr sz="2000" kern="1200">
+                <a:solidFill>
+                  <a:schemeClr val="tx1"/>
+                </a:solidFill>
+                <a:latin typeface="+mn-lt"/>
+                <a:ea typeface="+mn-ea"/>
+                <a:cs typeface="+mn-cs"/>
+              </a:defRPr>
+            </a:lvl3pPr>
+            <a:lvl4pPr marL="1600200" indent="-228600" algn="l" defTabSz="914400" rtl="0" eaLnBrk="1" latinLnBrk="0" hangingPunct="1">
+              <a:lnSpc>
+                <a:spcPct val="90000"/>
+              </a:lnSpc>
+              <a:spcBef>
+                <a:spcPts val="500"/>
+              </a:spcBef>
+              <a:buFont typeface="Arial" panose="020B0604020202020204" pitchFamily="34" charset="0"/>
+              <a:buChar char="•"/>
+              <a:defRPr sz="1800" kern="1200">
+                <a:solidFill>
+                  <a:schemeClr val="tx1"/>
+                </a:solidFill>
+                <a:latin typeface="+mn-lt"/>
+                <a:ea typeface="+mn-ea"/>
+                <a:cs typeface="+mn-cs"/>
+              </a:defRPr>
+            </a:lvl4pPr>
+            <a:lvl5pPr marL="2057400" indent="-228600" algn="l" defTabSz="914400" rtl="0" eaLnBrk="1" latinLnBrk="0" hangingPunct="1">
+              <a:lnSpc>
+                <a:spcPct val="90000"/>
+              </a:lnSpc>
+              <a:spcBef>
+                <a:spcPts val="500"/>
+              </a:spcBef>
+              <a:buFont typeface="Arial" panose="020B0604020202020204" pitchFamily="34" charset="0"/>
+              <a:buChar char="•"/>
+              <a:defRPr sz="1800" kern="1200">
+                <a:solidFill>
+                  <a:schemeClr val="tx1"/>
+                </a:solidFill>
+                <a:latin typeface="+mn-lt"/>
+                <a:ea typeface="+mn-ea"/>
+                <a:cs typeface="+mn-cs"/>
+              </a:defRPr>
+            </a:lvl5pPr>
+            <a:lvl6pPr marL="2514600" indent="-228600" algn="l" defTabSz="914400" rtl="0" eaLnBrk="1" latinLnBrk="0" hangingPunct="1">
+              <a:lnSpc>
+                <a:spcPct val="90000"/>
+              </a:lnSpc>
+              <a:spcBef>
+                <a:spcPts val="500"/>
+              </a:spcBef>
+              <a:buFont typeface="Arial" panose="020B0604020202020204" pitchFamily="34" charset="0"/>
+              <a:buChar char="•"/>
+              <a:defRPr sz="1800" kern="1200">
+                <a:solidFill>
+                  <a:schemeClr val="tx1"/>
+                </a:solidFill>
+                <a:latin typeface="+mn-lt"/>
+                <a:ea typeface="+mn-ea"/>
+                <a:cs typeface="+mn-cs"/>
+              </a:defRPr>
+            </a:lvl6pPr>
+            <a:lvl7pPr marL="2971800" indent="-228600" algn="l" defTabSz="914400" rtl="0" eaLnBrk="1" latinLnBrk="0" hangingPunct="1">
+              <a:lnSpc>
+                <a:spcPct val="90000"/>
+              </a:lnSpc>
+              <a:spcBef>
+                <a:spcPts val="500"/>
+              </a:spcBef>
+              <a:buFont typeface="Arial" panose="020B0604020202020204" pitchFamily="34" charset="0"/>
+              <a:buChar char="•"/>
+              <a:defRPr sz="1800" kern="1200">
+                <a:solidFill>
+                  <a:schemeClr val="tx1"/>
+                </a:solidFill>
+                <a:latin typeface="+mn-lt"/>
+                <a:ea typeface="+mn-ea"/>
+                <a:cs typeface="+mn-cs"/>
+              </a:defRPr>
+            </a:lvl7pPr>
+            <a:lvl8pPr marL="3429000" indent="-228600" algn="l" defTabSz="914400" rtl="0" eaLnBrk="1" latinLnBrk="0" hangingPunct="1">
+              <a:lnSpc>
+                <a:spcPct val="90000"/>
+              </a:lnSpc>
+              <a:spcBef>
+                <a:spcPts val="500"/>
+              </a:spcBef>
+              <a:buFont typeface="Arial" panose="020B0604020202020204" pitchFamily="34" charset="0"/>
+              <a:buChar char="•"/>
+              <a:defRPr sz="1800" kern="1200">
+                <a:solidFill>
+                  <a:schemeClr val="tx1"/>
+                </a:solidFill>
+                <a:latin typeface="+mn-lt"/>
+                <a:ea typeface="+mn-ea"/>
+                <a:cs typeface="+mn-cs"/>
+              </a:defRPr>
+            </a:lvl8pPr>
+            <a:lvl9pPr marL="3886200" indent="-228600" algn="l" defTabSz="914400" rtl="0" eaLnBrk="1" latinLnBrk="0" hangingPunct="1">
+              <a:lnSpc>
+                <a:spcPct val="90000"/>
+              </a:lnSpc>
+              <a:spcBef>
+                <a:spcPts val="500"/>
+              </a:spcBef>
+              <a:buFont typeface="Arial" panose="020B0604020202020204" pitchFamily="34" charset="0"/>
+              <a:buChar char="•"/>
+              <a:defRPr sz="1800" kern="1200">
+                <a:solidFill>
+                  <a:schemeClr val="tx1"/>
+                </a:solidFill>
+                <a:latin typeface="+mn-lt"/>
+                <a:ea typeface="+mn-ea"/>
+                <a:cs typeface="+mn-cs"/>
+              </a:defRPr>
+            </a:lvl9pPr>
+          </a:lstStyle>
+          <a:p>
+            <a:pPr marL="0" indent="0">
+              <a:buFont typeface="Arial" panose="020B0604020202020204" pitchFamily="34" charset="0"/>
+              <a:buNone/>
+            </a:pPr>
+            <a:r>
+              <a:rPr lang="en-US" dirty="0"/>
+              <a:t>Until a stopping condition is met</a:t>
+            </a:r>
+          </a:p>
+          <a:p>
+            <a:pPr marL="0" indent="0">
+              <a:buFont typeface="Arial" panose="020B0604020202020204" pitchFamily="34" charset="0"/>
+              <a:buNone/>
+            </a:pPr>
+            <a:r>
+              <a:rPr lang="en-US" dirty="0"/>
+              <a:t>   Evaluate best split for each predictor</a:t>
+            </a:r>
+          </a:p>
+          <a:p>
+            <a:pPr marL="0" indent="0">
+              <a:buFont typeface="Arial" panose="020B0604020202020204" pitchFamily="34" charset="0"/>
+              <a:buNone/>
+            </a:pPr>
+            <a:r>
+              <a:rPr lang="en-US" dirty="0"/>
+              <a:t>   Select the optimal split</a:t>
+            </a:r>
+          </a:p>
+          <a:p>
+            <a:pPr marL="0" indent="0">
+              <a:buFont typeface="Arial" panose="020B0604020202020204" pitchFamily="34" charset="0"/>
+              <a:buNone/>
+            </a:pPr>
+            <a:r>
+              <a:rPr lang="en-US" dirty="0"/>
+              <a:t>   Create new nodes</a:t>
+            </a:r>
+          </a:p>
+          <a:p>
+            <a:pPr marL="0" indent="0">
+              <a:buFont typeface="Arial" panose="020B0604020202020204" pitchFamily="34" charset="0"/>
+              <a:buNone/>
+            </a:pPr>
+            <a:endParaRPr lang="en-US" dirty="0"/>
+          </a:p>
+          <a:p>
+            <a:pPr marL="0" indent="0">
+              <a:buFont typeface="Arial" panose="020B0604020202020204" pitchFamily="34" charset="0"/>
+              <a:buNone/>
+            </a:pPr>
+            <a:endParaRPr lang="en-US" dirty="0"/>
+          </a:p>
+        </p:txBody>
+      </p:sp>
+    </p:spTree>
+    <p:extLst>
+      <p:ext uri="{BB962C8B-B14F-4D97-AF65-F5344CB8AC3E}">
+        <p14:creationId xmlns:p14="http://schemas.microsoft.com/office/powerpoint/2010/main" val="3197460958"/>
+      </p:ext>
+    </p:extLst>
+  </p:cSld>
+  <p:clrMapOvr>
+    <a:masterClrMapping/>
+  </p:clrMapOvr>
+</p:sld>
+</file>
+
+<file path=ppt/slides/slide48.xml><?xml version="1.0" encoding="utf-8"?>
+<p:sld xmlns:a="http://schemas.openxmlformats.org/drawingml/2006/main" xmlns:r="http://schemas.openxmlformats.org/officeDocument/2006/relationships" xmlns:p="http://schemas.openxmlformats.org/presentationml/2006/main">
+  <p:cSld>
+    <p:spTree>
+      <p:nvGrpSpPr>
+        <p:cNvPr id="1" name="">
+          <a:extLst>
+            <a:ext uri="{FF2B5EF4-FFF2-40B4-BE49-F238E27FC236}">
+              <a16:creationId xmlns:a16="http://schemas.microsoft.com/office/drawing/2014/main" id="{5E0B90EE-1E76-28A0-542C-3233C0A3A55B}"/>
+            </a:ext>
+          </a:extLst>
+        </p:cNvPr>
+        <p:cNvGrpSpPr/>
+        <p:nvPr/>
+      </p:nvGrpSpPr>
+      <p:grpSpPr>
+        <a:xfrm>
+          <a:off x="0" y="0"/>
+          <a:ext cx="0" cy="0"/>
+          <a:chOff x="0" y="0"/>
+          <a:chExt cx="0" cy="0"/>
+        </a:xfrm>
+      </p:grpSpPr>
+      <p:sp>
+        <p:nvSpPr>
+          <p:cNvPr id="2" name="Title 1">
+            <a:extLst>
+              <a:ext uri="{FF2B5EF4-FFF2-40B4-BE49-F238E27FC236}">
+                <a16:creationId xmlns:a16="http://schemas.microsoft.com/office/drawing/2014/main" id="{93EA62FE-89A4-8C02-6297-CD42CAA26D33}"/>
+              </a:ext>
+            </a:extLst>
+          </p:cNvPr>
+          <p:cNvSpPr>
+            <a:spLocks noGrp="1"/>
+          </p:cNvSpPr>
+          <p:nvPr>
+            <p:ph type="title"/>
+          </p:nvPr>
+        </p:nvSpPr>
+        <p:spPr/>
+        <p:txBody>
+          <a:bodyPr/>
+          <a:lstStyle/>
+          <a:p>
+            <a:r>
+              <a:rPr lang="en-US" dirty="0"/>
+              <a:t>Classification and Regression Trees (CART)</a:t>
+            </a:r>
+          </a:p>
+        </p:txBody>
+      </p:sp>
+      <p:grpSp>
+        <p:nvGrpSpPr>
+          <p:cNvPr id="29" name="Group 28">
+            <a:extLst>
+              <a:ext uri="{FF2B5EF4-FFF2-40B4-BE49-F238E27FC236}">
+                <a16:creationId xmlns:a16="http://schemas.microsoft.com/office/drawing/2014/main" id="{49A776A9-3DCD-0E03-5236-19F9AA581B43}"/>
+              </a:ext>
+            </a:extLst>
+          </p:cNvPr>
+          <p:cNvGrpSpPr/>
+          <p:nvPr/>
+        </p:nvGrpSpPr>
+        <p:grpSpPr>
+          <a:xfrm>
+            <a:off x="5074276" y="2369713"/>
+            <a:ext cx="6539891" cy="2736153"/>
+            <a:chOff x="253576" y="2125014"/>
+            <a:chExt cx="4179418" cy="2736153"/>
+          </a:xfrm>
+        </p:grpSpPr>
+        <p:sp>
+          <p:nvSpPr>
+            <p:cNvPr id="6" name="Oval 5">
+              <a:extLst>
+                <a:ext uri="{FF2B5EF4-FFF2-40B4-BE49-F238E27FC236}">
+                  <a16:creationId xmlns:a16="http://schemas.microsoft.com/office/drawing/2014/main" id="{8E95FCDC-59DF-FDDF-3FA9-95740542284E}"/>
+                </a:ext>
+              </a:extLst>
+            </p:cNvPr>
+            <p:cNvSpPr/>
+            <p:nvPr/>
+          </p:nvSpPr>
+          <p:spPr>
+            <a:xfrm>
+              <a:off x="2410784" y="2125014"/>
+              <a:ext cx="821813" cy="819337"/>
+            </a:xfrm>
+            <a:prstGeom prst="ellipse">
+              <a:avLst/>
+            </a:prstGeom>
+          </p:spPr>
+          <p:style>
+            <a:lnRef idx="2">
+              <a:schemeClr val="accent1">
+                <a:shade val="15000"/>
+              </a:schemeClr>
+            </a:lnRef>
+            <a:fillRef idx="1">
+              <a:schemeClr val="accent1"/>
+            </a:fillRef>
+            <a:effectRef idx="0">
+              <a:schemeClr val="accent1"/>
+            </a:effectRef>
+            <a:fontRef idx="minor">
+              <a:schemeClr val="lt1"/>
+            </a:fontRef>
+          </p:style>
+          <p:txBody>
+            <a:bodyPr rtlCol="0" anchor="ctr"/>
+            <a:lstStyle/>
+            <a:p>
+              <a:pPr algn="ctr"/>
+              <a:endParaRPr lang="en-US"/>
+            </a:p>
+          </p:txBody>
+        </p:sp>
+        <p:sp>
+          <p:nvSpPr>
+            <p:cNvPr id="7" name="Oval 6">
+              <a:extLst>
+                <a:ext uri="{FF2B5EF4-FFF2-40B4-BE49-F238E27FC236}">
+                  <a16:creationId xmlns:a16="http://schemas.microsoft.com/office/drawing/2014/main" id="{2E6A8EB6-7983-0A84-A2B2-BE38C7874604}"/>
+                </a:ext>
+              </a:extLst>
+            </p:cNvPr>
+            <p:cNvSpPr/>
+            <p:nvPr/>
+          </p:nvSpPr>
+          <p:spPr>
+            <a:xfrm>
+              <a:off x="1291291" y="3034954"/>
+              <a:ext cx="821813" cy="819337"/>
+            </a:xfrm>
+            <a:prstGeom prst="ellipse">
+              <a:avLst/>
+            </a:prstGeom>
+          </p:spPr>
+          <p:style>
+            <a:lnRef idx="2">
+              <a:schemeClr val="accent1">
+                <a:shade val="15000"/>
+              </a:schemeClr>
+            </a:lnRef>
+            <a:fillRef idx="1">
+              <a:schemeClr val="accent1"/>
+            </a:fillRef>
+            <a:effectRef idx="0">
+              <a:schemeClr val="accent1"/>
+            </a:effectRef>
+            <a:fontRef idx="minor">
+              <a:schemeClr val="lt1"/>
+            </a:fontRef>
+          </p:style>
+          <p:txBody>
+            <a:bodyPr rtlCol="0" anchor="ctr"/>
+            <a:lstStyle/>
+            <a:p>
+              <a:pPr algn="ctr"/>
+              <a:endParaRPr lang="en-US"/>
+            </a:p>
+          </p:txBody>
+        </p:sp>
+        <p:sp>
+          <p:nvSpPr>
+            <p:cNvPr id="8" name="Oval 7">
+              <a:extLst>
+                <a:ext uri="{FF2B5EF4-FFF2-40B4-BE49-F238E27FC236}">
+                  <a16:creationId xmlns:a16="http://schemas.microsoft.com/office/drawing/2014/main" id="{12F27990-1ED1-48C3-1D7B-FFC7EA3D6004}"/>
+                </a:ext>
+              </a:extLst>
+            </p:cNvPr>
+            <p:cNvSpPr/>
+            <p:nvPr/>
+          </p:nvSpPr>
+          <p:spPr>
+            <a:xfrm>
+              <a:off x="3611181" y="3323259"/>
+              <a:ext cx="821813" cy="819337"/>
+            </a:xfrm>
+            <a:prstGeom prst="ellipse">
+              <a:avLst/>
+            </a:prstGeom>
+          </p:spPr>
+          <p:style>
+            <a:lnRef idx="2">
+              <a:schemeClr val="accent1">
+                <a:shade val="15000"/>
+              </a:schemeClr>
+            </a:lnRef>
+            <a:fillRef idx="1">
+              <a:schemeClr val="accent1"/>
+            </a:fillRef>
+            <a:effectRef idx="0">
+              <a:schemeClr val="accent1"/>
+            </a:effectRef>
+            <a:fontRef idx="minor">
+              <a:schemeClr val="lt1"/>
+            </a:fontRef>
+          </p:style>
+          <p:txBody>
+            <a:bodyPr rtlCol="0" anchor="ctr"/>
+            <a:lstStyle/>
+            <a:p>
+              <a:pPr algn="ctr"/>
+              <a:endParaRPr lang="en-US"/>
+            </a:p>
+          </p:txBody>
+        </p:sp>
+        <p:sp>
+          <p:nvSpPr>
+            <p:cNvPr id="9" name="Oval 8">
+              <a:extLst>
+                <a:ext uri="{FF2B5EF4-FFF2-40B4-BE49-F238E27FC236}">
+                  <a16:creationId xmlns:a16="http://schemas.microsoft.com/office/drawing/2014/main" id="{FFEDC6FF-B88B-6C79-212C-E5D31332D17F}"/>
+                </a:ext>
+              </a:extLst>
+            </p:cNvPr>
+            <p:cNvSpPr/>
+            <p:nvPr/>
+          </p:nvSpPr>
+          <p:spPr>
+            <a:xfrm>
+              <a:off x="253576" y="4041829"/>
+              <a:ext cx="821813" cy="819337"/>
+            </a:xfrm>
+            <a:prstGeom prst="ellipse">
+              <a:avLst/>
+            </a:prstGeom>
+          </p:spPr>
+          <p:style>
+            <a:lnRef idx="2">
+              <a:schemeClr val="accent1">
+                <a:shade val="15000"/>
+              </a:schemeClr>
+            </a:lnRef>
+            <a:fillRef idx="1">
+              <a:schemeClr val="accent1"/>
+            </a:fillRef>
+            <a:effectRef idx="0">
+              <a:schemeClr val="accent1"/>
+            </a:effectRef>
+            <a:fontRef idx="minor">
+              <a:schemeClr val="lt1"/>
+            </a:fontRef>
+          </p:style>
+          <p:txBody>
+            <a:bodyPr rtlCol="0" anchor="ctr"/>
+            <a:lstStyle/>
+            <a:p>
+              <a:pPr algn="ctr"/>
+              <a:endParaRPr lang="en-US"/>
+            </a:p>
+          </p:txBody>
+        </p:sp>
+        <p:sp>
+          <p:nvSpPr>
+            <p:cNvPr id="10" name="Oval 9">
+              <a:extLst>
+                <a:ext uri="{FF2B5EF4-FFF2-40B4-BE49-F238E27FC236}">
+                  <a16:creationId xmlns:a16="http://schemas.microsoft.com/office/drawing/2014/main" id="{91F041FE-E0AA-0A0C-FF16-1BE0D9CCBE11}"/>
+                </a:ext>
+              </a:extLst>
+            </p:cNvPr>
+            <p:cNvSpPr/>
+            <p:nvPr/>
+          </p:nvSpPr>
+          <p:spPr>
+            <a:xfrm>
+              <a:off x="2296413" y="4041830"/>
+              <a:ext cx="821813" cy="819337"/>
+            </a:xfrm>
+            <a:prstGeom prst="ellipse">
+              <a:avLst/>
+            </a:prstGeom>
+          </p:spPr>
+          <p:style>
+            <a:lnRef idx="2">
+              <a:schemeClr val="accent1">
+                <a:shade val="15000"/>
+              </a:schemeClr>
+            </a:lnRef>
+            <a:fillRef idx="1">
+              <a:schemeClr val="accent1"/>
+            </a:fillRef>
+            <a:effectRef idx="0">
+              <a:schemeClr val="accent1"/>
+            </a:effectRef>
+            <a:fontRef idx="minor">
+              <a:schemeClr val="lt1"/>
+            </a:fontRef>
+          </p:style>
+          <p:txBody>
+            <a:bodyPr rtlCol="0" anchor="ctr"/>
+            <a:lstStyle/>
+            <a:p>
+              <a:pPr algn="ctr"/>
+              <a:endParaRPr lang="en-US"/>
+            </a:p>
+          </p:txBody>
+        </p:sp>
+        <p:cxnSp>
+          <p:nvCxnSpPr>
+            <p:cNvPr id="11" name="Straight Connector 10">
+              <a:extLst>
+                <a:ext uri="{FF2B5EF4-FFF2-40B4-BE49-F238E27FC236}">
+                  <a16:creationId xmlns:a16="http://schemas.microsoft.com/office/drawing/2014/main" id="{2DD614FC-D06B-849D-B6EF-B4002C8EF34C}"/>
+                </a:ext>
+              </a:extLst>
+            </p:cNvPr>
+            <p:cNvCxnSpPr>
+              <a:stCxn id="6" idx="5"/>
+              <a:endCxn id="8" idx="1"/>
+            </p:cNvCxnSpPr>
+            <p:nvPr/>
+          </p:nvCxnSpPr>
+          <p:spPr>
+            <a:xfrm>
+              <a:off x="3112245" y="2824362"/>
+              <a:ext cx="619288" cy="618886"/>
+            </a:xfrm>
+            <a:prstGeom prst="line">
+              <a:avLst/>
+            </a:prstGeom>
+          </p:spPr>
+          <p:style>
+            <a:lnRef idx="2">
+              <a:schemeClr val="accent1"/>
+            </a:lnRef>
+            <a:fillRef idx="0">
+              <a:schemeClr val="accent1"/>
+            </a:fillRef>
+            <a:effectRef idx="1">
+              <a:schemeClr val="accent1"/>
+            </a:effectRef>
+            <a:fontRef idx="minor">
+              <a:schemeClr val="tx1"/>
+            </a:fontRef>
+          </p:style>
+        </p:cxnSp>
+        <p:cxnSp>
+          <p:nvCxnSpPr>
+            <p:cNvPr id="12" name="Straight Connector 11">
+              <a:extLst>
+                <a:ext uri="{FF2B5EF4-FFF2-40B4-BE49-F238E27FC236}">
+                  <a16:creationId xmlns:a16="http://schemas.microsoft.com/office/drawing/2014/main" id="{096D6B1B-0DBD-8663-CC82-41FDC5A52DCC}"/>
+                </a:ext>
+              </a:extLst>
+            </p:cNvPr>
+            <p:cNvCxnSpPr>
+              <a:cxnSpLocks/>
+              <a:stCxn id="6" idx="3"/>
+              <a:endCxn id="7" idx="7"/>
+            </p:cNvCxnSpPr>
+            <p:nvPr/>
+          </p:nvCxnSpPr>
+          <p:spPr>
+            <a:xfrm flipH="1">
+              <a:off x="1992752" y="2824362"/>
+              <a:ext cx="538384" cy="330581"/>
+            </a:xfrm>
+            <a:prstGeom prst="line">
+              <a:avLst/>
+            </a:prstGeom>
+          </p:spPr>
+          <p:style>
+            <a:lnRef idx="2">
+              <a:schemeClr val="accent1"/>
+            </a:lnRef>
+            <a:fillRef idx="0">
+              <a:schemeClr val="accent1"/>
+            </a:fillRef>
+            <a:effectRef idx="1">
+              <a:schemeClr val="accent1"/>
+            </a:effectRef>
+            <a:fontRef idx="minor">
+              <a:schemeClr val="tx1"/>
+            </a:fontRef>
+          </p:style>
+        </p:cxnSp>
+        <p:cxnSp>
+          <p:nvCxnSpPr>
+            <p:cNvPr id="13" name="Straight Connector 12">
+              <a:extLst>
+                <a:ext uri="{FF2B5EF4-FFF2-40B4-BE49-F238E27FC236}">
+                  <a16:creationId xmlns:a16="http://schemas.microsoft.com/office/drawing/2014/main" id="{7422479F-F0E4-1810-71A3-7A00B74C86BB}"/>
+                </a:ext>
+              </a:extLst>
+            </p:cNvPr>
+            <p:cNvCxnSpPr>
+              <a:cxnSpLocks/>
+              <a:stCxn id="7" idx="3"/>
+              <a:endCxn id="9" idx="7"/>
+            </p:cNvCxnSpPr>
+            <p:nvPr/>
+          </p:nvCxnSpPr>
+          <p:spPr>
+            <a:xfrm flipH="1">
+              <a:off x="955037" y="3734302"/>
+              <a:ext cx="456606" cy="427516"/>
+            </a:xfrm>
+            <a:prstGeom prst="line">
+              <a:avLst/>
+            </a:prstGeom>
+          </p:spPr>
+          <p:style>
+            <a:lnRef idx="2">
+              <a:schemeClr val="accent1"/>
+            </a:lnRef>
+            <a:fillRef idx="0">
+              <a:schemeClr val="accent1"/>
+            </a:fillRef>
+            <a:effectRef idx="1">
+              <a:schemeClr val="accent1"/>
+            </a:effectRef>
+            <a:fontRef idx="minor">
+              <a:schemeClr val="tx1"/>
+            </a:fontRef>
+          </p:style>
+        </p:cxnSp>
+        <p:cxnSp>
+          <p:nvCxnSpPr>
+            <p:cNvPr id="14" name="Straight Connector 13">
+              <a:extLst>
+                <a:ext uri="{FF2B5EF4-FFF2-40B4-BE49-F238E27FC236}">
+                  <a16:creationId xmlns:a16="http://schemas.microsoft.com/office/drawing/2014/main" id="{3B4F6CC0-205F-1234-FE10-827C24ECA6EF}"/>
+                </a:ext>
+              </a:extLst>
+            </p:cNvPr>
+            <p:cNvCxnSpPr>
+              <a:cxnSpLocks/>
+              <a:stCxn id="7" idx="5"/>
+              <a:endCxn id="10" idx="1"/>
+            </p:cNvCxnSpPr>
+            <p:nvPr/>
+          </p:nvCxnSpPr>
+          <p:spPr>
+            <a:xfrm>
+              <a:off x="1992752" y="3734302"/>
+              <a:ext cx="424013" cy="427517"/>
+            </a:xfrm>
+            <a:prstGeom prst="line">
+              <a:avLst/>
+            </a:prstGeom>
+          </p:spPr>
+          <p:style>
+            <a:lnRef idx="2">
+              <a:schemeClr val="accent1"/>
+            </a:lnRef>
+            <a:fillRef idx="0">
+              <a:schemeClr val="accent1"/>
+            </a:fillRef>
+            <a:effectRef idx="1">
+              <a:schemeClr val="accent1"/>
+            </a:effectRef>
+            <a:fontRef idx="minor">
+              <a:schemeClr val="tx1"/>
+            </a:fontRef>
+          </p:style>
+        </p:cxnSp>
+      </p:grpSp>
+      <p:graphicFrame>
+        <p:nvGraphicFramePr>
+          <p:cNvPr id="3" name="Table 2">
+            <a:extLst>
+              <a:ext uri="{FF2B5EF4-FFF2-40B4-BE49-F238E27FC236}">
+                <a16:creationId xmlns:a16="http://schemas.microsoft.com/office/drawing/2014/main" id="{3B91855C-1D9E-5502-DC5C-BEDF2A0C8C43}"/>
+              </a:ext>
+            </a:extLst>
+          </p:cNvPr>
+          <p:cNvGraphicFramePr>
+            <a:graphicFrameLocks noGrp="1"/>
+          </p:cNvGraphicFramePr>
+          <p:nvPr/>
+        </p:nvGraphicFramePr>
+        <p:xfrm>
+          <a:off x="577833" y="3391084"/>
+          <a:ext cx="3762348" cy="3009715"/>
+        </p:xfrm>
+        <a:graphic>
+          <a:graphicData uri="http://schemas.openxmlformats.org/drawingml/2006/table">
+            <a:tbl>
+              <a:tblPr firstRow="1" bandRow="1">
+                <a:tableStyleId>{5C22544A-7EE6-4342-B048-85BDC9FD1C3A}</a:tableStyleId>
+              </a:tblPr>
+              <a:tblGrid>
+                <a:gridCol w="1254116">
+                  <a:extLst>
+                    <a:ext uri="{9D8B030D-6E8A-4147-A177-3AD203B41FA5}">
+                      <a16:colId xmlns:a16="http://schemas.microsoft.com/office/drawing/2014/main" val="3086874793"/>
+                    </a:ext>
+                  </a:extLst>
+                </a:gridCol>
+                <a:gridCol w="1254116">
+                  <a:extLst>
+                    <a:ext uri="{9D8B030D-6E8A-4147-A177-3AD203B41FA5}">
+                      <a16:colId xmlns:a16="http://schemas.microsoft.com/office/drawing/2014/main" val="725989201"/>
+                    </a:ext>
+                  </a:extLst>
+                </a:gridCol>
+                <a:gridCol w="1254116">
+                  <a:extLst>
+                    <a:ext uri="{9D8B030D-6E8A-4147-A177-3AD203B41FA5}">
+                      <a16:colId xmlns:a16="http://schemas.microsoft.com/office/drawing/2014/main" val="1915941172"/>
+                    </a:ext>
+                  </a:extLst>
+                </a:gridCol>
+              </a:tblGrid>
+              <a:tr h="907235">
+                <a:tc>
+                  <a:txBody>
+                    <a:bodyPr/>
+                    <a:lstStyle/>
+                    <a:p>
+                      <a:r>
+                        <a:rPr lang="en-US" dirty="0"/>
+                        <a:t>Penguin species</a:t>
+                      </a:r>
+                    </a:p>
+                  </a:txBody>
+                  <a:tcPr/>
+                </a:tc>
+                <a:tc>
+                  <a:txBody>
+                    <a:bodyPr/>
+                    <a:lstStyle/>
+                    <a:p>
+                      <a:r>
+                        <a:rPr lang="en-US" dirty="0"/>
+                        <a:t>Flipper length</a:t>
+                      </a:r>
+                    </a:p>
+                  </a:txBody>
+                  <a:tcPr/>
+                </a:tc>
+                <a:tc>
+                  <a:txBody>
+                    <a:bodyPr/>
+                    <a:lstStyle/>
+                    <a:p>
+                      <a:r>
+                        <a:rPr lang="en-US" dirty="0"/>
+                        <a:t>Body mass</a:t>
+                      </a:r>
+                    </a:p>
+                  </a:txBody>
+                  <a:tcPr/>
+                </a:tc>
+                <a:extLst>
+                  <a:ext uri="{0D108BD9-81ED-4DB2-BD59-A6C34878D82A}">
+                    <a16:rowId xmlns:a16="http://schemas.microsoft.com/office/drawing/2014/main" val="207539063"/>
+                  </a:ext>
+                </a:extLst>
+              </a:tr>
+              <a:tr h="525620">
+                <a:tc>
+                  <a:txBody>
+                    <a:bodyPr/>
+                    <a:lstStyle/>
+                    <a:p>
+                      <a:r>
+                        <a:rPr lang="en-US" dirty="0"/>
+                        <a:t>Adelie</a:t>
+                      </a:r>
+                    </a:p>
+                  </a:txBody>
+                  <a:tcPr/>
+                </a:tc>
+                <a:tc>
+                  <a:txBody>
+                    <a:bodyPr/>
+                    <a:lstStyle/>
+                    <a:p>
+                      <a:r>
+                        <a:rPr lang="en-US" dirty="0"/>
+                        <a:t>90</a:t>
+                      </a:r>
+                    </a:p>
+                  </a:txBody>
+                  <a:tcPr/>
+                </a:tc>
+                <a:tc>
+                  <a:txBody>
+                    <a:bodyPr/>
+                    <a:lstStyle/>
+                    <a:p>
+                      <a:r>
+                        <a:rPr lang="en-US" dirty="0"/>
+                        <a:t>80</a:t>
+                      </a:r>
+                    </a:p>
+                  </a:txBody>
+                  <a:tcPr/>
+                </a:tc>
+                <a:extLst>
+                  <a:ext uri="{0D108BD9-81ED-4DB2-BD59-A6C34878D82A}">
+                    <a16:rowId xmlns:a16="http://schemas.microsoft.com/office/drawing/2014/main" val="350663204"/>
+                  </a:ext>
+                </a:extLst>
+              </a:tr>
+              <a:tr h="525620">
+                <a:tc>
+                  <a:txBody>
+                    <a:bodyPr/>
+                    <a:lstStyle/>
+                    <a:p>
+                      <a:r>
+                        <a:rPr lang="en-US" dirty="0"/>
+                        <a:t>Gentoo</a:t>
+                      </a:r>
+                    </a:p>
+                  </a:txBody>
+                  <a:tcPr/>
+                </a:tc>
+                <a:tc>
+                  <a:txBody>
+                    <a:bodyPr/>
+                    <a:lstStyle/>
+                    <a:p>
+                      <a:r>
+                        <a:rPr lang="en-US" dirty="0"/>
+                        <a:t>75</a:t>
+                      </a:r>
+                    </a:p>
+                  </a:txBody>
+                  <a:tcPr/>
+                </a:tc>
+                <a:tc>
+                  <a:txBody>
+                    <a:bodyPr/>
+                    <a:lstStyle/>
+                    <a:p>
+                      <a:r>
+                        <a:rPr lang="en-US" dirty="0"/>
+                        <a:t>20</a:t>
+                      </a:r>
+                    </a:p>
+                  </a:txBody>
+                  <a:tcPr/>
+                </a:tc>
+                <a:extLst>
+                  <a:ext uri="{0D108BD9-81ED-4DB2-BD59-A6C34878D82A}">
+                    <a16:rowId xmlns:a16="http://schemas.microsoft.com/office/drawing/2014/main" val="2716910918"/>
+                  </a:ext>
+                </a:extLst>
+              </a:tr>
+              <a:tr h="525620">
+                <a:tc>
+                  <a:txBody>
+                    <a:bodyPr/>
+                    <a:lstStyle/>
+                    <a:p>
+                      <a:r>
+                        <a:rPr lang="en-US" dirty="0"/>
+                        <a:t>Gentoo</a:t>
+                      </a:r>
+                    </a:p>
+                  </a:txBody>
+                  <a:tcPr/>
+                </a:tc>
+                <a:tc>
+                  <a:txBody>
+                    <a:bodyPr/>
+                    <a:lstStyle/>
+                    <a:p>
+                      <a:r>
+                        <a:rPr lang="en-US" dirty="0"/>
+                        <a:t>77</a:t>
+                      </a:r>
+                    </a:p>
+                  </a:txBody>
+                  <a:tcPr/>
+                </a:tc>
+                <a:tc>
+                  <a:txBody>
+                    <a:bodyPr/>
+                    <a:lstStyle/>
+                    <a:p>
+                      <a:r>
+                        <a:rPr lang="en-US" dirty="0"/>
+                        <a:t>32</a:t>
+                      </a:r>
+                    </a:p>
+                  </a:txBody>
+                  <a:tcPr/>
+                </a:tc>
+                <a:extLst>
+                  <a:ext uri="{0D108BD9-81ED-4DB2-BD59-A6C34878D82A}">
+                    <a16:rowId xmlns:a16="http://schemas.microsoft.com/office/drawing/2014/main" val="3870395830"/>
+                  </a:ext>
+                </a:extLst>
+              </a:tr>
+              <a:tr h="525620">
+                <a:tc>
+                  <a:txBody>
+                    <a:bodyPr/>
+                    <a:lstStyle/>
+                    <a:p>
+                      <a:r>
+                        <a:rPr lang="en-US" dirty="0"/>
+                        <a:t>Chinstrap</a:t>
+                      </a:r>
+                    </a:p>
+                  </a:txBody>
+                  <a:tcPr/>
+                </a:tc>
+                <a:tc>
+                  <a:txBody>
+                    <a:bodyPr/>
+                    <a:lstStyle/>
+                    <a:p>
+                      <a:r>
+                        <a:rPr lang="en-US" dirty="0"/>
+                        <a:t>76</a:t>
+                      </a:r>
+                    </a:p>
+                  </a:txBody>
+                  <a:tcPr/>
+                </a:tc>
+                <a:tc>
+                  <a:txBody>
+                    <a:bodyPr/>
+                    <a:lstStyle/>
+                    <a:p>
+                      <a:r>
+                        <a:rPr lang="en-US" dirty="0"/>
+                        <a:t>12</a:t>
+                      </a:r>
+                    </a:p>
+                  </a:txBody>
+                  <a:tcPr/>
+                </a:tc>
+                <a:extLst>
+                  <a:ext uri="{0D108BD9-81ED-4DB2-BD59-A6C34878D82A}">
+                    <a16:rowId xmlns:a16="http://schemas.microsoft.com/office/drawing/2014/main" val="2608199707"/>
+                  </a:ext>
+                </a:extLst>
+              </a:tr>
+            </a:tbl>
+          </a:graphicData>
+        </a:graphic>
+      </p:graphicFrame>
+      <p:sp>
+        <p:nvSpPr>
+          <p:cNvPr id="4" name="TextBox 3">
+            <a:extLst>
+              <a:ext uri="{FF2B5EF4-FFF2-40B4-BE49-F238E27FC236}">
+                <a16:creationId xmlns:a16="http://schemas.microsoft.com/office/drawing/2014/main" id="{E33FACB9-5A11-D0A9-C498-9564E60F3B0F}"/>
+              </a:ext>
+            </a:extLst>
+          </p:cNvPr>
+          <p:cNvSpPr txBox="1"/>
+          <p:nvPr/>
+        </p:nvSpPr>
+        <p:spPr>
+          <a:xfrm>
+            <a:off x="8139712" y="3174079"/>
+            <a:ext cx="2010487" cy="369332"/>
+          </a:xfrm>
+          <a:prstGeom prst="rect">
+            <a:avLst/>
+          </a:prstGeom>
+          <a:noFill/>
+        </p:spPr>
+        <p:txBody>
+          <a:bodyPr wrap="none" rtlCol="0">
+            <a:spAutoFit/>
+          </a:bodyPr>
+          <a:lstStyle/>
+          <a:p>
+            <a:r>
+              <a:rPr lang="en-US" dirty="0"/>
+              <a:t>Flipper length &gt; 80</a:t>
+            </a:r>
+          </a:p>
+        </p:txBody>
+      </p:sp>
+      <p:sp>
+        <p:nvSpPr>
+          <p:cNvPr id="5" name="TextBox 4">
+            <a:extLst>
+              <a:ext uri="{FF2B5EF4-FFF2-40B4-BE49-F238E27FC236}">
+                <a16:creationId xmlns:a16="http://schemas.microsoft.com/office/drawing/2014/main" id="{ED735AFE-C6B4-D973-F097-F9314B27678D}"/>
+              </a:ext>
+            </a:extLst>
+          </p:cNvPr>
+          <p:cNvSpPr txBox="1"/>
+          <p:nvPr/>
+        </p:nvSpPr>
+        <p:spPr>
+          <a:xfrm>
+            <a:off x="10581704" y="3778299"/>
+            <a:ext cx="808235" cy="369332"/>
+          </a:xfrm>
+          <a:prstGeom prst="rect">
+            <a:avLst/>
+          </a:prstGeom>
+          <a:noFill/>
+        </p:spPr>
+        <p:txBody>
+          <a:bodyPr wrap="none" rtlCol="0">
+            <a:spAutoFit/>
+          </a:bodyPr>
+          <a:lstStyle/>
+          <a:p>
+            <a:r>
+              <a:rPr lang="en-US" dirty="0">
+                <a:solidFill>
+                  <a:schemeClr val="bg1"/>
+                </a:solidFill>
+              </a:rPr>
+              <a:t>Adelie</a:t>
+            </a:r>
+          </a:p>
+        </p:txBody>
+      </p:sp>
+      <p:sp>
+        <p:nvSpPr>
+          <p:cNvPr id="15" name="TextBox 14">
+            <a:extLst>
+              <a:ext uri="{FF2B5EF4-FFF2-40B4-BE49-F238E27FC236}">
+                <a16:creationId xmlns:a16="http://schemas.microsoft.com/office/drawing/2014/main" id="{567C8D36-626F-6164-9933-545E068DE295}"/>
+              </a:ext>
+            </a:extLst>
+          </p:cNvPr>
+          <p:cNvSpPr txBox="1"/>
+          <p:nvPr/>
+        </p:nvSpPr>
+        <p:spPr>
+          <a:xfrm>
+            <a:off x="6452389" y="3986854"/>
+            <a:ext cx="1739579" cy="369332"/>
+          </a:xfrm>
+          <a:prstGeom prst="rect">
+            <a:avLst/>
+          </a:prstGeom>
+          <a:noFill/>
+        </p:spPr>
+        <p:txBody>
+          <a:bodyPr wrap="none" rtlCol="0">
+            <a:spAutoFit/>
+          </a:bodyPr>
+          <a:lstStyle/>
+          <a:p>
+            <a:r>
+              <a:rPr lang="en-US" dirty="0"/>
+              <a:t>Body mass &gt; 18</a:t>
+            </a:r>
+          </a:p>
+        </p:txBody>
+      </p:sp>
+      <p:sp>
+        <p:nvSpPr>
+          <p:cNvPr id="20" name="Content Placeholder 2">
+            <a:extLst>
+              <a:ext uri="{FF2B5EF4-FFF2-40B4-BE49-F238E27FC236}">
+                <a16:creationId xmlns:a16="http://schemas.microsoft.com/office/drawing/2014/main" id="{54BC2618-5F67-7389-94CF-3F7479801403}"/>
+              </a:ext>
+            </a:extLst>
+          </p:cNvPr>
+          <p:cNvSpPr txBox="1">
+            <a:spLocks/>
+          </p:cNvSpPr>
+          <p:nvPr/>
+        </p:nvSpPr>
+        <p:spPr>
+          <a:xfrm>
+            <a:off x="838200" y="1582551"/>
+            <a:ext cx="6427484" cy="1704659"/>
+          </a:xfrm>
+          <a:prstGeom prst="rect">
+            <a:avLst/>
+          </a:prstGeom>
+        </p:spPr>
+        <p:txBody>
+          <a:bodyPr vert="horz" lIns="91440" tIns="45720" rIns="91440" bIns="45720" rtlCol="0">
+            <a:normAutofit fontScale="92500" lnSpcReduction="20000"/>
+          </a:bodyPr>
+          <a:lstStyle>
+            <a:lvl1pPr marL="228600" indent="-228600" algn="l" defTabSz="914400" rtl="0" eaLnBrk="1" latinLnBrk="0" hangingPunct="1">
+              <a:lnSpc>
+                <a:spcPct val="90000"/>
+              </a:lnSpc>
+              <a:spcBef>
+                <a:spcPts val="1000"/>
+              </a:spcBef>
+              <a:buFont typeface="Arial" panose="020B0604020202020204" pitchFamily="34" charset="0"/>
+              <a:buChar char="•"/>
+              <a:defRPr sz="2800" kern="1200">
+                <a:solidFill>
+                  <a:schemeClr val="tx1"/>
+                </a:solidFill>
+                <a:latin typeface="+mn-lt"/>
+                <a:ea typeface="+mn-ea"/>
+                <a:cs typeface="+mn-cs"/>
+              </a:defRPr>
+            </a:lvl1pPr>
+            <a:lvl2pPr marL="685800" indent="-228600" algn="l" defTabSz="914400" rtl="0" eaLnBrk="1" latinLnBrk="0" hangingPunct="1">
+              <a:lnSpc>
+                <a:spcPct val="90000"/>
+              </a:lnSpc>
+              <a:spcBef>
+                <a:spcPts val="500"/>
+              </a:spcBef>
+              <a:buFont typeface="Arial" panose="020B0604020202020204" pitchFamily="34" charset="0"/>
+              <a:buChar char="•"/>
+              <a:defRPr sz="2400" kern="1200">
+                <a:solidFill>
+                  <a:schemeClr val="tx1"/>
+                </a:solidFill>
+                <a:latin typeface="+mn-lt"/>
+                <a:ea typeface="+mn-ea"/>
+                <a:cs typeface="+mn-cs"/>
+              </a:defRPr>
+            </a:lvl2pPr>
+            <a:lvl3pPr marL="1143000" indent="-228600" algn="l" defTabSz="914400" rtl="0" eaLnBrk="1" latinLnBrk="0" hangingPunct="1">
+              <a:lnSpc>
+                <a:spcPct val="90000"/>
+              </a:lnSpc>
+              <a:spcBef>
+                <a:spcPts val="500"/>
+              </a:spcBef>
+              <a:buFont typeface="Arial" panose="020B0604020202020204" pitchFamily="34" charset="0"/>
+              <a:buChar char="•"/>
+              <a:defRPr sz="2000" kern="1200">
+                <a:solidFill>
+                  <a:schemeClr val="tx1"/>
+                </a:solidFill>
+                <a:latin typeface="+mn-lt"/>
+                <a:ea typeface="+mn-ea"/>
+                <a:cs typeface="+mn-cs"/>
+              </a:defRPr>
+            </a:lvl3pPr>
+            <a:lvl4pPr marL="1600200" indent="-228600" algn="l" defTabSz="914400" rtl="0" eaLnBrk="1" latinLnBrk="0" hangingPunct="1">
+              <a:lnSpc>
+                <a:spcPct val="90000"/>
+              </a:lnSpc>
+              <a:spcBef>
+                <a:spcPts val="500"/>
+              </a:spcBef>
+              <a:buFont typeface="Arial" panose="020B0604020202020204" pitchFamily="34" charset="0"/>
+              <a:buChar char="•"/>
+              <a:defRPr sz="1800" kern="1200">
+                <a:solidFill>
+                  <a:schemeClr val="tx1"/>
+                </a:solidFill>
+                <a:latin typeface="+mn-lt"/>
+                <a:ea typeface="+mn-ea"/>
+                <a:cs typeface="+mn-cs"/>
+              </a:defRPr>
+            </a:lvl4pPr>
+            <a:lvl5pPr marL="2057400" indent="-228600" algn="l" defTabSz="914400" rtl="0" eaLnBrk="1" latinLnBrk="0" hangingPunct="1">
+              <a:lnSpc>
+                <a:spcPct val="90000"/>
+              </a:lnSpc>
+              <a:spcBef>
+                <a:spcPts val="500"/>
+              </a:spcBef>
+              <a:buFont typeface="Arial" panose="020B0604020202020204" pitchFamily="34" charset="0"/>
+              <a:buChar char="•"/>
+              <a:defRPr sz="1800" kern="1200">
+                <a:solidFill>
+                  <a:schemeClr val="tx1"/>
+                </a:solidFill>
+                <a:latin typeface="+mn-lt"/>
+                <a:ea typeface="+mn-ea"/>
+                <a:cs typeface="+mn-cs"/>
+              </a:defRPr>
+            </a:lvl5pPr>
+            <a:lvl6pPr marL="2514600" indent="-228600" algn="l" defTabSz="914400" rtl="0" eaLnBrk="1" latinLnBrk="0" hangingPunct="1">
+              <a:lnSpc>
+                <a:spcPct val="90000"/>
+              </a:lnSpc>
+              <a:spcBef>
+                <a:spcPts val="500"/>
+              </a:spcBef>
+              <a:buFont typeface="Arial" panose="020B0604020202020204" pitchFamily="34" charset="0"/>
+              <a:buChar char="•"/>
+              <a:defRPr sz="1800" kern="1200">
+                <a:solidFill>
+                  <a:schemeClr val="tx1"/>
+                </a:solidFill>
+                <a:latin typeface="+mn-lt"/>
+                <a:ea typeface="+mn-ea"/>
+                <a:cs typeface="+mn-cs"/>
+              </a:defRPr>
+            </a:lvl6pPr>
+            <a:lvl7pPr marL="2971800" indent="-228600" algn="l" defTabSz="914400" rtl="0" eaLnBrk="1" latinLnBrk="0" hangingPunct="1">
+              <a:lnSpc>
+                <a:spcPct val="90000"/>
+              </a:lnSpc>
+              <a:spcBef>
+                <a:spcPts val="500"/>
+              </a:spcBef>
+              <a:buFont typeface="Arial" panose="020B0604020202020204" pitchFamily="34" charset="0"/>
+              <a:buChar char="•"/>
+              <a:defRPr sz="1800" kern="1200">
+                <a:solidFill>
+                  <a:schemeClr val="tx1"/>
+                </a:solidFill>
+                <a:latin typeface="+mn-lt"/>
+                <a:ea typeface="+mn-ea"/>
+                <a:cs typeface="+mn-cs"/>
+              </a:defRPr>
+            </a:lvl7pPr>
+            <a:lvl8pPr marL="3429000" indent="-228600" algn="l" defTabSz="914400" rtl="0" eaLnBrk="1" latinLnBrk="0" hangingPunct="1">
+              <a:lnSpc>
+                <a:spcPct val="90000"/>
+              </a:lnSpc>
+              <a:spcBef>
+                <a:spcPts val="500"/>
+              </a:spcBef>
+              <a:buFont typeface="Arial" panose="020B0604020202020204" pitchFamily="34" charset="0"/>
+              <a:buChar char="•"/>
+              <a:defRPr sz="1800" kern="1200">
+                <a:solidFill>
+                  <a:schemeClr val="tx1"/>
+                </a:solidFill>
+                <a:latin typeface="+mn-lt"/>
+                <a:ea typeface="+mn-ea"/>
+                <a:cs typeface="+mn-cs"/>
+              </a:defRPr>
+            </a:lvl8pPr>
+            <a:lvl9pPr marL="3886200" indent="-228600" algn="l" defTabSz="914400" rtl="0" eaLnBrk="1" latinLnBrk="0" hangingPunct="1">
+              <a:lnSpc>
+                <a:spcPct val="90000"/>
+              </a:lnSpc>
+              <a:spcBef>
+                <a:spcPts val="500"/>
+              </a:spcBef>
+              <a:buFont typeface="Arial" panose="020B0604020202020204" pitchFamily="34" charset="0"/>
+              <a:buChar char="•"/>
+              <a:defRPr sz="1800" kern="1200">
+                <a:solidFill>
+                  <a:schemeClr val="tx1"/>
+                </a:solidFill>
+                <a:latin typeface="+mn-lt"/>
+                <a:ea typeface="+mn-ea"/>
+                <a:cs typeface="+mn-cs"/>
+              </a:defRPr>
+            </a:lvl9pPr>
+          </a:lstStyle>
+          <a:p>
+            <a:pPr marL="0" indent="0">
+              <a:buFont typeface="Arial" panose="020B0604020202020204" pitchFamily="34" charset="0"/>
+              <a:buNone/>
+            </a:pPr>
+            <a:r>
+              <a:rPr lang="en-US" dirty="0"/>
+              <a:t>Until a stopping condition is met</a:t>
+            </a:r>
+          </a:p>
+          <a:p>
+            <a:pPr marL="0" indent="0">
+              <a:buFont typeface="Arial" panose="020B0604020202020204" pitchFamily="34" charset="0"/>
+              <a:buNone/>
+            </a:pPr>
+            <a:r>
+              <a:rPr lang="en-US" dirty="0"/>
+              <a:t>   Evaluate best split for each predictor</a:t>
+            </a:r>
+          </a:p>
+          <a:p>
+            <a:pPr marL="0" indent="0">
+              <a:buFont typeface="Arial" panose="020B0604020202020204" pitchFamily="34" charset="0"/>
+              <a:buNone/>
+            </a:pPr>
+            <a:r>
+              <a:rPr lang="en-US" dirty="0"/>
+              <a:t>   Select the optimal split</a:t>
+            </a:r>
+          </a:p>
+          <a:p>
+            <a:pPr marL="0" indent="0">
+              <a:buFont typeface="Arial" panose="020B0604020202020204" pitchFamily="34" charset="0"/>
+              <a:buNone/>
+            </a:pPr>
+            <a:r>
+              <a:rPr lang="en-US" dirty="0"/>
+              <a:t>   Create new nodes</a:t>
+            </a:r>
+          </a:p>
+          <a:p>
+            <a:pPr marL="0" indent="0">
+              <a:buFont typeface="Arial" panose="020B0604020202020204" pitchFamily="34" charset="0"/>
+              <a:buNone/>
+            </a:pPr>
+            <a:endParaRPr lang="en-US" dirty="0"/>
+          </a:p>
+          <a:p>
+            <a:pPr marL="0" indent="0">
+              <a:buFont typeface="Arial" panose="020B0604020202020204" pitchFamily="34" charset="0"/>
+              <a:buNone/>
+            </a:pPr>
+            <a:endParaRPr lang="en-US" dirty="0"/>
+          </a:p>
+        </p:txBody>
+      </p:sp>
+    </p:spTree>
+    <p:extLst>
+      <p:ext uri="{BB962C8B-B14F-4D97-AF65-F5344CB8AC3E}">
+        <p14:creationId xmlns:p14="http://schemas.microsoft.com/office/powerpoint/2010/main" val="1086180660"/>
+      </p:ext>
+    </p:extLst>
+  </p:cSld>
+  <p:clrMapOvr>
+    <a:masterClrMapping/>
+  </p:clrMapOvr>
+</p:sld>
+</file>
+
+<file path=ppt/slides/slide49.xml><?xml version="1.0" encoding="utf-8"?>
+<p:sld xmlns:a="http://schemas.openxmlformats.org/drawingml/2006/main" xmlns:r="http://schemas.openxmlformats.org/officeDocument/2006/relationships" xmlns:p="http://schemas.openxmlformats.org/presentationml/2006/main">
+  <p:cSld>
+    <p:spTree>
+      <p:nvGrpSpPr>
+        <p:cNvPr id="1" name="">
+          <a:extLst>
+            <a:ext uri="{FF2B5EF4-FFF2-40B4-BE49-F238E27FC236}">
+              <a16:creationId xmlns:a16="http://schemas.microsoft.com/office/drawing/2014/main" id="{42B1CA57-BD9D-2463-2D86-72B3EA02C55D}"/>
+            </a:ext>
+          </a:extLst>
+        </p:cNvPr>
+        <p:cNvGrpSpPr/>
+        <p:nvPr/>
+      </p:nvGrpSpPr>
+      <p:grpSpPr>
+        <a:xfrm>
+          <a:off x="0" y="0"/>
+          <a:ext cx="0" cy="0"/>
+          <a:chOff x="0" y="0"/>
+          <a:chExt cx="0" cy="0"/>
+        </a:xfrm>
+      </p:grpSpPr>
+      <p:sp>
+        <p:nvSpPr>
+          <p:cNvPr id="2" name="Title 1">
+            <a:extLst>
+              <a:ext uri="{FF2B5EF4-FFF2-40B4-BE49-F238E27FC236}">
+                <a16:creationId xmlns:a16="http://schemas.microsoft.com/office/drawing/2014/main" id="{0C7EAB02-9BAC-5B7F-6F52-F72109841031}"/>
+              </a:ext>
+            </a:extLst>
+          </p:cNvPr>
+          <p:cNvSpPr>
+            <a:spLocks noGrp="1"/>
+          </p:cNvSpPr>
+          <p:nvPr>
+            <p:ph type="title"/>
+          </p:nvPr>
+        </p:nvSpPr>
+        <p:spPr/>
+        <p:txBody>
+          <a:bodyPr/>
+          <a:lstStyle/>
+          <a:p>
+            <a:r>
+              <a:rPr lang="en-US" dirty="0"/>
+              <a:t>Classification and Regression Trees (CART)</a:t>
+            </a:r>
+          </a:p>
+        </p:txBody>
+      </p:sp>
+      <p:grpSp>
+        <p:nvGrpSpPr>
+          <p:cNvPr id="29" name="Group 28">
+            <a:extLst>
+              <a:ext uri="{FF2B5EF4-FFF2-40B4-BE49-F238E27FC236}">
+                <a16:creationId xmlns:a16="http://schemas.microsoft.com/office/drawing/2014/main" id="{525B1A5C-5A18-097D-CFBB-A3DDACCADE05}"/>
+              </a:ext>
+            </a:extLst>
+          </p:cNvPr>
+          <p:cNvGrpSpPr/>
+          <p:nvPr/>
+        </p:nvGrpSpPr>
+        <p:grpSpPr>
+          <a:xfrm>
+            <a:off x="5074276" y="2369713"/>
+            <a:ext cx="6539891" cy="2736153"/>
+            <a:chOff x="253576" y="2125014"/>
+            <a:chExt cx="4179418" cy="2736153"/>
+          </a:xfrm>
+        </p:grpSpPr>
+        <p:sp>
+          <p:nvSpPr>
+            <p:cNvPr id="6" name="Oval 5">
+              <a:extLst>
+                <a:ext uri="{FF2B5EF4-FFF2-40B4-BE49-F238E27FC236}">
+                  <a16:creationId xmlns:a16="http://schemas.microsoft.com/office/drawing/2014/main" id="{C6720257-D382-E371-43B9-884F99E724DE}"/>
+                </a:ext>
+              </a:extLst>
+            </p:cNvPr>
+            <p:cNvSpPr/>
+            <p:nvPr/>
+          </p:nvSpPr>
+          <p:spPr>
+            <a:xfrm>
+              <a:off x="2410784" y="2125014"/>
+              <a:ext cx="821813" cy="819337"/>
+            </a:xfrm>
+            <a:prstGeom prst="ellipse">
+              <a:avLst/>
+            </a:prstGeom>
+          </p:spPr>
+          <p:style>
+            <a:lnRef idx="2">
+              <a:schemeClr val="accent1">
+                <a:shade val="15000"/>
+              </a:schemeClr>
+            </a:lnRef>
+            <a:fillRef idx="1">
+              <a:schemeClr val="accent1"/>
+            </a:fillRef>
+            <a:effectRef idx="0">
+              <a:schemeClr val="accent1"/>
+            </a:effectRef>
+            <a:fontRef idx="minor">
+              <a:schemeClr val="lt1"/>
+            </a:fontRef>
+          </p:style>
+          <p:txBody>
+            <a:bodyPr rtlCol="0" anchor="ctr"/>
+            <a:lstStyle/>
+            <a:p>
+              <a:pPr algn="ctr"/>
+              <a:endParaRPr lang="en-US"/>
+            </a:p>
+          </p:txBody>
+        </p:sp>
+        <p:sp>
+          <p:nvSpPr>
+            <p:cNvPr id="7" name="Oval 6">
+              <a:extLst>
+                <a:ext uri="{FF2B5EF4-FFF2-40B4-BE49-F238E27FC236}">
+                  <a16:creationId xmlns:a16="http://schemas.microsoft.com/office/drawing/2014/main" id="{278D42EA-AA92-4DD3-5BC8-DB5D17ACC3E1}"/>
+                </a:ext>
+              </a:extLst>
+            </p:cNvPr>
+            <p:cNvSpPr/>
+            <p:nvPr/>
+          </p:nvSpPr>
+          <p:spPr>
+            <a:xfrm>
+              <a:off x="1291291" y="3034954"/>
+              <a:ext cx="821813" cy="819337"/>
+            </a:xfrm>
+            <a:prstGeom prst="ellipse">
+              <a:avLst/>
+            </a:prstGeom>
+          </p:spPr>
+          <p:style>
+            <a:lnRef idx="2">
+              <a:schemeClr val="accent1">
+                <a:shade val="15000"/>
+              </a:schemeClr>
+            </a:lnRef>
+            <a:fillRef idx="1">
+              <a:schemeClr val="accent1"/>
+            </a:fillRef>
+            <a:effectRef idx="0">
+              <a:schemeClr val="accent1"/>
+            </a:effectRef>
+            <a:fontRef idx="minor">
+              <a:schemeClr val="lt1"/>
+            </a:fontRef>
+          </p:style>
+          <p:txBody>
+            <a:bodyPr rtlCol="0" anchor="ctr"/>
+            <a:lstStyle/>
+            <a:p>
+              <a:pPr algn="ctr"/>
+              <a:endParaRPr lang="en-US"/>
+            </a:p>
+          </p:txBody>
+        </p:sp>
+        <p:sp>
+          <p:nvSpPr>
+            <p:cNvPr id="8" name="Oval 7">
+              <a:extLst>
+                <a:ext uri="{FF2B5EF4-FFF2-40B4-BE49-F238E27FC236}">
+                  <a16:creationId xmlns:a16="http://schemas.microsoft.com/office/drawing/2014/main" id="{4FCC8956-0B2F-C30C-9FEB-48473099E99D}"/>
+                </a:ext>
+              </a:extLst>
+            </p:cNvPr>
+            <p:cNvSpPr/>
+            <p:nvPr/>
+          </p:nvSpPr>
+          <p:spPr>
+            <a:xfrm>
+              <a:off x="3611181" y="3323259"/>
+              <a:ext cx="821813" cy="819337"/>
+            </a:xfrm>
+            <a:prstGeom prst="ellipse">
+              <a:avLst/>
+            </a:prstGeom>
+          </p:spPr>
+          <p:style>
+            <a:lnRef idx="2">
+              <a:schemeClr val="accent1">
+                <a:shade val="15000"/>
+              </a:schemeClr>
+            </a:lnRef>
+            <a:fillRef idx="1">
+              <a:schemeClr val="accent1"/>
+            </a:fillRef>
+            <a:effectRef idx="0">
+              <a:schemeClr val="accent1"/>
+            </a:effectRef>
+            <a:fontRef idx="minor">
+              <a:schemeClr val="lt1"/>
+            </a:fontRef>
+          </p:style>
+          <p:txBody>
+            <a:bodyPr rtlCol="0" anchor="ctr"/>
+            <a:lstStyle/>
+            <a:p>
+              <a:pPr algn="ctr"/>
+              <a:endParaRPr lang="en-US"/>
+            </a:p>
+          </p:txBody>
+        </p:sp>
+        <p:sp>
+          <p:nvSpPr>
+            <p:cNvPr id="9" name="Oval 8">
+              <a:extLst>
+                <a:ext uri="{FF2B5EF4-FFF2-40B4-BE49-F238E27FC236}">
+                  <a16:creationId xmlns:a16="http://schemas.microsoft.com/office/drawing/2014/main" id="{2658B678-C7D9-9EEE-64EA-CD2CFFF856CA}"/>
+                </a:ext>
+              </a:extLst>
+            </p:cNvPr>
+            <p:cNvSpPr/>
+            <p:nvPr/>
+          </p:nvSpPr>
+          <p:spPr>
+            <a:xfrm>
+              <a:off x="253576" y="4041829"/>
+              <a:ext cx="821813" cy="819337"/>
+            </a:xfrm>
+            <a:prstGeom prst="ellipse">
+              <a:avLst/>
+            </a:prstGeom>
+          </p:spPr>
+          <p:style>
+            <a:lnRef idx="2">
+              <a:schemeClr val="accent1">
+                <a:shade val="15000"/>
+              </a:schemeClr>
+            </a:lnRef>
+            <a:fillRef idx="1">
+              <a:schemeClr val="accent1"/>
+            </a:fillRef>
+            <a:effectRef idx="0">
+              <a:schemeClr val="accent1"/>
+            </a:effectRef>
+            <a:fontRef idx="minor">
+              <a:schemeClr val="lt1"/>
+            </a:fontRef>
+          </p:style>
+          <p:txBody>
+            <a:bodyPr rtlCol="0" anchor="ctr"/>
+            <a:lstStyle/>
+            <a:p>
+              <a:pPr algn="ctr"/>
+              <a:endParaRPr lang="en-US"/>
+            </a:p>
+          </p:txBody>
+        </p:sp>
+        <p:sp>
+          <p:nvSpPr>
+            <p:cNvPr id="10" name="Oval 9">
+              <a:extLst>
+                <a:ext uri="{FF2B5EF4-FFF2-40B4-BE49-F238E27FC236}">
+                  <a16:creationId xmlns:a16="http://schemas.microsoft.com/office/drawing/2014/main" id="{71CEF44A-F3F6-A3B6-D5D5-666FFDF205C4}"/>
+                </a:ext>
+              </a:extLst>
+            </p:cNvPr>
+            <p:cNvSpPr/>
+            <p:nvPr/>
+          </p:nvSpPr>
+          <p:spPr>
+            <a:xfrm>
+              <a:off x="2296413" y="4041830"/>
+              <a:ext cx="821813" cy="819337"/>
+            </a:xfrm>
+            <a:prstGeom prst="ellipse">
+              <a:avLst/>
+            </a:prstGeom>
+          </p:spPr>
+          <p:style>
+            <a:lnRef idx="2">
+              <a:schemeClr val="accent1">
+                <a:shade val="15000"/>
+              </a:schemeClr>
+            </a:lnRef>
+            <a:fillRef idx="1">
+              <a:schemeClr val="accent1"/>
+            </a:fillRef>
+            <a:effectRef idx="0">
+              <a:schemeClr val="accent1"/>
+            </a:effectRef>
+            <a:fontRef idx="minor">
+              <a:schemeClr val="lt1"/>
+            </a:fontRef>
+          </p:style>
+          <p:txBody>
+            <a:bodyPr rtlCol="0" anchor="ctr"/>
+            <a:lstStyle/>
+            <a:p>
+              <a:pPr algn="ctr"/>
+              <a:endParaRPr lang="en-US"/>
+            </a:p>
+          </p:txBody>
+        </p:sp>
+        <p:cxnSp>
+          <p:nvCxnSpPr>
+            <p:cNvPr id="11" name="Straight Connector 10">
+              <a:extLst>
+                <a:ext uri="{FF2B5EF4-FFF2-40B4-BE49-F238E27FC236}">
+                  <a16:creationId xmlns:a16="http://schemas.microsoft.com/office/drawing/2014/main" id="{7BBFFA25-E75F-215E-89DA-33B1F5649F31}"/>
+                </a:ext>
+              </a:extLst>
+            </p:cNvPr>
+            <p:cNvCxnSpPr>
+              <a:stCxn id="6" idx="5"/>
+              <a:endCxn id="8" idx="1"/>
+            </p:cNvCxnSpPr>
+            <p:nvPr/>
+          </p:nvCxnSpPr>
+          <p:spPr>
+            <a:xfrm>
+              <a:off x="3112245" y="2824362"/>
+              <a:ext cx="619288" cy="618886"/>
+            </a:xfrm>
+            <a:prstGeom prst="line">
+              <a:avLst/>
+            </a:prstGeom>
+          </p:spPr>
+          <p:style>
+            <a:lnRef idx="2">
+              <a:schemeClr val="accent1"/>
+            </a:lnRef>
+            <a:fillRef idx="0">
+              <a:schemeClr val="accent1"/>
+            </a:fillRef>
+            <a:effectRef idx="1">
+              <a:schemeClr val="accent1"/>
+            </a:effectRef>
+            <a:fontRef idx="minor">
+              <a:schemeClr val="tx1"/>
+            </a:fontRef>
+          </p:style>
+        </p:cxnSp>
+        <p:cxnSp>
+          <p:nvCxnSpPr>
+            <p:cNvPr id="12" name="Straight Connector 11">
+              <a:extLst>
+                <a:ext uri="{FF2B5EF4-FFF2-40B4-BE49-F238E27FC236}">
+                  <a16:creationId xmlns:a16="http://schemas.microsoft.com/office/drawing/2014/main" id="{90B84E95-BECA-8B10-F4FA-E1612A9EDB72}"/>
+                </a:ext>
+              </a:extLst>
+            </p:cNvPr>
+            <p:cNvCxnSpPr>
+              <a:cxnSpLocks/>
+              <a:stCxn id="6" idx="3"/>
+              <a:endCxn id="7" idx="7"/>
+            </p:cNvCxnSpPr>
+            <p:nvPr/>
+          </p:nvCxnSpPr>
+          <p:spPr>
+            <a:xfrm flipH="1">
+              <a:off x="1992752" y="2824362"/>
+              <a:ext cx="538384" cy="330581"/>
+            </a:xfrm>
+            <a:prstGeom prst="line">
+              <a:avLst/>
+            </a:prstGeom>
+          </p:spPr>
+          <p:style>
+            <a:lnRef idx="2">
+              <a:schemeClr val="accent1"/>
+            </a:lnRef>
+            <a:fillRef idx="0">
+              <a:schemeClr val="accent1"/>
+            </a:fillRef>
+            <a:effectRef idx="1">
+              <a:schemeClr val="accent1"/>
+            </a:effectRef>
+            <a:fontRef idx="minor">
+              <a:schemeClr val="tx1"/>
+            </a:fontRef>
+          </p:style>
+        </p:cxnSp>
+        <p:cxnSp>
+          <p:nvCxnSpPr>
+            <p:cNvPr id="13" name="Straight Connector 12">
+              <a:extLst>
+                <a:ext uri="{FF2B5EF4-FFF2-40B4-BE49-F238E27FC236}">
+                  <a16:creationId xmlns:a16="http://schemas.microsoft.com/office/drawing/2014/main" id="{25CA10E0-8AFC-6FA5-2A32-8066D1E5467F}"/>
+                </a:ext>
+              </a:extLst>
+            </p:cNvPr>
+            <p:cNvCxnSpPr>
+              <a:cxnSpLocks/>
+              <a:stCxn id="7" idx="3"/>
+              <a:endCxn id="9" idx="7"/>
+            </p:cNvCxnSpPr>
+            <p:nvPr/>
+          </p:nvCxnSpPr>
+          <p:spPr>
+            <a:xfrm flipH="1">
+              <a:off x="955037" y="3734302"/>
+              <a:ext cx="456606" cy="427516"/>
+            </a:xfrm>
+            <a:prstGeom prst="line">
+              <a:avLst/>
+            </a:prstGeom>
+          </p:spPr>
+          <p:style>
+            <a:lnRef idx="2">
+              <a:schemeClr val="accent1"/>
+            </a:lnRef>
+            <a:fillRef idx="0">
+              <a:schemeClr val="accent1"/>
+            </a:fillRef>
+            <a:effectRef idx="1">
+              <a:schemeClr val="accent1"/>
+            </a:effectRef>
+            <a:fontRef idx="minor">
+              <a:schemeClr val="tx1"/>
+            </a:fontRef>
+          </p:style>
+        </p:cxnSp>
+        <p:cxnSp>
+          <p:nvCxnSpPr>
+            <p:cNvPr id="14" name="Straight Connector 13">
+              <a:extLst>
+                <a:ext uri="{FF2B5EF4-FFF2-40B4-BE49-F238E27FC236}">
+                  <a16:creationId xmlns:a16="http://schemas.microsoft.com/office/drawing/2014/main" id="{606EF836-723E-C61B-6915-B1E6060EBAE0}"/>
+                </a:ext>
+              </a:extLst>
+            </p:cNvPr>
+            <p:cNvCxnSpPr>
+              <a:cxnSpLocks/>
+              <a:stCxn id="7" idx="5"/>
+              <a:endCxn id="10" idx="1"/>
+            </p:cNvCxnSpPr>
+            <p:nvPr/>
+          </p:nvCxnSpPr>
+          <p:spPr>
+            <a:xfrm>
+              <a:off x="1992752" y="3734302"/>
+              <a:ext cx="424013" cy="427517"/>
+            </a:xfrm>
+            <a:prstGeom prst="line">
+              <a:avLst/>
+            </a:prstGeom>
+          </p:spPr>
+          <p:style>
+            <a:lnRef idx="2">
+              <a:schemeClr val="accent1"/>
+            </a:lnRef>
+            <a:fillRef idx="0">
+              <a:schemeClr val="accent1"/>
+            </a:fillRef>
+            <a:effectRef idx="1">
+              <a:schemeClr val="accent1"/>
+            </a:effectRef>
+            <a:fontRef idx="minor">
+              <a:schemeClr val="tx1"/>
+            </a:fontRef>
+          </p:style>
+        </p:cxnSp>
+      </p:grpSp>
+      <p:graphicFrame>
+        <p:nvGraphicFramePr>
+          <p:cNvPr id="3" name="Table 2">
+            <a:extLst>
+              <a:ext uri="{FF2B5EF4-FFF2-40B4-BE49-F238E27FC236}">
+                <a16:creationId xmlns:a16="http://schemas.microsoft.com/office/drawing/2014/main" id="{F2363AA1-4C19-D57A-59E5-96585262A7BF}"/>
+              </a:ext>
+            </a:extLst>
+          </p:cNvPr>
+          <p:cNvGraphicFramePr>
+            <a:graphicFrameLocks noGrp="1"/>
+          </p:cNvGraphicFramePr>
+          <p:nvPr/>
+        </p:nvGraphicFramePr>
+        <p:xfrm>
+          <a:off x="577833" y="3391084"/>
+          <a:ext cx="3762348" cy="3009715"/>
+        </p:xfrm>
+        <a:graphic>
+          <a:graphicData uri="http://schemas.openxmlformats.org/drawingml/2006/table">
+            <a:tbl>
+              <a:tblPr firstRow="1" bandRow="1">
+                <a:tableStyleId>{5C22544A-7EE6-4342-B048-85BDC9FD1C3A}</a:tableStyleId>
+              </a:tblPr>
+              <a:tblGrid>
+                <a:gridCol w="1254116">
+                  <a:extLst>
+                    <a:ext uri="{9D8B030D-6E8A-4147-A177-3AD203B41FA5}">
+                      <a16:colId xmlns:a16="http://schemas.microsoft.com/office/drawing/2014/main" val="3086874793"/>
+                    </a:ext>
+                  </a:extLst>
+                </a:gridCol>
+                <a:gridCol w="1254116">
+                  <a:extLst>
+                    <a:ext uri="{9D8B030D-6E8A-4147-A177-3AD203B41FA5}">
+                      <a16:colId xmlns:a16="http://schemas.microsoft.com/office/drawing/2014/main" val="725989201"/>
+                    </a:ext>
+                  </a:extLst>
+                </a:gridCol>
+                <a:gridCol w="1254116">
+                  <a:extLst>
+                    <a:ext uri="{9D8B030D-6E8A-4147-A177-3AD203B41FA5}">
+                      <a16:colId xmlns:a16="http://schemas.microsoft.com/office/drawing/2014/main" val="1915941172"/>
+                    </a:ext>
+                  </a:extLst>
+                </a:gridCol>
+              </a:tblGrid>
+              <a:tr h="907235">
+                <a:tc>
+                  <a:txBody>
+                    <a:bodyPr/>
+                    <a:lstStyle/>
+                    <a:p>
+                      <a:r>
+                        <a:rPr lang="en-US" dirty="0"/>
+                        <a:t>Penguin species</a:t>
+                      </a:r>
+                    </a:p>
+                  </a:txBody>
+                  <a:tcPr/>
+                </a:tc>
+                <a:tc>
+                  <a:txBody>
+                    <a:bodyPr/>
+                    <a:lstStyle/>
+                    <a:p>
+                      <a:r>
+                        <a:rPr lang="en-US" dirty="0"/>
+                        <a:t>Flipper length</a:t>
+                      </a:r>
+                    </a:p>
+                  </a:txBody>
+                  <a:tcPr/>
+                </a:tc>
+                <a:tc>
+                  <a:txBody>
+                    <a:bodyPr/>
+                    <a:lstStyle/>
+                    <a:p>
+                      <a:r>
+                        <a:rPr lang="en-US" dirty="0"/>
+                        <a:t>Body mass</a:t>
+                      </a:r>
+                    </a:p>
+                  </a:txBody>
+                  <a:tcPr/>
+                </a:tc>
+                <a:extLst>
+                  <a:ext uri="{0D108BD9-81ED-4DB2-BD59-A6C34878D82A}">
+                    <a16:rowId xmlns:a16="http://schemas.microsoft.com/office/drawing/2014/main" val="207539063"/>
+                  </a:ext>
+                </a:extLst>
+              </a:tr>
+              <a:tr h="525620">
+                <a:tc>
+                  <a:txBody>
+                    <a:bodyPr/>
+                    <a:lstStyle/>
+                    <a:p>
+                      <a:r>
+                        <a:rPr lang="en-US" dirty="0"/>
+                        <a:t>Adelie</a:t>
+                      </a:r>
+                    </a:p>
+                  </a:txBody>
+                  <a:tcPr/>
+                </a:tc>
+                <a:tc>
+                  <a:txBody>
+                    <a:bodyPr/>
+                    <a:lstStyle/>
+                    <a:p>
+                      <a:r>
+                        <a:rPr lang="en-US" dirty="0"/>
+                        <a:t>90</a:t>
+                      </a:r>
+                    </a:p>
+                  </a:txBody>
+                  <a:tcPr/>
+                </a:tc>
+                <a:tc>
+                  <a:txBody>
+                    <a:bodyPr/>
+                    <a:lstStyle/>
+                    <a:p>
+                      <a:r>
+                        <a:rPr lang="en-US" dirty="0"/>
+                        <a:t>80</a:t>
+                      </a:r>
+                    </a:p>
+                  </a:txBody>
+                  <a:tcPr/>
+                </a:tc>
+                <a:extLst>
+                  <a:ext uri="{0D108BD9-81ED-4DB2-BD59-A6C34878D82A}">
+                    <a16:rowId xmlns:a16="http://schemas.microsoft.com/office/drawing/2014/main" val="350663204"/>
+                  </a:ext>
+                </a:extLst>
+              </a:tr>
+              <a:tr h="525620">
+                <a:tc>
+                  <a:txBody>
+                    <a:bodyPr/>
+                    <a:lstStyle/>
+                    <a:p>
+                      <a:r>
+                        <a:rPr lang="en-US" dirty="0"/>
+                        <a:t>Gentoo</a:t>
+                      </a:r>
+                    </a:p>
+                  </a:txBody>
+                  <a:tcPr/>
+                </a:tc>
+                <a:tc>
+                  <a:txBody>
+                    <a:bodyPr/>
+                    <a:lstStyle/>
+                    <a:p>
+                      <a:r>
+                        <a:rPr lang="en-US" dirty="0"/>
+                        <a:t>75</a:t>
+                      </a:r>
+                    </a:p>
+                  </a:txBody>
+                  <a:tcPr/>
+                </a:tc>
+                <a:tc>
+                  <a:txBody>
+                    <a:bodyPr/>
+                    <a:lstStyle/>
+                    <a:p>
+                      <a:r>
+                        <a:rPr lang="en-US" dirty="0"/>
+                        <a:t>20</a:t>
+                      </a:r>
+                    </a:p>
+                  </a:txBody>
+                  <a:tcPr/>
+                </a:tc>
+                <a:extLst>
+                  <a:ext uri="{0D108BD9-81ED-4DB2-BD59-A6C34878D82A}">
+                    <a16:rowId xmlns:a16="http://schemas.microsoft.com/office/drawing/2014/main" val="2716910918"/>
+                  </a:ext>
+                </a:extLst>
+              </a:tr>
+              <a:tr h="525620">
+                <a:tc>
+                  <a:txBody>
+                    <a:bodyPr/>
+                    <a:lstStyle/>
+                    <a:p>
+                      <a:r>
+                        <a:rPr lang="en-US" dirty="0"/>
+                        <a:t>Gentoo</a:t>
+                      </a:r>
+                    </a:p>
+                  </a:txBody>
+                  <a:tcPr/>
+                </a:tc>
+                <a:tc>
+                  <a:txBody>
+                    <a:bodyPr/>
+                    <a:lstStyle/>
+                    <a:p>
+                      <a:r>
+                        <a:rPr lang="en-US" dirty="0"/>
+                        <a:t>77</a:t>
+                      </a:r>
+                    </a:p>
+                  </a:txBody>
+                  <a:tcPr/>
+                </a:tc>
+                <a:tc>
+                  <a:txBody>
+                    <a:bodyPr/>
+                    <a:lstStyle/>
+                    <a:p>
+                      <a:r>
+                        <a:rPr lang="en-US" dirty="0"/>
+                        <a:t>32</a:t>
+                      </a:r>
+                    </a:p>
+                  </a:txBody>
+                  <a:tcPr/>
+                </a:tc>
+                <a:extLst>
+                  <a:ext uri="{0D108BD9-81ED-4DB2-BD59-A6C34878D82A}">
+                    <a16:rowId xmlns:a16="http://schemas.microsoft.com/office/drawing/2014/main" val="3870395830"/>
+                  </a:ext>
+                </a:extLst>
+              </a:tr>
+              <a:tr h="525620">
+                <a:tc>
+                  <a:txBody>
+                    <a:bodyPr/>
+                    <a:lstStyle/>
+                    <a:p>
+                      <a:r>
+                        <a:rPr lang="en-US" dirty="0"/>
+                        <a:t>Chinstrap</a:t>
+                      </a:r>
+                    </a:p>
+                  </a:txBody>
+                  <a:tcPr/>
+                </a:tc>
+                <a:tc>
+                  <a:txBody>
+                    <a:bodyPr/>
+                    <a:lstStyle/>
+                    <a:p>
+                      <a:r>
+                        <a:rPr lang="en-US" dirty="0"/>
+                        <a:t>76</a:t>
+                      </a:r>
+                    </a:p>
+                  </a:txBody>
+                  <a:tcPr/>
+                </a:tc>
+                <a:tc>
+                  <a:txBody>
+                    <a:bodyPr/>
+                    <a:lstStyle/>
+                    <a:p>
+                      <a:r>
+                        <a:rPr lang="en-US" dirty="0"/>
+                        <a:t>12</a:t>
+                      </a:r>
+                    </a:p>
+                  </a:txBody>
+                  <a:tcPr/>
+                </a:tc>
+                <a:extLst>
+                  <a:ext uri="{0D108BD9-81ED-4DB2-BD59-A6C34878D82A}">
+                    <a16:rowId xmlns:a16="http://schemas.microsoft.com/office/drawing/2014/main" val="2608199707"/>
+                  </a:ext>
+                </a:extLst>
+              </a:tr>
+            </a:tbl>
+          </a:graphicData>
+        </a:graphic>
+      </p:graphicFrame>
+      <p:sp>
+        <p:nvSpPr>
+          <p:cNvPr id="4" name="TextBox 3">
+            <a:extLst>
+              <a:ext uri="{FF2B5EF4-FFF2-40B4-BE49-F238E27FC236}">
+                <a16:creationId xmlns:a16="http://schemas.microsoft.com/office/drawing/2014/main" id="{775EC552-53F4-3A5A-37D5-3670AD7FB6C5}"/>
+              </a:ext>
+            </a:extLst>
+          </p:cNvPr>
+          <p:cNvSpPr txBox="1"/>
+          <p:nvPr/>
+        </p:nvSpPr>
+        <p:spPr>
+          <a:xfrm>
+            <a:off x="8139712" y="3174079"/>
+            <a:ext cx="2010487" cy="369332"/>
+          </a:xfrm>
+          <a:prstGeom prst="rect">
+            <a:avLst/>
+          </a:prstGeom>
+          <a:noFill/>
+        </p:spPr>
+        <p:txBody>
+          <a:bodyPr wrap="none" rtlCol="0">
+            <a:spAutoFit/>
+          </a:bodyPr>
+          <a:lstStyle/>
+          <a:p>
+            <a:r>
+              <a:rPr lang="en-US" dirty="0"/>
+              <a:t>Flipper length &gt; 80</a:t>
+            </a:r>
+          </a:p>
+        </p:txBody>
+      </p:sp>
+      <p:sp>
+        <p:nvSpPr>
+          <p:cNvPr id="5" name="TextBox 4">
+            <a:extLst>
+              <a:ext uri="{FF2B5EF4-FFF2-40B4-BE49-F238E27FC236}">
+                <a16:creationId xmlns:a16="http://schemas.microsoft.com/office/drawing/2014/main" id="{BDE9179A-105D-2291-52E6-D7421F446FAD}"/>
+              </a:ext>
+            </a:extLst>
+          </p:cNvPr>
+          <p:cNvSpPr txBox="1"/>
+          <p:nvPr/>
+        </p:nvSpPr>
+        <p:spPr>
+          <a:xfrm>
+            <a:off x="10581704" y="3778299"/>
+            <a:ext cx="808235" cy="369332"/>
+          </a:xfrm>
+          <a:prstGeom prst="rect">
+            <a:avLst/>
+          </a:prstGeom>
+          <a:noFill/>
+        </p:spPr>
+        <p:txBody>
+          <a:bodyPr wrap="none" rtlCol="0">
+            <a:spAutoFit/>
+          </a:bodyPr>
+          <a:lstStyle/>
+          <a:p>
+            <a:r>
+              <a:rPr lang="en-US" dirty="0">
+                <a:solidFill>
+                  <a:schemeClr val="bg1"/>
+                </a:solidFill>
+              </a:rPr>
+              <a:t>Adelie</a:t>
+            </a:r>
+          </a:p>
+        </p:txBody>
+      </p:sp>
+      <p:sp>
+        <p:nvSpPr>
+          <p:cNvPr id="15" name="TextBox 14">
+            <a:extLst>
+              <a:ext uri="{FF2B5EF4-FFF2-40B4-BE49-F238E27FC236}">
+                <a16:creationId xmlns:a16="http://schemas.microsoft.com/office/drawing/2014/main" id="{C0B57BFB-B064-4DB3-40F4-6A50E259F06D}"/>
+              </a:ext>
+            </a:extLst>
+          </p:cNvPr>
+          <p:cNvSpPr txBox="1"/>
+          <p:nvPr/>
+        </p:nvSpPr>
+        <p:spPr>
+          <a:xfrm>
+            <a:off x="6452389" y="3986854"/>
+            <a:ext cx="1739579" cy="369332"/>
+          </a:xfrm>
+          <a:prstGeom prst="rect">
+            <a:avLst/>
+          </a:prstGeom>
+          <a:noFill/>
+        </p:spPr>
+        <p:txBody>
+          <a:bodyPr wrap="none" rtlCol="0">
+            <a:spAutoFit/>
+          </a:bodyPr>
+          <a:lstStyle/>
+          <a:p>
+            <a:r>
+              <a:rPr lang="en-US" dirty="0"/>
+              <a:t>Body mass &gt; 18</a:t>
+            </a:r>
+          </a:p>
+        </p:txBody>
+      </p:sp>
+      <p:sp>
+        <p:nvSpPr>
+          <p:cNvPr id="16" name="TextBox 15">
+            <a:extLst>
+              <a:ext uri="{FF2B5EF4-FFF2-40B4-BE49-F238E27FC236}">
+                <a16:creationId xmlns:a16="http://schemas.microsoft.com/office/drawing/2014/main" id="{91D8C681-4D52-4578-E0DE-C98415D000DE}"/>
+              </a:ext>
+            </a:extLst>
+          </p:cNvPr>
+          <p:cNvSpPr txBox="1"/>
+          <p:nvPr/>
+        </p:nvSpPr>
+        <p:spPr>
+          <a:xfrm>
+            <a:off x="8451807" y="4373029"/>
+            <a:ext cx="924099" cy="646331"/>
+          </a:xfrm>
+          <a:prstGeom prst="rect">
+            <a:avLst/>
+          </a:prstGeom>
+          <a:noFill/>
+        </p:spPr>
+        <p:txBody>
+          <a:bodyPr wrap="none" rtlCol="0">
+            <a:spAutoFit/>
+          </a:bodyPr>
+          <a:lstStyle/>
+          <a:p>
+            <a:r>
+              <a:rPr lang="en-US" dirty="0">
+                <a:solidFill>
+                  <a:schemeClr val="bg1"/>
+                </a:solidFill>
+              </a:rPr>
+              <a:t>Gentoo</a:t>
+            </a:r>
+          </a:p>
+          <a:p>
+            <a:r>
+              <a:rPr lang="en-US" dirty="0">
+                <a:solidFill>
+                  <a:schemeClr val="bg1"/>
+                </a:solidFill>
+              </a:rPr>
+              <a:t>Gentoo</a:t>
+            </a:r>
+          </a:p>
+        </p:txBody>
+      </p:sp>
+      <p:sp>
+        <p:nvSpPr>
+          <p:cNvPr id="17" name="TextBox 16">
+            <a:extLst>
+              <a:ext uri="{FF2B5EF4-FFF2-40B4-BE49-F238E27FC236}">
+                <a16:creationId xmlns:a16="http://schemas.microsoft.com/office/drawing/2014/main" id="{B9F627AE-D04F-BC4C-46CF-EFEA79E4BBDA}"/>
+              </a:ext>
+            </a:extLst>
+          </p:cNvPr>
+          <p:cNvSpPr txBox="1"/>
+          <p:nvPr/>
+        </p:nvSpPr>
+        <p:spPr>
+          <a:xfrm>
+            <a:off x="5136103" y="4511529"/>
+            <a:ext cx="1162306" cy="369332"/>
+          </a:xfrm>
+          <a:prstGeom prst="rect">
+            <a:avLst/>
+          </a:prstGeom>
+          <a:noFill/>
+        </p:spPr>
+        <p:txBody>
+          <a:bodyPr wrap="none" rtlCol="0">
+            <a:spAutoFit/>
+          </a:bodyPr>
+          <a:lstStyle/>
+          <a:p>
+            <a:r>
+              <a:rPr lang="en-US" dirty="0">
+                <a:solidFill>
+                  <a:schemeClr val="bg1"/>
+                </a:solidFill>
+              </a:rPr>
+              <a:t>Chinstrap</a:t>
+            </a:r>
+          </a:p>
+        </p:txBody>
+      </p:sp>
+      <p:sp>
+        <p:nvSpPr>
+          <p:cNvPr id="20" name="Content Placeholder 2">
+            <a:extLst>
+              <a:ext uri="{FF2B5EF4-FFF2-40B4-BE49-F238E27FC236}">
+                <a16:creationId xmlns:a16="http://schemas.microsoft.com/office/drawing/2014/main" id="{88B188E2-DC8A-A2A5-456E-571FC29F2124}"/>
+              </a:ext>
+            </a:extLst>
+          </p:cNvPr>
+          <p:cNvSpPr txBox="1">
+            <a:spLocks/>
+          </p:cNvSpPr>
+          <p:nvPr/>
+        </p:nvSpPr>
+        <p:spPr>
+          <a:xfrm>
+            <a:off x="838200" y="1582551"/>
+            <a:ext cx="6427484" cy="1704659"/>
+          </a:xfrm>
+          <a:prstGeom prst="rect">
+            <a:avLst/>
+          </a:prstGeom>
+        </p:spPr>
+        <p:txBody>
+          <a:bodyPr vert="horz" lIns="91440" tIns="45720" rIns="91440" bIns="45720" rtlCol="0">
+            <a:normAutofit fontScale="92500" lnSpcReduction="20000"/>
+          </a:bodyPr>
+          <a:lstStyle>
+            <a:lvl1pPr marL="228600" indent="-228600" algn="l" defTabSz="914400" rtl="0" eaLnBrk="1" latinLnBrk="0" hangingPunct="1">
+              <a:lnSpc>
+                <a:spcPct val="90000"/>
+              </a:lnSpc>
+              <a:spcBef>
+                <a:spcPts val="1000"/>
+              </a:spcBef>
+              <a:buFont typeface="Arial" panose="020B0604020202020204" pitchFamily="34" charset="0"/>
+              <a:buChar char="•"/>
+              <a:defRPr sz="2800" kern="1200">
+                <a:solidFill>
+                  <a:schemeClr val="tx1"/>
+                </a:solidFill>
+                <a:latin typeface="+mn-lt"/>
+                <a:ea typeface="+mn-ea"/>
+                <a:cs typeface="+mn-cs"/>
+              </a:defRPr>
+            </a:lvl1pPr>
+            <a:lvl2pPr marL="685800" indent="-228600" algn="l" defTabSz="914400" rtl="0" eaLnBrk="1" latinLnBrk="0" hangingPunct="1">
+              <a:lnSpc>
+                <a:spcPct val="90000"/>
+              </a:lnSpc>
+              <a:spcBef>
+                <a:spcPts val="500"/>
+              </a:spcBef>
+              <a:buFont typeface="Arial" panose="020B0604020202020204" pitchFamily="34" charset="0"/>
+              <a:buChar char="•"/>
+              <a:defRPr sz="2400" kern="1200">
+                <a:solidFill>
+                  <a:schemeClr val="tx1"/>
+                </a:solidFill>
+                <a:latin typeface="+mn-lt"/>
+                <a:ea typeface="+mn-ea"/>
+                <a:cs typeface="+mn-cs"/>
+              </a:defRPr>
+            </a:lvl2pPr>
+            <a:lvl3pPr marL="1143000" indent="-228600" algn="l" defTabSz="914400" rtl="0" eaLnBrk="1" latinLnBrk="0" hangingPunct="1">
+              <a:lnSpc>
+                <a:spcPct val="90000"/>
+              </a:lnSpc>
+              <a:spcBef>
+                <a:spcPts val="500"/>
+              </a:spcBef>
+              <a:buFont typeface="Arial" panose="020B0604020202020204" pitchFamily="34" charset="0"/>
+              <a:buChar char="•"/>
+              <a:defRPr sz="2000" kern="1200">
+                <a:solidFill>
+                  <a:schemeClr val="tx1"/>
+                </a:solidFill>
+                <a:latin typeface="+mn-lt"/>
+                <a:ea typeface="+mn-ea"/>
+                <a:cs typeface="+mn-cs"/>
+              </a:defRPr>
+            </a:lvl3pPr>
+            <a:lvl4pPr marL="1600200" indent="-228600" algn="l" defTabSz="914400" rtl="0" eaLnBrk="1" latinLnBrk="0" hangingPunct="1">
+              <a:lnSpc>
+                <a:spcPct val="90000"/>
+              </a:lnSpc>
+              <a:spcBef>
+                <a:spcPts val="500"/>
+              </a:spcBef>
+              <a:buFont typeface="Arial" panose="020B0604020202020204" pitchFamily="34" charset="0"/>
+              <a:buChar char="•"/>
+              <a:defRPr sz="1800" kern="1200">
+                <a:solidFill>
+                  <a:schemeClr val="tx1"/>
+                </a:solidFill>
+                <a:latin typeface="+mn-lt"/>
+                <a:ea typeface="+mn-ea"/>
+                <a:cs typeface="+mn-cs"/>
+              </a:defRPr>
+            </a:lvl4pPr>
+            <a:lvl5pPr marL="2057400" indent="-228600" algn="l" defTabSz="914400" rtl="0" eaLnBrk="1" latinLnBrk="0" hangingPunct="1">
+              <a:lnSpc>
+                <a:spcPct val="90000"/>
+              </a:lnSpc>
+              <a:spcBef>
+                <a:spcPts val="500"/>
+              </a:spcBef>
+              <a:buFont typeface="Arial" panose="020B0604020202020204" pitchFamily="34" charset="0"/>
+              <a:buChar char="•"/>
+              <a:defRPr sz="1800" kern="1200">
+                <a:solidFill>
+                  <a:schemeClr val="tx1"/>
+                </a:solidFill>
+                <a:latin typeface="+mn-lt"/>
+                <a:ea typeface="+mn-ea"/>
+                <a:cs typeface="+mn-cs"/>
+              </a:defRPr>
+            </a:lvl5pPr>
+            <a:lvl6pPr marL="2514600" indent="-228600" algn="l" defTabSz="914400" rtl="0" eaLnBrk="1" latinLnBrk="0" hangingPunct="1">
+              <a:lnSpc>
+                <a:spcPct val="90000"/>
+              </a:lnSpc>
+              <a:spcBef>
+                <a:spcPts val="500"/>
+              </a:spcBef>
+              <a:buFont typeface="Arial" panose="020B0604020202020204" pitchFamily="34" charset="0"/>
+              <a:buChar char="•"/>
+              <a:defRPr sz="1800" kern="1200">
+                <a:solidFill>
+                  <a:schemeClr val="tx1"/>
+                </a:solidFill>
+                <a:latin typeface="+mn-lt"/>
+                <a:ea typeface="+mn-ea"/>
+                <a:cs typeface="+mn-cs"/>
+              </a:defRPr>
+            </a:lvl6pPr>
+            <a:lvl7pPr marL="2971800" indent="-228600" algn="l" defTabSz="914400" rtl="0" eaLnBrk="1" latinLnBrk="0" hangingPunct="1">
+              <a:lnSpc>
+                <a:spcPct val="90000"/>
+              </a:lnSpc>
+              <a:spcBef>
+                <a:spcPts val="500"/>
+              </a:spcBef>
+              <a:buFont typeface="Arial" panose="020B0604020202020204" pitchFamily="34" charset="0"/>
+              <a:buChar char="•"/>
+              <a:defRPr sz="1800" kern="1200">
+                <a:solidFill>
+                  <a:schemeClr val="tx1"/>
+                </a:solidFill>
+                <a:latin typeface="+mn-lt"/>
+                <a:ea typeface="+mn-ea"/>
+                <a:cs typeface="+mn-cs"/>
+              </a:defRPr>
+            </a:lvl7pPr>
+            <a:lvl8pPr marL="3429000" indent="-228600" algn="l" defTabSz="914400" rtl="0" eaLnBrk="1" latinLnBrk="0" hangingPunct="1">
+              <a:lnSpc>
+                <a:spcPct val="90000"/>
+              </a:lnSpc>
+              <a:spcBef>
+                <a:spcPts val="500"/>
+              </a:spcBef>
+              <a:buFont typeface="Arial" panose="020B0604020202020204" pitchFamily="34" charset="0"/>
+              <a:buChar char="•"/>
+              <a:defRPr sz="1800" kern="1200">
+                <a:solidFill>
+                  <a:schemeClr val="tx1"/>
+                </a:solidFill>
+                <a:latin typeface="+mn-lt"/>
+                <a:ea typeface="+mn-ea"/>
+                <a:cs typeface="+mn-cs"/>
+              </a:defRPr>
+            </a:lvl8pPr>
+            <a:lvl9pPr marL="3886200" indent="-228600" algn="l" defTabSz="914400" rtl="0" eaLnBrk="1" latinLnBrk="0" hangingPunct="1">
+              <a:lnSpc>
+                <a:spcPct val="90000"/>
+              </a:lnSpc>
+              <a:spcBef>
+                <a:spcPts val="500"/>
+              </a:spcBef>
+              <a:buFont typeface="Arial" panose="020B0604020202020204" pitchFamily="34" charset="0"/>
+              <a:buChar char="•"/>
+              <a:defRPr sz="1800" kern="1200">
+                <a:solidFill>
+                  <a:schemeClr val="tx1"/>
+                </a:solidFill>
+                <a:latin typeface="+mn-lt"/>
+                <a:ea typeface="+mn-ea"/>
+                <a:cs typeface="+mn-cs"/>
+              </a:defRPr>
+            </a:lvl9pPr>
+          </a:lstStyle>
+          <a:p>
+            <a:pPr marL="0" indent="0">
+              <a:buFont typeface="Arial" panose="020B0604020202020204" pitchFamily="34" charset="0"/>
+              <a:buNone/>
+            </a:pPr>
+            <a:r>
+              <a:rPr lang="en-US" dirty="0"/>
+              <a:t>Until a stopping condition is met</a:t>
+            </a:r>
+          </a:p>
+          <a:p>
+            <a:pPr marL="0" indent="0">
+              <a:buFont typeface="Arial" panose="020B0604020202020204" pitchFamily="34" charset="0"/>
+              <a:buNone/>
+            </a:pPr>
+            <a:r>
+              <a:rPr lang="en-US" dirty="0"/>
+              <a:t>   Evaluate best split for each predictor</a:t>
+            </a:r>
+          </a:p>
+          <a:p>
+            <a:pPr marL="0" indent="0">
+              <a:buFont typeface="Arial" panose="020B0604020202020204" pitchFamily="34" charset="0"/>
+              <a:buNone/>
+            </a:pPr>
+            <a:r>
+              <a:rPr lang="en-US" dirty="0"/>
+              <a:t>   Select the optimal split</a:t>
+            </a:r>
+          </a:p>
+          <a:p>
+            <a:pPr marL="0" indent="0">
+              <a:buFont typeface="Arial" panose="020B0604020202020204" pitchFamily="34" charset="0"/>
+              <a:buNone/>
+            </a:pPr>
+            <a:r>
+              <a:rPr lang="en-US" dirty="0"/>
+              <a:t>   Create new nodes</a:t>
+            </a:r>
+          </a:p>
+          <a:p>
+            <a:pPr marL="0" indent="0">
+              <a:buFont typeface="Arial" panose="020B0604020202020204" pitchFamily="34" charset="0"/>
+              <a:buNone/>
+            </a:pPr>
+            <a:endParaRPr lang="en-US" dirty="0"/>
+          </a:p>
+          <a:p>
+            <a:pPr marL="0" indent="0">
+              <a:buFont typeface="Arial" panose="020B0604020202020204" pitchFamily="34" charset="0"/>
+              <a:buNone/>
+            </a:pPr>
+            <a:endParaRPr lang="en-US" dirty="0"/>
+          </a:p>
+        </p:txBody>
+      </p:sp>
+      <p:sp>
+        <p:nvSpPr>
+          <p:cNvPr id="18" name="TextBox 17">
+            <a:extLst>
+              <a:ext uri="{FF2B5EF4-FFF2-40B4-BE49-F238E27FC236}">
+                <a16:creationId xmlns:a16="http://schemas.microsoft.com/office/drawing/2014/main" id="{9DE99C7C-00CB-4E53-AA02-A3384CFA4BBA}"/>
+              </a:ext>
+            </a:extLst>
+          </p:cNvPr>
+          <p:cNvSpPr txBox="1"/>
+          <p:nvPr/>
+        </p:nvSpPr>
+        <p:spPr>
+          <a:xfrm>
+            <a:off x="7068083" y="5687955"/>
+            <a:ext cx="4288931" cy="461665"/>
+          </a:xfrm>
+          <a:prstGeom prst="rect">
+            <a:avLst/>
+          </a:prstGeom>
+          <a:noFill/>
+        </p:spPr>
+        <p:txBody>
+          <a:bodyPr wrap="none" rtlCol="0">
+            <a:spAutoFit/>
+          </a:bodyPr>
+          <a:lstStyle/>
+          <a:p>
+            <a:r>
+              <a:rPr lang="en-US" sz="2400" dirty="0"/>
+              <a:t>All nodes are “pure” so we stop</a:t>
+            </a:r>
+          </a:p>
+        </p:txBody>
+      </p:sp>
+    </p:spTree>
+    <p:extLst>
+      <p:ext uri="{BB962C8B-B14F-4D97-AF65-F5344CB8AC3E}">
+        <p14:creationId xmlns:p14="http://schemas.microsoft.com/office/powerpoint/2010/main" val="1670323958"/>
       </p:ext>
     </p:extLst>
   </p:cSld>
@@ -25334,3388 +28311,6 @@
         <p:cNvPr id="1" name="">
           <a:extLst>
             <a:ext uri="{FF2B5EF4-FFF2-40B4-BE49-F238E27FC236}">
-              <a16:creationId xmlns:a16="http://schemas.microsoft.com/office/drawing/2014/main" id="{6F89030A-0054-6957-3C4E-A96C92296135}"/>
-            </a:ext>
-          </a:extLst>
-        </p:cNvPr>
-        <p:cNvGrpSpPr/>
-        <p:nvPr/>
-      </p:nvGrpSpPr>
-      <p:grpSpPr>
-        <a:xfrm>
-          <a:off x="0" y="0"/>
-          <a:ext cx="0" cy="0"/>
-          <a:chOff x="0" y="0"/>
-          <a:chExt cx="0" cy="0"/>
-        </a:xfrm>
-      </p:grpSpPr>
-      <p:sp>
-        <p:nvSpPr>
-          <p:cNvPr id="2" name="Title 1">
-            <a:extLst>
-              <a:ext uri="{FF2B5EF4-FFF2-40B4-BE49-F238E27FC236}">
-                <a16:creationId xmlns:a16="http://schemas.microsoft.com/office/drawing/2014/main" id="{F792BF6F-6357-6B28-FB99-BC252155A043}"/>
-              </a:ext>
-            </a:extLst>
-          </p:cNvPr>
-          <p:cNvSpPr>
-            <a:spLocks noGrp="1"/>
-          </p:cNvSpPr>
-          <p:nvPr>
-            <p:ph type="title"/>
-          </p:nvPr>
-        </p:nvSpPr>
-        <p:spPr/>
-        <p:txBody>
-          <a:bodyPr/>
-          <a:lstStyle/>
-          <a:p>
-            <a:r>
-              <a:rPr lang="en-US" dirty="0"/>
-              <a:t>Classification and Regression Trees (CART)</a:t>
-            </a:r>
-          </a:p>
-        </p:txBody>
-      </p:sp>
-      <p:grpSp>
-        <p:nvGrpSpPr>
-          <p:cNvPr id="29" name="Group 28">
-            <a:extLst>
-              <a:ext uri="{FF2B5EF4-FFF2-40B4-BE49-F238E27FC236}">
-                <a16:creationId xmlns:a16="http://schemas.microsoft.com/office/drawing/2014/main" id="{24E0FDD7-90B8-8017-CB03-041E2F74476E}"/>
-              </a:ext>
-            </a:extLst>
-          </p:cNvPr>
-          <p:cNvGrpSpPr/>
-          <p:nvPr/>
-        </p:nvGrpSpPr>
-        <p:grpSpPr>
-          <a:xfrm>
-            <a:off x="6698077" y="2369713"/>
-            <a:ext cx="4916090" cy="2017582"/>
-            <a:chOff x="1291291" y="2125014"/>
-            <a:chExt cx="3141703" cy="2017582"/>
-          </a:xfrm>
-        </p:grpSpPr>
-        <p:sp>
-          <p:nvSpPr>
-            <p:cNvPr id="6" name="Oval 5">
-              <a:extLst>
-                <a:ext uri="{FF2B5EF4-FFF2-40B4-BE49-F238E27FC236}">
-                  <a16:creationId xmlns:a16="http://schemas.microsoft.com/office/drawing/2014/main" id="{18462A07-5515-B049-F219-BA09754126E6}"/>
-                </a:ext>
-              </a:extLst>
-            </p:cNvPr>
-            <p:cNvSpPr/>
-            <p:nvPr/>
-          </p:nvSpPr>
-          <p:spPr>
-            <a:xfrm>
-              <a:off x="2410784" y="2125014"/>
-              <a:ext cx="821813" cy="819337"/>
-            </a:xfrm>
-            <a:prstGeom prst="ellipse">
-              <a:avLst/>
-            </a:prstGeom>
-          </p:spPr>
-          <p:style>
-            <a:lnRef idx="2">
-              <a:schemeClr val="accent1">
-                <a:shade val="15000"/>
-              </a:schemeClr>
-            </a:lnRef>
-            <a:fillRef idx="1">
-              <a:schemeClr val="accent1"/>
-            </a:fillRef>
-            <a:effectRef idx="0">
-              <a:schemeClr val="accent1"/>
-            </a:effectRef>
-            <a:fontRef idx="minor">
-              <a:schemeClr val="lt1"/>
-            </a:fontRef>
-          </p:style>
-          <p:txBody>
-            <a:bodyPr rtlCol="0" anchor="ctr"/>
-            <a:lstStyle/>
-            <a:p>
-              <a:pPr algn="ctr"/>
-              <a:endParaRPr lang="en-US"/>
-            </a:p>
-          </p:txBody>
-        </p:sp>
-        <p:sp>
-          <p:nvSpPr>
-            <p:cNvPr id="7" name="Oval 6">
-              <a:extLst>
-                <a:ext uri="{FF2B5EF4-FFF2-40B4-BE49-F238E27FC236}">
-                  <a16:creationId xmlns:a16="http://schemas.microsoft.com/office/drawing/2014/main" id="{06D07F63-A7A4-ACF2-67C0-6C1DB64791A8}"/>
-                </a:ext>
-              </a:extLst>
-            </p:cNvPr>
-            <p:cNvSpPr/>
-            <p:nvPr/>
-          </p:nvSpPr>
-          <p:spPr>
-            <a:xfrm>
-              <a:off x="1291291" y="3034954"/>
-              <a:ext cx="821813" cy="819337"/>
-            </a:xfrm>
-            <a:prstGeom prst="ellipse">
-              <a:avLst/>
-            </a:prstGeom>
-          </p:spPr>
-          <p:style>
-            <a:lnRef idx="2">
-              <a:schemeClr val="accent1">
-                <a:shade val="15000"/>
-              </a:schemeClr>
-            </a:lnRef>
-            <a:fillRef idx="1">
-              <a:schemeClr val="accent1"/>
-            </a:fillRef>
-            <a:effectRef idx="0">
-              <a:schemeClr val="accent1"/>
-            </a:effectRef>
-            <a:fontRef idx="minor">
-              <a:schemeClr val="lt1"/>
-            </a:fontRef>
-          </p:style>
-          <p:txBody>
-            <a:bodyPr rtlCol="0" anchor="ctr"/>
-            <a:lstStyle/>
-            <a:p>
-              <a:pPr algn="ctr"/>
-              <a:endParaRPr lang="en-US"/>
-            </a:p>
-          </p:txBody>
-        </p:sp>
-        <p:sp>
-          <p:nvSpPr>
-            <p:cNvPr id="8" name="Oval 7">
-              <a:extLst>
-                <a:ext uri="{FF2B5EF4-FFF2-40B4-BE49-F238E27FC236}">
-                  <a16:creationId xmlns:a16="http://schemas.microsoft.com/office/drawing/2014/main" id="{26A464BC-A43E-3575-1A0F-36C66998A01D}"/>
-                </a:ext>
-              </a:extLst>
-            </p:cNvPr>
-            <p:cNvSpPr/>
-            <p:nvPr/>
-          </p:nvSpPr>
-          <p:spPr>
-            <a:xfrm>
-              <a:off x="3611181" y="3323259"/>
-              <a:ext cx="821813" cy="819337"/>
-            </a:xfrm>
-            <a:prstGeom prst="ellipse">
-              <a:avLst/>
-            </a:prstGeom>
-          </p:spPr>
-          <p:style>
-            <a:lnRef idx="2">
-              <a:schemeClr val="accent1">
-                <a:shade val="15000"/>
-              </a:schemeClr>
-            </a:lnRef>
-            <a:fillRef idx="1">
-              <a:schemeClr val="accent1"/>
-            </a:fillRef>
-            <a:effectRef idx="0">
-              <a:schemeClr val="accent1"/>
-            </a:effectRef>
-            <a:fontRef idx="minor">
-              <a:schemeClr val="lt1"/>
-            </a:fontRef>
-          </p:style>
-          <p:txBody>
-            <a:bodyPr rtlCol="0" anchor="ctr"/>
-            <a:lstStyle/>
-            <a:p>
-              <a:pPr algn="ctr"/>
-              <a:endParaRPr lang="en-US"/>
-            </a:p>
-          </p:txBody>
-        </p:sp>
-        <p:cxnSp>
-          <p:nvCxnSpPr>
-            <p:cNvPr id="11" name="Straight Connector 10">
-              <a:extLst>
-                <a:ext uri="{FF2B5EF4-FFF2-40B4-BE49-F238E27FC236}">
-                  <a16:creationId xmlns:a16="http://schemas.microsoft.com/office/drawing/2014/main" id="{F1567168-B3AA-7A5A-CABE-E6D85954BF32}"/>
-                </a:ext>
-              </a:extLst>
-            </p:cNvPr>
-            <p:cNvCxnSpPr>
-              <a:cxnSpLocks/>
-              <a:stCxn id="6" idx="5"/>
-              <a:endCxn id="8" idx="1"/>
-            </p:cNvCxnSpPr>
-            <p:nvPr/>
-          </p:nvCxnSpPr>
-          <p:spPr>
-            <a:xfrm>
-              <a:off x="3112245" y="2824362"/>
-              <a:ext cx="619288" cy="618886"/>
-            </a:xfrm>
-            <a:prstGeom prst="line">
-              <a:avLst/>
-            </a:prstGeom>
-          </p:spPr>
-          <p:style>
-            <a:lnRef idx="2">
-              <a:schemeClr val="accent1"/>
-            </a:lnRef>
-            <a:fillRef idx="0">
-              <a:schemeClr val="accent1"/>
-            </a:fillRef>
-            <a:effectRef idx="1">
-              <a:schemeClr val="accent1"/>
-            </a:effectRef>
-            <a:fontRef idx="minor">
-              <a:schemeClr val="tx1"/>
-            </a:fontRef>
-          </p:style>
-        </p:cxnSp>
-        <p:cxnSp>
-          <p:nvCxnSpPr>
-            <p:cNvPr id="12" name="Straight Connector 11">
-              <a:extLst>
-                <a:ext uri="{FF2B5EF4-FFF2-40B4-BE49-F238E27FC236}">
-                  <a16:creationId xmlns:a16="http://schemas.microsoft.com/office/drawing/2014/main" id="{7BD6176F-B700-A4C8-CBC8-07BB1CB1798B}"/>
-                </a:ext>
-              </a:extLst>
-            </p:cNvPr>
-            <p:cNvCxnSpPr>
-              <a:cxnSpLocks/>
-              <a:stCxn id="6" idx="3"/>
-              <a:endCxn id="7" idx="7"/>
-            </p:cNvCxnSpPr>
-            <p:nvPr/>
-          </p:nvCxnSpPr>
-          <p:spPr>
-            <a:xfrm flipH="1">
-              <a:off x="1992752" y="2824362"/>
-              <a:ext cx="538384" cy="330581"/>
-            </a:xfrm>
-            <a:prstGeom prst="line">
-              <a:avLst/>
-            </a:prstGeom>
-          </p:spPr>
-          <p:style>
-            <a:lnRef idx="2">
-              <a:schemeClr val="accent1"/>
-            </a:lnRef>
-            <a:fillRef idx="0">
-              <a:schemeClr val="accent1"/>
-            </a:fillRef>
-            <a:effectRef idx="1">
-              <a:schemeClr val="accent1"/>
-            </a:effectRef>
-            <a:fontRef idx="minor">
-              <a:schemeClr val="tx1"/>
-            </a:fontRef>
-          </p:style>
-        </p:cxnSp>
-      </p:grpSp>
-      <p:graphicFrame>
-        <p:nvGraphicFramePr>
-          <p:cNvPr id="3" name="Table 2">
-            <a:extLst>
-              <a:ext uri="{FF2B5EF4-FFF2-40B4-BE49-F238E27FC236}">
-                <a16:creationId xmlns:a16="http://schemas.microsoft.com/office/drawing/2014/main" id="{309A6777-30CD-DED5-2451-A0830CBCBF67}"/>
-              </a:ext>
-            </a:extLst>
-          </p:cNvPr>
-          <p:cNvGraphicFramePr>
-            <a:graphicFrameLocks noGrp="1"/>
-          </p:cNvGraphicFramePr>
-          <p:nvPr/>
-        </p:nvGraphicFramePr>
-        <p:xfrm>
-          <a:off x="577833" y="3391084"/>
-          <a:ext cx="3762348" cy="3009715"/>
-        </p:xfrm>
-        <a:graphic>
-          <a:graphicData uri="http://schemas.openxmlformats.org/drawingml/2006/table">
-            <a:tbl>
-              <a:tblPr firstRow="1" bandRow="1">
-                <a:tableStyleId>{5C22544A-7EE6-4342-B048-85BDC9FD1C3A}</a:tableStyleId>
-              </a:tblPr>
-              <a:tblGrid>
-                <a:gridCol w="1254116">
-                  <a:extLst>
-                    <a:ext uri="{9D8B030D-6E8A-4147-A177-3AD203B41FA5}">
-                      <a16:colId xmlns:a16="http://schemas.microsoft.com/office/drawing/2014/main" val="3086874793"/>
-                    </a:ext>
-                  </a:extLst>
-                </a:gridCol>
-                <a:gridCol w="1254116">
-                  <a:extLst>
-                    <a:ext uri="{9D8B030D-6E8A-4147-A177-3AD203B41FA5}">
-                      <a16:colId xmlns:a16="http://schemas.microsoft.com/office/drawing/2014/main" val="725989201"/>
-                    </a:ext>
-                  </a:extLst>
-                </a:gridCol>
-                <a:gridCol w="1254116">
-                  <a:extLst>
-                    <a:ext uri="{9D8B030D-6E8A-4147-A177-3AD203B41FA5}">
-                      <a16:colId xmlns:a16="http://schemas.microsoft.com/office/drawing/2014/main" val="1915941172"/>
-                    </a:ext>
-                  </a:extLst>
-                </a:gridCol>
-              </a:tblGrid>
-              <a:tr h="907235">
-                <a:tc>
-                  <a:txBody>
-                    <a:bodyPr/>
-                    <a:lstStyle/>
-                    <a:p>
-                      <a:r>
-                        <a:rPr lang="en-US" dirty="0"/>
-                        <a:t>Penguin species</a:t>
-                      </a:r>
-                    </a:p>
-                  </a:txBody>
-                  <a:tcPr/>
-                </a:tc>
-                <a:tc>
-                  <a:txBody>
-                    <a:bodyPr/>
-                    <a:lstStyle/>
-                    <a:p>
-                      <a:r>
-                        <a:rPr lang="en-US" dirty="0"/>
-                        <a:t>Flipper length</a:t>
-                      </a:r>
-                    </a:p>
-                  </a:txBody>
-                  <a:tcPr/>
-                </a:tc>
-                <a:tc>
-                  <a:txBody>
-                    <a:bodyPr/>
-                    <a:lstStyle/>
-                    <a:p>
-                      <a:r>
-                        <a:rPr lang="en-US" dirty="0"/>
-                        <a:t>Body mass</a:t>
-                      </a:r>
-                    </a:p>
-                  </a:txBody>
-                  <a:tcPr/>
-                </a:tc>
-                <a:extLst>
-                  <a:ext uri="{0D108BD9-81ED-4DB2-BD59-A6C34878D82A}">
-                    <a16:rowId xmlns:a16="http://schemas.microsoft.com/office/drawing/2014/main" val="207539063"/>
-                  </a:ext>
-                </a:extLst>
-              </a:tr>
-              <a:tr h="525620">
-                <a:tc>
-                  <a:txBody>
-                    <a:bodyPr/>
-                    <a:lstStyle/>
-                    <a:p>
-                      <a:r>
-                        <a:rPr lang="en-US" dirty="0"/>
-                        <a:t>Adelie</a:t>
-                      </a:r>
-                    </a:p>
-                  </a:txBody>
-                  <a:tcPr/>
-                </a:tc>
-                <a:tc>
-                  <a:txBody>
-                    <a:bodyPr/>
-                    <a:lstStyle/>
-                    <a:p>
-                      <a:r>
-                        <a:rPr lang="en-US" dirty="0"/>
-                        <a:t>90</a:t>
-                      </a:r>
-                    </a:p>
-                  </a:txBody>
-                  <a:tcPr/>
-                </a:tc>
-                <a:tc>
-                  <a:txBody>
-                    <a:bodyPr/>
-                    <a:lstStyle/>
-                    <a:p>
-                      <a:r>
-                        <a:rPr lang="en-US" dirty="0"/>
-                        <a:t>80</a:t>
-                      </a:r>
-                    </a:p>
-                  </a:txBody>
-                  <a:tcPr/>
-                </a:tc>
-                <a:extLst>
-                  <a:ext uri="{0D108BD9-81ED-4DB2-BD59-A6C34878D82A}">
-                    <a16:rowId xmlns:a16="http://schemas.microsoft.com/office/drawing/2014/main" val="350663204"/>
-                  </a:ext>
-                </a:extLst>
-              </a:tr>
-              <a:tr h="525620">
-                <a:tc>
-                  <a:txBody>
-                    <a:bodyPr/>
-                    <a:lstStyle/>
-                    <a:p>
-                      <a:r>
-                        <a:rPr lang="en-US" dirty="0"/>
-                        <a:t>Gentoo</a:t>
-                      </a:r>
-                    </a:p>
-                  </a:txBody>
-                  <a:tcPr/>
-                </a:tc>
-                <a:tc>
-                  <a:txBody>
-                    <a:bodyPr/>
-                    <a:lstStyle/>
-                    <a:p>
-                      <a:r>
-                        <a:rPr lang="en-US" dirty="0"/>
-                        <a:t>75</a:t>
-                      </a:r>
-                    </a:p>
-                  </a:txBody>
-                  <a:tcPr/>
-                </a:tc>
-                <a:tc>
-                  <a:txBody>
-                    <a:bodyPr/>
-                    <a:lstStyle/>
-                    <a:p>
-                      <a:r>
-                        <a:rPr lang="en-US" dirty="0"/>
-                        <a:t>20</a:t>
-                      </a:r>
-                    </a:p>
-                  </a:txBody>
-                  <a:tcPr/>
-                </a:tc>
-                <a:extLst>
-                  <a:ext uri="{0D108BD9-81ED-4DB2-BD59-A6C34878D82A}">
-                    <a16:rowId xmlns:a16="http://schemas.microsoft.com/office/drawing/2014/main" val="2716910918"/>
-                  </a:ext>
-                </a:extLst>
-              </a:tr>
-              <a:tr h="525620">
-                <a:tc>
-                  <a:txBody>
-                    <a:bodyPr/>
-                    <a:lstStyle/>
-                    <a:p>
-                      <a:r>
-                        <a:rPr lang="en-US" dirty="0"/>
-                        <a:t>Gentoo</a:t>
-                      </a:r>
-                    </a:p>
-                  </a:txBody>
-                  <a:tcPr/>
-                </a:tc>
-                <a:tc>
-                  <a:txBody>
-                    <a:bodyPr/>
-                    <a:lstStyle/>
-                    <a:p>
-                      <a:r>
-                        <a:rPr lang="en-US" dirty="0"/>
-                        <a:t>77</a:t>
-                      </a:r>
-                    </a:p>
-                  </a:txBody>
-                  <a:tcPr/>
-                </a:tc>
-                <a:tc>
-                  <a:txBody>
-                    <a:bodyPr/>
-                    <a:lstStyle/>
-                    <a:p>
-                      <a:r>
-                        <a:rPr lang="en-US" dirty="0"/>
-                        <a:t>32</a:t>
-                      </a:r>
-                    </a:p>
-                  </a:txBody>
-                  <a:tcPr/>
-                </a:tc>
-                <a:extLst>
-                  <a:ext uri="{0D108BD9-81ED-4DB2-BD59-A6C34878D82A}">
-                    <a16:rowId xmlns:a16="http://schemas.microsoft.com/office/drawing/2014/main" val="3870395830"/>
-                  </a:ext>
-                </a:extLst>
-              </a:tr>
-              <a:tr h="525620">
-                <a:tc>
-                  <a:txBody>
-                    <a:bodyPr/>
-                    <a:lstStyle/>
-                    <a:p>
-                      <a:r>
-                        <a:rPr lang="en-US" dirty="0"/>
-                        <a:t>Chinstrap</a:t>
-                      </a:r>
-                    </a:p>
-                  </a:txBody>
-                  <a:tcPr/>
-                </a:tc>
-                <a:tc>
-                  <a:txBody>
-                    <a:bodyPr/>
-                    <a:lstStyle/>
-                    <a:p>
-                      <a:r>
-                        <a:rPr lang="en-US" dirty="0"/>
-                        <a:t>76</a:t>
-                      </a:r>
-                    </a:p>
-                  </a:txBody>
-                  <a:tcPr/>
-                </a:tc>
-                <a:tc>
-                  <a:txBody>
-                    <a:bodyPr/>
-                    <a:lstStyle/>
-                    <a:p>
-                      <a:r>
-                        <a:rPr lang="en-US" dirty="0"/>
-                        <a:t>12</a:t>
-                      </a:r>
-                    </a:p>
-                  </a:txBody>
-                  <a:tcPr/>
-                </a:tc>
-                <a:extLst>
-                  <a:ext uri="{0D108BD9-81ED-4DB2-BD59-A6C34878D82A}">
-                    <a16:rowId xmlns:a16="http://schemas.microsoft.com/office/drawing/2014/main" val="2608199707"/>
-                  </a:ext>
-                </a:extLst>
-              </a:tr>
-            </a:tbl>
-          </a:graphicData>
-        </a:graphic>
-      </p:graphicFrame>
-      <p:sp>
-        <p:nvSpPr>
-          <p:cNvPr id="4" name="TextBox 3">
-            <a:extLst>
-              <a:ext uri="{FF2B5EF4-FFF2-40B4-BE49-F238E27FC236}">
-                <a16:creationId xmlns:a16="http://schemas.microsoft.com/office/drawing/2014/main" id="{B9624B2B-5D6A-5ADD-285B-79AEC2E59045}"/>
-              </a:ext>
-            </a:extLst>
-          </p:cNvPr>
-          <p:cNvSpPr txBox="1"/>
-          <p:nvPr/>
-        </p:nvSpPr>
-        <p:spPr>
-          <a:xfrm>
-            <a:off x="8139712" y="3174079"/>
-            <a:ext cx="2010487" cy="369332"/>
-          </a:xfrm>
-          <a:prstGeom prst="rect">
-            <a:avLst/>
-          </a:prstGeom>
-          <a:noFill/>
-        </p:spPr>
-        <p:txBody>
-          <a:bodyPr wrap="none" rtlCol="0">
-            <a:spAutoFit/>
-          </a:bodyPr>
-          <a:lstStyle/>
-          <a:p>
-            <a:r>
-              <a:rPr lang="en-US" dirty="0"/>
-              <a:t>Flipper length &gt; 80</a:t>
-            </a:r>
-          </a:p>
-        </p:txBody>
-      </p:sp>
-      <p:sp>
-        <p:nvSpPr>
-          <p:cNvPr id="5" name="TextBox 4">
-            <a:extLst>
-              <a:ext uri="{FF2B5EF4-FFF2-40B4-BE49-F238E27FC236}">
-                <a16:creationId xmlns:a16="http://schemas.microsoft.com/office/drawing/2014/main" id="{7E4333B4-5A22-3F57-EAD5-9CFDD8E90594}"/>
-              </a:ext>
-            </a:extLst>
-          </p:cNvPr>
-          <p:cNvSpPr txBox="1"/>
-          <p:nvPr/>
-        </p:nvSpPr>
-        <p:spPr>
-          <a:xfrm>
-            <a:off x="10581704" y="3778299"/>
-            <a:ext cx="808235" cy="369332"/>
-          </a:xfrm>
-          <a:prstGeom prst="rect">
-            <a:avLst/>
-          </a:prstGeom>
-          <a:noFill/>
-        </p:spPr>
-        <p:txBody>
-          <a:bodyPr wrap="none" rtlCol="0">
-            <a:spAutoFit/>
-          </a:bodyPr>
-          <a:lstStyle/>
-          <a:p>
-            <a:r>
-              <a:rPr lang="en-US" dirty="0">
-                <a:solidFill>
-                  <a:schemeClr val="bg1"/>
-                </a:solidFill>
-              </a:rPr>
-              <a:t>Adelie</a:t>
-            </a:r>
-          </a:p>
-        </p:txBody>
-      </p:sp>
-      <p:sp>
-        <p:nvSpPr>
-          <p:cNvPr id="15" name="TextBox 14">
-            <a:extLst>
-              <a:ext uri="{FF2B5EF4-FFF2-40B4-BE49-F238E27FC236}">
-                <a16:creationId xmlns:a16="http://schemas.microsoft.com/office/drawing/2014/main" id="{DC9059DA-1554-B209-4D95-80EF0DD61160}"/>
-              </a:ext>
-            </a:extLst>
-          </p:cNvPr>
-          <p:cNvSpPr txBox="1"/>
-          <p:nvPr/>
-        </p:nvSpPr>
-        <p:spPr>
-          <a:xfrm>
-            <a:off x="6452389" y="4010004"/>
-            <a:ext cx="1739579" cy="369332"/>
-          </a:xfrm>
-          <a:prstGeom prst="rect">
-            <a:avLst/>
-          </a:prstGeom>
-          <a:noFill/>
-        </p:spPr>
-        <p:txBody>
-          <a:bodyPr wrap="none" rtlCol="0">
-            <a:spAutoFit/>
-          </a:bodyPr>
-          <a:lstStyle/>
-          <a:p>
-            <a:r>
-              <a:rPr lang="en-US" dirty="0"/>
-              <a:t>Body mass &gt; 18</a:t>
-            </a:r>
-          </a:p>
-        </p:txBody>
-      </p:sp>
-      <p:sp>
-        <p:nvSpPr>
-          <p:cNvPr id="17" name="TextBox 16">
-            <a:extLst>
-              <a:ext uri="{FF2B5EF4-FFF2-40B4-BE49-F238E27FC236}">
-                <a16:creationId xmlns:a16="http://schemas.microsoft.com/office/drawing/2014/main" id="{1B811112-4CD7-40F9-C177-624CE7BCC612}"/>
-              </a:ext>
-            </a:extLst>
-          </p:cNvPr>
-          <p:cNvSpPr txBox="1"/>
-          <p:nvPr/>
-        </p:nvSpPr>
-        <p:spPr>
-          <a:xfrm>
-            <a:off x="5136103" y="4511529"/>
-            <a:ext cx="1162306" cy="369332"/>
-          </a:xfrm>
-          <a:prstGeom prst="rect">
-            <a:avLst/>
-          </a:prstGeom>
-          <a:noFill/>
-        </p:spPr>
-        <p:txBody>
-          <a:bodyPr wrap="none" rtlCol="0">
-            <a:spAutoFit/>
-          </a:bodyPr>
-          <a:lstStyle/>
-          <a:p>
-            <a:r>
-              <a:rPr lang="en-US" dirty="0">
-                <a:solidFill>
-                  <a:schemeClr val="bg1"/>
-                </a:solidFill>
-              </a:rPr>
-              <a:t>Chinstrap</a:t>
-            </a:r>
-          </a:p>
-        </p:txBody>
-      </p:sp>
-      <p:sp>
-        <p:nvSpPr>
-          <p:cNvPr id="20" name="Content Placeholder 2">
-            <a:extLst>
-              <a:ext uri="{FF2B5EF4-FFF2-40B4-BE49-F238E27FC236}">
-                <a16:creationId xmlns:a16="http://schemas.microsoft.com/office/drawing/2014/main" id="{D7C07C8C-41BC-0AF7-62C7-E1922F2CE665}"/>
-              </a:ext>
-            </a:extLst>
-          </p:cNvPr>
-          <p:cNvSpPr txBox="1">
-            <a:spLocks/>
-          </p:cNvSpPr>
-          <p:nvPr/>
-        </p:nvSpPr>
-        <p:spPr>
-          <a:xfrm>
-            <a:off x="838200" y="1582551"/>
-            <a:ext cx="6427484" cy="1704659"/>
-          </a:xfrm>
-          <a:prstGeom prst="rect">
-            <a:avLst/>
-          </a:prstGeom>
-        </p:spPr>
-        <p:txBody>
-          <a:bodyPr vert="horz" lIns="91440" tIns="45720" rIns="91440" bIns="45720" rtlCol="0">
-            <a:normAutofit fontScale="92500" lnSpcReduction="20000"/>
-          </a:bodyPr>
-          <a:lstStyle>
-            <a:lvl1pPr marL="228600" indent="-228600" algn="l" defTabSz="914400" rtl="0" eaLnBrk="1" latinLnBrk="0" hangingPunct="1">
-              <a:lnSpc>
-                <a:spcPct val="90000"/>
-              </a:lnSpc>
-              <a:spcBef>
-                <a:spcPts val="1000"/>
-              </a:spcBef>
-              <a:buFont typeface="Arial" panose="020B0604020202020204" pitchFamily="34" charset="0"/>
-              <a:buChar char="•"/>
-              <a:defRPr sz="2800" kern="1200">
-                <a:solidFill>
-                  <a:schemeClr val="tx1"/>
-                </a:solidFill>
-                <a:latin typeface="+mn-lt"/>
-                <a:ea typeface="+mn-ea"/>
-                <a:cs typeface="+mn-cs"/>
-              </a:defRPr>
-            </a:lvl1pPr>
-            <a:lvl2pPr marL="685800" indent="-228600" algn="l" defTabSz="914400" rtl="0" eaLnBrk="1" latinLnBrk="0" hangingPunct="1">
-              <a:lnSpc>
-                <a:spcPct val="90000"/>
-              </a:lnSpc>
-              <a:spcBef>
-                <a:spcPts val="500"/>
-              </a:spcBef>
-              <a:buFont typeface="Arial" panose="020B0604020202020204" pitchFamily="34" charset="0"/>
-              <a:buChar char="•"/>
-              <a:defRPr sz="2400" kern="1200">
-                <a:solidFill>
-                  <a:schemeClr val="tx1"/>
-                </a:solidFill>
-                <a:latin typeface="+mn-lt"/>
-                <a:ea typeface="+mn-ea"/>
-                <a:cs typeface="+mn-cs"/>
-              </a:defRPr>
-            </a:lvl2pPr>
-            <a:lvl3pPr marL="1143000" indent="-228600" algn="l" defTabSz="914400" rtl="0" eaLnBrk="1" latinLnBrk="0" hangingPunct="1">
-              <a:lnSpc>
-                <a:spcPct val="90000"/>
-              </a:lnSpc>
-              <a:spcBef>
-                <a:spcPts val="500"/>
-              </a:spcBef>
-              <a:buFont typeface="Arial" panose="020B0604020202020204" pitchFamily="34" charset="0"/>
-              <a:buChar char="•"/>
-              <a:defRPr sz="2000" kern="1200">
-                <a:solidFill>
-                  <a:schemeClr val="tx1"/>
-                </a:solidFill>
-                <a:latin typeface="+mn-lt"/>
-                <a:ea typeface="+mn-ea"/>
-                <a:cs typeface="+mn-cs"/>
-              </a:defRPr>
-            </a:lvl3pPr>
-            <a:lvl4pPr marL="1600200" indent="-228600" algn="l" defTabSz="914400" rtl="0" eaLnBrk="1" latinLnBrk="0" hangingPunct="1">
-              <a:lnSpc>
-                <a:spcPct val="90000"/>
-              </a:lnSpc>
-              <a:spcBef>
-                <a:spcPts val="500"/>
-              </a:spcBef>
-              <a:buFont typeface="Arial" panose="020B0604020202020204" pitchFamily="34" charset="0"/>
-              <a:buChar char="•"/>
-              <a:defRPr sz="1800" kern="1200">
-                <a:solidFill>
-                  <a:schemeClr val="tx1"/>
-                </a:solidFill>
-                <a:latin typeface="+mn-lt"/>
-                <a:ea typeface="+mn-ea"/>
-                <a:cs typeface="+mn-cs"/>
-              </a:defRPr>
-            </a:lvl4pPr>
-            <a:lvl5pPr marL="2057400" indent="-228600" algn="l" defTabSz="914400" rtl="0" eaLnBrk="1" latinLnBrk="0" hangingPunct="1">
-              <a:lnSpc>
-                <a:spcPct val="90000"/>
-              </a:lnSpc>
-              <a:spcBef>
-                <a:spcPts val="500"/>
-              </a:spcBef>
-              <a:buFont typeface="Arial" panose="020B0604020202020204" pitchFamily="34" charset="0"/>
-              <a:buChar char="•"/>
-              <a:defRPr sz="1800" kern="1200">
-                <a:solidFill>
-                  <a:schemeClr val="tx1"/>
-                </a:solidFill>
-                <a:latin typeface="+mn-lt"/>
-                <a:ea typeface="+mn-ea"/>
-                <a:cs typeface="+mn-cs"/>
-              </a:defRPr>
-            </a:lvl5pPr>
-            <a:lvl6pPr marL="2514600" indent="-228600" algn="l" defTabSz="914400" rtl="0" eaLnBrk="1" latinLnBrk="0" hangingPunct="1">
-              <a:lnSpc>
-                <a:spcPct val="90000"/>
-              </a:lnSpc>
-              <a:spcBef>
-                <a:spcPts val="500"/>
-              </a:spcBef>
-              <a:buFont typeface="Arial" panose="020B0604020202020204" pitchFamily="34" charset="0"/>
-              <a:buChar char="•"/>
-              <a:defRPr sz="1800" kern="1200">
-                <a:solidFill>
-                  <a:schemeClr val="tx1"/>
-                </a:solidFill>
-                <a:latin typeface="+mn-lt"/>
-                <a:ea typeface="+mn-ea"/>
-                <a:cs typeface="+mn-cs"/>
-              </a:defRPr>
-            </a:lvl6pPr>
-            <a:lvl7pPr marL="2971800" indent="-228600" algn="l" defTabSz="914400" rtl="0" eaLnBrk="1" latinLnBrk="0" hangingPunct="1">
-              <a:lnSpc>
-                <a:spcPct val="90000"/>
-              </a:lnSpc>
-              <a:spcBef>
-                <a:spcPts val="500"/>
-              </a:spcBef>
-              <a:buFont typeface="Arial" panose="020B0604020202020204" pitchFamily="34" charset="0"/>
-              <a:buChar char="•"/>
-              <a:defRPr sz="1800" kern="1200">
-                <a:solidFill>
-                  <a:schemeClr val="tx1"/>
-                </a:solidFill>
-                <a:latin typeface="+mn-lt"/>
-                <a:ea typeface="+mn-ea"/>
-                <a:cs typeface="+mn-cs"/>
-              </a:defRPr>
-            </a:lvl7pPr>
-            <a:lvl8pPr marL="3429000" indent="-228600" algn="l" defTabSz="914400" rtl="0" eaLnBrk="1" latinLnBrk="0" hangingPunct="1">
-              <a:lnSpc>
-                <a:spcPct val="90000"/>
-              </a:lnSpc>
-              <a:spcBef>
-                <a:spcPts val="500"/>
-              </a:spcBef>
-              <a:buFont typeface="Arial" panose="020B0604020202020204" pitchFamily="34" charset="0"/>
-              <a:buChar char="•"/>
-              <a:defRPr sz="1800" kern="1200">
-                <a:solidFill>
-                  <a:schemeClr val="tx1"/>
-                </a:solidFill>
-                <a:latin typeface="+mn-lt"/>
-                <a:ea typeface="+mn-ea"/>
-                <a:cs typeface="+mn-cs"/>
-              </a:defRPr>
-            </a:lvl8pPr>
-            <a:lvl9pPr marL="3886200" indent="-228600" algn="l" defTabSz="914400" rtl="0" eaLnBrk="1" latinLnBrk="0" hangingPunct="1">
-              <a:lnSpc>
-                <a:spcPct val="90000"/>
-              </a:lnSpc>
-              <a:spcBef>
-                <a:spcPts val="500"/>
-              </a:spcBef>
-              <a:buFont typeface="Arial" panose="020B0604020202020204" pitchFamily="34" charset="0"/>
-              <a:buChar char="•"/>
-              <a:defRPr sz="1800" kern="1200">
-                <a:solidFill>
-                  <a:schemeClr val="tx1"/>
-                </a:solidFill>
-                <a:latin typeface="+mn-lt"/>
-                <a:ea typeface="+mn-ea"/>
-                <a:cs typeface="+mn-cs"/>
-              </a:defRPr>
-            </a:lvl9pPr>
-          </a:lstStyle>
-          <a:p>
-            <a:pPr marL="0" indent="0">
-              <a:buFont typeface="Arial" panose="020B0604020202020204" pitchFamily="34" charset="0"/>
-              <a:buNone/>
-            </a:pPr>
-            <a:r>
-              <a:rPr lang="en-US" dirty="0"/>
-              <a:t>Until a stopping condition is met</a:t>
-            </a:r>
-          </a:p>
-          <a:p>
-            <a:pPr marL="0" indent="0">
-              <a:buFont typeface="Arial" panose="020B0604020202020204" pitchFamily="34" charset="0"/>
-              <a:buNone/>
-            </a:pPr>
-            <a:r>
-              <a:rPr lang="en-US" dirty="0"/>
-              <a:t>   Evaluate best split for each predictor</a:t>
-            </a:r>
-          </a:p>
-          <a:p>
-            <a:pPr marL="0" indent="0">
-              <a:buFont typeface="Arial" panose="020B0604020202020204" pitchFamily="34" charset="0"/>
-              <a:buNone/>
-            </a:pPr>
-            <a:r>
-              <a:rPr lang="en-US" dirty="0"/>
-              <a:t>   Select the optimal split</a:t>
-            </a:r>
-          </a:p>
-          <a:p>
-            <a:pPr marL="0" indent="0">
-              <a:buFont typeface="Arial" panose="020B0604020202020204" pitchFamily="34" charset="0"/>
-              <a:buNone/>
-            </a:pPr>
-            <a:r>
-              <a:rPr lang="en-US" dirty="0"/>
-              <a:t>   Create new nodes</a:t>
-            </a:r>
-          </a:p>
-          <a:p>
-            <a:pPr marL="0" indent="0">
-              <a:buFont typeface="Arial" panose="020B0604020202020204" pitchFamily="34" charset="0"/>
-              <a:buNone/>
-            </a:pPr>
-            <a:endParaRPr lang="en-US" dirty="0"/>
-          </a:p>
-          <a:p>
-            <a:pPr marL="0" indent="0">
-              <a:buFont typeface="Arial" panose="020B0604020202020204" pitchFamily="34" charset="0"/>
-              <a:buNone/>
-            </a:pPr>
-            <a:endParaRPr lang="en-US" dirty="0"/>
-          </a:p>
-        </p:txBody>
-      </p:sp>
-    </p:spTree>
-    <p:extLst>
-      <p:ext uri="{BB962C8B-B14F-4D97-AF65-F5344CB8AC3E}">
-        <p14:creationId xmlns:p14="http://schemas.microsoft.com/office/powerpoint/2010/main" val="3197460958"/>
-      </p:ext>
-    </p:extLst>
-  </p:cSld>
-  <p:clrMapOvr>
-    <a:masterClrMapping/>
-  </p:clrMapOvr>
-</p:sld>
-</file>
-
-<file path=ppt/slides/slide51.xml><?xml version="1.0" encoding="utf-8"?>
-<p:sld xmlns:a="http://schemas.openxmlformats.org/drawingml/2006/main" xmlns:r="http://schemas.openxmlformats.org/officeDocument/2006/relationships" xmlns:p="http://schemas.openxmlformats.org/presentationml/2006/main">
-  <p:cSld>
-    <p:spTree>
-      <p:nvGrpSpPr>
-        <p:cNvPr id="1" name="">
-          <a:extLst>
-            <a:ext uri="{FF2B5EF4-FFF2-40B4-BE49-F238E27FC236}">
-              <a16:creationId xmlns:a16="http://schemas.microsoft.com/office/drawing/2014/main" id="{5E0B90EE-1E76-28A0-542C-3233C0A3A55B}"/>
-            </a:ext>
-          </a:extLst>
-        </p:cNvPr>
-        <p:cNvGrpSpPr/>
-        <p:nvPr/>
-      </p:nvGrpSpPr>
-      <p:grpSpPr>
-        <a:xfrm>
-          <a:off x="0" y="0"/>
-          <a:ext cx="0" cy="0"/>
-          <a:chOff x="0" y="0"/>
-          <a:chExt cx="0" cy="0"/>
-        </a:xfrm>
-      </p:grpSpPr>
-      <p:sp>
-        <p:nvSpPr>
-          <p:cNvPr id="2" name="Title 1">
-            <a:extLst>
-              <a:ext uri="{FF2B5EF4-FFF2-40B4-BE49-F238E27FC236}">
-                <a16:creationId xmlns:a16="http://schemas.microsoft.com/office/drawing/2014/main" id="{93EA62FE-89A4-8C02-6297-CD42CAA26D33}"/>
-              </a:ext>
-            </a:extLst>
-          </p:cNvPr>
-          <p:cNvSpPr>
-            <a:spLocks noGrp="1"/>
-          </p:cNvSpPr>
-          <p:nvPr>
-            <p:ph type="title"/>
-          </p:nvPr>
-        </p:nvSpPr>
-        <p:spPr/>
-        <p:txBody>
-          <a:bodyPr/>
-          <a:lstStyle/>
-          <a:p>
-            <a:r>
-              <a:rPr lang="en-US" dirty="0"/>
-              <a:t>Classification and Regression Trees (CART)</a:t>
-            </a:r>
-          </a:p>
-        </p:txBody>
-      </p:sp>
-      <p:grpSp>
-        <p:nvGrpSpPr>
-          <p:cNvPr id="29" name="Group 28">
-            <a:extLst>
-              <a:ext uri="{FF2B5EF4-FFF2-40B4-BE49-F238E27FC236}">
-                <a16:creationId xmlns:a16="http://schemas.microsoft.com/office/drawing/2014/main" id="{49A776A9-3DCD-0E03-5236-19F9AA581B43}"/>
-              </a:ext>
-            </a:extLst>
-          </p:cNvPr>
-          <p:cNvGrpSpPr/>
-          <p:nvPr/>
-        </p:nvGrpSpPr>
-        <p:grpSpPr>
-          <a:xfrm>
-            <a:off x="5074276" y="2369713"/>
-            <a:ext cx="6539891" cy="2736153"/>
-            <a:chOff x="253576" y="2125014"/>
-            <a:chExt cx="4179418" cy="2736153"/>
-          </a:xfrm>
-        </p:grpSpPr>
-        <p:sp>
-          <p:nvSpPr>
-            <p:cNvPr id="6" name="Oval 5">
-              <a:extLst>
-                <a:ext uri="{FF2B5EF4-FFF2-40B4-BE49-F238E27FC236}">
-                  <a16:creationId xmlns:a16="http://schemas.microsoft.com/office/drawing/2014/main" id="{8E95FCDC-59DF-FDDF-3FA9-95740542284E}"/>
-                </a:ext>
-              </a:extLst>
-            </p:cNvPr>
-            <p:cNvSpPr/>
-            <p:nvPr/>
-          </p:nvSpPr>
-          <p:spPr>
-            <a:xfrm>
-              <a:off x="2410784" y="2125014"/>
-              <a:ext cx="821813" cy="819337"/>
-            </a:xfrm>
-            <a:prstGeom prst="ellipse">
-              <a:avLst/>
-            </a:prstGeom>
-          </p:spPr>
-          <p:style>
-            <a:lnRef idx="2">
-              <a:schemeClr val="accent1">
-                <a:shade val="15000"/>
-              </a:schemeClr>
-            </a:lnRef>
-            <a:fillRef idx="1">
-              <a:schemeClr val="accent1"/>
-            </a:fillRef>
-            <a:effectRef idx="0">
-              <a:schemeClr val="accent1"/>
-            </a:effectRef>
-            <a:fontRef idx="minor">
-              <a:schemeClr val="lt1"/>
-            </a:fontRef>
-          </p:style>
-          <p:txBody>
-            <a:bodyPr rtlCol="0" anchor="ctr"/>
-            <a:lstStyle/>
-            <a:p>
-              <a:pPr algn="ctr"/>
-              <a:endParaRPr lang="en-US"/>
-            </a:p>
-          </p:txBody>
-        </p:sp>
-        <p:sp>
-          <p:nvSpPr>
-            <p:cNvPr id="7" name="Oval 6">
-              <a:extLst>
-                <a:ext uri="{FF2B5EF4-FFF2-40B4-BE49-F238E27FC236}">
-                  <a16:creationId xmlns:a16="http://schemas.microsoft.com/office/drawing/2014/main" id="{2E6A8EB6-7983-0A84-A2B2-BE38C7874604}"/>
-                </a:ext>
-              </a:extLst>
-            </p:cNvPr>
-            <p:cNvSpPr/>
-            <p:nvPr/>
-          </p:nvSpPr>
-          <p:spPr>
-            <a:xfrm>
-              <a:off x="1291291" y="3034954"/>
-              <a:ext cx="821813" cy="819337"/>
-            </a:xfrm>
-            <a:prstGeom prst="ellipse">
-              <a:avLst/>
-            </a:prstGeom>
-          </p:spPr>
-          <p:style>
-            <a:lnRef idx="2">
-              <a:schemeClr val="accent1">
-                <a:shade val="15000"/>
-              </a:schemeClr>
-            </a:lnRef>
-            <a:fillRef idx="1">
-              <a:schemeClr val="accent1"/>
-            </a:fillRef>
-            <a:effectRef idx="0">
-              <a:schemeClr val="accent1"/>
-            </a:effectRef>
-            <a:fontRef idx="minor">
-              <a:schemeClr val="lt1"/>
-            </a:fontRef>
-          </p:style>
-          <p:txBody>
-            <a:bodyPr rtlCol="0" anchor="ctr"/>
-            <a:lstStyle/>
-            <a:p>
-              <a:pPr algn="ctr"/>
-              <a:endParaRPr lang="en-US"/>
-            </a:p>
-          </p:txBody>
-        </p:sp>
-        <p:sp>
-          <p:nvSpPr>
-            <p:cNvPr id="8" name="Oval 7">
-              <a:extLst>
-                <a:ext uri="{FF2B5EF4-FFF2-40B4-BE49-F238E27FC236}">
-                  <a16:creationId xmlns:a16="http://schemas.microsoft.com/office/drawing/2014/main" id="{12F27990-1ED1-48C3-1D7B-FFC7EA3D6004}"/>
-                </a:ext>
-              </a:extLst>
-            </p:cNvPr>
-            <p:cNvSpPr/>
-            <p:nvPr/>
-          </p:nvSpPr>
-          <p:spPr>
-            <a:xfrm>
-              <a:off x="3611181" y="3323259"/>
-              <a:ext cx="821813" cy="819337"/>
-            </a:xfrm>
-            <a:prstGeom prst="ellipse">
-              <a:avLst/>
-            </a:prstGeom>
-          </p:spPr>
-          <p:style>
-            <a:lnRef idx="2">
-              <a:schemeClr val="accent1">
-                <a:shade val="15000"/>
-              </a:schemeClr>
-            </a:lnRef>
-            <a:fillRef idx="1">
-              <a:schemeClr val="accent1"/>
-            </a:fillRef>
-            <a:effectRef idx="0">
-              <a:schemeClr val="accent1"/>
-            </a:effectRef>
-            <a:fontRef idx="minor">
-              <a:schemeClr val="lt1"/>
-            </a:fontRef>
-          </p:style>
-          <p:txBody>
-            <a:bodyPr rtlCol="0" anchor="ctr"/>
-            <a:lstStyle/>
-            <a:p>
-              <a:pPr algn="ctr"/>
-              <a:endParaRPr lang="en-US"/>
-            </a:p>
-          </p:txBody>
-        </p:sp>
-        <p:sp>
-          <p:nvSpPr>
-            <p:cNvPr id="9" name="Oval 8">
-              <a:extLst>
-                <a:ext uri="{FF2B5EF4-FFF2-40B4-BE49-F238E27FC236}">
-                  <a16:creationId xmlns:a16="http://schemas.microsoft.com/office/drawing/2014/main" id="{FFEDC6FF-B88B-6C79-212C-E5D31332D17F}"/>
-                </a:ext>
-              </a:extLst>
-            </p:cNvPr>
-            <p:cNvSpPr/>
-            <p:nvPr/>
-          </p:nvSpPr>
-          <p:spPr>
-            <a:xfrm>
-              <a:off x="253576" y="4041829"/>
-              <a:ext cx="821813" cy="819337"/>
-            </a:xfrm>
-            <a:prstGeom prst="ellipse">
-              <a:avLst/>
-            </a:prstGeom>
-          </p:spPr>
-          <p:style>
-            <a:lnRef idx="2">
-              <a:schemeClr val="accent1">
-                <a:shade val="15000"/>
-              </a:schemeClr>
-            </a:lnRef>
-            <a:fillRef idx="1">
-              <a:schemeClr val="accent1"/>
-            </a:fillRef>
-            <a:effectRef idx="0">
-              <a:schemeClr val="accent1"/>
-            </a:effectRef>
-            <a:fontRef idx="minor">
-              <a:schemeClr val="lt1"/>
-            </a:fontRef>
-          </p:style>
-          <p:txBody>
-            <a:bodyPr rtlCol="0" anchor="ctr"/>
-            <a:lstStyle/>
-            <a:p>
-              <a:pPr algn="ctr"/>
-              <a:endParaRPr lang="en-US"/>
-            </a:p>
-          </p:txBody>
-        </p:sp>
-        <p:sp>
-          <p:nvSpPr>
-            <p:cNvPr id="10" name="Oval 9">
-              <a:extLst>
-                <a:ext uri="{FF2B5EF4-FFF2-40B4-BE49-F238E27FC236}">
-                  <a16:creationId xmlns:a16="http://schemas.microsoft.com/office/drawing/2014/main" id="{91F041FE-E0AA-0A0C-FF16-1BE0D9CCBE11}"/>
-                </a:ext>
-              </a:extLst>
-            </p:cNvPr>
-            <p:cNvSpPr/>
-            <p:nvPr/>
-          </p:nvSpPr>
-          <p:spPr>
-            <a:xfrm>
-              <a:off x="2296413" y="4041830"/>
-              <a:ext cx="821813" cy="819337"/>
-            </a:xfrm>
-            <a:prstGeom prst="ellipse">
-              <a:avLst/>
-            </a:prstGeom>
-          </p:spPr>
-          <p:style>
-            <a:lnRef idx="2">
-              <a:schemeClr val="accent1">
-                <a:shade val="15000"/>
-              </a:schemeClr>
-            </a:lnRef>
-            <a:fillRef idx="1">
-              <a:schemeClr val="accent1"/>
-            </a:fillRef>
-            <a:effectRef idx="0">
-              <a:schemeClr val="accent1"/>
-            </a:effectRef>
-            <a:fontRef idx="minor">
-              <a:schemeClr val="lt1"/>
-            </a:fontRef>
-          </p:style>
-          <p:txBody>
-            <a:bodyPr rtlCol="0" anchor="ctr"/>
-            <a:lstStyle/>
-            <a:p>
-              <a:pPr algn="ctr"/>
-              <a:endParaRPr lang="en-US"/>
-            </a:p>
-          </p:txBody>
-        </p:sp>
-        <p:cxnSp>
-          <p:nvCxnSpPr>
-            <p:cNvPr id="11" name="Straight Connector 10">
-              <a:extLst>
-                <a:ext uri="{FF2B5EF4-FFF2-40B4-BE49-F238E27FC236}">
-                  <a16:creationId xmlns:a16="http://schemas.microsoft.com/office/drawing/2014/main" id="{2DD614FC-D06B-849D-B6EF-B4002C8EF34C}"/>
-                </a:ext>
-              </a:extLst>
-            </p:cNvPr>
-            <p:cNvCxnSpPr>
-              <a:stCxn id="6" idx="5"/>
-              <a:endCxn id="8" idx="1"/>
-            </p:cNvCxnSpPr>
-            <p:nvPr/>
-          </p:nvCxnSpPr>
-          <p:spPr>
-            <a:xfrm>
-              <a:off x="3112245" y="2824362"/>
-              <a:ext cx="619288" cy="618886"/>
-            </a:xfrm>
-            <a:prstGeom prst="line">
-              <a:avLst/>
-            </a:prstGeom>
-          </p:spPr>
-          <p:style>
-            <a:lnRef idx="2">
-              <a:schemeClr val="accent1"/>
-            </a:lnRef>
-            <a:fillRef idx="0">
-              <a:schemeClr val="accent1"/>
-            </a:fillRef>
-            <a:effectRef idx="1">
-              <a:schemeClr val="accent1"/>
-            </a:effectRef>
-            <a:fontRef idx="minor">
-              <a:schemeClr val="tx1"/>
-            </a:fontRef>
-          </p:style>
-        </p:cxnSp>
-        <p:cxnSp>
-          <p:nvCxnSpPr>
-            <p:cNvPr id="12" name="Straight Connector 11">
-              <a:extLst>
-                <a:ext uri="{FF2B5EF4-FFF2-40B4-BE49-F238E27FC236}">
-                  <a16:creationId xmlns:a16="http://schemas.microsoft.com/office/drawing/2014/main" id="{096D6B1B-0DBD-8663-CC82-41FDC5A52DCC}"/>
-                </a:ext>
-              </a:extLst>
-            </p:cNvPr>
-            <p:cNvCxnSpPr>
-              <a:cxnSpLocks/>
-              <a:stCxn id="6" idx="3"/>
-              <a:endCxn id="7" idx="7"/>
-            </p:cNvCxnSpPr>
-            <p:nvPr/>
-          </p:nvCxnSpPr>
-          <p:spPr>
-            <a:xfrm flipH="1">
-              <a:off x="1992752" y="2824362"/>
-              <a:ext cx="538384" cy="330581"/>
-            </a:xfrm>
-            <a:prstGeom prst="line">
-              <a:avLst/>
-            </a:prstGeom>
-          </p:spPr>
-          <p:style>
-            <a:lnRef idx="2">
-              <a:schemeClr val="accent1"/>
-            </a:lnRef>
-            <a:fillRef idx="0">
-              <a:schemeClr val="accent1"/>
-            </a:fillRef>
-            <a:effectRef idx="1">
-              <a:schemeClr val="accent1"/>
-            </a:effectRef>
-            <a:fontRef idx="minor">
-              <a:schemeClr val="tx1"/>
-            </a:fontRef>
-          </p:style>
-        </p:cxnSp>
-        <p:cxnSp>
-          <p:nvCxnSpPr>
-            <p:cNvPr id="13" name="Straight Connector 12">
-              <a:extLst>
-                <a:ext uri="{FF2B5EF4-FFF2-40B4-BE49-F238E27FC236}">
-                  <a16:creationId xmlns:a16="http://schemas.microsoft.com/office/drawing/2014/main" id="{7422479F-F0E4-1810-71A3-7A00B74C86BB}"/>
-                </a:ext>
-              </a:extLst>
-            </p:cNvPr>
-            <p:cNvCxnSpPr>
-              <a:cxnSpLocks/>
-              <a:stCxn id="7" idx="3"/>
-              <a:endCxn id="9" idx="7"/>
-            </p:cNvCxnSpPr>
-            <p:nvPr/>
-          </p:nvCxnSpPr>
-          <p:spPr>
-            <a:xfrm flipH="1">
-              <a:off x="955037" y="3734302"/>
-              <a:ext cx="456606" cy="427516"/>
-            </a:xfrm>
-            <a:prstGeom prst="line">
-              <a:avLst/>
-            </a:prstGeom>
-          </p:spPr>
-          <p:style>
-            <a:lnRef idx="2">
-              <a:schemeClr val="accent1"/>
-            </a:lnRef>
-            <a:fillRef idx="0">
-              <a:schemeClr val="accent1"/>
-            </a:fillRef>
-            <a:effectRef idx="1">
-              <a:schemeClr val="accent1"/>
-            </a:effectRef>
-            <a:fontRef idx="minor">
-              <a:schemeClr val="tx1"/>
-            </a:fontRef>
-          </p:style>
-        </p:cxnSp>
-        <p:cxnSp>
-          <p:nvCxnSpPr>
-            <p:cNvPr id="14" name="Straight Connector 13">
-              <a:extLst>
-                <a:ext uri="{FF2B5EF4-FFF2-40B4-BE49-F238E27FC236}">
-                  <a16:creationId xmlns:a16="http://schemas.microsoft.com/office/drawing/2014/main" id="{3B4F6CC0-205F-1234-FE10-827C24ECA6EF}"/>
-                </a:ext>
-              </a:extLst>
-            </p:cNvPr>
-            <p:cNvCxnSpPr>
-              <a:cxnSpLocks/>
-              <a:stCxn id="7" idx="5"/>
-              <a:endCxn id="10" idx="1"/>
-            </p:cNvCxnSpPr>
-            <p:nvPr/>
-          </p:nvCxnSpPr>
-          <p:spPr>
-            <a:xfrm>
-              <a:off x="1992752" y="3734302"/>
-              <a:ext cx="424013" cy="427517"/>
-            </a:xfrm>
-            <a:prstGeom prst="line">
-              <a:avLst/>
-            </a:prstGeom>
-          </p:spPr>
-          <p:style>
-            <a:lnRef idx="2">
-              <a:schemeClr val="accent1"/>
-            </a:lnRef>
-            <a:fillRef idx="0">
-              <a:schemeClr val="accent1"/>
-            </a:fillRef>
-            <a:effectRef idx="1">
-              <a:schemeClr val="accent1"/>
-            </a:effectRef>
-            <a:fontRef idx="minor">
-              <a:schemeClr val="tx1"/>
-            </a:fontRef>
-          </p:style>
-        </p:cxnSp>
-      </p:grpSp>
-      <p:graphicFrame>
-        <p:nvGraphicFramePr>
-          <p:cNvPr id="3" name="Table 2">
-            <a:extLst>
-              <a:ext uri="{FF2B5EF4-FFF2-40B4-BE49-F238E27FC236}">
-                <a16:creationId xmlns:a16="http://schemas.microsoft.com/office/drawing/2014/main" id="{3B91855C-1D9E-5502-DC5C-BEDF2A0C8C43}"/>
-              </a:ext>
-            </a:extLst>
-          </p:cNvPr>
-          <p:cNvGraphicFramePr>
-            <a:graphicFrameLocks noGrp="1"/>
-          </p:cNvGraphicFramePr>
-          <p:nvPr/>
-        </p:nvGraphicFramePr>
-        <p:xfrm>
-          <a:off x="577833" y="3391084"/>
-          <a:ext cx="3762348" cy="3009715"/>
-        </p:xfrm>
-        <a:graphic>
-          <a:graphicData uri="http://schemas.openxmlformats.org/drawingml/2006/table">
-            <a:tbl>
-              <a:tblPr firstRow="1" bandRow="1">
-                <a:tableStyleId>{5C22544A-7EE6-4342-B048-85BDC9FD1C3A}</a:tableStyleId>
-              </a:tblPr>
-              <a:tblGrid>
-                <a:gridCol w="1254116">
-                  <a:extLst>
-                    <a:ext uri="{9D8B030D-6E8A-4147-A177-3AD203B41FA5}">
-                      <a16:colId xmlns:a16="http://schemas.microsoft.com/office/drawing/2014/main" val="3086874793"/>
-                    </a:ext>
-                  </a:extLst>
-                </a:gridCol>
-                <a:gridCol w="1254116">
-                  <a:extLst>
-                    <a:ext uri="{9D8B030D-6E8A-4147-A177-3AD203B41FA5}">
-                      <a16:colId xmlns:a16="http://schemas.microsoft.com/office/drawing/2014/main" val="725989201"/>
-                    </a:ext>
-                  </a:extLst>
-                </a:gridCol>
-                <a:gridCol w="1254116">
-                  <a:extLst>
-                    <a:ext uri="{9D8B030D-6E8A-4147-A177-3AD203B41FA5}">
-                      <a16:colId xmlns:a16="http://schemas.microsoft.com/office/drawing/2014/main" val="1915941172"/>
-                    </a:ext>
-                  </a:extLst>
-                </a:gridCol>
-              </a:tblGrid>
-              <a:tr h="907235">
-                <a:tc>
-                  <a:txBody>
-                    <a:bodyPr/>
-                    <a:lstStyle/>
-                    <a:p>
-                      <a:r>
-                        <a:rPr lang="en-US" dirty="0"/>
-                        <a:t>Penguin species</a:t>
-                      </a:r>
-                    </a:p>
-                  </a:txBody>
-                  <a:tcPr/>
-                </a:tc>
-                <a:tc>
-                  <a:txBody>
-                    <a:bodyPr/>
-                    <a:lstStyle/>
-                    <a:p>
-                      <a:r>
-                        <a:rPr lang="en-US" dirty="0"/>
-                        <a:t>Flipper length</a:t>
-                      </a:r>
-                    </a:p>
-                  </a:txBody>
-                  <a:tcPr/>
-                </a:tc>
-                <a:tc>
-                  <a:txBody>
-                    <a:bodyPr/>
-                    <a:lstStyle/>
-                    <a:p>
-                      <a:r>
-                        <a:rPr lang="en-US" dirty="0"/>
-                        <a:t>Body mass</a:t>
-                      </a:r>
-                    </a:p>
-                  </a:txBody>
-                  <a:tcPr/>
-                </a:tc>
-                <a:extLst>
-                  <a:ext uri="{0D108BD9-81ED-4DB2-BD59-A6C34878D82A}">
-                    <a16:rowId xmlns:a16="http://schemas.microsoft.com/office/drawing/2014/main" val="207539063"/>
-                  </a:ext>
-                </a:extLst>
-              </a:tr>
-              <a:tr h="525620">
-                <a:tc>
-                  <a:txBody>
-                    <a:bodyPr/>
-                    <a:lstStyle/>
-                    <a:p>
-                      <a:r>
-                        <a:rPr lang="en-US" dirty="0"/>
-                        <a:t>Adelie</a:t>
-                      </a:r>
-                    </a:p>
-                  </a:txBody>
-                  <a:tcPr/>
-                </a:tc>
-                <a:tc>
-                  <a:txBody>
-                    <a:bodyPr/>
-                    <a:lstStyle/>
-                    <a:p>
-                      <a:r>
-                        <a:rPr lang="en-US" dirty="0"/>
-                        <a:t>90</a:t>
-                      </a:r>
-                    </a:p>
-                  </a:txBody>
-                  <a:tcPr/>
-                </a:tc>
-                <a:tc>
-                  <a:txBody>
-                    <a:bodyPr/>
-                    <a:lstStyle/>
-                    <a:p>
-                      <a:r>
-                        <a:rPr lang="en-US" dirty="0"/>
-                        <a:t>80</a:t>
-                      </a:r>
-                    </a:p>
-                  </a:txBody>
-                  <a:tcPr/>
-                </a:tc>
-                <a:extLst>
-                  <a:ext uri="{0D108BD9-81ED-4DB2-BD59-A6C34878D82A}">
-                    <a16:rowId xmlns:a16="http://schemas.microsoft.com/office/drawing/2014/main" val="350663204"/>
-                  </a:ext>
-                </a:extLst>
-              </a:tr>
-              <a:tr h="525620">
-                <a:tc>
-                  <a:txBody>
-                    <a:bodyPr/>
-                    <a:lstStyle/>
-                    <a:p>
-                      <a:r>
-                        <a:rPr lang="en-US" dirty="0"/>
-                        <a:t>Gentoo</a:t>
-                      </a:r>
-                    </a:p>
-                  </a:txBody>
-                  <a:tcPr/>
-                </a:tc>
-                <a:tc>
-                  <a:txBody>
-                    <a:bodyPr/>
-                    <a:lstStyle/>
-                    <a:p>
-                      <a:r>
-                        <a:rPr lang="en-US" dirty="0"/>
-                        <a:t>75</a:t>
-                      </a:r>
-                    </a:p>
-                  </a:txBody>
-                  <a:tcPr/>
-                </a:tc>
-                <a:tc>
-                  <a:txBody>
-                    <a:bodyPr/>
-                    <a:lstStyle/>
-                    <a:p>
-                      <a:r>
-                        <a:rPr lang="en-US" dirty="0"/>
-                        <a:t>20</a:t>
-                      </a:r>
-                    </a:p>
-                  </a:txBody>
-                  <a:tcPr/>
-                </a:tc>
-                <a:extLst>
-                  <a:ext uri="{0D108BD9-81ED-4DB2-BD59-A6C34878D82A}">
-                    <a16:rowId xmlns:a16="http://schemas.microsoft.com/office/drawing/2014/main" val="2716910918"/>
-                  </a:ext>
-                </a:extLst>
-              </a:tr>
-              <a:tr h="525620">
-                <a:tc>
-                  <a:txBody>
-                    <a:bodyPr/>
-                    <a:lstStyle/>
-                    <a:p>
-                      <a:r>
-                        <a:rPr lang="en-US" dirty="0"/>
-                        <a:t>Gentoo</a:t>
-                      </a:r>
-                    </a:p>
-                  </a:txBody>
-                  <a:tcPr/>
-                </a:tc>
-                <a:tc>
-                  <a:txBody>
-                    <a:bodyPr/>
-                    <a:lstStyle/>
-                    <a:p>
-                      <a:r>
-                        <a:rPr lang="en-US" dirty="0"/>
-                        <a:t>77</a:t>
-                      </a:r>
-                    </a:p>
-                  </a:txBody>
-                  <a:tcPr/>
-                </a:tc>
-                <a:tc>
-                  <a:txBody>
-                    <a:bodyPr/>
-                    <a:lstStyle/>
-                    <a:p>
-                      <a:r>
-                        <a:rPr lang="en-US" dirty="0"/>
-                        <a:t>32</a:t>
-                      </a:r>
-                    </a:p>
-                  </a:txBody>
-                  <a:tcPr/>
-                </a:tc>
-                <a:extLst>
-                  <a:ext uri="{0D108BD9-81ED-4DB2-BD59-A6C34878D82A}">
-                    <a16:rowId xmlns:a16="http://schemas.microsoft.com/office/drawing/2014/main" val="3870395830"/>
-                  </a:ext>
-                </a:extLst>
-              </a:tr>
-              <a:tr h="525620">
-                <a:tc>
-                  <a:txBody>
-                    <a:bodyPr/>
-                    <a:lstStyle/>
-                    <a:p>
-                      <a:r>
-                        <a:rPr lang="en-US" dirty="0"/>
-                        <a:t>Chinstrap</a:t>
-                      </a:r>
-                    </a:p>
-                  </a:txBody>
-                  <a:tcPr/>
-                </a:tc>
-                <a:tc>
-                  <a:txBody>
-                    <a:bodyPr/>
-                    <a:lstStyle/>
-                    <a:p>
-                      <a:r>
-                        <a:rPr lang="en-US" dirty="0"/>
-                        <a:t>76</a:t>
-                      </a:r>
-                    </a:p>
-                  </a:txBody>
-                  <a:tcPr/>
-                </a:tc>
-                <a:tc>
-                  <a:txBody>
-                    <a:bodyPr/>
-                    <a:lstStyle/>
-                    <a:p>
-                      <a:r>
-                        <a:rPr lang="en-US" dirty="0"/>
-                        <a:t>12</a:t>
-                      </a:r>
-                    </a:p>
-                  </a:txBody>
-                  <a:tcPr/>
-                </a:tc>
-                <a:extLst>
-                  <a:ext uri="{0D108BD9-81ED-4DB2-BD59-A6C34878D82A}">
-                    <a16:rowId xmlns:a16="http://schemas.microsoft.com/office/drawing/2014/main" val="2608199707"/>
-                  </a:ext>
-                </a:extLst>
-              </a:tr>
-            </a:tbl>
-          </a:graphicData>
-        </a:graphic>
-      </p:graphicFrame>
-      <p:sp>
-        <p:nvSpPr>
-          <p:cNvPr id="4" name="TextBox 3">
-            <a:extLst>
-              <a:ext uri="{FF2B5EF4-FFF2-40B4-BE49-F238E27FC236}">
-                <a16:creationId xmlns:a16="http://schemas.microsoft.com/office/drawing/2014/main" id="{E33FACB9-5A11-D0A9-C498-9564E60F3B0F}"/>
-              </a:ext>
-            </a:extLst>
-          </p:cNvPr>
-          <p:cNvSpPr txBox="1"/>
-          <p:nvPr/>
-        </p:nvSpPr>
-        <p:spPr>
-          <a:xfrm>
-            <a:off x="8139712" y="3174079"/>
-            <a:ext cx="2010487" cy="369332"/>
-          </a:xfrm>
-          <a:prstGeom prst="rect">
-            <a:avLst/>
-          </a:prstGeom>
-          <a:noFill/>
-        </p:spPr>
-        <p:txBody>
-          <a:bodyPr wrap="none" rtlCol="0">
-            <a:spAutoFit/>
-          </a:bodyPr>
-          <a:lstStyle/>
-          <a:p>
-            <a:r>
-              <a:rPr lang="en-US" dirty="0"/>
-              <a:t>Flipper length &gt; 80</a:t>
-            </a:r>
-          </a:p>
-        </p:txBody>
-      </p:sp>
-      <p:sp>
-        <p:nvSpPr>
-          <p:cNvPr id="5" name="TextBox 4">
-            <a:extLst>
-              <a:ext uri="{FF2B5EF4-FFF2-40B4-BE49-F238E27FC236}">
-                <a16:creationId xmlns:a16="http://schemas.microsoft.com/office/drawing/2014/main" id="{ED735AFE-C6B4-D973-F097-F9314B27678D}"/>
-              </a:ext>
-            </a:extLst>
-          </p:cNvPr>
-          <p:cNvSpPr txBox="1"/>
-          <p:nvPr/>
-        </p:nvSpPr>
-        <p:spPr>
-          <a:xfrm>
-            <a:off x="10581704" y="3778299"/>
-            <a:ext cx="808235" cy="369332"/>
-          </a:xfrm>
-          <a:prstGeom prst="rect">
-            <a:avLst/>
-          </a:prstGeom>
-          <a:noFill/>
-        </p:spPr>
-        <p:txBody>
-          <a:bodyPr wrap="none" rtlCol="0">
-            <a:spAutoFit/>
-          </a:bodyPr>
-          <a:lstStyle/>
-          <a:p>
-            <a:r>
-              <a:rPr lang="en-US" dirty="0">
-                <a:solidFill>
-                  <a:schemeClr val="bg1"/>
-                </a:solidFill>
-              </a:rPr>
-              <a:t>Adelie</a:t>
-            </a:r>
-          </a:p>
-        </p:txBody>
-      </p:sp>
-      <p:sp>
-        <p:nvSpPr>
-          <p:cNvPr id="15" name="TextBox 14">
-            <a:extLst>
-              <a:ext uri="{FF2B5EF4-FFF2-40B4-BE49-F238E27FC236}">
-                <a16:creationId xmlns:a16="http://schemas.microsoft.com/office/drawing/2014/main" id="{567C8D36-626F-6164-9933-545E068DE295}"/>
-              </a:ext>
-            </a:extLst>
-          </p:cNvPr>
-          <p:cNvSpPr txBox="1"/>
-          <p:nvPr/>
-        </p:nvSpPr>
-        <p:spPr>
-          <a:xfrm>
-            <a:off x="6452389" y="3986854"/>
-            <a:ext cx="1739579" cy="369332"/>
-          </a:xfrm>
-          <a:prstGeom prst="rect">
-            <a:avLst/>
-          </a:prstGeom>
-          <a:noFill/>
-        </p:spPr>
-        <p:txBody>
-          <a:bodyPr wrap="none" rtlCol="0">
-            <a:spAutoFit/>
-          </a:bodyPr>
-          <a:lstStyle/>
-          <a:p>
-            <a:r>
-              <a:rPr lang="en-US" dirty="0"/>
-              <a:t>Body mass &gt; 18</a:t>
-            </a:r>
-          </a:p>
-        </p:txBody>
-      </p:sp>
-      <p:sp>
-        <p:nvSpPr>
-          <p:cNvPr id="20" name="Content Placeholder 2">
-            <a:extLst>
-              <a:ext uri="{FF2B5EF4-FFF2-40B4-BE49-F238E27FC236}">
-                <a16:creationId xmlns:a16="http://schemas.microsoft.com/office/drawing/2014/main" id="{54BC2618-5F67-7389-94CF-3F7479801403}"/>
-              </a:ext>
-            </a:extLst>
-          </p:cNvPr>
-          <p:cNvSpPr txBox="1">
-            <a:spLocks/>
-          </p:cNvSpPr>
-          <p:nvPr/>
-        </p:nvSpPr>
-        <p:spPr>
-          <a:xfrm>
-            <a:off x="838200" y="1582551"/>
-            <a:ext cx="6427484" cy="1704659"/>
-          </a:xfrm>
-          <a:prstGeom prst="rect">
-            <a:avLst/>
-          </a:prstGeom>
-        </p:spPr>
-        <p:txBody>
-          <a:bodyPr vert="horz" lIns="91440" tIns="45720" rIns="91440" bIns="45720" rtlCol="0">
-            <a:normAutofit fontScale="92500" lnSpcReduction="20000"/>
-          </a:bodyPr>
-          <a:lstStyle>
-            <a:lvl1pPr marL="228600" indent="-228600" algn="l" defTabSz="914400" rtl="0" eaLnBrk="1" latinLnBrk="0" hangingPunct="1">
-              <a:lnSpc>
-                <a:spcPct val="90000"/>
-              </a:lnSpc>
-              <a:spcBef>
-                <a:spcPts val="1000"/>
-              </a:spcBef>
-              <a:buFont typeface="Arial" panose="020B0604020202020204" pitchFamily="34" charset="0"/>
-              <a:buChar char="•"/>
-              <a:defRPr sz="2800" kern="1200">
-                <a:solidFill>
-                  <a:schemeClr val="tx1"/>
-                </a:solidFill>
-                <a:latin typeface="+mn-lt"/>
-                <a:ea typeface="+mn-ea"/>
-                <a:cs typeface="+mn-cs"/>
-              </a:defRPr>
-            </a:lvl1pPr>
-            <a:lvl2pPr marL="685800" indent="-228600" algn="l" defTabSz="914400" rtl="0" eaLnBrk="1" latinLnBrk="0" hangingPunct="1">
-              <a:lnSpc>
-                <a:spcPct val="90000"/>
-              </a:lnSpc>
-              <a:spcBef>
-                <a:spcPts val="500"/>
-              </a:spcBef>
-              <a:buFont typeface="Arial" panose="020B0604020202020204" pitchFamily="34" charset="0"/>
-              <a:buChar char="•"/>
-              <a:defRPr sz="2400" kern="1200">
-                <a:solidFill>
-                  <a:schemeClr val="tx1"/>
-                </a:solidFill>
-                <a:latin typeface="+mn-lt"/>
-                <a:ea typeface="+mn-ea"/>
-                <a:cs typeface="+mn-cs"/>
-              </a:defRPr>
-            </a:lvl2pPr>
-            <a:lvl3pPr marL="1143000" indent="-228600" algn="l" defTabSz="914400" rtl="0" eaLnBrk="1" latinLnBrk="0" hangingPunct="1">
-              <a:lnSpc>
-                <a:spcPct val="90000"/>
-              </a:lnSpc>
-              <a:spcBef>
-                <a:spcPts val="500"/>
-              </a:spcBef>
-              <a:buFont typeface="Arial" panose="020B0604020202020204" pitchFamily="34" charset="0"/>
-              <a:buChar char="•"/>
-              <a:defRPr sz="2000" kern="1200">
-                <a:solidFill>
-                  <a:schemeClr val="tx1"/>
-                </a:solidFill>
-                <a:latin typeface="+mn-lt"/>
-                <a:ea typeface="+mn-ea"/>
-                <a:cs typeface="+mn-cs"/>
-              </a:defRPr>
-            </a:lvl3pPr>
-            <a:lvl4pPr marL="1600200" indent="-228600" algn="l" defTabSz="914400" rtl="0" eaLnBrk="1" latinLnBrk="0" hangingPunct="1">
-              <a:lnSpc>
-                <a:spcPct val="90000"/>
-              </a:lnSpc>
-              <a:spcBef>
-                <a:spcPts val="500"/>
-              </a:spcBef>
-              <a:buFont typeface="Arial" panose="020B0604020202020204" pitchFamily="34" charset="0"/>
-              <a:buChar char="•"/>
-              <a:defRPr sz="1800" kern="1200">
-                <a:solidFill>
-                  <a:schemeClr val="tx1"/>
-                </a:solidFill>
-                <a:latin typeface="+mn-lt"/>
-                <a:ea typeface="+mn-ea"/>
-                <a:cs typeface="+mn-cs"/>
-              </a:defRPr>
-            </a:lvl4pPr>
-            <a:lvl5pPr marL="2057400" indent="-228600" algn="l" defTabSz="914400" rtl="0" eaLnBrk="1" latinLnBrk="0" hangingPunct="1">
-              <a:lnSpc>
-                <a:spcPct val="90000"/>
-              </a:lnSpc>
-              <a:spcBef>
-                <a:spcPts val="500"/>
-              </a:spcBef>
-              <a:buFont typeface="Arial" panose="020B0604020202020204" pitchFamily="34" charset="0"/>
-              <a:buChar char="•"/>
-              <a:defRPr sz="1800" kern="1200">
-                <a:solidFill>
-                  <a:schemeClr val="tx1"/>
-                </a:solidFill>
-                <a:latin typeface="+mn-lt"/>
-                <a:ea typeface="+mn-ea"/>
-                <a:cs typeface="+mn-cs"/>
-              </a:defRPr>
-            </a:lvl5pPr>
-            <a:lvl6pPr marL="2514600" indent="-228600" algn="l" defTabSz="914400" rtl="0" eaLnBrk="1" latinLnBrk="0" hangingPunct="1">
-              <a:lnSpc>
-                <a:spcPct val="90000"/>
-              </a:lnSpc>
-              <a:spcBef>
-                <a:spcPts val="500"/>
-              </a:spcBef>
-              <a:buFont typeface="Arial" panose="020B0604020202020204" pitchFamily="34" charset="0"/>
-              <a:buChar char="•"/>
-              <a:defRPr sz="1800" kern="1200">
-                <a:solidFill>
-                  <a:schemeClr val="tx1"/>
-                </a:solidFill>
-                <a:latin typeface="+mn-lt"/>
-                <a:ea typeface="+mn-ea"/>
-                <a:cs typeface="+mn-cs"/>
-              </a:defRPr>
-            </a:lvl6pPr>
-            <a:lvl7pPr marL="2971800" indent="-228600" algn="l" defTabSz="914400" rtl="0" eaLnBrk="1" latinLnBrk="0" hangingPunct="1">
-              <a:lnSpc>
-                <a:spcPct val="90000"/>
-              </a:lnSpc>
-              <a:spcBef>
-                <a:spcPts val="500"/>
-              </a:spcBef>
-              <a:buFont typeface="Arial" panose="020B0604020202020204" pitchFamily="34" charset="0"/>
-              <a:buChar char="•"/>
-              <a:defRPr sz="1800" kern="1200">
-                <a:solidFill>
-                  <a:schemeClr val="tx1"/>
-                </a:solidFill>
-                <a:latin typeface="+mn-lt"/>
-                <a:ea typeface="+mn-ea"/>
-                <a:cs typeface="+mn-cs"/>
-              </a:defRPr>
-            </a:lvl7pPr>
-            <a:lvl8pPr marL="3429000" indent="-228600" algn="l" defTabSz="914400" rtl="0" eaLnBrk="1" latinLnBrk="0" hangingPunct="1">
-              <a:lnSpc>
-                <a:spcPct val="90000"/>
-              </a:lnSpc>
-              <a:spcBef>
-                <a:spcPts val="500"/>
-              </a:spcBef>
-              <a:buFont typeface="Arial" panose="020B0604020202020204" pitchFamily="34" charset="0"/>
-              <a:buChar char="•"/>
-              <a:defRPr sz="1800" kern="1200">
-                <a:solidFill>
-                  <a:schemeClr val="tx1"/>
-                </a:solidFill>
-                <a:latin typeface="+mn-lt"/>
-                <a:ea typeface="+mn-ea"/>
-                <a:cs typeface="+mn-cs"/>
-              </a:defRPr>
-            </a:lvl8pPr>
-            <a:lvl9pPr marL="3886200" indent="-228600" algn="l" defTabSz="914400" rtl="0" eaLnBrk="1" latinLnBrk="0" hangingPunct="1">
-              <a:lnSpc>
-                <a:spcPct val="90000"/>
-              </a:lnSpc>
-              <a:spcBef>
-                <a:spcPts val="500"/>
-              </a:spcBef>
-              <a:buFont typeface="Arial" panose="020B0604020202020204" pitchFamily="34" charset="0"/>
-              <a:buChar char="•"/>
-              <a:defRPr sz="1800" kern="1200">
-                <a:solidFill>
-                  <a:schemeClr val="tx1"/>
-                </a:solidFill>
-                <a:latin typeface="+mn-lt"/>
-                <a:ea typeface="+mn-ea"/>
-                <a:cs typeface="+mn-cs"/>
-              </a:defRPr>
-            </a:lvl9pPr>
-          </a:lstStyle>
-          <a:p>
-            <a:pPr marL="0" indent="0">
-              <a:buFont typeface="Arial" panose="020B0604020202020204" pitchFamily="34" charset="0"/>
-              <a:buNone/>
-            </a:pPr>
-            <a:r>
-              <a:rPr lang="en-US" dirty="0"/>
-              <a:t>Until a stopping condition is met</a:t>
-            </a:r>
-          </a:p>
-          <a:p>
-            <a:pPr marL="0" indent="0">
-              <a:buFont typeface="Arial" panose="020B0604020202020204" pitchFamily="34" charset="0"/>
-              <a:buNone/>
-            </a:pPr>
-            <a:r>
-              <a:rPr lang="en-US" dirty="0"/>
-              <a:t>   Evaluate best split for each predictor</a:t>
-            </a:r>
-          </a:p>
-          <a:p>
-            <a:pPr marL="0" indent="0">
-              <a:buFont typeface="Arial" panose="020B0604020202020204" pitchFamily="34" charset="0"/>
-              <a:buNone/>
-            </a:pPr>
-            <a:r>
-              <a:rPr lang="en-US" dirty="0"/>
-              <a:t>   Select the optimal split</a:t>
-            </a:r>
-          </a:p>
-          <a:p>
-            <a:pPr marL="0" indent="0">
-              <a:buFont typeface="Arial" panose="020B0604020202020204" pitchFamily="34" charset="0"/>
-              <a:buNone/>
-            </a:pPr>
-            <a:r>
-              <a:rPr lang="en-US" dirty="0"/>
-              <a:t>   Create new nodes</a:t>
-            </a:r>
-          </a:p>
-          <a:p>
-            <a:pPr marL="0" indent="0">
-              <a:buFont typeface="Arial" panose="020B0604020202020204" pitchFamily="34" charset="0"/>
-              <a:buNone/>
-            </a:pPr>
-            <a:endParaRPr lang="en-US" dirty="0"/>
-          </a:p>
-          <a:p>
-            <a:pPr marL="0" indent="0">
-              <a:buFont typeface="Arial" panose="020B0604020202020204" pitchFamily="34" charset="0"/>
-              <a:buNone/>
-            </a:pPr>
-            <a:endParaRPr lang="en-US" dirty="0"/>
-          </a:p>
-        </p:txBody>
-      </p:sp>
-    </p:spTree>
-    <p:extLst>
-      <p:ext uri="{BB962C8B-B14F-4D97-AF65-F5344CB8AC3E}">
-        <p14:creationId xmlns:p14="http://schemas.microsoft.com/office/powerpoint/2010/main" val="1086180660"/>
-      </p:ext>
-    </p:extLst>
-  </p:cSld>
-  <p:clrMapOvr>
-    <a:masterClrMapping/>
-  </p:clrMapOvr>
-</p:sld>
-</file>
-
-<file path=ppt/slides/slide52.xml><?xml version="1.0" encoding="utf-8"?>
-<p:sld xmlns:a="http://schemas.openxmlformats.org/drawingml/2006/main" xmlns:r="http://schemas.openxmlformats.org/officeDocument/2006/relationships" xmlns:p="http://schemas.openxmlformats.org/presentationml/2006/main">
-  <p:cSld>
-    <p:spTree>
-      <p:nvGrpSpPr>
-        <p:cNvPr id="1" name="">
-          <a:extLst>
-            <a:ext uri="{FF2B5EF4-FFF2-40B4-BE49-F238E27FC236}">
-              <a16:creationId xmlns:a16="http://schemas.microsoft.com/office/drawing/2014/main" id="{42B1CA57-BD9D-2463-2D86-72B3EA02C55D}"/>
-            </a:ext>
-          </a:extLst>
-        </p:cNvPr>
-        <p:cNvGrpSpPr/>
-        <p:nvPr/>
-      </p:nvGrpSpPr>
-      <p:grpSpPr>
-        <a:xfrm>
-          <a:off x="0" y="0"/>
-          <a:ext cx="0" cy="0"/>
-          <a:chOff x="0" y="0"/>
-          <a:chExt cx="0" cy="0"/>
-        </a:xfrm>
-      </p:grpSpPr>
-      <p:sp>
-        <p:nvSpPr>
-          <p:cNvPr id="2" name="Title 1">
-            <a:extLst>
-              <a:ext uri="{FF2B5EF4-FFF2-40B4-BE49-F238E27FC236}">
-                <a16:creationId xmlns:a16="http://schemas.microsoft.com/office/drawing/2014/main" id="{0C7EAB02-9BAC-5B7F-6F52-F72109841031}"/>
-              </a:ext>
-            </a:extLst>
-          </p:cNvPr>
-          <p:cNvSpPr>
-            <a:spLocks noGrp="1"/>
-          </p:cNvSpPr>
-          <p:nvPr>
-            <p:ph type="title"/>
-          </p:nvPr>
-        </p:nvSpPr>
-        <p:spPr/>
-        <p:txBody>
-          <a:bodyPr/>
-          <a:lstStyle/>
-          <a:p>
-            <a:r>
-              <a:rPr lang="en-US" dirty="0"/>
-              <a:t>Classification and Regression Trees (CART)</a:t>
-            </a:r>
-          </a:p>
-        </p:txBody>
-      </p:sp>
-      <p:grpSp>
-        <p:nvGrpSpPr>
-          <p:cNvPr id="29" name="Group 28">
-            <a:extLst>
-              <a:ext uri="{FF2B5EF4-FFF2-40B4-BE49-F238E27FC236}">
-                <a16:creationId xmlns:a16="http://schemas.microsoft.com/office/drawing/2014/main" id="{525B1A5C-5A18-097D-CFBB-A3DDACCADE05}"/>
-              </a:ext>
-            </a:extLst>
-          </p:cNvPr>
-          <p:cNvGrpSpPr/>
-          <p:nvPr/>
-        </p:nvGrpSpPr>
-        <p:grpSpPr>
-          <a:xfrm>
-            <a:off x="5074276" y="2369713"/>
-            <a:ext cx="6539891" cy="2736153"/>
-            <a:chOff x="253576" y="2125014"/>
-            <a:chExt cx="4179418" cy="2736153"/>
-          </a:xfrm>
-        </p:grpSpPr>
-        <p:sp>
-          <p:nvSpPr>
-            <p:cNvPr id="6" name="Oval 5">
-              <a:extLst>
-                <a:ext uri="{FF2B5EF4-FFF2-40B4-BE49-F238E27FC236}">
-                  <a16:creationId xmlns:a16="http://schemas.microsoft.com/office/drawing/2014/main" id="{C6720257-D382-E371-43B9-884F99E724DE}"/>
-                </a:ext>
-              </a:extLst>
-            </p:cNvPr>
-            <p:cNvSpPr/>
-            <p:nvPr/>
-          </p:nvSpPr>
-          <p:spPr>
-            <a:xfrm>
-              <a:off x="2410784" y="2125014"/>
-              <a:ext cx="821813" cy="819337"/>
-            </a:xfrm>
-            <a:prstGeom prst="ellipse">
-              <a:avLst/>
-            </a:prstGeom>
-          </p:spPr>
-          <p:style>
-            <a:lnRef idx="2">
-              <a:schemeClr val="accent1">
-                <a:shade val="15000"/>
-              </a:schemeClr>
-            </a:lnRef>
-            <a:fillRef idx="1">
-              <a:schemeClr val="accent1"/>
-            </a:fillRef>
-            <a:effectRef idx="0">
-              <a:schemeClr val="accent1"/>
-            </a:effectRef>
-            <a:fontRef idx="minor">
-              <a:schemeClr val="lt1"/>
-            </a:fontRef>
-          </p:style>
-          <p:txBody>
-            <a:bodyPr rtlCol="0" anchor="ctr"/>
-            <a:lstStyle/>
-            <a:p>
-              <a:pPr algn="ctr"/>
-              <a:endParaRPr lang="en-US"/>
-            </a:p>
-          </p:txBody>
-        </p:sp>
-        <p:sp>
-          <p:nvSpPr>
-            <p:cNvPr id="7" name="Oval 6">
-              <a:extLst>
-                <a:ext uri="{FF2B5EF4-FFF2-40B4-BE49-F238E27FC236}">
-                  <a16:creationId xmlns:a16="http://schemas.microsoft.com/office/drawing/2014/main" id="{278D42EA-AA92-4DD3-5BC8-DB5D17ACC3E1}"/>
-                </a:ext>
-              </a:extLst>
-            </p:cNvPr>
-            <p:cNvSpPr/>
-            <p:nvPr/>
-          </p:nvSpPr>
-          <p:spPr>
-            <a:xfrm>
-              <a:off x="1291291" y="3034954"/>
-              <a:ext cx="821813" cy="819337"/>
-            </a:xfrm>
-            <a:prstGeom prst="ellipse">
-              <a:avLst/>
-            </a:prstGeom>
-          </p:spPr>
-          <p:style>
-            <a:lnRef idx="2">
-              <a:schemeClr val="accent1">
-                <a:shade val="15000"/>
-              </a:schemeClr>
-            </a:lnRef>
-            <a:fillRef idx="1">
-              <a:schemeClr val="accent1"/>
-            </a:fillRef>
-            <a:effectRef idx="0">
-              <a:schemeClr val="accent1"/>
-            </a:effectRef>
-            <a:fontRef idx="minor">
-              <a:schemeClr val="lt1"/>
-            </a:fontRef>
-          </p:style>
-          <p:txBody>
-            <a:bodyPr rtlCol="0" anchor="ctr"/>
-            <a:lstStyle/>
-            <a:p>
-              <a:pPr algn="ctr"/>
-              <a:endParaRPr lang="en-US"/>
-            </a:p>
-          </p:txBody>
-        </p:sp>
-        <p:sp>
-          <p:nvSpPr>
-            <p:cNvPr id="8" name="Oval 7">
-              <a:extLst>
-                <a:ext uri="{FF2B5EF4-FFF2-40B4-BE49-F238E27FC236}">
-                  <a16:creationId xmlns:a16="http://schemas.microsoft.com/office/drawing/2014/main" id="{4FCC8956-0B2F-C30C-9FEB-48473099E99D}"/>
-                </a:ext>
-              </a:extLst>
-            </p:cNvPr>
-            <p:cNvSpPr/>
-            <p:nvPr/>
-          </p:nvSpPr>
-          <p:spPr>
-            <a:xfrm>
-              <a:off x="3611181" y="3323259"/>
-              <a:ext cx="821813" cy="819337"/>
-            </a:xfrm>
-            <a:prstGeom prst="ellipse">
-              <a:avLst/>
-            </a:prstGeom>
-          </p:spPr>
-          <p:style>
-            <a:lnRef idx="2">
-              <a:schemeClr val="accent1">
-                <a:shade val="15000"/>
-              </a:schemeClr>
-            </a:lnRef>
-            <a:fillRef idx="1">
-              <a:schemeClr val="accent1"/>
-            </a:fillRef>
-            <a:effectRef idx="0">
-              <a:schemeClr val="accent1"/>
-            </a:effectRef>
-            <a:fontRef idx="minor">
-              <a:schemeClr val="lt1"/>
-            </a:fontRef>
-          </p:style>
-          <p:txBody>
-            <a:bodyPr rtlCol="0" anchor="ctr"/>
-            <a:lstStyle/>
-            <a:p>
-              <a:pPr algn="ctr"/>
-              <a:endParaRPr lang="en-US"/>
-            </a:p>
-          </p:txBody>
-        </p:sp>
-        <p:sp>
-          <p:nvSpPr>
-            <p:cNvPr id="9" name="Oval 8">
-              <a:extLst>
-                <a:ext uri="{FF2B5EF4-FFF2-40B4-BE49-F238E27FC236}">
-                  <a16:creationId xmlns:a16="http://schemas.microsoft.com/office/drawing/2014/main" id="{2658B678-C7D9-9EEE-64EA-CD2CFFF856CA}"/>
-                </a:ext>
-              </a:extLst>
-            </p:cNvPr>
-            <p:cNvSpPr/>
-            <p:nvPr/>
-          </p:nvSpPr>
-          <p:spPr>
-            <a:xfrm>
-              <a:off x="253576" y="4041829"/>
-              <a:ext cx="821813" cy="819337"/>
-            </a:xfrm>
-            <a:prstGeom prst="ellipse">
-              <a:avLst/>
-            </a:prstGeom>
-          </p:spPr>
-          <p:style>
-            <a:lnRef idx="2">
-              <a:schemeClr val="accent1">
-                <a:shade val="15000"/>
-              </a:schemeClr>
-            </a:lnRef>
-            <a:fillRef idx="1">
-              <a:schemeClr val="accent1"/>
-            </a:fillRef>
-            <a:effectRef idx="0">
-              <a:schemeClr val="accent1"/>
-            </a:effectRef>
-            <a:fontRef idx="minor">
-              <a:schemeClr val="lt1"/>
-            </a:fontRef>
-          </p:style>
-          <p:txBody>
-            <a:bodyPr rtlCol="0" anchor="ctr"/>
-            <a:lstStyle/>
-            <a:p>
-              <a:pPr algn="ctr"/>
-              <a:endParaRPr lang="en-US"/>
-            </a:p>
-          </p:txBody>
-        </p:sp>
-        <p:sp>
-          <p:nvSpPr>
-            <p:cNvPr id="10" name="Oval 9">
-              <a:extLst>
-                <a:ext uri="{FF2B5EF4-FFF2-40B4-BE49-F238E27FC236}">
-                  <a16:creationId xmlns:a16="http://schemas.microsoft.com/office/drawing/2014/main" id="{71CEF44A-F3F6-A3B6-D5D5-666FFDF205C4}"/>
-                </a:ext>
-              </a:extLst>
-            </p:cNvPr>
-            <p:cNvSpPr/>
-            <p:nvPr/>
-          </p:nvSpPr>
-          <p:spPr>
-            <a:xfrm>
-              <a:off x="2296413" y="4041830"/>
-              <a:ext cx="821813" cy="819337"/>
-            </a:xfrm>
-            <a:prstGeom prst="ellipse">
-              <a:avLst/>
-            </a:prstGeom>
-          </p:spPr>
-          <p:style>
-            <a:lnRef idx="2">
-              <a:schemeClr val="accent1">
-                <a:shade val="15000"/>
-              </a:schemeClr>
-            </a:lnRef>
-            <a:fillRef idx="1">
-              <a:schemeClr val="accent1"/>
-            </a:fillRef>
-            <a:effectRef idx="0">
-              <a:schemeClr val="accent1"/>
-            </a:effectRef>
-            <a:fontRef idx="minor">
-              <a:schemeClr val="lt1"/>
-            </a:fontRef>
-          </p:style>
-          <p:txBody>
-            <a:bodyPr rtlCol="0" anchor="ctr"/>
-            <a:lstStyle/>
-            <a:p>
-              <a:pPr algn="ctr"/>
-              <a:endParaRPr lang="en-US"/>
-            </a:p>
-          </p:txBody>
-        </p:sp>
-        <p:cxnSp>
-          <p:nvCxnSpPr>
-            <p:cNvPr id="11" name="Straight Connector 10">
-              <a:extLst>
-                <a:ext uri="{FF2B5EF4-FFF2-40B4-BE49-F238E27FC236}">
-                  <a16:creationId xmlns:a16="http://schemas.microsoft.com/office/drawing/2014/main" id="{7BBFFA25-E75F-215E-89DA-33B1F5649F31}"/>
-                </a:ext>
-              </a:extLst>
-            </p:cNvPr>
-            <p:cNvCxnSpPr>
-              <a:stCxn id="6" idx="5"/>
-              <a:endCxn id="8" idx="1"/>
-            </p:cNvCxnSpPr>
-            <p:nvPr/>
-          </p:nvCxnSpPr>
-          <p:spPr>
-            <a:xfrm>
-              <a:off x="3112245" y="2824362"/>
-              <a:ext cx="619288" cy="618886"/>
-            </a:xfrm>
-            <a:prstGeom prst="line">
-              <a:avLst/>
-            </a:prstGeom>
-          </p:spPr>
-          <p:style>
-            <a:lnRef idx="2">
-              <a:schemeClr val="accent1"/>
-            </a:lnRef>
-            <a:fillRef idx="0">
-              <a:schemeClr val="accent1"/>
-            </a:fillRef>
-            <a:effectRef idx="1">
-              <a:schemeClr val="accent1"/>
-            </a:effectRef>
-            <a:fontRef idx="minor">
-              <a:schemeClr val="tx1"/>
-            </a:fontRef>
-          </p:style>
-        </p:cxnSp>
-        <p:cxnSp>
-          <p:nvCxnSpPr>
-            <p:cNvPr id="12" name="Straight Connector 11">
-              <a:extLst>
-                <a:ext uri="{FF2B5EF4-FFF2-40B4-BE49-F238E27FC236}">
-                  <a16:creationId xmlns:a16="http://schemas.microsoft.com/office/drawing/2014/main" id="{90B84E95-BECA-8B10-F4FA-E1612A9EDB72}"/>
-                </a:ext>
-              </a:extLst>
-            </p:cNvPr>
-            <p:cNvCxnSpPr>
-              <a:cxnSpLocks/>
-              <a:stCxn id="6" idx="3"/>
-              <a:endCxn id="7" idx="7"/>
-            </p:cNvCxnSpPr>
-            <p:nvPr/>
-          </p:nvCxnSpPr>
-          <p:spPr>
-            <a:xfrm flipH="1">
-              <a:off x="1992752" y="2824362"/>
-              <a:ext cx="538384" cy="330581"/>
-            </a:xfrm>
-            <a:prstGeom prst="line">
-              <a:avLst/>
-            </a:prstGeom>
-          </p:spPr>
-          <p:style>
-            <a:lnRef idx="2">
-              <a:schemeClr val="accent1"/>
-            </a:lnRef>
-            <a:fillRef idx="0">
-              <a:schemeClr val="accent1"/>
-            </a:fillRef>
-            <a:effectRef idx="1">
-              <a:schemeClr val="accent1"/>
-            </a:effectRef>
-            <a:fontRef idx="minor">
-              <a:schemeClr val="tx1"/>
-            </a:fontRef>
-          </p:style>
-        </p:cxnSp>
-        <p:cxnSp>
-          <p:nvCxnSpPr>
-            <p:cNvPr id="13" name="Straight Connector 12">
-              <a:extLst>
-                <a:ext uri="{FF2B5EF4-FFF2-40B4-BE49-F238E27FC236}">
-                  <a16:creationId xmlns:a16="http://schemas.microsoft.com/office/drawing/2014/main" id="{25CA10E0-8AFC-6FA5-2A32-8066D1E5467F}"/>
-                </a:ext>
-              </a:extLst>
-            </p:cNvPr>
-            <p:cNvCxnSpPr>
-              <a:cxnSpLocks/>
-              <a:stCxn id="7" idx="3"/>
-              <a:endCxn id="9" idx="7"/>
-            </p:cNvCxnSpPr>
-            <p:nvPr/>
-          </p:nvCxnSpPr>
-          <p:spPr>
-            <a:xfrm flipH="1">
-              <a:off x="955037" y="3734302"/>
-              <a:ext cx="456606" cy="427516"/>
-            </a:xfrm>
-            <a:prstGeom prst="line">
-              <a:avLst/>
-            </a:prstGeom>
-          </p:spPr>
-          <p:style>
-            <a:lnRef idx="2">
-              <a:schemeClr val="accent1"/>
-            </a:lnRef>
-            <a:fillRef idx="0">
-              <a:schemeClr val="accent1"/>
-            </a:fillRef>
-            <a:effectRef idx="1">
-              <a:schemeClr val="accent1"/>
-            </a:effectRef>
-            <a:fontRef idx="minor">
-              <a:schemeClr val="tx1"/>
-            </a:fontRef>
-          </p:style>
-        </p:cxnSp>
-        <p:cxnSp>
-          <p:nvCxnSpPr>
-            <p:cNvPr id="14" name="Straight Connector 13">
-              <a:extLst>
-                <a:ext uri="{FF2B5EF4-FFF2-40B4-BE49-F238E27FC236}">
-                  <a16:creationId xmlns:a16="http://schemas.microsoft.com/office/drawing/2014/main" id="{606EF836-723E-C61B-6915-B1E6060EBAE0}"/>
-                </a:ext>
-              </a:extLst>
-            </p:cNvPr>
-            <p:cNvCxnSpPr>
-              <a:cxnSpLocks/>
-              <a:stCxn id="7" idx="5"/>
-              <a:endCxn id="10" idx="1"/>
-            </p:cNvCxnSpPr>
-            <p:nvPr/>
-          </p:nvCxnSpPr>
-          <p:spPr>
-            <a:xfrm>
-              <a:off x="1992752" y="3734302"/>
-              <a:ext cx="424013" cy="427517"/>
-            </a:xfrm>
-            <a:prstGeom prst="line">
-              <a:avLst/>
-            </a:prstGeom>
-          </p:spPr>
-          <p:style>
-            <a:lnRef idx="2">
-              <a:schemeClr val="accent1"/>
-            </a:lnRef>
-            <a:fillRef idx="0">
-              <a:schemeClr val="accent1"/>
-            </a:fillRef>
-            <a:effectRef idx="1">
-              <a:schemeClr val="accent1"/>
-            </a:effectRef>
-            <a:fontRef idx="minor">
-              <a:schemeClr val="tx1"/>
-            </a:fontRef>
-          </p:style>
-        </p:cxnSp>
-      </p:grpSp>
-      <p:graphicFrame>
-        <p:nvGraphicFramePr>
-          <p:cNvPr id="3" name="Table 2">
-            <a:extLst>
-              <a:ext uri="{FF2B5EF4-FFF2-40B4-BE49-F238E27FC236}">
-                <a16:creationId xmlns:a16="http://schemas.microsoft.com/office/drawing/2014/main" id="{F2363AA1-4C19-D57A-59E5-96585262A7BF}"/>
-              </a:ext>
-            </a:extLst>
-          </p:cNvPr>
-          <p:cNvGraphicFramePr>
-            <a:graphicFrameLocks noGrp="1"/>
-          </p:cNvGraphicFramePr>
-          <p:nvPr/>
-        </p:nvGraphicFramePr>
-        <p:xfrm>
-          <a:off x="577833" y="3391084"/>
-          <a:ext cx="3762348" cy="3009715"/>
-        </p:xfrm>
-        <a:graphic>
-          <a:graphicData uri="http://schemas.openxmlformats.org/drawingml/2006/table">
-            <a:tbl>
-              <a:tblPr firstRow="1" bandRow="1">
-                <a:tableStyleId>{5C22544A-7EE6-4342-B048-85BDC9FD1C3A}</a:tableStyleId>
-              </a:tblPr>
-              <a:tblGrid>
-                <a:gridCol w="1254116">
-                  <a:extLst>
-                    <a:ext uri="{9D8B030D-6E8A-4147-A177-3AD203B41FA5}">
-                      <a16:colId xmlns:a16="http://schemas.microsoft.com/office/drawing/2014/main" val="3086874793"/>
-                    </a:ext>
-                  </a:extLst>
-                </a:gridCol>
-                <a:gridCol w="1254116">
-                  <a:extLst>
-                    <a:ext uri="{9D8B030D-6E8A-4147-A177-3AD203B41FA5}">
-                      <a16:colId xmlns:a16="http://schemas.microsoft.com/office/drawing/2014/main" val="725989201"/>
-                    </a:ext>
-                  </a:extLst>
-                </a:gridCol>
-                <a:gridCol w="1254116">
-                  <a:extLst>
-                    <a:ext uri="{9D8B030D-6E8A-4147-A177-3AD203B41FA5}">
-                      <a16:colId xmlns:a16="http://schemas.microsoft.com/office/drawing/2014/main" val="1915941172"/>
-                    </a:ext>
-                  </a:extLst>
-                </a:gridCol>
-              </a:tblGrid>
-              <a:tr h="907235">
-                <a:tc>
-                  <a:txBody>
-                    <a:bodyPr/>
-                    <a:lstStyle/>
-                    <a:p>
-                      <a:r>
-                        <a:rPr lang="en-US" dirty="0"/>
-                        <a:t>Penguin species</a:t>
-                      </a:r>
-                    </a:p>
-                  </a:txBody>
-                  <a:tcPr/>
-                </a:tc>
-                <a:tc>
-                  <a:txBody>
-                    <a:bodyPr/>
-                    <a:lstStyle/>
-                    <a:p>
-                      <a:r>
-                        <a:rPr lang="en-US" dirty="0"/>
-                        <a:t>Flipper length</a:t>
-                      </a:r>
-                    </a:p>
-                  </a:txBody>
-                  <a:tcPr/>
-                </a:tc>
-                <a:tc>
-                  <a:txBody>
-                    <a:bodyPr/>
-                    <a:lstStyle/>
-                    <a:p>
-                      <a:r>
-                        <a:rPr lang="en-US" dirty="0"/>
-                        <a:t>Body mass</a:t>
-                      </a:r>
-                    </a:p>
-                  </a:txBody>
-                  <a:tcPr/>
-                </a:tc>
-                <a:extLst>
-                  <a:ext uri="{0D108BD9-81ED-4DB2-BD59-A6C34878D82A}">
-                    <a16:rowId xmlns:a16="http://schemas.microsoft.com/office/drawing/2014/main" val="207539063"/>
-                  </a:ext>
-                </a:extLst>
-              </a:tr>
-              <a:tr h="525620">
-                <a:tc>
-                  <a:txBody>
-                    <a:bodyPr/>
-                    <a:lstStyle/>
-                    <a:p>
-                      <a:r>
-                        <a:rPr lang="en-US" dirty="0"/>
-                        <a:t>Adelie</a:t>
-                      </a:r>
-                    </a:p>
-                  </a:txBody>
-                  <a:tcPr/>
-                </a:tc>
-                <a:tc>
-                  <a:txBody>
-                    <a:bodyPr/>
-                    <a:lstStyle/>
-                    <a:p>
-                      <a:r>
-                        <a:rPr lang="en-US" dirty="0"/>
-                        <a:t>90</a:t>
-                      </a:r>
-                    </a:p>
-                  </a:txBody>
-                  <a:tcPr/>
-                </a:tc>
-                <a:tc>
-                  <a:txBody>
-                    <a:bodyPr/>
-                    <a:lstStyle/>
-                    <a:p>
-                      <a:r>
-                        <a:rPr lang="en-US" dirty="0"/>
-                        <a:t>80</a:t>
-                      </a:r>
-                    </a:p>
-                  </a:txBody>
-                  <a:tcPr/>
-                </a:tc>
-                <a:extLst>
-                  <a:ext uri="{0D108BD9-81ED-4DB2-BD59-A6C34878D82A}">
-                    <a16:rowId xmlns:a16="http://schemas.microsoft.com/office/drawing/2014/main" val="350663204"/>
-                  </a:ext>
-                </a:extLst>
-              </a:tr>
-              <a:tr h="525620">
-                <a:tc>
-                  <a:txBody>
-                    <a:bodyPr/>
-                    <a:lstStyle/>
-                    <a:p>
-                      <a:r>
-                        <a:rPr lang="en-US" dirty="0"/>
-                        <a:t>Gentoo</a:t>
-                      </a:r>
-                    </a:p>
-                  </a:txBody>
-                  <a:tcPr/>
-                </a:tc>
-                <a:tc>
-                  <a:txBody>
-                    <a:bodyPr/>
-                    <a:lstStyle/>
-                    <a:p>
-                      <a:r>
-                        <a:rPr lang="en-US" dirty="0"/>
-                        <a:t>75</a:t>
-                      </a:r>
-                    </a:p>
-                  </a:txBody>
-                  <a:tcPr/>
-                </a:tc>
-                <a:tc>
-                  <a:txBody>
-                    <a:bodyPr/>
-                    <a:lstStyle/>
-                    <a:p>
-                      <a:r>
-                        <a:rPr lang="en-US" dirty="0"/>
-                        <a:t>20</a:t>
-                      </a:r>
-                    </a:p>
-                  </a:txBody>
-                  <a:tcPr/>
-                </a:tc>
-                <a:extLst>
-                  <a:ext uri="{0D108BD9-81ED-4DB2-BD59-A6C34878D82A}">
-                    <a16:rowId xmlns:a16="http://schemas.microsoft.com/office/drawing/2014/main" val="2716910918"/>
-                  </a:ext>
-                </a:extLst>
-              </a:tr>
-              <a:tr h="525620">
-                <a:tc>
-                  <a:txBody>
-                    <a:bodyPr/>
-                    <a:lstStyle/>
-                    <a:p>
-                      <a:r>
-                        <a:rPr lang="en-US" dirty="0"/>
-                        <a:t>Gentoo</a:t>
-                      </a:r>
-                    </a:p>
-                  </a:txBody>
-                  <a:tcPr/>
-                </a:tc>
-                <a:tc>
-                  <a:txBody>
-                    <a:bodyPr/>
-                    <a:lstStyle/>
-                    <a:p>
-                      <a:r>
-                        <a:rPr lang="en-US" dirty="0"/>
-                        <a:t>77</a:t>
-                      </a:r>
-                    </a:p>
-                  </a:txBody>
-                  <a:tcPr/>
-                </a:tc>
-                <a:tc>
-                  <a:txBody>
-                    <a:bodyPr/>
-                    <a:lstStyle/>
-                    <a:p>
-                      <a:r>
-                        <a:rPr lang="en-US" dirty="0"/>
-                        <a:t>32</a:t>
-                      </a:r>
-                    </a:p>
-                  </a:txBody>
-                  <a:tcPr/>
-                </a:tc>
-                <a:extLst>
-                  <a:ext uri="{0D108BD9-81ED-4DB2-BD59-A6C34878D82A}">
-                    <a16:rowId xmlns:a16="http://schemas.microsoft.com/office/drawing/2014/main" val="3870395830"/>
-                  </a:ext>
-                </a:extLst>
-              </a:tr>
-              <a:tr h="525620">
-                <a:tc>
-                  <a:txBody>
-                    <a:bodyPr/>
-                    <a:lstStyle/>
-                    <a:p>
-                      <a:r>
-                        <a:rPr lang="en-US" dirty="0"/>
-                        <a:t>Chinstrap</a:t>
-                      </a:r>
-                    </a:p>
-                  </a:txBody>
-                  <a:tcPr/>
-                </a:tc>
-                <a:tc>
-                  <a:txBody>
-                    <a:bodyPr/>
-                    <a:lstStyle/>
-                    <a:p>
-                      <a:r>
-                        <a:rPr lang="en-US" dirty="0"/>
-                        <a:t>76</a:t>
-                      </a:r>
-                    </a:p>
-                  </a:txBody>
-                  <a:tcPr/>
-                </a:tc>
-                <a:tc>
-                  <a:txBody>
-                    <a:bodyPr/>
-                    <a:lstStyle/>
-                    <a:p>
-                      <a:r>
-                        <a:rPr lang="en-US" dirty="0"/>
-                        <a:t>12</a:t>
-                      </a:r>
-                    </a:p>
-                  </a:txBody>
-                  <a:tcPr/>
-                </a:tc>
-                <a:extLst>
-                  <a:ext uri="{0D108BD9-81ED-4DB2-BD59-A6C34878D82A}">
-                    <a16:rowId xmlns:a16="http://schemas.microsoft.com/office/drawing/2014/main" val="2608199707"/>
-                  </a:ext>
-                </a:extLst>
-              </a:tr>
-            </a:tbl>
-          </a:graphicData>
-        </a:graphic>
-      </p:graphicFrame>
-      <p:sp>
-        <p:nvSpPr>
-          <p:cNvPr id="4" name="TextBox 3">
-            <a:extLst>
-              <a:ext uri="{FF2B5EF4-FFF2-40B4-BE49-F238E27FC236}">
-                <a16:creationId xmlns:a16="http://schemas.microsoft.com/office/drawing/2014/main" id="{775EC552-53F4-3A5A-37D5-3670AD7FB6C5}"/>
-              </a:ext>
-            </a:extLst>
-          </p:cNvPr>
-          <p:cNvSpPr txBox="1"/>
-          <p:nvPr/>
-        </p:nvSpPr>
-        <p:spPr>
-          <a:xfrm>
-            <a:off x="8139712" y="3174079"/>
-            <a:ext cx="2010487" cy="369332"/>
-          </a:xfrm>
-          <a:prstGeom prst="rect">
-            <a:avLst/>
-          </a:prstGeom>
-          <a:noFill/>
-        </p:spPr>
-        <p:txBody>
-          <a:bodyPr wrap="none" rtlCol="0">
-            <a:spAutoFit/>
-          </a:bodyPr>
-          <a:lstStyle/>
-          <a:p>
-            <a:r>
-              <a:rPr lang="en-US" dirty="0"/>
-              <a:t>Flipper length &gt; 80</a:t>
-            </a:r>
-          </a:p>
-        </p:txBody>
-      </p:sp>
-      <p:sp>
-        <p:nvSpPr>
-          <p:cNvPr id="5" name="TextBox 4">
-            <a:extLst>
-              <a:ext uri="{FF2B5EF4-FFF2-40B4-BE49-F238E27FC236}">
-                <a16:creationId xmlns:a16="http://schemas.microsoft.com/office/drawing/2014/main" id="{BDE9179A-105D-2291-52E6-D7421F446FAD}"/>
-              </a:ext>
-            </a:extLst>
-          </p:cNvPr>
-          <p:cNvSpPr txBox="1"/>
-          <p:nvPr/>
-        </p:nvSpPr>
-        <p:spPr>
-          <a:xfrm>
-            <a:off x="10581704" y="3778299"/>
-            <a:ext cx="808235" cy="369332"/>
-          </a:xfrm>
-          <a:prstGeom prst="rect">
-            <a:avLst/>
-          </a:prstGeom>
-          <a:noFill/>
-        </p:spPr>
-        <p:txBody>
-          <a:bodyPr wrap="none" rtlCol="0">
-            <a:spAutoFit/>
-          </a:bodyPr>
-          <a:lstStyle/>
-          <a:p>
-            <a:r>
-              <a:rPr lang="en-US" dirty="0">
-                <a:solidFill>
-                  <a:schemeClr val="bg1"/>
-                </a:solidFill>
-              </a:rPr>
-              <a:t>Adelie</a:t>
-            </a:r>
-          </a:p>
-        </p:txBody>
-      </p:sp>
-      <p:sp>
-        <p:nvSpPr>
-          <p:cNvPr id="15" name="TextBox 14">
-            <a:extLst>
-              <a:ext uri="{FF2B5EF4-FFF2-40B4-BE49-F238E27FC236}">
-                <a16:creationId xmlns:a16="http://schemas.microsoft.com/office/drawing/2014/main" id="{C0B57BFB-B064-4DB3-40F4-6A50E259F06D}"/>
-              </a:ext>
-            </a:extLst>
-          </p:cNvPr>
-          <p:cNvSpPr txBox="1"/>
-          <p:nvPr/>
-        </p:nvSpPr>
-        <p:spPr>
-          <a:xfrm>
-            <a:off x="6452389" y="3986854"/>
-            <a:ext cx="1739579" cy="369332"/>
-          </a:xfrm>
-          <a:prstGeom prst="rect">
-            <a:avLst/>
-          </a:prstGeom>
-          <a:noFill/>
-        </p:spPr>
-        <p:txBody>
-          <a:bodyPr wrap="none" rtlCol="0">
-            <a:spAutoFit/>
-          </a:bodyPr>
-          <a:lstStyle/>
-          <a:p>
-            <a:r>
-              <a:rPr lang="en-US" dirty="0"/>
-              <a:t>Body mass &gt; 18</a:t>
-            </a:r>
-          </a:p>
-        </p:txBody>
-      </p:sp>
-      <p:sp>
-        <p:nvSpPr>
-          <p:cNvPr id="16" name="TextBox 15">
-            <a:extLst>
-              <a:ext uri="{FF2B5EF4-FFF2-40B4-BE49-F238E27FC236}">
-                <a16:creationId xmlns:a16="http://schemas.microsoft.com/office/drawing/2014/main" id="{91D8C681-4D52-4578-E0DE-C98415D000DE}"/>
-              </a:ext>
-            </a:extLst>
-          </p:cNvPr>
-          <p:cNvSpPr txBox="1"/>
-          <p:nvPr/>
-        </p:nvSpPr>
-        <p:spPr>
-          <a:xfrm>
-            <a:off x="8451807" y="4373029"/>
-            <a:ext cx="924099" cy="646331"/>
-          </a:xfrm>
-          <a:prstGeom prst="rect">
-            <a:avLst/>
-          </a:prstGeom>
-          <a:noFill/>
-        </p:spPr>
-        <p:txBody>
-          <a:bodyPr wrap="none" rtlCol="0">
-            <a:spAutoFit/>
-          </a:bodyPr>
-          <a:lstStyle/>
-          <a:p>
-            <a:r>
-              <a:rPr lang="en-US" dirty="0">
-                <a:solidFill>
-                  <a:schemeClr val="bg1"/>
-                </a:solidFill>
-              </a:rPr>
-              <a:t>Gentoo</a:t>
-            </a:r>
-          </a:p>
-          <a:p>
-            <a:r>
-              <a:rPr lang="en-US" dirty="0">
-                <a:solidFill>
-                  <a:schemeClr val="bg1"/>
-                </a:solidFill>
-              </a:rPr>
-              <a:t>Gentoo</a:t>
-            </a:r>
-          </a:p>
-        </p:txBody>
-      </p:sp>
-      <p:sp>
-        <p:nvSpPr>
-          <p:cNvPr id="17" name="TextBox 16">
-            <a:extLst>
-              <a:ext uri="{FF2B5EF4-FFF2-40B4-BE49-F238E27FC236}">
-                <a16:creationId xmlns:a16="http://schemas.microsoft.com/office/drawing/2014/main" id="{B9F627AE-D04F-BC4C-46CF-EFEA79E4BBDA}"/>
-              </a:ext>
-            </a:extLst>
-          </p:cNvPr>
-          <p:cNvSpPr txBox="1"/>
-          <p:nvPr/>
-        </p:nvSpPr>
-        <p:spPr>
-          <a:xfrm>
-            <a:off x="5136103" y="4511529"/>
-            <a:ext cx="1162306" cy="369332"/>
-          </a:xfrm>
-          <a:prstGeom prst="rect">
-            <a:avLst/>
-          </a:prstGeom>
-          <a:noFill/>
-        </p:spPr>
-        <p:txBody>
-          <a:bodyPr wrap="none" rtlCol="0">
-            <a:spAutoFit/>
-          </a:bodyPr>
-          <a:lstStyle/>
-          <a:p>
-            <a:r>
-              <a:rPr lang="en-US" dirty="0">
-                <a:solidFill>
-                  <a:schemeClr val="bg1"/>
-                </a:solidFill>
-              </a:rPr>
-              <a:t>Chinstrap</a:t>
-            </a:r>
-          </a:p>
-        </p:txBody>
-      </p:sp>
-      <p:sp>
-        <p:nvSpPr>
-          <p:cNvPr id="20" name="Content Placeholder 2">
-            <a:extLst>
-              <a:ext uri="{FF2B5EF4-FFF2-40B4-BE49-F238E27FC236}">
-                <a16:creationId xmlns:a16="http://schemas.microsoft.com/office/drawing/2014/main" id="{88B188E2-DC8A-A2A5-456E-571FC29F2124}"/>
-              </a:ext>
-            </a:extLst>
-          </p:cNvPr>
-          <p:cNvSpPr txBox="1">
-            <a:spLocks/>
-          </p:cNvSpPr>
-          <p:nvPr/>
-        </p:nvSpPr>
-        <p:spPr>
-          <a:xfrm>
-            <a:off x="838200" y="1582551"/>
-            <a:ext cx="6427484" cy="1704659"/>
-          </a:xfrm>
-          <a:prstGeom prst="rect">
-            <a:avLst/>
-          </a:prstGeom>
-        </p:spPr>
-        <p:txBody>
-          <a:bodyPr vert="horz" lIns="91440" tIns="45720" rIns="91440" bIns="45720" rtlCol="0">
-            <a:normAutofit fontScale="92500" lnSpcReduction="20000"/>
-          </a:bodyPr>
-          <a:lstStyle>
-            <a:lvl1pPr marL="228600" indent="-228600" algn="l" defTabSz="914400" rtl="0" eaLnBrk="1" latinLnBrk="0" hangingPunct="1">
-              <a:lnSpc>
-                <a:spcPct val="90000"/>
-              </a:lnSpc>
-              <a:spcBef>
-                <a:spcPts val="1000"/>
-              </a:spcBef>
-              <a:buFont typeface="Arial" panose="020B0604020202020204" pitchFamily="34" charset="0"/>
-              <a:buChar char="•"/>
-              <a:defRPr sz="2800" kern="1200">
-                <a:solidFill>
-                  <a:schemeClr val="tx1"/>
-                </a:solidFill>
-                <a:latin typeface="+mn-lt"/>
-                <a:ea typeface="+mn-ea"/>
-                <a:cs typeface="+mn-cs"/>
-              </a:defRPr>
-            </a:lvl1pPr>
-            <a:lvl2pPr marL="685800" indent="-228600" algn="l" defTabSz="914400" rtl="0" eaLnBrk="1" latinLnBrk="0" hangingPunct="1">
-              <a:lnSpc>
-                <a:spcPct val="90000"/>
-              </a:lnSpc>
-              <a:spcBef>
-                <a:spcPts val="500"/>
-              </a:spcBef>
-              <a:buFont typeface="Arial" panose="020B0604020202020204" pitchFamily="34" charset="0"/>
-              <a:buChar char="•"/>
-              <a:defRPr sz="2400" kern="1200">
-                <a:solidFill>
-                  <a:schemeClr val="tx1"/>
-                </a:solidFill>
-                <a:latin typeface="+mn-lt"/>
-                <a:ea typeface="+mn-ea"/>
-                <a:cs typeface="+mn-cs"/>
-              </a:defRPr>
-            </a:lvl2pPr>
-            <a:lvl3pPr marL="1143000" indent="-228600" algn="l" defTabSz="914400" rtl="0" eaLnBrk="1" latinLnBrk="0" hangingPunct="1">
-              <a:lnSpc>
-                <a:spcPct val="90000"/>
-              </a:lnSpc>
-              <a:spcBef>
-                <a:spcPts val="500"/>
-              </a:spcBef>
-              <a:buFont typeface="Arial" panose="020B0604020202020204" pitchFamily="34" charset="0"/>
-              <a:buChar char="•"/>
-              <a:defRPr sz="2000" kern="1200">
-                <a:solidFill>
-                  <a:schemeClr val="tx1"/>
-                </a:solidFill>
-                <a:latin typeface="+mn-lt"/>
-                <a:ea typeface="+mn-ea"/>
-                <a:cs typeface="+mn-cs"/>
-              </a:defRPr>
-            </a:lvl3pPr>
-            <a:lvl4pPr marL="1600200" indent="-228600" algn="l" defTabSz="914400" rtl="0" eaLnBrk="1" latinLnBrk="0" hangingPunct="1">
-              <a:lnSpc>
-                <a:spcPct val="90000"/>
-              </a:lnSpc>
-              <a:spcBef>
-                <a:spcPts val="500"/>
-              </a:spcBef>
-              <a:buFont typeface="Arial" panose="020B0604020202020204" pitchFamily="34" charset="0"/>
-              <a:buChar char="•"/>
-              <a:defRPr sz="1800" kern="1200">
-                <a:solidFill>
-                  <a:schemeClr val="tx1"/>
-                </a:solidFill>
-                <a:latin typeface="+mn-lt"/>
-                <a:ea typeface="+mn-ea"/>
-                <a:cs typeface="+mn-cs"/>
-              </a:defRPr>
-            </a:lvl4pPr>
-            <a:lvl5pPr marL="2057400" indent="-228600" algn="l" defTabSz="914400" rtl="0" eaLnBrk="1" latinLnBrk="0" hangingPunct="1">
-              <a:lnSpc>
-                <a:spcPct val="90000"/>
-              </a:lnSpc>
-              <a:spcBef>
-                <a:spcPts val="500"/>
-              </a:spcBef>
-              <a:buFont typeface="Arial" panose="020B0604020202020204" pitchFamily="34" charset="0"/>
-              <a:buChar char="•"/>
-              <a:defRPr sz="1800" kern="1200">
-                <a:solidFill>
-                  <a:schemeClr val="tx1"/>
-                </a:solidFill>
-                <a:latin typeface="+mn-lt"/>
-                <a:ea typeface="+mn-ea"/>
-                <a:cs typeface="+mn-cs"/>
-              </a:defRPr>
-            </a:lvl5pPr>
-            <a:lvl6pPr marL="2514600" indent="-228600" algn="l" defTabSz="914400" rtl="0" eaLnBrk="1" latinLnBrk="0" hangingPunct="1">
-              <a:lnSpc>
-                <a:spcPct val="90000"/>
-              </a:lnSpc>
-              <a:spcBef>
-                <a:spcPts val="500"/>
-              </a:spcBef>
-              <a:buFont typeface="Arial" panose="020B0604020202020204" pitchFamily="34" charset="0"/>
-              <a:buChar char="•"/>
-              <a:defRPr sz="1800" kern="1200">
-                <a:solidFill>
-                  <a:schemeClr val="tx1"/>
-                </a:solidFill>
-                <a:latin typeface="+mn-lt"/>
-                <a:ea typeface="+mn-ea"/>
-                <a:cs typeface="+mn-cs"/>
-              </a:defRPr>
-            </a:lvl6pPr>
-            <a:lvl7pPr marL="2971800" indent="-228600" algn="l" defTabSz="914400" rtl="0" eaLnBrk="1" latinLnBrk="0" hangingPunct="1">
-              <a:lnSpc>
-                <a:spcPct val="90000"/>
-              </a:lnSpc>
-              <a:spcBef>
-                <a:spcPts val="500"/>
-              </a:spcBef>
-              <a:buFont typeface="Arial" panose="020B0604020202020204" pitchFamily="34" charset="0"/>
-              <a:buChar char="•"/>
-              <a:defRPr sz="1800" kern="1200">
-                <a:solidFill>
-                  <a:schemeClr val="tx1"/>
-                </a:solidFill>
-                <a:latin typeface="+mn-lt"/>
-                <a:ea typeface="+mn-ea"/>
-                <a:cs typeface="+mn-cs"/>
-              </a:defRPr>
-            </a:lvl7pPr>
-            <a:lvl8pPr marL="3429000" indent="-228600" algn="l" defTabSz="914400" rtl="0" eaLnBrk="1" latinLnBrk="0" hangingPunct="1">
-              <a:lnSpc>
-                <a:spcPct val="90000"/>
-              </a:lnSpc>
-              <a:spcBef>
-                <a:spcPts val="500"/>
-              </a:spcBef>
-              <a:buFont typeface="Arial" panose="020B0604020202020204" pitchFamily="34" charset="0"/>
-              <a:buChar char="•"/>
-              <a:defRPr sz="1800" kern="1200">
-                <a:solidFill>
-                  <a:schemeClr val="tx1"/>
-                </a:solidFill>
-                <a:latin typeface="+mn-lt"/>
-                <a:ea typeface="+mn-ea"/>
-                <a:cs typeface="+mn-cs"/>
-              </a:defRPr>
-            </a:lvl8pPr>
-            <a:lvl9pPr marL="3886200" indent="-228600" algn="l" defTabSz="914400" rtl="0" eaLnBrk="1" latinLnBrk="0" hangingPunct="1">
-              <a:lnSpc>
-                <a:spcPct val="90000"/>
-              </a:lnSpc>
-              <a:spcBef>
-                <a:spcPts val="500"/>
-              </a:spcBef>
-              <a:buFont typeface="Arial" panose="020B0604020202020204" pitchFamily="34" charset="0"/>
-              <a:buChar char="•"/>
-              <a:defRPr sz="1800" kern="1200">
-                <a:solidFill>
-                  <a:schemeClr val="tx1"/>
-                </a:solidFill>
-                <a:latin typeface="+mn-lt"/>
-                <a:ea typeface="+mn-ea"/>
-                <a:cs typeface="+mn-cs"/>
-              </a:defRPr>
-            </a:lvl9pPr>
-          </a:lstStyle>
-          <a:p>
-            <a:pPr marL="0" indent="0">
-              <a:buFont typeface="Arial" panose="020B0604020202020204" pitchFamily="34" charset="0"/>
-              <a:buNone/>
-            </a:pPr>
-            <a:r>
-              <a:rPr lang="en-US" dirty="0"/>
-              <a:t>Until a stopping condition is met</a:t>
-            </a:r>
-          </a:p>
-          <a:p>
-            <a:pPr marL="0" indent="0">
-              <a:buFont typeface="Arial" panose="020B0604020202020204" pitchFamily="34" charset="0"/>
-              <a:buNone/>
-            </a:pPr>
-            <a:r>
-              <a:rPr lang="en-US" dirty="0"/>
-              <a:t>   Evaluate best split for each predictor</a:t>
-            </a:r>
-          </a:p>
-          <a:p>
-            <a:pPr marL="0" indent="0">
-              <a:buFont typeface="Arial" panose="020B0604020202020204" pitchFamily="34" charset="0"/>
-              <a:buNone/>
-            </a:pPr>
-            <a:r>
-              <a:rPr lang="en-US" dirty="0"/>
-              <a:t>   Select the optimal split</a:t>
-            </a:r>
-          </a:p>
-          <a:p>
-            <a:pPr marL="0" indent="0">
-              <a:buFont typeface="Arial" panose="020B0604020202020204" pitchFamily="34" charset="0"/>
-              <a:buNone/>
-            </a:pPr>
-            <a:r>
-              <a:rPr lang="en-US" dirty="0"/>
-              <a:t>   Create new nodes</a:t>
-            </a:r>
-          </a:p>
-          <a:p>
-            <a:pPr marL="0" indent="0">
-              <a:buFont typeface="Arial" panose="020B0604020202020204" pitchFamily="34" charset="0"/>
-              <a:buNone/>
-            </a:pPr>
-            <a:endParaRPr lang="en-US" dirty="0"/>
-          </a:p>
-          <a:p>
-            <a:pPr marL="0" indent="0">
-              <a:buFont typeface="Arial" panose="020B0604020202020204" pitchFamily="34" charset="0"/>
-              <a:buNone/>
-            </a:pPr>
-            <a:endParaRPr lang="en-US" dirty="0"/>
-          </a:p>
-        </p:txBody>
-      </p:sp>
-      <p:sp>
-        <p:nvSpPr>
-          <p:cNvPr id="18" name="TextBox 17">
-            <a:extLst>
-              <a:ext uri="{FF2B5EF4-FFF2-40B4-BE49-F238E27FC236}">
-                <a16:creationId xmlns:a16="http://schemas.microsoft.com/office/drawing/2014/main" id="{9DE99C7C-00CB-4E53-AA02-A3384CFA4BBA}"/>
-              </a:ext>
-            </a:extLst>
-          </p:cNvPr>
-          <p:cNvSpPr txBox="1"/>
-          <p:nvPr/>
-        </p:nvSpPr>
-        <p:spPr>
-          <a:xfrm>
-            <a:off x="7068083" y="5687955"/>
-            <a:ext cx="4288931" cy="461665"/>
-          </a:xfrm>
-          <a:prstGeom prst="rect">
-            <a:avLst/>
-          </a:prstGeom>
-          <a:noFill/>
-        </p:spPr>
-        <p:txBody>
-          <a:bodyPr wrap="none" rtlCol="0">
-            <a:spAutoFit/>
-          </a:bodyPr>
-          <a:lstStyle/>
-          <a:p>
-            <a:r>
-              <a:rPr lang="en-US" sz="2400" dirty="0"/>
-              <a:t>All nodes are “pure” so we stop</a:t>
-            </a:r>
-          </a:p>
-        </p:txBody>
-      </p:sp>
-    </p:spTree>
-    <p:extLst>
-      <p:ext uri="{BB962C8B-B14F-4D97-AF65-F5344CB8AC3E}">
-        <p14:creationId xmlns:p14="http://schemas.microsoft.com/office/powerpoint/2010/main" val="1670323958"/>
-      </p:ext>
-    </p:extLst>
-  </p:cSld>
-  <p:clrMapOvr>
-    <a:masterClrMapping/>
-  </p:clrMapOvr>
-</p:sld>
-</file>
-
-<file path=ppt/slides/slide53.xml><?xml version="1.0" encoding="utf-8"?>
-<p:sld xmlns:a="http://schemas.openxmlformats.org/drawingml/2006/main" xmlns:r="http://schemas.openxmlformats.org/officeDocument/2006/relationships" xmlns:p="http://schemas.openxmlformats.org/presentationml/2006/main">
-  <p:cSld>
-    <p:spTree>
-      <p:nvGrpSpPr>
-        <p:cNvPr id="1" name=""/>
-        <p:cNvGrpSpPr/>
-        <p:nvPr/>
-      </p:nvGrpSpPr>
-      <p:grpSpPr>
-        <a:xfrm>
-          <a:off x="0" y="0"/>
-          <a:ext cx="0" cy="0"/>
-          <a:chOff x="0" y="0"/>
-          <a:chExt cx="0" cy="0"/>
-        </a:xfrm>
-      </p:grpSpPr>
-      <p:sp>
-        <p:nvSpPr>
-          <p:cNvPr id="2" name="Title 1">
-            <a:extLst>
-              <a:ext uri="{FF2B5EF4-FFF2-40B4-BE49-F238E27FC236}">
-                <a16:creationId xmlns:a16="http://schemas.microsoft.com/office/drawing/2014/main" id="{C90EB099-EDFE-49C0-F92A-5A06671FA823}"/>
-              </a:ext>
-            </a:extLst>
-          </p:cNvPr>
-          <p:cNvSpPr>
-            <a:spLocks noGrp="1"/>
-          </p:cNvSpPr>
-          <p:nvPr>
-            <p:ph type="title"/>
-          </p:nvPr>
-        </p:nvSpPr>
-        <p:spPr/>
-        <p:txBody>
-          <a:bodyPr/>
-          <a:lstStyle/>
-          <a:p>
-            <a:r>
-              <a:rPr lang="en-US" dirty="0"/>
-              <a:t>Now to a hands-on coding example…</a:t>
-            </a:r>
-          </a:p>
-        </p:txBody>
-      </p:sp>
-    </p:spTree>
-    <p:extLst>
-      <p:ext uri="{BB962C8B-B14F-4D97-AF65-F5344CB8AC3E}">
-        <p14:creationId xmlns:p14="http://schemas.microsoft.com/office/powerpoint/2010/main" val="3633211302"/>
-      </p:ext>
-    </p:extLst>
-  </p:cSld>
-  <p:clrMapOvr>
-    <a:masterClrMapping/>
-  </p:clrMapOvr>
-</p:sld>
-</file>
-
-<file path=ppt/slides/slide54.xml><?xml version="1.0" encoding="utf-8"?>
-<p:sld xmlns:a="http://schemas.openxmlformats.org/drawingml/2006/main" xmlns:r="http://schemas.openxmlformats.org/officeDocument/2006/relationships" xmlns:p="http://schemas.openxmlformats.org/presentationml/2006/main">
-  <p:cSld>
-    <p:spTree>
-      <p:nvGrpSpPr>
-        <p:cNvPr id="1" name="">
-          <a:extLst>
-            <a:ext uri="{FF2B5EF4-FFF2-40B4-BE49-F238E27FC236}">
               <a16:creationId xmlns:a16="http://schemas.microsoft.com/office/drawing/2014/main" id="{31EE18F0-EFDC-C465-E1D4-6B880F14D515}"/>
             </a:ext>
           </a:extLst>
@@ -29093,67 +28688,7 @@
 </p:sld>
 </file>
 
-<file path=ppt/slides/slide55.xml><?xml version="1.0" encoding="utf-8"?>
-<p:sld xmlns:a="http://schemas.openxmlformats.org/drawingml/2006/main" xmlns:r="http://schemas.openxmlformats.org/officeDocument/2006/relationships" xmlns:p="http://schemas.openxmlformats.org/presentationml/2006/main">
-  <p:cSld>
-    <p:spTree>
-      <p:nvGrpSpPr>
-        <p:cNvPr id="1" name=""/>
-        <p:cNvGrpSpPr/>
-        <p:nvPr/>
-      </p:nvGrpSpPr>
-      <p:grpSpPr>
-        <a:xfrm>
-          <a:off x="0" y="0"/>
-          <a:ext cx="0" cy="0"/>
-          <a:chOff x="0" y="0"/>
-          <a:chExt cx="0" cy="0"/>
-        </a:xfrm>
-      </p:grpSpPr>
-      <p:pic>
-        <p:nvPicPr>
-          <p:cNvPr id="5" name="Picture 4">
-            <a:extLst>
-              <a:ext uri="{FF2B5EF4-FFF2-40B4-BE49-F238E27FC236}">
-                <a16:creationId xmlns:a16="http://schemas.microsoft.com/office/drawing/2014/main" id="{A437544B-D8D3-8FA0-6A22-3995549898C1}"/>
-              </a:ext>
-            </a:extLst>
-          </p:cNvPr>
-          <p:cNvPicPr>
-            <a:picLocks noChangeAspect="1"/>
-          </p:cNvPicPr>
-          <p:nvPr/>
-        </p:nvPicPr>
-        <p:blipFill>
-          <a:blip r:embed="rId2"/>
-          <a:stretch>
-            <a:fillRect/>
-          </a:stretch>
-        </p:blipFill>
-        <p:spPr>
-          <a:xfrm>
-            <a:off x="1146" y="0"/>
-            <a:ext cx="12190854" cy="6858645"/>
-          </a:xfrm>
-          <a:prstGeom prst="rect">
-            <a:avLst/>
-          </a:prstGeom>
-        </p:spPr>
-      </p:pic>
-    </p:spTree>
-    <p:extLst>
-      <p:ext uri="{BB962C8B-B14F-4D97-AF65-F5344CB8AC3E}">
-        <p14:creationId xmlns:p14="http://schemas.microsoft.com/office/powerpoint/2010/main" val="1644529892"/>
-      </p:ext>
-    </p:extLst>
-  </p:cSld>
-  <p:clrMapOvr>
-    <a:masterClrMapping/>
-  </p:clrMapOvr>
-</p:sld>
-</file>
-
-<file path=ppt/slides/slide56.xml><?xml version="1.0" encoding="utf-8"?>
+<file path=ppt/slides/slide51.xml><?xml version="1.0" encoding="utf-8"?>
 <p:sld xmlns:a="http://schemas.openxmlformats.org/drawingml/2006/main" xmlns:r="http://schemas.openxmlformats.org/officeDocument/2006/relationships" xmlns:p="http://schemas.openxmlformats.org/presentationml/2006/main">
   <p:cSld>
     <p:spTree>

--- a/slides/02_model_eval_cv.pptx
+++ b/slides/02_model_eval_cv.pptx
@@ -8,7 +8,7 @@
     <p:notesMasterId r:id="rId53"/>
   </p:notesMasterIdLst>
   <p:sldIdLst>
-    <p:sldId id="256" r:id="rId2"/>
+    <p:sldId id="325" r:id="rId2"/>
     <p:sldId id="294" r:id="rId3"/>
     <p:sldId id="295" r:id="rId4"/>
     <p:sldId id="259" r:id="rId5"/>
@@ -6651,10 +6651,46 @@
           </a:p>
         </p:txBody>
       </p:sp>
+      <p:sp>
+        <p:nvSpPr>
+          <p:cNvPr id="3" name="Subtitle 2">
+            <a:extLst>
+              <a:ext uri="{FF2B5EF4-FFF2-40B4-BE49-F238E27FC236}">
+                <a16:creationId xmlns:a16="http://schemas.microsoft.com/office/drawing/2014/main" id="{2B86EE02-CD74-3E24-9C07-FC52D726FE3F}"/>
+              </a:ext>
+            </a:extLst>
+          </p:cNvPr>
+          <p:cNvSpPr>
+            <a:spLocks noGrp="1"/>
+          </p:cNvSpPr>
+          <p:nvPr>
+            <p:ph type="subTitle" idx="1"/>
+          </p:nvPr>
+        </p:nvSpPr>
+        <p:spPr/>
+        <p:txBody>
+          <a:bodyPr/>
+          <a:lstStyle/>
+          <a:p>
+            <a:r>
+              <a:rPr lang="en-US" dirty="0"/>
+              <a:t>Grant Vagle, Jeremiah </a:t>
+            </a:r>
+            <a:r>
+              <a:rPr lang="en-US" dirty="0" err="1"/>
+              <a:t>Shrovnal</a:t>
+            </a:r>
+            <a:r>
+              <a:rPr lang="en-US" dirty="0"/>
+              <a:t>, Lynn Waterhouse</a:t>
+            </a:r>
+          </a:p>
+        </p:txBody>
+      </p:sp>
     </p:spTree>
     <p:extLst>
       <p:ext uri="{BB962C8B-B14F-4D97-AF65-F5344CB8AC3E}">
-        <p14:creationId xmlns:p14="http://schemas.microsoft.com/office/powerpoint/2010/main" val="1510234652"/>
+        <p14:creationId xmlns:p14="http://schemas.microsoft.com/office/powerpoint/2010/main" val="457126585"/>
       </p:ext>
     </p:extLst>
   </p:cSld>
